--- a/ProyectoFinalUTEC_DanielGranados_Presentacion.pptx
+++ b/ProyectoFinalUTEC_DanielGranados_Presentacion.pptx
@@ -5,19 +5,20 @@
     <p:sldMasterId id="2147483864" r:id="rId1"/>
   </p:sldMasterIdLst>
   <p:notesMasterIdLst>
-    <p:notesMasterId r:id="rId12"/>
+    <p:notesMasterId r:id="rId13"/>
   </p:notesMasterIdLst>
   <p:sldIdLst>
     <p:sldId id="256" r:id="rId2"/>
-    <p:sldId id="264" r:id="rId3"/>
-    <p:sldId id="257" r:id="rId4"/>
+    <p:sldId id="257" r:id="rId3"/>
+    <p:sldId id="266" r:id="rId4"/>
     <p:sldId id="258" r:id="rId5"/>
     <p:sldId id="263" r:id="rId6"/>
     <p:sldId id="259" r:id="rId7"/>
     <p:sldId id="260" r:id="rId8"/>
-    <p:sldId id="261" r:id="rId9"/>
-    <p:sldId id="262" r:id="rId10"/>
-    <p:sldId id="265" r:id="rId11"/>
+    <p:sldId id="267" r:id="rId9"/>
+    <p:sldId id="261" r:id="rId10"/>
+    <p:sldId id="262" r:id="rId11"/>
+    <p:sldId id="265" r:id="rId12"/>
   </p:sldIdLst>
   <p:sldSz cx="12192000" cy="6858000"/>
   <p:notesSz cx="6858000" cy="9144000"/>
@@ -124,6 +125,290 @@
 </p:presentation>
 </file>
 
+<file path=ppt/revisionInfo.xml><?xml version="1.0" encoding="utf-8"?>
+<p1510:revInfo xmlns:a="http://schemas.openxmlformats.org/drawingml/2006/main" xmlns:r="http://schemas.openxmlformats.org/officeDocument/2006/relationships" xmlns:p1510="http://schemas.microsoft.com/office/powerpoint/2015/10/main">
+  <p1510:revLst>
+    <p1510:client id="{04943323-A3F2-7FC2-CB2A-6EFB9E4183C6}" v="81" dt="2026-05-15T02:41:13.799"/>
+    <p1510:client id="{FCD69BBF-3A35-D5CC-9C86-80B11D387F57}" v="865" dt="2026-05-15T00:26:13.439"/>
+  </p1510:revLst>
+</p1510:revInfo>
+</file>
+
+<file path=ppt/changesInfos/changesInfo1.xml><?xml version="1.0" encoding="utf-8"?>
+<pc:chgInfo xmlns:a="http://schemas.openxmlformats.org/drawingml/2006/main" xmlns:r="http://schemas.openxmlformats.org/officeDocument/2006/relationships" xmlns:ac="http://schemas.microsoft.com/office/drawing/2013/main/command" xmlns:pc="http://schemas.microsoft.com/office/powerpoint/2013/main/command">
+  <pc:docChgLst>
+    <pc:chgData name="Daniel Granados" userId="252fb4755f18f6fd" providerId="Windows Live" clId="Web-{FCD69BBF-3A35-D5CC-9C86-80B11D387F57}"/>
+    <pc:docChg chg="addSld delSld modSld">
+      <pc:chgData name="Daniel Granados" userId="252fb4755f18f6fd" providerId="Windows Live" clId="Web-{FCD69BBF-3A35-D5CC-9C86-80B11D387F57}" dt="2026-05-15T00:30:23.121" v="897" actId="20577"/>
+      <pc:docMkLst>
+        <pc:docMk/>
+      </pc:docMkLst>
+      <pc:sldChg chg="addSp delSp modSp">
+        <pc:chgData name="Daniel Granados" userId="252fb4755f18f6fd" providerId="Windows Live" clId="Web-{FCD69BBF-3A35-D5CC-9C86-80B11D387F57}" dt="2026-05-15T00:26:13.439" v="868" actId="20577"/>
+        <pc:sldMkLst>
+          <pc:docMk/>
+          <pc:sldMk cId="1860873599" sldId="257"/>
+        </pc:sldMkLst>
+        <pc:spChg chg="mod">
+          <ac:chgData name="Daniel Granados" userId="252fb4755f18f6fd" providerId="Windows Live" clId="Web-{FCD69BBF-3A35-D5CC-9C86-80B11D387F57}" dt="2026-05-14T23:52:42.630" v="3" actId="20577"/>
+          <ac:spMkLst>
+            <pc:docMk/>
+            <pc:sldMk cId="1860873599" sldId="257"/>
+            <ac:spMk id="2" creationId="{AB417137-6933-2996-A547-C510EE6EE9B6}"/>
+          </ac:spMkLst>
+        </pc:spChg>
+        <pc:spChg chg="add mod">
+          <ac:chgData name="Daniel Granados" userId="252fb4755f18f6fd" providerId="Windows Live" clId="Web-{FCD69BBF-3A35-D5CC-9C86-80B11D387F57}" dt="2026-05-15T00:26:13.439" v="868" actId="20577"/>
+          <ac:spMkLst>
+            <pc:docMk/>
+            <pc:sldMk cId="1860873599" sldId="257"/>
+            <ac:spMk id="10" creationId="{BD0444FC-1FBE-D718-CB99-E0E67BF06EC5}"/>
+          </ac:spMkLst>
+        </pc:spChg>
+        <pc:graphicFrameChg chg="del">
+          <ac:chgData name="Daniel Granados" userId="252fb4755f18f6fd" providerId="Windows Live" clId="Web-{FCD69BBF-3A35-D5CC-9C86-80B11D387F57}" dt="2026-05-14T23:52:48.724" v="4"/>
+          <ac:graphicFrameMkLst>
+            <pc:docMk/>
+            <pc:sldMk cId="1860873599" sldId="257"/>
+            <ac:graphicFrameMk id="6" creationId="{48A9351B-7BFB-EBB9-93BB-EE16D4DD7F81}"/>
+          </ac:graphicFrameMkLst>
+        </pc:graphicFrameChg>
+      </pc:sldChg>
+      <pc:sldChg chg="modSp">
+        <pc:chgData name="Daniel Granados" userId="252fb4755f18f6fd" providerId="Windows Live" clId="Web-{FCD69BBF-3A35-D5CC-9C86-80B11D387F57}" dt="2026-05-15T00:30:23.121" v="897" actId="20577"/>
+        <pc:sldMkLst>
+          <pc:docMk/>
+          <pc:sldMk cId="2060895292" sldId="258"/>
+        </pc:sldMkLst>
+        <pc:graphicFrameChg chg="modGraphic">
+          <ac:chgData name="Daniel Granados" userId="252fb4755f18f6fd" providerId="Windows Live" clId="Web-{FCD69BBF-3A35-D5CC-9C86-80B11D387F57}" dt="2026-05-15T00:30:23.121" v="897" actId="20577"/>
+          <ac:graphicFrameMkLst>
+            <pc:docMk/>
+            <pc:sldMk cId="2060895292" sldId="258"/>
+            <ac:graphicFrameMk id="10" creationId="{23500928-D5C5-95CB-BB76-291C05954161}"/>
+          </ac:graphicFrameMkLst>
+        </pc:graphicFrameChg>
+      </pc:sldChg>
+      <pc:sldChg chg="modSp">
+        <pc:chgData name="Daniel Granados" userId="252fb4755f18f6fd" providerId="Windows Live" clId="Web-{FCD69BBF-3A35-D5CC-9C86-80B11D387F57}" dt="2026-05-15T00:07:09.023" v="27" actId="20577"/>
+        <pc:sldMkLst>
+          <pc:docMk/>
+          <pc:sldMk cId="246699837" sldId="260"/>
+        </pc:sldMkLst>
+        <pc:graphicFrameChg chg="modGraphic">
+          <ac:chgData name="Daniel Granados" userId="252fb4755f18f6fd" providerId="Windows Live" clId="Web-{FCD69BBF-3A35-D5CC-9C86-80B11D387F57}" dt="2026-05-15T00:07:09.023" v="27" actId="20577"/>
+          <ac:graphicFrameMkLst>
+            <pc:docMk/>
+            <pc:sldMk cId="246699837" sldId="260"/>
+            <ac:graphicFrameMk id="7" creationId="{E85E166B-AE3C-603A-DACF-B9E0B374793A}"/>
+          </ac:graphicFrameMkLst>
+        </pc:graphicFrameChg>
+      </pc:sldChg>
+      <pc:sldChg chg="modSp">
+        <pc:chgData name="Daniel Granados" userId="252fb4755f18f6fd" providerId="Windows Live" clId="Web-{FCD69BBF-3A35-D5CC-9C86-80B11D387F57}" dt="2026-05-15T00:24:33.326" v="850" actId="20577"/>
+        <pc:sldMkLst>
+          <pc:docMk/>
+          <pc:sldMk cId="2189395731" sldId="262"/>
+        </pc:sldMkLst>
+        <pc:graphicFrameChg chg="modGraphic">
+          <ac:chgData name="Daniel Granados" userId="252fb4755f18f6fd" providerId="Windows Live" clId="Web-{FCD69BBF-3A35-D5CC-9C86-80B11D387F57}" dt="2026-05-15T00:24:33.326" v="850" actId="20577"/>
+          <ac:graphicFrameMkLst>
+            <pc:docMk/>
+            <pc:sldMk cId="2189395731" sldId="262"/>
+            <ac:graphicFrameMk id="6" creationId="{287425C4-341D-A725-9F8B-9A62B4C9F01E}"/>
+          </ac:graphicFrameMkLst>
+        </pc:graphicFrameChg>
+      </pc:sldChg>
+      <pc:sldChg chg="del">
+        <pc:chgData name="Daniel Granados" userId="252fb4755f18f6fd" providerId="Windows Live" clId="Web-{FCD69BBF-3A35-D5CC-9C86-80B11D387F57}" dt="2026-05-14T23:53:19.460" v="5"/>
+        <pc:sldMkLst>
+          <pc:docMk/>
+          <pc:sldMk cId="192601957" sldId="264"/>
+        </pc:sldMkLst>
+      </pc:sldChg>
+      <pc:sldChg chg="add replId">
+        <pc:chgData name="Daniel Granados" userId="252fb4755f18f6fd" providerId="Windows Live" clId="Web-{FCD69BBF-3A35-D5CC-9C86-80B11D387F57}" dt="2026-05-14T23:52:32.895" v="0"/>
+        <pc:sldMkLst>
+          <pc:docMk/>
+          <pc:sldMk cId="4061065148" sldId="266"/>
+        </pc:sldMkLst>
+      </pc:sldChg>
+      <pc:sldChg chg="modSp new del">
+        <pc:chgData name="Daniel Granados" userId="252fb4755f18f6fd" providerId="Windows Live" clId="Web-{FCD69BBF-3A35-D5CC-9C86-80B11D387F57}" dt="2026-05-14T23:53:47.976" v="9"/>
+        <pc:sldMkLst>
+          <pc:docMk/>
+          <pc:sldMk cId="3138994097" sldId="267"/>
+        </pc:sldMkLst>
+        <pc:spChg chg="mod">
+          <ac:chgData name="Daniel Granados" userId="252fb4755f18f6fd" providerId="Windows Live" clId="Web-{FCD69BBF-3A35-D5CC-9C86-80B11D387F57}" dt="2026-05-14T23:53:38.273" v="7" actId="20577"/>
+          <ac:spMkLst>
+            <pc:docMk/>
+            <pc:sldMk cId="3138994097" sldId="267"/>
+            <ac:spMk id="3" creationId="{DB88C6AE-7590-3DF6-A9C5-9587FA556263}"/>
+          </ac:spMkLst>
+        </pc:spChg>
+      </pc:sldChg>
+      <pc:sldChg chg="addSp delSp modSp new">
+        <pc:chgData name="Daniel Granados" userId="252fb4755f18f6fd" providerId="Windows Live" clId="Web-{FCD69BBF-3A35-D5CC-9C86-80B11D387F57}" dt="2026-05-15T00:22:06.946" v="831" actId="1076"/>
+        <pc:sldMkLst>
+          <pc:docMk/>
+          <pc:sldMk cId="4004196352" sldId="267"/>
+        </pc:sldMkLst>
+        <pc:spChg chg="mod">
+          <ac:chgData name="Daniel Granados" userId="252fb4755f18f6fd" providerId="Windows Live" clId="Web-{FCD69BBF-3A35-D5CC-9C86-80B11D387F57}" dt="2026-05-15T00:21:03.319" v="687" actId="1076"/>
+          <ac:spMkLst>
+            <pc:docMk/>
+            <pc:sldMk cId="4004196352" sldId="267"/>
+            <ac:spMk id="2" creationId="{E80C6B06-8BA7-6409-EC77-9BF0DBEA4279}"/>
+          </ac:spMkLst>
+        </pc:spChg>
+        <pc:spChg chg="del">
+          <ac:chgData name="Daniel Granados" userId="252fb4755f18f6fd" providerId="Windows Live" clId="Web-{FCD69BBF-3A35-D5CC-9C86-80B11D387F57}" dt="2026-05-15T00:18:31.267" v="50"/>
+          <ac:spMkLst>
+            <pc:docMk/>
+            <pc:sldMk cId="4004196352" sldId="267"/>
+            <ac:spMk id="3" creationId="{FEA633CF-5144-E368-9FAC-36A106E95BF5}"/>
+          </ac:spMkLst>
+        </pc:spChg>
+        <pc:graphicFrameChg chg="add mod ord modGraphic">
+          <ac:chgData name="Daniel Granados" userId="252fb4755f18f6fd" providerId="Windows Live" clId="Web-{FCD69BBF-3A35-D5CC-9C86-80B11D387F57}" dt="2026-05-15T00:22:06.790" v="830" actId="1076"/>
+          <ac:graphicFrameMkLst>
+            <pc:docMk/>
+            <pc:sldMk cId="4004196352" sldId="267"/>
+            <ac:graphicFrameMk id="5" creationId="{368D4D31-43A8-5F6A-8DA8-1E2C5B2A261B}"/>
+          </ac:graphicFrameMkLst>
+        </pc:graphicFrameChg>
+        <pc:graphicFrameChg chg="add mod modGraphic">
+          <ac:chgData name="Daniel Granados" userId="252fb4755f18f6fd" providerId="Windows Live" clId="Web-{FCD69BBF-3A35-D5CC-9C86-80B11D387F57}" dt="2026-05-15T00:22:06.946" v="831" actId="1076"/>
+          <ac:graphicFrameMkLst>
+            <pc:docMk/>
+            <pc:sldMk cId="4004196352" sldId="267"/>
+            <ac:graphicFrameMk id="7" creationId="{BD097B00-CBD2-2BB6-BDF7-D66FB2925031}"/>
+          </ac:graphicFrameMkLst>
+        </pc:graphicFrameChg>
+      </pc:sldChg>
+    </pc:docChg>
+  </pc:docChgLst>
+  <pc:docChgLst>
+    <pc:chgData name="Daniel Granados" userId="252fb4755f18f6fd" providerId="Windows Live" clId="Web-{04943323-A3F2-7FC2-CB2A-6EFB9E4183C6}"/>
+    <pc:docChg chg="modSld">
+      <pc:chgData name="Daniel Granados" userId="252fb4755f18f6fd" providerId="Windows Live" clId="Web-{04943323-A3F2-7FC2-CB2A-6EFB9E4183C6}" dt="2026-05-15T02:41:13.799" v="92"/>
+      <pc:docMkLst>
+        <pc:docMk/>
+      </pc:docMkLst>
+      <pc:sldChg chg="addSp delSp modSp">
+        <pc:chgData name="Daniel Granados" userId="252fb4755f18f6fd" providerId="Windows Live" clId="Web-{04943323-A3F2-7FC2-CB2A-6EFB9E4183C6}" dt="2026-05-15T02:41:13.799" v="92"/>
+        <pc:sldMkLst>
+          <pc:docMk/>
+          <pc:sldMk cId="4201746802" sldId="256"/>
+        </pc:sldMkLst>
+        <pc:spChg chg="mod">
+          <ac:chgData name="Daniel Granados" userId="252fb4755f18f6fd" providerId="Windows Live" clId="Web-{04943323-A3F2-7FC2-CB2A-6EFB9E4183C6}" dt="2026-05-15T02:36:24.673" v="91"/>
+          <ac:spMkLst>
+            <pc:docMk/>
+            <pc:sldMk cId="4201746802" sldId="256"/>
+            <ac:spMk id="2" creationId="{8DC72353-7F07-0EE6-031E-29727DCE12EF}"/>
+          </ac:spMkLst>
+        </pc:spChg>
+        <pc:spChg chg="del">
+          <ac:chgData name="Daniel Granados" userId="252fb4755f18f6fd" providerId="Windows Live" clId="Web-{04943323-A3F2-7FC2-CB2A-6EFB9E4183C6}" dt="2026-05-15T01:13:42.260" v="11"/>
+          <ac:spMkLst>
+            <pc:docMk/>
+            <pc:sldMk cId="4201746802" sldId="256"/>
+            <ac:spMk id="3" creationId="{41258141-D21A-A452-46A1-4F843307918E}"/>
+          </ac:spMkLst>
+        </pc:spChg>
+        <pc:spChg chg="add del">
+          <ac:chgData name="Daniel Granados" userId="252fb4755f18f6fd" providerId="Windows Live" clId="Web-{04943323-A3F2-7FC2-CB2A-6EFB9E4183C6}" dt="2026-05-15T01:42:39.250" v="22"/>
+          <ac:spMkLst>
+            <pc:docMk/>
+            <pc:sldMk cId="4201746802" sldId="256"/>
+            <ac:spMk id="6" creationId="{A6C8EBED-E2C8-9705-7E92-2353A540286C}"/>
+          </ac:spMkLst>
+        </pc:spChg>
+        <pc:spChg chg="add mod">
+          <ac:chgData name="Daniel Granados" userId="252fb4755f18f6fd" providerId="Windows Live" clId="Web-{04943323-A3F2-7FC2-CB2A-6EFB9E4183C6}" dt="2026-05-15T02:41:13.799" v="92"/>
+          <ac:spMkLst>
+            <pc:docMk/>
+            <pc:sldMk cId="4201746802" sldId="256"/>
+            <ac:spMk id="8" creationId="{98D90103-DE12-251F-C4A6-0F92F4E1A52C}"/>
+          </ac:spMkLst>
+        </pc:spChg>
+        <pc:picChg chg="add mod">
+          <ac:chgData name="Daniel Granados" userId="252fb4755f18f6fd" providerId="Windows Live" clId="Web-{04943323-A3F2-7FC2-CB2A-6EFB9E4183C6}" dt="2026-05-15T01:44:04.078" v="66" actId="1076"/>
+          <ac:picMkLst>
+            <pc:docMk/>
+            <pc:sldMk cId="4201746802" sldId="256"/>
+            <ac:picMk id="4" creationId="{2E99CE63-F72A-92AE-B961-A6A7E9F372F8}"/>
+          </ac:picMkLst>
+        </pc:picChg>
+      </pc:sldChg>
+      <pc:sldChg chg="delSp modSp">
+        <pc:chgData name="Daniel Granados" userId="252fb4755f18f6fd" providerId="Windows Live" clId="Web-{04943323-A3F2-7FC2-CB2A-6EFB9E4183C6}" dt="2026-05-15T02:23:39.845" v="82"/>
+        <pc:sldMkLst>
+          <pc:docMk/>
+          <pc:sldMk cId="246699837" sldId="260"/>
+        </pc:sldMkLst>
+        <pc:spChg chg="del">
+          <ac:chgData name="Daniel Granados" userId="252fb4755f18f6fd" providerId="Windows Live" clId="Web-{04943323-A3F2-7FC2-CB2A-6EFB9E4183C6}" dt="2026-05-15T02:23:39.845" v="82"/>
+          <ac:spMkLst>
+            <pc:docMk/>
+            <pc:sldMk cId="246699837" sldId="260"/>
+            <ac:spMk id="6" creationId="{214E6896-2F9F-6A72-07A8-9D6F3A4EE56C}"/>
+          </ac:spMkLst>
+        </pc:spChg>
+        <pc:graphicFrameChg chg="modGraphic">
+          <ac:chgData name="Daniel Granados" userId="252fb4755f18f6fd" providerId="Windows Live" clId="Web-{04943323-A3F2-7FC2-CB2A-6EFB9E4183C6}" dt="2026-05-15T01:47:36.875" v="76" actId="20577"/>
+          <ac:graphicFrameMkLst>
+            <pc:docMk/>
+            <pc:sldMk cId="246699837" sldId="260"/>
+            <ac:graphicFrameMk id="7" creationId="{E85E166B-AE3C-603A-DACF-B9E0B374793A}"/>
+          </ac:graphicFrameMkLst>
+        </pc:graphicFrameChg>
+      </pc:sldChg>
+      <pc:sldChg chg="modSp">
+        <pc:chgData name="Daniel Granados" userId="252fb4755f18f6fd" providerId="Windows Live" clId="Web-{04943323-A3F2-7FC2-CB2A-6EFB9E4183C6}" dt="2026-05-15T01:59:04.079" v="81" actId="20577"/>
+        <pc:sldMkLst>
+          <pc:docMk/>
+          <pc:sldMk cId="2897962074" sldId="261"/>
+        </pc:sldMkLst>
+        <pc:graphicFrameChg chg="modGraphic">
+          <ac:chgData name="Daniel Granados" userId="252fb4755f18f6fd" providerId="Windows Live" clId="Web-{04943323-A3F2-7FC2-CB2A-6EFB9E4183C6}" dt="2026-05-15T01:59:04.079" v="81" actId="20577"/>
+          <ac:graphicFrameMkLst>
+            <pc:docMk/>
+            <pc:sldMk cId="2897962074" sldId="261"/>
+            <ac:graphicFrameMk id="8" creationId="{D20818CC-2B10-B393-2D70-F4B3197AFE3C}"/>
+          </ac:graphicFrameMkLst>
+        </pc:graphicFrameChg>
+      </pc:sldChg>
+      <pc:sldChg chg="modSp">
+        <pc:chgData name="Daniel Granados" userId="252fb4755f18f6fd" providerId="Windows Live" clId="Web-{04943323-A3F2-7FC2-CB2A-6EFB9E4183C6}" dt="2026-05-15T02:26:34.579" v="90"/>
+        <pc:sldMkLst>
+          <pc:docMk/>
+          <pc:sldMk cId="4004196352" sldId="267"/>
+        </pc:sldMkLst>
+        <pc:graphicFrameChg chg="mod modGraphic">
+          <ac:chgData name="Daniel Granados" userId="252fb4755f18f6fd" providerId="Windows Live" clId="Web-{04943323-A3F2-7FC2-CB2A-6EFB9E4183C6}" dt="2026-05-15T00:51:09.474" v="3"/>
+          <ac:graphicFrameMkLst>
+            <pc:docMk/>
+            <pc:sldMk cId="4004196352" sldId="267"/>
+            <ac:graphicFrameMk id="5" creationId="{368D4D31-43A8-5F6A-8DA8-1E2C5B2A261B}"/>
+          </ac:graphicFrameMkLst>
+        </pc:graphicFrameChg>
+        <pc:graphicFrameChg chg="mod modGraphic">
+          <ac:chgData name="Daniel Granados" userId="252fb4755f18f6fd" providerId="Windows Live" clId="Web-{04943323-A3F2-7FC2-CB2A-6EFB9E4183C6}" dt="2026-05-15T02:26:34.579" v="90"/>
+          <ac:graphicFrameMkLst>
+            <pc:docMk/>
+            <pc:sldMk cId="4004196352" sldId="267"/>
+            <ac:graphicFrameMk id="7" creationId="{BD097B00-CBD2-2BB6-BDF7-D66FB2925031}"/>
+          </ac:graphicFrameMkLst>
+        </pc:graphicFrameChg>
+      </pc:sldChg>
+    </pc:docChg>
+  </pc:docChgLst>
+</pc:chgInfo>
+</file>
+
 <file path=ppt/diagrams/colors1.xml><?xml version="1.0" encoding="utf-8"?>
 <dgm:colorsDef xmlns:dgm="http://schemas.openxmlformats.org/drawingml/2006/diagram" xmlns:a="http://schemas.openxmlformats.org/drawingml/2006/main" uniqueId="urn:microsoft.com/office/officeart/2005/8/colors/accent1_2">
   <dgm:title val=""/>
@@ -5445,7 +5730,7 @@
               <a:effectLst/>
               <a:latin typeface="Arial" panose="020B0604020202020204" pitchFamily="34" charset="0"/>
             </a:rPr>
-            <a:t>La pérdida de proyectos genera: </a:t>
+            <a:t>La pérdida de colaboradores genera: </a:t>
           </a:r>
         </a:p>
         <a:p>
@@ -5746,7 +6031,15 @@
         <a:p>
           <a:r>
             <a:rPr lang="es-PE" b="0" i="0" baseline="0" dirty="0"/>
-            <a:t>La consultora necesita anticiparse a posibles pérdidas de colaboradores, por ende de proyectos. </a:t>
+            <a:t>La consultora necesita anticiparse a posibles pérdidas de colaboradores, por </a:t>
+          </a:r>
+          <a:r>
+            <a:rPr lang="es-PE" b="0" i="0" baseline="0" dirty="0" err="1"/>
+            <a:t>ende</a:t>
+          </a:r>
+          <a:r>
+            <a:rPr lang="es-PE" b="0" i="0" baseline="0" dirty="0"/>
+            <a:t> de proyectos. </a:t>
           </a:r>
           <a:endParaRPr lang="es-PE" dirty="0"/>
         </a:p>
@@ -6181,6 +6474,31 @@
         </a:p>
       </dgm:t>
     </dgm:pt>
+    <dgm:pt modelId="{05ECE495-8CAF-4FCD-964A-3736E9D62230}">
+      <dgm:prSet phldrT="[Texto]" phldr="0"/>
+      <dgm:spPr/>
+      <dgm:t>
+        <a:bodyPr/>
+        <a:lstStyle/>
+        <a:p>
+          <a:pPr rtl="0"/>
+          <a:r>
+            <a:rPr lang="es-PE" sz="1400" b="0" i="0" baseline="0" dirty="0">
+              <a:latin typeface="Tw Cen MT" panose="020B0602020104020603"/>
+            </a:rPr>
+            <a:t>Mayo a Octubre 2025</a:t>
+          </a:r>
+        </a:p>
+      </dgm:t>
+    </dgm:pt>
+    <dgm:pt modelId="{F634502C-ADD5-4C2F-AAF5-EFE6DA8C9E23}" type="parTrans" cxnId="{949394E3-3822-411F-A5D3-6F76F49F8181}">
+      <dgm:prSet/>
+      <dgm:spPr/>
+    </dgm:pt>
+    <dgm:pt modelId="{EECE1089-8183-4CAA-8D74-86BAAC164EA7}" type="sibTrans" cxnId="{949394E3-3822-411F-A5D3-6F76F49F8181}">
+      <dgm:prSet/>
+      <dgm:spPr/>
+    </dgm:pt>
     <dgm:pt modelId="{F1FABC65-CBAB-534D-B5F7-42052720B329}" type="pres">
       <dgm:prSet presAssocID="{D85E56D9-C31E-FC40-90ED-AD86620CF6E1}" presName="Name0" presStyleCnt="0">
         <dgm:presLayoutVars>
@@ -6228,15 +6546,15 @@
       <dgm:prSet presAssocID="{110D808B-713E-2F44-A16B-AB5F89B691A3}" presName="rect3" presStyleLbl="alignAcc1" presStyleIdx="2" presStyleCnt="4"/>
       <dgm:spPr/>
     </dgm:pt>
-    <dgm:pt modelId="{84D4CF0A-34A9-B741-ADB1-706557980F8D}" type="pres">
+    <dgm:pt modelId="{602842E0-B1BC-4C4F-8CFF-E4798C727CBB}" type="pres">
       <dgm:prSet presAssocID="{A479A8EC-E353-2E44-BF46-DC2F405D4C6F}" presName="vertSpace4" presStyleLbl="node1" presStyleIdx="2" presStyleCnt="4"/>
       <dgm:spPr/>
     </dgm:pt>
-    <dgm:pt modelId="{B98DF855-EC7E-DA4C-AA22-F6F76CF1BFFE}" type="pres">
+    <dgm:pt modelId="{F4DE4A95-37FB-4267-BB4C-59E7EC78F599}" type="pres">
       <dgm:prSet presAssocID="{A479A8EC-E353-2E44-BF46-DC2F405D4C6F}" presName="circle4" presStyleLbl="node1" presStyleIdx="3" presStyleCnt="4"/>
       <dgm:spPr/>
     </dgm:pt>
-    <dgm:pt modelId="{E1EAD459-84E8-E647-9756-DB050016C2AA}" type="pres">
+    <dgm:pt modelId="{8F44AB94-720C-4547-B678-359AF71BC54F}" type="pres">
       <dgm:prSet presAssocID="{A479A8EC-E353-2E44-BF46-DC2F405D4C6F}" presName="rect4" presStyleLbl="alignAcc1" presStyleIdx="3" presStyleCnt="4"/>
       <dgm:spPr/>
     </dgm:pt>
@@ -6291,7 +6609,7 @@
       </dgm:prSet>
       <dgm:spPr/>
     </dgm:pt>
-    <dgm:pt modelId="{89BC4CFD-C3F8-C945-8FED-8AA7F0B5A349}" type="pres">
+    <dgm:pt modelId="{529E497D-CFAF-4626-96FE-4FD6587F3FE7}" type="pres">
       <dgm:prSet presAssocID="{A479A8EC-E353-2E44-BF46-DC2F405D4C6F}" presName="rect4ParTx" presStyleLbl="alignAcc1" presStyleIdx="3" presStyleCnt="4">
         <dgm:presLayoutVars>
           <dgm:chMax val="1"/>
@@ -6300,7 +6618,7 @@
       </dgm:prSet>
       <dgm:spPr/>
     </dgm:pt>
-    <dgm:pt modelId="{9D0E246D-2B0E-4C42-A279-F7CB3E46C811}" type="pres">
+    <dgm:pt modelId="{083E20F9-7277-4201-B98F-4A412B09804F}" type="pres">
       <dgm:prSet presAssocID="{A479A8EC-E353-2E44-BF46-DC2F405D4C6F}" presName="rect4ChTx" presStyleLbl="alignAcc1" presStyleIdx="3" presStyleCnt="4">
         <dgm:presLayoutVars>
           <dgm:bulletEnabled val="1"/>
@@ -6310,55 +6628,57 @@
     </dgm:pt>
   </dgm:ptLst>
   <dgm:cxnLst>
+    <dgm:cxn modelId="{28104B00-5820-4B69-84D7-BCC12FBEFAA0}" type="presOf" srcId="{02040BBF-CB26-2B4C-B9FC-AF47A8F7E8A3}" destId="{083E20F9-7277-4201-B98F-4A412B09804F}" srcOrd="0" destOrd="3" presId="urn:microsoft.com/office/officeart/2005/8/layout/target3"/>
+    <dgm:cxn modelId="{E7AFA502-4D71-431D-8431-6067CED6BFB6}" type="presOf" srcId="{F04EA46F-FC32-1843-A591-8C89918EC04E}" destId="{083E20F9-7277-4201-B98F-4A412B09804F}" srcOrd="0" destOrd="1" presId="urn:microsoft.com/office/officeart/2005/8/layout/target3"/>
+    <dgm:cxn modelId="{BB2D6A22-483C-47BA-B90D-C0E661EE7BB5}" type="presOf" srcId="{71EA1AD7-A052-3742-9A09-8308A2EBE3B7}" destId="{9B20ADC5-ACE5-074F-9AAA-915C660AFEB1}" srcOrd="1" destOrd="0" presId="urn:microsoft.com/office/officeart/2005/8/layout/target3"/>
     <dgm:cxn modelId="{59CD9C24-8A7D-584E-AC4B-196C1E7DFE5D}" srcId="{D85E56D9-C31E-FC40-90ED-AD86620CF6E1}" destId="{71EA1AD7-A052-3742-9A09-8308A2EBE3B7}" srcOrd="0" destOrd="0" parTransId="{E3FB70CA-EBBC-4F4C-9BD0-183F554D3BB6}" sibTransId="{AC134D8C-C212-C54B-8742-53943BBA48A5}"/>
-    <dgm:cxn modelId="{D5A1B524-8B82-F84E-834B-6DC6BF11B7FA}" type="presOf" srcId="{71EA1AD7-A052-3742-9A09-8308A2EBE3B7}" destId="{9B20ADC5-ACE5-074F-9AAA-915C660AFEB1}" srcOrd="1" destOrd="0" presId="urn:microsoft.com/office/officeart/2005/8/layout/target3"/>
-    <dgm:cxn modelId="{2E215F29-9494-1647-8AF6-428B8B7F738A}" type="presOf" srcId="{CF2415A1-2618-9E4C-881B-41435BAC89C9}" destId="{9D0E246D-2B0E-4C42-A279-F7CB3E46C811}" srcOrd="0" destOrd="2" presId="urn:microsoft.com/office/officeart/2005/8/layout/target3"/>
-    <dgm:cxn modelId="{4B065D2A-897A-8C48-9BA5-139E0BF69A98}" type="presOf" srcId="{70E990FA-9F8B-994E-94BF-9F5EB171887E}" destId="{65579841-4ADF-EC4E-BCE3-9A2637629F71}" srcOrd="0" destOrd="0" presId="urn:microsoft.com/office/officeart/2005/8/layout/target3"/>
+    <dgm:cxn modelId="{19DEEE24-F314-4266-9277-D17DA5298332}" type="presOf" srcId="{1895F70E-4D6B-CF47-84E3-8A8D07936F96}" destId="{BBFF07B8-6F26-B84E-A8AB-19D12DFA3057}" srcOrd="0" destOrd="3" presId="urn:microsoft.com/office/officeart/2005/8/layout/target3"/>
     <dgm:cxn modelId="{A087462D-52BF-6B41-A7CE-2A005372A2E2}" srcId="{A479A8EC-E353-2E44-BF46-DC2F405D4C6F}" destId="{02040BBF-CB26-2B4C-B9FC-AF47A8F7E8A3}" srcOrd="3" destOrd="0" parTransId="{F68F2D04-BDD3-0A4E-9449-8BE90FAB5EEF}" sibTransId="{9CEA46B5-0366-3841-B846-70CA83F68266}"/>
     <dgm:cxn modelId="{6D31C430-28A4-3446-878B-F376F455C70A}" srcId="{D85E56D9-C31E-FC40-90ED-AD86620CF6E1}" destId="{110D808B-713E-2F44-A16B-AB5F89B691A3}" srcOrd="2" destOrd="0" parTransId="{193CCFA4-4240-4D46-8FF2-B83041C3039B}" sibTransId="{94DBA1C9-A126-0247-B3D3-C6D41DA27552}"/>
-    <dgm:cxn modelId="{B49C9731-4E1F-224C-A8E8-F9BFCDE5940A}" type="presOf" srcId="{F7327F11-85D3-E74B-946F-85F55D5FE629}" destId="{BBFF07B8-6F26-B84E-A8AB-19D12DFA3057}" srcOrd="0" destOrd="1" presId="urn:microsoft.com/office/officeart/2005/8/layout/target3"/>
     <dgm:cxn modelId="{715B9E37-CAEF-8440-8DC5-91DE33185685}" srcId="{70E990FA-9F8B-994E-94BF-9F5EB171887E}" destId="{F7327F11-85D3-E74B-946F-85F55D5FE629}" srcOrd="1" destOrd="0" parTransId="{4FF7E842-695E-3342-91C7-5DABC3470AB6}" sibTransId="{7C06548F-D2E3-444D-95A5-ED1257FCB5C2}"/>
+    <dgm:cxn modelId="{E8999539-CA22-46AF-B542-484B820182C2}" type="presOf" srcId="{71EA1AD7-A052-3742-9A09-8308A2EBE3B7}" destId="{A10F58CA-5C42-874B-A2F7-1C184A0AC75D}" srcOrd="0" destOrd="0" presId="urn:microsoft.com/office/officeart/2005/8/layout/target3"/>
+    <dgm:cxn modelId="{E8D5B23D-7D81-4A48-895D-12DDE175582D}" type="presOf" srcId="{A479A8EC-E353-2E44-BF46-DC2F405D4C6F}" destId="{8F44AB94-720C-4547-B678-359AF71BC54F}" srcOrd="0" destOrd="0" presId="urn:microsoft.com/office/officeart/2005/8/layout/target3"/>
     <dgm:cxn modelId="{288A0062-7ED4-D044-95E2-0F21016498E8}" srcId="{70E990FA-9F8B-994E-94BF-9F5EB171887E}" destId="{1895F70E-4D6B-CF47-84E3-8A8D07936F96}" srcOrd="3" destOrd="0" parTransId="{2E7935F5-55A1-1D4B-A132-66740103D4A6}" sibTransId="{0047FCDB-1131-F54E-914F-D22B05F1B08D}"/>
-    <dgm:cxn modelId="{9C0E196B-10A9-5942-B524-6D8213622158}" type="presOf" srcId="{C81708D8-6860-344B-8058-9F87B858387B}" destId="{BBFF07B8-6F26-B84E-A8AB-19D12DFA3057}" srcOrd="0" destOrd="0" presId="urn:microsoft.com/office/officeart/2005/8/layout/target3"/>
-    <dgm:cxn modelId="{66A35B6D-2D5F-7D45-A947-0759CBAFBE89}" type="presOf" srcId="{73070E4A-517E-764C-8C8C-E11F43B03EFB}" destId="{BBFF07B8-6F26-B84E-A8AB-19D12DFA3057}" srcOrd="0" destOrd="2" presId="urn:microsoft.com/office/officeart/2005/8/layout/target3"/>
+    <dgm:cxn modelId="{514E1947-BD99-4D3F-AADA-05DCA778266F}" type="presOf" srcId="{110D808B-713E-2F44-A16B-AB5F89B691A3}" destId="{CE6DF527-2442-0A4D-BC35-51781661E854}" srcOrd="1" destOrd="0" presId="urn:microsoft.com/office/officeart/2005/8/layout/target3"/>
+    <dgm:cxn modelId="{9AD98D68-AF42-4E3C-AAE1-DA7F22480F0E}" type="presOf" srcId="{05ECE495-8CAF-4FCD-964A-3736E9D62230}" destId="{49262429-8B35-2C46-8FF6-31CBF38C001C}" srcOrd="0" destOrd="0" presId="urn:microsoft.com/office/officeart/2005/8/layout/target3"/>
+    <dgm:cxn modelId="{2BE9B84C-0639-443B-A898-F972D0AE71D4}" type="presOf" srcId="{C81708D8-6860-344B-8058-9F87B858387B}" destId="{BBFF07B8-6F26-B84E-A8AB-19D12DFA3057}" srcOrd="0" destOrd="0" presId="urn:microsoft.com/office/officeart/2005/8/layout/target3"/>
     <dgm:cxn modelId="{576AAB4D-6DC8-DC47-BC60-CFADF7C2F0FF}" type="presOf" srcId="{D85E56D9-C31E-FC40-90ED-AD86620CF6E1}" destId="{F1FABC65-CBAB-534D-B5F7-42052720B329}" srcOrd="0" destOrd="0" presId="urn:microsoft.com/office/officeart/2005/8/layout/target3"/>
-    <dgm:cxn modelId="{0B10B971-4CDD-D54C-9B1A-4927AEAB3D0A}" type="presOf" srcId="{1895F70E-4D6B-CF47-84E3-8A8D07936F96}" destId="{BBFF07B8-6F26-B84E-A8AB-19D12DFA3057}" srcOrd="0" destOrd="3" presId="urn:microsoft.com/office/officeart/2005/8/layout/target3"/>
-    <dgm:cxn modelId="{6DA01C57-9444-1E4C-9E3A-CD3F93F8A8B7}" type="presOf" srcId="{70E990FA-9F8B-994E-94BF-9F5EB171887E}" destId="{590C72DD-9C11-5943-8183-CC45EDC74AA1}" srcOrd="1" destOrd="0" presId="urn:microsoft.com/office/officeart/2005/8/layout/target3"/>
     <dgm:cxn modelId="{EE698C58-BFC0-6347-8D51-08A493DD4B05}" srcId="{D85E56D9-C31E-FC40-90ED-AD86620CF6E1}" destId="{A479A8EC-E353-2E44-BF46-DC2F405D4C6F}" srcOrd="3" destOrd="0" parTransId="{7A1537CF-A409-2742-B3CD-9B642D893EE2}" sibTransId="{C3AECCDC-7211-264D-8112-427DCB5D4687}"/>
-    <dgm:cxn modelId="{365A677E-720C-F543-85E1-1A52712CFDA4}" type="presOf" srcId="{110D808B-713E-2F44-A16B-AB5F89B691A3}" destId="{CE6DF527-2442-0A4D-BC35-51781661E854}" srcOrd="1" destOrd="0" presId="urn:microsoft.com/office/officeart/2005/8/layout/target3"/>
+    <dgm:cxn modelId="{002C417B-1122-4AD4-A1D4-5EFD27C8A2F3}" type="presOf" srcId="{110D808B-713E-2F44-A16B-AB5F89B691A3}" destId="{6D596F1A-2F76-644C-A1DC-AE6E31AD6E0F}" srcOrd="0" destOrd="0" presId="urn:microsoft.com/office/officeart/2005/8/layout/target3"/>
+    <dgm:cxn modelId="{57695E7C-6144-4E53-AC8C-7518B5F1ACAB}" type="presOf" srcId="{C79B9E55-F944-5F4B-8F91-1AF37FE09E46}" destId="{083E20F9-7277-4201-B98F-4A412B09804F}" srcOrd="0" destOrd="0" presId="urn:microsoft.com/office/officeart/2005/8/layout/target3"/>
     <dgm:cxn modelId="{8E8E2D80-9561-974A-9342-CC86B5F9C8F4}" srcId="{70E990FA-9F8B-994E-94BF-9F5EB171887E}" destId="{73070E4A-517E-764C-8C8C-E11F43B03EFB}" srcOrd="2" destOrd="0" parTransId="{8952A2A1-8857-DD47-B1B9-7D2A1A9A401F}" sibTransId="{B88CE8E3-A4B4-0E41-84E0-4A0E7CDB44FC}"/>
-    <dgm:cxn modelId="{7B396A83-16BA-7944-8CBF-B1081FE2CF6F}" type="presOf" srcId="{A479A8EC-E353-2E44-BF46-DC2F405D4C6F}" destId="{E1EAD459-84E8-E647-9756-DB050016C2AA}" srcOrd="0" destOrd="0" presId="urn:microsoft.com/office/officeart/2005/8/layout/target3"/>
-    <dgm:cxn modelId="{D21C338F-38F4-4847-8B46-B5685BACED1B}" type="presOf" srcId="{02040BBF-CB26-2B4C-B9FC-AF47A8F7E8A3}" destId="{9D0E246D-2B0E-4C42-A279-F7CB3E46C811}" srcOrd="0" destOrd="3" presId="urn:microsoft.com/office/officeart/2005/8/layout/target3"/>
+    <dgm:cxn modelId="{96513484-7234-428F-B46C-E08BD1D8EFB3}" type="presOf" srcId="{F7327F11-85D3-E74B-946F-85F55D5FE629}" destId="{BBFF07B8-6F26-B84E-A8AB-19D12DFA3057}" srcOrd="0" destOrd="1" presId="urn:microsoft.com/office/officeart/2005/8/layout/target3"/>
     <dgm:cxn modelId="{C9B4C390-1B76-E04A-82AD-A9D6757ADB21}" srcId="{70E990FA-9F8B-994E-94BF-9F5EB171887E}" destId="{C81708D8-6860-344B-8058-9F87B858387B}" srcOrd="0" destOrd="0" parTransId="{7CABF177-83E8-D74B-93A4-A1B8640AB322}" sibTransId="{B903A34A-E8F9-E64D-B52C-66DB20266347}"/>
     <dgm:cxn modelId="{ADBB9791-0661-0848-BF91-FFF7EF16C6FD}" srcId="{A479A8EC-E353-2E44-BF46-DC2F405D4C6F}" destId="{F04EA46F-FC32-1843-A591-8C89918EC04E}" srcOrd="1" destOrd="0" parTransId="{D1E8FA0D-62C0-8C47-BFE7-6E04B59D06EA}" sibTransId="{981E1547-FAB1-8D4C-82AA-139056972022}"/>
-    <dgm:cxn modelId="{BB8BD193-2EDE-4E41-80C6-49170F4EF473}" type="presOf" srcId="{110D808B-713E-2F44-A16B-AB5F89B691A3}" destId="{6D596F1A-2F76-644C-A1DC-AE6E31AD6E0F}" srcOrd="0" destOrd="0" presId="urn:microsoft.com/office/officeart/2005/8/layout/target3"/>
-    <dgm:cxn modelId="{E85D5C94-4223-974A-A53C-D0F73109B11A}" type="presOf" srcId="{F04EA46F-FC32-1843-A591-8C89918EC04E}" destId="{9D0E246D-2B0E-4C42-A279-F7CB3E46C811}" srcOrd="0" destOrd="1" presId="urn:microsoft.com/office/officeart/2005/8/layout/target3"/>
-    <dgm:cxn modelId="{A67E33AB-A9F4-3346-B06C-4D9F224C77B5}" type="presOf" srcId="{71EA1AD7-A052-3742-9A09-8308A2EBE3B7}" destId="{A10F58CA-5C42-874B-A2F7-1C184A0AC75D}" srcOrd="0" destOrd="0" presId="urn:microsoft.com/office/officeart/2005/8/layout/target3"/>
-    <dgm:cxn modelId="{AB6756AD-7365-9349-80F7-F81154F0D63D}" type="presOf" srcId="{A479A8EC-E353-2E44-BF46-DC2F405D4C6F}" destId="{89BC4CFD-C3F8-C945-8FED-8AA7F0B5A349}" srcOrd="1" destOrd="0" presId="urn:microsoft.com/office/officeart/2005/8/layout/target3"/>
+    <dgm:cxn modelId="{45BE5C9A-FAD5-4F26-B7BA-244F09106D51}" type="presOf" srcId="{73070E4A-517E-764C-8C8C-E11F43B03EFB}" destId="{BBFF07B8-6F26-B84E-A8AB-19D12DFA3057}" srcOrd="0" destOrd="2" presId="urn:microsoft.com/office/officeart/2005/8/layout/target3"/>
+    <dgm:cxn modelId="{4934A79C-DF1C-4739-ADA7-3B1864159068}" type="presOf" srcId="{CF2415A1-2618-9E4C-881B-41435BAC89C9}" destId="{083E20F9-7277-4201-B98F-4A412B09804F}" srcOrd="0" destOrd="2" presId="urn:microsoft.com/office/officeart/2005/8/layout/target3"/>
+    <dgm:cxn modelId="{4BD78FC6-1CBA-4ADB-906F-622EC82FD567}" type="presOf" srcId="{A479A8EC-E353-2E44-BF46-DC2F405D4C6F}" destId="{529E497D-CFAF-4626-96FE-4FD6587F3FE7}" srcOrd="1" destOrd="0" presId="urn:microsoft.com/office/officeart/2005/8/layout/target3"/>
     <dgm:cxn modelId="{67917BCB-D48F-3F43-B299-90B7D8348FBE}" srcId="{A479A8EC-E353-2E44-BF46-DC2F405D4C6F}" destId="{C79B9E55-F944-5F4B-8F91-1AF37FE09E46}" srcOrd="0" destOrd="0" parTransId="{419FEBA3-FBC7-B144-B638-FD5FA0041BD9}" sibTransId="{4ACEAA8D-A423-8B47-A85E-FA4D2C155CB1}"/>
     <dgm:cxn modelId="{4F271ACC-B836-CC40-97E8-F7C9E9D81509}" srcId="{A479A8EC-E353-2E44-BF46-DC2F405D4C6F}" destId="{CF2415A1-2618-9E4C-881B-41435BAC89C9}" srcOrd="2" destOrd="0" parTransId="{F1F7C959-76FB-E745-AE76-CB36F143B031}" sibTransId="{3D622C20-869E-2140-975E-89887F6C7131}"/>
-    <dgm:cxn modelId="{DC5C71EF-8369-6448-B7CD-59B6C562FA9D}" type="presOf" srcId="{C79B9E55-F944-5F4B-8F91-1AF37FE09E46}" destId="{9D0E246D-2B0E-4C42-A279-F7CB3E46C811}" srcOrd="0" destOrd="0" presId="urn:microsoft.com/office/officeart/2005/8/layout/target3"/>
+    <dgm:cxn modelId="{02143DDE-BB2A-4A92-9D80-60DE545D3511}" type="presOf" srcId="{70E990FA-9F8B-994E-94BF-9F5EB171887E}" destId="{65579841-4ADF-EC4E-BCE3-9A2637629F71}" srcOrd="0" destOrd="0" presId="urn:microsoft.com/office/officeart/2005/8/layout/target3"/>
+    <dgm:cxn modelId="{949394E3-3822-411F-A5D3-6F76F49F8181}" srcId="{110D808B-713E-2F44-A16B-AB5F89B691A3}" destId="{05ECE495-8CAF-4FCD-964A-3736E9D62230}" srcOrd="0" destOrd="0" parTransId="{F634502C-ADD5-4C2F-AAF5-EFE6DA8C9E23}" sibTransId="{EECE1089-8183-4CAA-8D74-86BAAC164EA7}"/>
+    <dgm:cxn modelId="{A6DFC4F5-F4E9-45A7-908E-6B2C0A1B2046}" type="presOf" srcId="{70E990FA-9F8B-994E-94BF-9F5EB171887E}" destId="{590C72DD-9C11-5943-8183-CC45EDC74AA1}" srcOrd="1" destOrd="0" presId="urn:microsoft.com/office/officeart/2005/8/layout/target3"/>
     <dgm:cxn modelId="{177D4EF6-F3F4-3F43-9F90-123543B4306B}" srcId="{D85E56D9-C31E-FC40-90ED-AD86620CF6E1}" destId="{70E990FA-9F8B-994E-94BF-9F5EB171887E}" srcOrd="1" destOrd="0" parTransId="{798C2F65-C8C1-324E-9BA0-5587A6F026E1}" sibTransId="{3CE02C46-7E96-1949-8230-853498CBCD1B}"/>
-    <dgm:cxn modelId="{958F63D5-1188-5642-9926-9688D9D1F8B4}" type="presParOf" srcId="{F1FABC65-CBAB-534D-B5F7-42052720B329}" destId="{696727FD-700B-FA4D-8C68-50F38EF69C63}" srcOrd="0" destOrd="0" presId="urn:microsoft.com/office/officeart/2005/8/layout/target3"/>
-    <dgm:cxn modelId="{B8C7CBE9-4BB9-3C42-9EC3-C5DDC3D33D23}" type="presParOf" srcId="{F1FABC65-CBAB-534D-B5F7-42052720B329}" destId="{6F0971C2-3FCB-3A4B-BF62-1A6E16B4A155}" srcOrd="1" destOrd="0" presId="urn:microsoft.com/office/officeart/2005/8/layout/target3"/>
-    <dgm:cxn modelId="{414CA906-F18E-D94F-81D3-F3BA881341E2}" type="presParOf" srcId="{F1FABC65-CBAB-534D-B5F7-42052720B329}" destId="{A10F58CA-5C42-874B-A2F7-1C184A0AC75D}" srcOrd="2" destOrd="0" presId="urn:microsoft.com/office/officeart/2005/8/layout/target3"/>
-    <dgm:cxn modelId="{70D44764-780B-1542-A8C4-5056764392B0}" type="presParOf" srcId="{F1FABC65-CBAB-534D-B5F7-42052720B329}" destId="{C10CD78E-F498-5740-A524-F7E78DF72C31}" srcOrd="3" destOrd="0" presId="urn:microsoft.com/office/officeart/2005/8/layout/target3"/>
-    <dgm:cxn modelId="{F2F21DF3-9B34-FC4F-B2CB-DDE79F9F52BD}" type="presParOf" srcId="{F1FABC65-CBAB-534D-B5F7-42052720B329}" destId="{D3037F47-C5E4-C344-BFC2-1F67EDFC93C4}" srcOrd="4" destOrd="0" presId="urn:microsoft.com/office/officeart/2005/8/layout/target3"/>
-    <dgm:cxn modelId="{693BE58D-41B5-2A48-9C1B-605B185364CD}" type="presParOf" srcId="{F1FABC65-CBAB-534D-B5F7-42052720B329}" destId="{65579841-4ADF-EC4E-BCE3-9A2637629F71}" srcOrd="5" destOrd="0" presId="urn:microsoft.com/office/officeart/2005/8/layout/target3"/>
-    <dgm:cxn modelId="{2AF3E4F6-B4C8-AD47-953F-C238DE27F2B1}" type="presParOf" srcId="{F1FABC65-CBAB-534D-B5F7-42052720B329}" destId="{5C3CA542-C17C-BC4D-A357-9E1ED3F44B35}" srcOrd="6" destOrd="0" presId="urn:microsoft.com/office/officeart/2005/8/layout/target3"/>
-    <dgm:cxn modelId="{3C38481D-0AE5-2E43-9E15-80CDFAD1F466}" type="presParOf" srcId="{F1FABC65-CBAB-534D-B5F7-42052720B329}" destId="{4C66E6FD-53AB-FB4C-A784-B949391C5111}" srcOrd="7" destOrd="0" presId="urn:microsoft.com/office/officeart/2005/8/layout/target3"/>
-    <dgm:cxn modelId="{DC366DB0-EEA6-EA4F-97E9-6FDE65E7BAFD}" type="presParOf" srcId="{F1FABC65-CBAB-534D-B5F7-42052720B329}" destId="{6D596F1A-2F76-644C-A1DC-AE6E31AD6E0F}" srcOrd="8" destOrd="0" presId="urn:microsoft.com/office/officeart/2005/8/layout/target3"/>
-    <dgm:cxn modelId="{4677E63E-5451-4D46-A5FA-BFAEA5502B8C}" type="presParOf" srcId="{F1FABC65-CBAB-534D-B5F7-42052720B329}" destId="{84D4CF0A-34A9-B741-ADB1-706557980F8D}" srcOrd="9" destOrd="0" presId="urn:microsoft.com/office/officeart/2005/8/layout/target3"/>
-    <dgm:cxn modelId="{69DD7863-DD79-4D47-BAC8-347253C62FE6}" type="presParOf" srcId="{F1FABC65-CBAB-534D-B5F7-42052720B329}" destId="{B98DF855-EC7E-DA4C-AA22-F6F76CF1BFFE}" srcOrd="10" destOrd="0" presId="urn:microsoft.com/office/officeart/2005/8/layout/target3"/>
-    <dgm:cxn modelId="{167609BA-3B1F-274B-8CE9-7A6AEC56D845}" type="presParOf" srcId="{F1FABC65-CBAB-534D-B5F7-42052720B329}" destId="{E1EAD459-84E8-E647-9756-DB050016C2AA}" srcOrd="11" destOrd="0" presId="urn:microsoft.com/office/officeart/2005/8/layout/target3"/>
-    <dgm:cxn modelId="{2B6484A9-6363-A641-9DDC-4C689CC968C8}" type="presParOf" srcId="{F1FABC65-CBAB-534D-B5F7-42052720B329}" destId="{9B20ADC5-ACE5-074F-9AAA-915C660AFEB1}" srcOrd="12" destOrd="0" presId="urn:microsoft.com/office/officeart/2005/8/layout/target3"/>
-    <dgm:cxn modelId="{B9599573-1CCE-464D-94E6-5EDC3ABB5BC3}" type="presParOf" srcId="{F1FABC65-CBAB-534D-B5F7-42052720B329}" destId="{43FFAA88-47C3-8A49-BAD7-6282536A13CA}" srcOrd="13" destOrd="0" presId="urn:microsoft.com/office/officeart/2005/8/layout/target3"/>
-    <dgm:cxn modelId="{A813BBFF-1D3E-A343-8D1B-8D871BFD7CA5}" type="presParOf" srcId="{F1FABC65-CBAB-534D-B5F7-42052720B329}" destId="{590C72DD-9C11-5943-8183-CC45EDC74AA1}" srcOrd="14" destOrd="0" presId="urn:microsoft.com/office/officeart/2005/8/layout/target3"/>
-    <dgm:cxn modelId="{42DA6F9D-E706-294D-8674-BFDE69CB0E3C}" type="presParOf" srcId="{F1FABC65-CBAB-534D-B5F7-42052720B329}" destId="{BBFF07B8-6F26-B84E-A8AB-19D12DFA3057}" srcOrd="15" destOrd="0" presId="urn:microsoft.com/office/officeart/2005/8/layout/target3"/>
-    <dgm:cxn modelId="{3A0529E3-BDBC-7B40-9F69-6C33337EC3AB}" type="presParOf" srcId="{F1FABC65-CBAB-534D-B5F7-42052720B329}" destId="{CE6DF527-2442-0A4D-BC35-51781661E854}" srcOrd="16" destOrd="0" presId="urn:microsoft.com/office/officeart/2005/8/layout/target3"/>
-    <dgm:cxn modelId="{D3D34CE2-331F-274C-A86C-EBF7E8418225}" type="presParOf" srcId="{F1FABC65-CBAB-534D-B5F7-42052720B329}" destId="{49262429-8B35-2C46-8FF6-31CBF38C001C}" srcOrd="17" destOrd="0" presId="urn:microsoft.com/office/officeart/2005/8/layout/target3"/>
-    <dgm:cxn modelId="{CEC9EB45-3623-F742-8C54-C8FA50C1D8CD}" type="presParOf" srcId="{F1FABC65-CBAB-534D-B5F7-42052720B329}" destId="{89BC4CFD-C3F8-C945-8FED-8AA7F0B5A349}" srcOrd="18" destOrd="0" presId="urn:microsoft.com/office/officeart/2005/8/layout/target3"/>
-    <dgm:cxn modelId="{D3169B07-F124-C144-9AD6-20D89967A822}" type="presParOf" srcId="{F1FABC65-CBAB-534D-B5F7-42052720B329}" destId="{9D0E246D-2B0E-4C42-A279-F7CB3E46C811}" srcOrd="19" destOrd="0" presId="urn:microsoft.com/office/officeart/2005/8/layout/target3"/>
+    <dgm:cxn modelId="{408622C7-4270-454F-8B59-BC3B2EED78FB}" type="presParOf" srcId="{F1FABC65-CBAB-534D-B5F7-42052720B329}" destId="{696727FD-700B-FA4D-8C68-50F38EF69C63}" srcOrd="0" destOrd="0" presId="urn:microsoft.com/office/officeart/2005/8/layout/target3"/>
+    <dgm:cxn modelId="{E96153B3-C6C8-47D2-9674-63348375C757}" type="presParOf" srcId="{F1FABC65-CBAB-534D-B5F7-42052720B329}" destId="{6F0971C2-3FCB-3A4B-BF62-1A6E16B4A155}" srcOrd="1" destOrd="0" presId="urn:microsoft.com/office/officeart/2005/8/layout/target3"/>
+    <dgm:cxn modelId="{C7D5D29D-B587-4E2E-B41B-9F1A6EE1120B}" type="presParOf" srcId="{F1FABC65-CBAB-534D-B5F7-42052720B329}" destId="{A10F58CA-5C42-874B-A2F7-1C184A0AC75D}" srcOrd="2" destOrd="0" presId="urn:microsoft.com/office/officeart/2005/8/layout/target3"/>
+    <dgm:cxn modelId="{A5A863D8-85A2-4C03-8EF1-69F85C44C5C7}" type="presParOf" srcId="{F1FABC65-CBAB-534D-B5F7-42052720B329}" destId="{C10CD78E-F498-5740-A524-F7E78DF72C31}" srcOrd="3" destOrd="0" presId="urn:microsoft.com/office/officeart/2005/8/layout/target3"/>
+    <dgm:cxn modelId="{940AC435-21E5-4709-BA54-04EE788DB4F9}" type="presParOf" srcId="{F1FABC65-CBAB-534D-B5F7-42052720B329}" destId="{D3037F47-C5E4-C344-BFC2-1F67EDFC93C4}" srcOrd="4" destOrd="0" presId="urn:microsoft.com/office/officeart/2005/8/layout/target3"/>
+    <dgm:cxn modelId="{A687227B-FAD6-4D02-AD2A-85AB0AB236F5}" type="presParOf" srcId="{F1FABC65-CBAB-534D-B5F7-42052720B329}" destId="{65579841-4ADF-EC4E-BCE3-9A2637629F71}" srcOrd="5" destOrd="0" presId="urn:microsoft.com/office/officeart/2005/8/layout/target3"/>
+    <dgm:cxn modelId="{50B70AAE-972B-4D26-A474-3BB1414BC560}" type="presParOf" srcId="{F1FABC65-CBAB-534D-B5F7-42052720B329}" destId="{5C3CA542-C17C-BC4D-A357-9E1ED3F44B35}" srcOrd="6" destOrd="0" presId="urn:microsoft.com/office/officeart/2005/8/layout/target3"/>
+    <dgm:cxn modelId="{30ACBF44-A809-4D0F-B29F-184C0D86223F}" type="presParOf" srcId="{F1FABC65-CBAB-534D-B5F7-42052720B329}" destId="{4C66E6FD-53AB-FB4C-A784-B949391C5111}" srcOrd="7" destOrd="0" presId="urn:microsoft.com/office/officeart/2005/8/layout/target3"/>
+    <dgm:cxn modelId="{FE1D575D-DFC0-4F48-9CF2-D1F7B94BD830}" type="presParOf" srcId="{F1FABC65-CBAB-534D-B5F7-42052720B329}" destId="{6D596F1A-2F76-644C-A1DC-AE6E31AD6E0F}" srcOrd="8" destOrd="0" presId="urn:microsoft.com/office/officeart/2005/8/layout/target3"/>
+    <dgm:cxn modelId="{A787EA2D-A206-4599-8478-2F9EB244776E}" type="presParOf" srcId="{F1FABC65-CBAB-534D-B5F7-42052720B329}" destId="{602842E0-B1BC-4C4F-8CFF-E4798C727CBB}" srcOrd="9" destOrd="0" presId="urn:microsoft.com/office/officeart/2005/8/layout/target3"/>
+    <dgm:cxn modelId="{9D694409-8DE1-4529-BA37-5C215E52955D}" type="presParOf" srcId="{F1FABC65-CBAB-534D-B5F7-42052720B329}" destId="{F4DE4A95-37FB-4267-BB4C-59E7EC78F599}" srcOrd="10" destOrd="0" presId="urn:microsoft.com/office/officeart/2005/8/layout/target3"/>
+    <dgm:cxn modelId="{5A01E8DF-0E30-4F48-9B0C-C2EC5FA2BE7D}" type="presParOf" srcId="{F1FABC65-CBAB-534D-B5F7-42052720B329}" destId="{8F44AB94-720C-4547-B678-359AF71BC54F}" srcOrd="11" destOrd="0" presId="urn:microsoft.com/office/officeart/2005/8/layout/target3"/>
+    <dgm:cxn modelId="{66AE23D9-DA24-4279-B02F-7DD0BDD014D2}" type="presParOf" srcId="{F1FABC65-CBAB-534D-B5F7-42052720B329}" destId="{9B20ADC5-ACE5-074F-9AAA-915C660AFEB1}" srcOrd="12" destOrd="0" presId="urn:microsoft.com/office/officeart/2005/8/layout/target3"/>
+    <dgm:cxn modelId="{3D3AB3E8-D633-479F-956A-1E18578AD730}" type="presParOf" srcId="{F1FABC65-CBAB-534D-B5F7-42052720B329}" destId="{43FFAA88-47C3-8A49-BAD7-6282536A13CA}" srcOrd="13" destOrd="0" presId="urn:microsoft.com/office/officeart/2005/8/layout/target3"/>
+    <dgm:cxn modelId="{7A346BA5-8E79-437C-9DFC-48E327E3BD77}" type="presParOf" srcId="{F1FABC65-CBAB-534D-B5F7-42052720B329}" destId="{590C72DD-9C11-5943-8183-CC45EDC74AA1}" srcOrd="14" destOrd="0" presId="urn:microsoft.com/office/officeart/2005/8/layout/target3"/>
+    <dgm:cxn modelId="{DBC4E446-86AA-43A0-8121-F6BC937BA259}" type="presParOf" srcId="{F1FABC65-CBAB-534D-B5F7-42052720B329}" destId="{BBFF07B8-6F26-B84E-A8AB-19D12DFA3057}" srcOrd="15" destOrd="0" presId="urn:microsoft.com/office/officeart/2005/8/layout/target3"/>
+    <dgm:cxn modelId="{10E59911-4A8E-41CC-B34A-B067ADD71A75}" type="presParOf" srcId="{F1FABC65-CBAB-534D-B5F7-42052720B329}" destId="{CE6DF527-2442-0A4D-BC35-51781661E854}" srcOrd="16" destOrd="0" presId="urn:microsoft.com/office/officeart/2005/8/layout/target3"/>
+    <dgm:cxn modelId="{05568D42-024C-4A65-9BAB-790D644BDD5F}" type="presParOf" srcId="{F1FABC65-CBAB-534D-B5F7-42052720B329}" destId="{49262429-8B35-2C46-8FF6-31CBF38C001C}" srcOrd="17" destOrd="0" presId="urn:microsoft.com/office/officeart/2005/8/layout/target3"/>
+    <dgm:cxn modelId="{3669E8A5-DF68-4D68-81E7-3C2EF28DDA30}" type="presParOf" srcId="{F1FABC65-CBAB-534D-B5F7-42052720B329}" destId="{529E497D-CFAF-4626-96FE-4FD6587F3FE7}" srcOrd="18" destOrd="0" presId="urn:microsoft.com/office/officeart/2005/8/layout/target3"/>
+    <dgm:cxn modelId="{AB790239-5399-48F5-B49F-0880411EC444}" type="presParOf" srcId="{F1FABC65-CBAB-534D-B5F7-42052720B329}" destId="{083E20F9-7277-4201-B98F-4A412B09804F}" srcOrd="19" destOrd="0" presId="urn:microsoft.com/office/officeart/2005/8/layout/target3"/>
   </dgm:cxnLst>
   <dgm:bg/>
   <dgm:whole/>
@@ -7203,7 +7523,7 @@
         <a:p>
           <a:r>
             <a:rPr lang="es-PE" b="0" i="0" baseline="0" dirty="0"/>
-            <a:t>Variable dependiente (y): Cantidad de proyectos que no continuaron o rotaron diariamente.</a:t>
+            <a:t>Variable dependiente (y): Cantidad de colaboradores que no continuaron o rotaron por día.</a:t>
           </a:r>
           <a:endParaRPr lang="es-PE" dirty="0"/>
         </a:p>
@@ -7862,16 +8182,11 @@
         <a:lstStyle/>
         <a:p>
           <a:r>
-            <a:rPr lang="es-ES_tradnl" dirty="0" err="1">
-              <a:latin typeface="Arial" panose="020B0604020202020204" pitchFamily="34" charset="0"/>
+            <a:rPr lang="es-ES_tradnl" dirty="0">
+              <a:latin typeface="Arial"/>
+              <a:cs typeface="Arial"/>
             </a:rPr>
-            <a:t>NumPy</a:t>
-          </a:r>
-          <a:r>
-            <a:rPr lang="es-ES_tradnl" dirty="0">
-              <a:latin typeface="Arial" panose="020B0604020202020204" pitchFamily="34" charset="0"/>
-            </a:rPr>
-            <a:t> </a:t>
+            <a:t>NumPy </a:t>
           </a:r>
         </a:p>
       </dgm:t>
@@ -7906,14 +8221,12 @@
         <a:lstStyle/>
         <a:p>
           <a:r>
-            <a:rPr lang="es-ES_tradnl" dirty="0" err="1">
-              <a:latin typeface="Arial" panose="020B0604020202020204" pitchFamily="34" charset="0"/>
+            <a:rPr lang="es-ES_tradnl" dirty="0">
+              <a:latin typeface="Arial"/>
+              <a:cs typeface="Arial"/>
             </a:rPr>
             <a:t>Matplotlib</a:t>
           </a:r>
-          <a:endParaRPr lang="es-ES_tradnl" dirty="0">
-            <a:latin typeface="Arial" panose="020B0604020202020204" pitchFamily="34" charset="0"/>
-          </a:endParaRPr>
         </a:p>
       </dgm:t>
     </dgm:pt>
@@ -7948,7 +8261,8 @@
         <a:p>
           <a:r>
             <a:rPr lang="es-ES_tradnl" dirty="0">
-              <a:latin typeface="Arial" panose="020B0604020202020204" pitchFamily="34" charset="0"/>
+              <a:latin typeface="Arial"/>
+              <a:cs typeface="Arial"/>
             </a:rPr>
             <a:t>Carga y preparación de datos históricos. </a:t>
           </a:r>
@@ -7967,44 +8281,6 @@
       </dgm:t>
     </dgm:pt>
     <dgm:pt modelId="{B0DC6FFA-4C55-5947-BDAA-8A605425B314}" type="sibTrans" cxnId="{2EB2DDB0-C70B-304A-AF1F-29C90DDB9876}">
-      <dgm:prSet/>
-      <dgm:spPr/>
-      <dgm:t>
-        <a:bodyPr/>
-        <a:lstStyle/>
-        <a:p>
-          <a:endParaRPr lang="es-MX"/>
-        </a:p>
-      </dgm:t>
-    </dgm:pt>
-    <dgm:pt modelId="{78510E95-0D19-2845-841B-1D41C65DDA4C}">
-      <dgm:prSet/>
-      <dgm:spPr/>
-      <dgm:t>
-        <a:bodyPr/>
-        <a:lstStyle/>
-        <a:p>
-          <a:r>
-            <a:rPr lang="es-ES_tradnl" dirty="0">
-              <a:latin typeface="Arial" panose="020B0604020202020204" pitchFamily="34" charset="0"/>
-            </a:rPr>
-            <a:t>Generación de serie temporal diaria. </a:t>
-          </a:r>
-        </a:p>
-      </dgm:t>
-    </dgm:pt>
-    <dgm:pt modelId="{C55CA015-BEC0-4C4F-AEE3-6CBFF82B9A6F}" type="parTrans" cxnId="{52384011-78C9-E04F-93AA-19BD85C0BB1C}">
-      <dgm:prSet/>
-      <dgm:spPr/>
-      <dgm:t>
-        <a:bodyPr/>
-        <a:lstStyle/>
-        <a:p>
-          <a:endParaRPr lang="es-MX"/>
-        </a:p>
-      </dgm:t>
-    </dgm:pt>
-    <dgm:pt modelId="{9793BE6E-78F5-104F-BB6C-8926EE68C2A7}" type="sibTrans" cxnId="{52384011-78C9-E04F-93AA-19BD85C0BB1C}">
       <dgm:prSet/>
       <dgm:spPr/>
       <dgm:t>
@@ -8087,47 +8363,6 @@
       </dgm:t>
     </dgm:pt>
     <dgm:pt modelId="{7BF85ED8-D500-4840-BBEA-272813978F66}" type="sibTrans" cxnId="{78AC7426-9F69-DC4D-8666-B9C705061465}">
-      <dgm:prSet/>
-      <dgm:spPr/>
-      <dgm:t>
-        <a:bodyPr/>
-        <a:lstStyle/>
-        <a:p>
-          <a:endParaRPr lang="es-MX"/>
-        </a:p>
-      </dgm:t>
-    </dgm:pt>
-    <dgm:pt modelId="{F93E27AE-E40C-D240-B958-4C336141075F}">
-      <dgm:prSet/>
-      <dgm:spPr/>
-      <dgm:t>
-        <a:bodyPr/>
-        <a:lstStyle/>
-        <a:p>
-          <a:r>
-            <a:rPr lang="es-ES_tradnl">
-              <a:latin typeface="Arial" panose="020B0604020202020204" pitchFamily="34" charset="0"/>
-            </a:rPr>
-            <a:t>Construcción de tabla comparativa. </a:t>
-          </a:r>
-          <a:endParaRPr lang="es-ES_tradnl" dirty="0">
-            <a:latin typeface="Arial" panose="020B0604020202020204" pitchFamily="34" charset="0"/>
-          </a:endParaRPr>
-        </a:p>
-      </dgm:t>
-    </dgm:pt>
-    <dgm:pt modelId="{96A58939-B3F3-A747-989E-14B5BCE4CC8C}" type="parTrans" cxnId="{EA4A50A2-D7DB-9A40-999F-C34508ED9BDF}">
-      <dgm:prSet/>
-      <dgm:spPr/>
-      <dgm:t>
-        <a:bodyPr/>
-        <a:lstStyle/>
-        <a:p>
-          <a:endParaRPr lang="es-MX"/>
-        </a:p>
-      </dgm:t>
-    </dgm:pt>
-    <dgm:pt modelId="{759F35F7-E99A-BF4B-9F5A-ECAABC98A98C}" type="sibTrans" cxnId="{EA4A50A2-D7DB-9A40-999F-C34508ED9BDF}">
       <dgm:prSet/>
       <dgm:spPr/>
       <dgm:t>
@@ -8299,6 +8534,57 @@
         </a:p>
       </dgm:t>
     </dgm:pt>
+    <dgm:pt modelId="{CF470638-A2C4-4066-BC59-4947FB5A299B}">
+      <dgm:prSet phldrT="[Texto]" phldr="0"/>
+      <dgm:spPr/>
+      <dgm:t>
+        <a:bodyPr/>
+        <a:lstStyle/>
+        <a:p>
+          <a:pPr rtl="0"/>
+          <a:r>
+            <a:rPr lang="es-ES_tradnl" sz="1800" dirty="0">
+              <a:latin typeface="Arial"/>
+              <a:cs typeface="Arial"/>
+            </a:rPr>
+            <a:t>Construcción de tabla comparativa. </a:t>
+          </a:r>
+        </a:p>
+      </dgm:t>
+    </dgm:pt>
+    <dgm:pt modelId="{FBB649DC-1E8F-4EE5-B055-3C097F244CEB}" type="parTrans" cxnId="{A0007693-CB19-493B-A223-FDABF644F34A}">
+      <dgm:prSet/>
+      <dgm:spPr/>
+    </dgm:pt>
+    <dgm:pt modelId="{56535149-B9BC-44B7-BA00-B857285596B3}" type="sibTrans" cxnId="{A0007693-CB19-493B-A223-FDABF644F34A}">
+      <dgm:prSet/>
+      <dgm:spPr/>
+    </dgm:pt>
+    <dgm:pt modelId="{372B3BA0-ED99-4C20-912D-3E86ED7C7154}">
+      <dgm:prSet phldrT="[Texto]" phldr="0"/>
+      <dgm:spPr/>
+      <dgm:t>
+        <a:bodyPr/>
+        <a:lstStyle/>
+        <a:p>
+          <a:r>
+            <a:rPr lang="es-ES_tradnl" dirty="0">
+              <a:latin typeface="Arial"/>
+              <a:cs typeface="Arial"/>
+            </a:rPr>
+            <a:t>Seaborn</a:t>
+          </a:r>
+        </a:p>
+      </dgm:t>
+    </dgm:pt>
+    <dgm:pt modelId="{1E72ADAF-79A7-40A9-B72C-F72C6EB646EE}" type="parTrans" cxnId="{C7E65B30-F012-4835-819A-0921F69EC593}">
+      <dgm:prSet/>
+      <dgm:spPr/>
+    </dgm:pt>
+    <dgm:pt modelId="{CFB0B6A3-C84A-4B6D-A9B2-3BBF2620489A}" type="sibTrans" cxnId="{C7E65B30-F012-4835-819A-0921F69EC593}">
+      <dgm:prSet/>
+      <dgm:spPr/>
+    </dgm:pt>
     <dgm:pt modelId="{50608F40-E842-3A42-B7EC-FA9B296A7525}" type="pres">
       <dgm:prSet presAssocID="{3DA114D2-7EDE-D046-9077-A7E0EBFDF707}" presName="Name0" presStyleCnt="0">
         <dgm:presLayoutVars>
@@ -8358,8 +8644,20 @@
       <dgm:prSet presAssocID="{4C994BE5-10B1-454A-BF98-522591E6825D}" presName="sibTrans" presStyleCnt="0"/>
       <dgm:spPr/>
     </dgm:pt>
+    <dgm:pt modelId="{A89241F6-1BA1-4EBE-AFF1-A8801246B451}" type="pres">
+      <dgm:prSet presAssocID="{372B3BA0-ED99-4C20-912D-3E86ED7C7154}" presName="node" presStyleLbl="alignAccFollowNode1" presStyleIdx="3" presStyleCnt="13">
+        <dgm:presLayoutVars>
+          <dgm:bulletEnabled val="1"/>
+        </dgm:presLayoutVars>
+      </dgm:prSet>
+      <dgm:spPr/>
+    </dgm:pt>
+    <dgm:pt modelId="{80C97DEF-B4FD-461A-A9D9-E036B7F17287}" type="pres">
+      <dgm:prSet presAssocID="{CFB0B6A3-C84A-4B6D-A9B2-3BBF2620489A}" presName="sibTrans" presStyleCnt="0"/>
+      <dgm:spPr/>
+    </dgm:pt>
     <dgm:pt modelId="{632772CD-9C7D-E24D-93B1-C000A3BB7D8D}" type="pres">
-      <dgm:prSet presAssocID="{46FCBF72-C7B8-C944-AE67-E2F60D8186EB}" presName="node" presStyleLbl="alignAccFollowNode1" presStyleIdx="3" presStyleCnt="13">
+      <dgm:prSet presAssocID="{46FCBF72-C7B8-C944-AE67-E2F60D8186EB}" presName="node" presStyleLbl="alignAccFollowNode1" presStyleIdx="4" presStyleCnt="13">
         <dgm:presLayoutVars>
           <dgm:bulletEnabled val="1"/>
         </dgm:presLayoutVars>
@@ -8383,27 +8681,15 @@
       <dgm:spPr/>
     </dgm:pt>
     <dgm:pt modelId="{D63E9201-7A03-5F45-865F-676A48BB160C}" type="pres">
-      <dgm:prSet presAssocID="{3825AE95-A929-B547-89AF-702D0003A86F}" presName="node" presStyleLbl="alignAccFollowNode1" presStyleIdx="4" presStyleCnt="13">
+      <dgm:prSet presAssocID="{3825AE95-A929-B547-89AF-702D0003A86F}" presName="node" presStyleLbl="alignAccFollowNode1" presStyleIdx="5" presStyleCnt="13">
         <dgm:presLayoutVars>
           <dgm:bulletEnabled val="1"/>
         </dgm:presLayoutVars>
       </dgm:prSet>
       <dgm:spPr/>
     </dgm:pt>
-    <dgm:pt modelId="{C94C90BC-3641-D340-9E5E-8291C329B73B}" type="pres">
+    <dgm:pt modelId="{487F6291-056C-4E89-8985-257032843F0E}" type="pres">
       <dgm:prSet presAssocID="{B0DC6FFA-4C55-5947-BDAA-8A605425B314}" presName="sibTrans" presStyleCnt="0"/>
-      <dgm:spPr/>
-    </dgm:pt>
-    <dgm:pt modelId="{6C0952D4-0640-E34A-994F-CCE293E4E2FD}" type="pres">
-      <dgm:prSet presAssocID="{78510E95-0D19-2845-841B-1D41C65DDA4C}" presName="node" presStyleLbl="alignAccFollowNode1" presStyleIdx="5" presStyleCnt="13">
-        <dgm:presLayoutVars>
-          <dgm:bulletEnabled val="1"/>
-        </dgm:presLayoutVars>
-      </dgm:prSet>
-      <dgm:spPr/>
-    </dgm:pt>
-    <dgm:pt modelId="{E0608C87-2B1A-AC4B-85C5-2202070109DB}" type="pres">
-      <dgm:prSet presAssocID="{9793BE6E-78F5-104F-BB6C-8926EE68C2A7}" presName="sibTrans" presStyleCnt="0"/>
       <dgm:spPr/>
     </dgm:pt>
     <dgm:pt modelId="{4C642C97-12AB-AB4D-BC7B-4A63DD7015B4}" type="pres">
@@ -8414,7 +8700,7 @@
       </dgm:prSet>
       <dgm:spPr/>
     </dgm:pt>
-    <dgm:pt modelId="{D53A70C0-D605-9A4B-8089-F9509A9A4F55}" type="pres">
+    <dgm:pt modelId="{F08889FC-75B7-4C57-A4AE-3A8CD819DAAE}" type="pres">
       <dgm:prSet presAssocID="{FDB1E105-9005-D344-9E3D-96E4E682BA35}" presName="sibTrans" presStyleCnt="0"/>
       <dgm:spPr/>
     </dgm:pt>
@@ -8426,20 +8712,20 @@
       </dgm:prSet>
       <dgm:spPr/>
     </dgm:pt>
-    <dgm:pt modelId="{490DCFEE-506A-204F-A861-A89E13D90C05}" type="pres">
+    <dgm:pt modelId="{57CCBC07-10CC-4DC2-AA75-DAC80CD57FE8}" type="pres">
       <dgm:prSet presAssocID="{7BF85ED8-D500-4840-BBEA-272813978F66}" presName="sibTrans" presStyleCnt="0"/>
       <dgm:spPr/>
     </dgm:pt>
-    <dgm:pt modelId="{F3E41A5C-91CA-AE47-8D8F-2D8870E80197}" type="pres">
-      <dgm:prSet presAssocID="{F93E27AE-E40C-D240-B958-4C336141075F}" presName="node" presStyleLbl="alignAccFollowNode1" presStyleIdx="8" presStyleCnt="13">
+    <dgm:pt modelId="{4ECAD6D7-A0CB-4EAC-B7CA-BB0CE1B92C57}" type="pres">
+      <dgm:prSet presAssocID="{CF470638-A2C4-4066-BC59-4947FB5A299B}" presName="node" presStyleLbl="alignAccFollowNode1" presStyleIdx="8" presStyleCnt="13">
         <dgm:presLayoutVars>
           <dgm:bulletEnabled val="1"/>
         </dgm:presLayoutVars>
       </dgm:prSet>
       <dgm:spPr/>
     </dgm:pt>
-    <dgm:pt modelId="{1F065B89-C6D7-2E40-B971-A20F3E30866F}" type="pres">
-      <dgm:prSet presAssocID="{759F35F7-E99A-BF4B-9F5A-ECAABC98A98C}" presName="sibTrans" presStyleCnt="0"/>
+    <dgm:pt modelId="{AD806653-A87F-49FE-86E8-03E0BAA12351}" type="pres">
+      <dgm:prSet presAssocID="{56535149-B9BC-44B7-BA00-B857285596B3}" presName="sibTrans" presStyleCnt="0"/>
       <dgm:spPr/>
     </dgm:pt>
     <dgm:pt modelId="{D6F3DC2D-C8E8-2443-9968-4CBAC8788EB7}" type="pres">
@@ -8500,73 +8786,73 @@
     </dgm:pt>
   </dgm:ptLst>
   <dgm:cxnLst>
-    <dgm:cxn modelId="{0C580D04-E16C-1147-9020-0764705C4EBD}" srcId="{B95ED0AB-1CBA-6341-8278-7826AC1B0E15}" destId="{46FCBF72-C7B8-C944-AE67-E2F60D8186EB}" srcOrd="3" destOrd="0" parTransId="{40AE922D-167A-C443-BF4F-BED7F15F56BD}" sibTransId="{B9BB4428-C2F8-5C4E-A162-556987F01C11}"/>
-    <dgm:cxn modelId="{D3F60B0A-021E-5E43-A370-4CE8082F6E0E}" type="presOf" srcId="{B95ED0AB-1CBA-6341-8278-7826AC1B0E15}" destId="{D9C2B440-8433-ED4B-931B-9D88526F1E68}" srcOrd="0" destOrd="0" presId="urn:microsoft.com/office/officeart/2005/8/layout/lProcess3"/>
-    <dgm:cxn modelId="{52384011-78C9-E04F-93AA-19BD85C0BB1C}" srcId="{BB066365-0428-B744-A9EE-28EFAFEA985C}" destId="{78510E95-0D19-2845-841B-1D41C65DDA4C}" srcOrd="1" destOrd="0" parTransId="{C55CA015-BEC0-4C4F-AEE3-6CBFF82B9A6F}" sibTransId="{9793BE6E-78F5-104F-BB6C-8926EE68C2A7}"/>
-    <dgm:cxn modelId="{E1280315-06D5-4949-9F33-B16E9A7043DA}" type="presOf" srcId="{11602173-EB8E-B243-98DD-39838FD34B03}" destId="{926A95DD-46EE-0948-8924-9A2D4AC6EB8D}" srcOrd="0" destOrd="0" presId="urn:microsoft.com/office/officeart/2005/8/layout/lProcess3"/>
-    <dgm:cxn modelId="{005D3820-0B78-F34B-95F5-B745F8D6B4D8}" type="presOf" srcId="{1C7E5650-A323-CC46-8592-D9278D2F4511}" destId="{D6F3DC2D-C8E8-2443-9968-4CBAC8788EB7}" srcOrd="0" destOrd="0" presId="urn:microsoft.com/office/officeart/2005/8/layout/lProcess3"/>
-    <dgm:cxn modelId="{15AAF921-C83D-8B47-82AC-F998AAE4091C}" srcId="{BB066365-0428-B744-A9EE-28EFAFEA985C}" destId="{672F3EFD-3B15-F54A-AF27-677C94384395}" srcOrd="2" destOrd="0" parTransId="{BA3965DD-71FF-024F-B589-B577E8CC8883}" sibTransId="{FDB1E105-9005-D344-9E3D-96E4E682BA35}"/>
-    <dgm:cxn modelId="{78AC7426-9F69-DC4D-8666-B9C705061465}" srcId="{BB066365-0428-B744-A9EE-28EFAFEA985C}" destId="{D89573EB-5253-F44B-BC96-E2D16D9AC960}" srcOrd="3" destOrd="0" parTransId="{78803DAF-E7D5-DB42-BD78-5BDE83BD5A1C}" sibTransId="{7BF85ED8-D500-4840-BBEA-272813978F66}"/>
+    <dgm:cxn modelId="{0C580D04-E16C-1147-9020-0764705C4EBD}" srcId="{B95ED0AB-1CBA-6341-8278-7826AC1B0E15}" destId="{46FCBF72-C7B8-C944-AE67-E2F60D8186EB}" srcOrd="4" destOrd="0" parTransId="{40AE922D-167A-C443-BF4F-BED7F15F56BD}" sibTransId="{B9BB4428-C2F8-5C4E-A162-556987F01C11}"/>
+    <dgm:cxn modelId="{6F3C9508-6311-4165-AAA2-89FC2F368E41}" type="presOf" srcId="{B95ED0AB-1CBA-6341-8278-7826AC1B0E15}" destId="{D9C2B440-8433-ED4B-931B-9D88526F1E68}" srcOrd="0" destOrd="0" presId="urn:microsoft.com/office/officeart/2005/8/layout/lProcess3"/>
+    <dgm:cxn modelId="{30D2E60B-0478-4485-A998-930D376C8C6C}" type="presOf" srcId="{11602173-EB8E-B243-98DD-39838FD34B03}" destId="{926A95DD-46EE-0948-8924-9A2D4AC6EB8D}" srcOrd="0" destOrd="0" presId="urn:microsoft.com/office/officeart/2005/8/layout/lProcess3"/>
+    <dgm:cxn modelId="{DBE97121-2D48-47EC-BCDD-D0D4F7A96173}" type="presOf" srcId="{672F3EFD-3B15-F54A-AF27-677C94384395}" destId="{4C642C97-12AB-AB4D-BC7B-4A63DD7015B4}" srcOrd="0" destOrd="0" presId="urn:microsoft.com/office/officeart/2005/8/layout/lProcess3"/>
+    <dgm:cxn modelId="{15AAF921-C83D-8B47-82AC-F998AAE4091C}" srcId="{BB066365-0428-B744-A9EE-28EFAFEA985C}" destId="{672F3EFD-3B15-F54A-AF27-677C94384395}" srcOrd="1" destOrd="0" parTransId="{BA3965DD-71FF-024F-B589-B577E8CC8883}" sibTransId="{FDB1E105-9005-D344-9E3D-96E4E682BA35}"/>
+    <dgm:cxn modelId="{78AC7426-9F69-DC4D-8666-B9C705061465}" srcId="{BB066365-0428-B744-A9EE-28EFAFEA985C}" destId="{D89573EB-5253-F44B-BC96-E2D16D9AC960}" srcOrd="2" destOrd="0" parTransId="{78803DAF-E7D5-DB42-BD78-5BDE83BD5A1C}" sibTransId="{7BF85ED8-D500-4840-BBEA-272813978F66}"/>
     <dgm:cxn modelId="{99CB5028-0505-334F-A16D-D33FC850ED48}" srcId="{BF144609-AC8C-F04F-B100-E87F13B83CD2}" destId="{47DBC6A6-81B8-F646-A217-89DCB15E4969}" srcOrd="0" destOrd="0" parTransId="{8EF392D8-1C7A-E443-AE64-F6E924BA079B}" sibTransId="{C4BE4B71-FC7D-5A41-A299-4149F9DAA2CB}"/>
-    <dgm:cxn modelId="{128AAB36-7EB9-FC49-B386-52389DD5EA30}" type="presOf" srcId="{F93E27AE-E40C-D240-B958-4C336141075F}" destId="{F3E41A5C-91CA-AE47-8D8F-2D8870E80197}" srcOrd="0" destOrd="0" presId="urn:microsoft.com/office/officeart/2005/8/layout/lProcess3"/>
+    <dgm:cxn modelId="{C7E65B30-F012-4835-819A-0921F69EC593}" srcId="{B95ED0AB-1CBA-6341-8278-7826AC1B0E15}" destId="{372B3BA0-ED99-4C20-912D-3E86ED7C7154}" srcOrd="3" destOrd="0" parTransId="{1E72ADAF-79A7-40A9-B72C-F72C6EB646EE}" sibTransId="{CFB0B6A3-C84A-4B6D-A9B2-3BBF2620489A}"/>
+    <dgm:cxn modelId="{893EF732-216C-4251-9363-2C3F3794FBE6}" type="presOf" srcId="{7925FEA3-D363-BA4F-920C-C48919DCD087}" destId="{145240E1-4F54-1B46-94F3-5BE46DC2B791}" srcOrd="0" destOrd="0" presId="urn:microsoft.com/office/officeart/2005/8/layout/lProcess3"/>
     <dgm:cxn modelId="{5B028637-575A-E149-9258-0511B9DCB64F}" srcId="{B95ED0AB-1CBA-6341-8278-7826AC1B0E15}" destId="{11602173-EB8E-B243-98DD-39838FD34B03}" srcOrd="2" destOrd="0" parTransId="{4619B66F-286C-B045-90F0-8E0311E7B06C}" sibTransId="{4C994BE5-10B1-454A-BF98-522591E6825D}"/>
-    <dgm:cxn modelId="{F7DAA464-46AA-D040-BEF3-39937BEDE530}" type="presOf" srcId="{D9D06DE5-F849-7646-ABBB-A7AB42478D68}" destId="{CEA4562F-3DF9-D446-9F81-337BB7935385}" srcOrd="0" destOrd="0" presId="urn:microsoft.com/office/officeart/2005/8/layout/lProcess3"/>
+    <dgm:cxn modelId="{284DB940-744F-4145-ADAF-6BE51A893F88}" type="presOf" srcId="{BB066365-0428-B744-A9EE-28EFAFEA985C}" destId="{BCE69AC5-EDF5-6048-82A3-2F4E580882C0}" srcOrd="0" destOrd="0" presId="urn:microsoft.com/office/officeart/2005/8/layout/lProcess3"/>
     <dgm:cxn modelId="{B3C7C047-5595-2042-9211-F54F0629EDFB}" srcId="{3DA114D2-7EDE-D046-9077-A7E0EBFDF707}" destId="{B95ED0AB-1CBA-6341-8278-7826AC1B0E15}" srcOrd="0" destOrd="0" parTransId="{29C2B137-0177-AD40-AC6F-819396CBE6E1}" sibTransId="{FB0C4987-994E-BA44-A4C7-67680993700C}"/>
-    <dgm:cxn modelId="{DAADC44E-3692-1648-809D-C30145191E64}" type="presOf" srcId="{672F3EFD-3B15-F54A-AF27-677C94384395}" destId="{4C642C97-12AB-AB4D-BC7B-4A63DD7015B4}" srcOrd="0" destOrd="0" presId="urn:microsoft.com/office/officeart/2005/8/layout/lProcess3"/>
+    <dgm:cxn modelId="{76EABD4B-3910-4F60-8A81-EB3AEB1CC654}" type="presOf" srcId="{CF470638-A2C4-4066-BC59-4947FB5A299B}" destId="{4ECAD6D7-A0CB-4EAC-B7CA-BB0CE1B92C57}" srcOrd="0" destOrd="0" presId="urn:microsoft.com/office/officeart/2005/8/layout/lProcess3"/>
     <dgm:cxn modelId="{0A32904F-2117-4440-9C91-3FE9AACC4189}" srcId="{B95ED0AB-1CBA-6341-8278-7826AC1B0E15}" destId="{EBC09B09-37F9-D84E-AFD2-8C6F9D3A0365}" srcOrd="0" destOrd="0" parTransId="{21F2AA86-349D-4F47-BA73-4AB746D469EE}" sibTransId="{1BFDC70C-12F1-134F-AF3C-C3144301DB85}"/>
-    <dgm:cxn modelId="{F42DBA57-56A8-BE48-AEE8-271773579780}" type="presOf" srcId="{3825AE95-A929-B547-89AF-702D0003A86F}" destId="{D63E9201-7A03-5F45-865F-676A48BB160C}" srcOrd="0" destOrd="0" presId="urn:microsoft.com/office/officeart/2005/8/layout/lProcess3"/>
-    <dgm:cxn modelId="{FD4A597B-4748-4345-AD89-D382ADCE665A}" type="presOf" srcId="{7925FEA3-D363-BA4F-920C-C48919DCD087}" destId="{145240E1-4F54-1B46-94F3-5BE46DC2B791}" srcOrd="0" destOrd="0" presId="urn:microsoft.com/office/officeart/2005/8/layout/lProcess3"/>
-    <dgm:cxn modelId="{13CC817D-8B8C-7945-AFB0-7F2B68CD2F1D}" type="presOf" srcId="{46FCBF72-C7B8-C944-AE67-E2F60D8186EB}" destId="{632772CD-9C7D-E24D-93B1-C000A3BB7D8D}" srcOrd="0" destOrd="0" presId="urn:microsoft.com/office/officeart/2005/8/layout/lProcess3"/>
-    <dgm:cxn modelId="{1569FF8E-F05F-6847-B01D-0AC9109AC0EF}" type="presOf" srcId="{BF144609-AC8C-F04F-B100-E87F13B83CD2}" destId="{7A2119B2-BAB2-154A-8E45-93A406A4356F}" srcOrd="0" destOrd="0" presId="urn:microsoft.com/office/officeart/2005/8/layout/lProcess3"/>
-    <dgm:cxn modelId="{1B016A91-6370-CD4B-BC33-58EDE0E9C1DC}" type="presOf" srcId="{EBC09B09-37F9-D84E-AFD2-8C6F9D3A0365}" destId="{E30B889D-093B-6C48-BB45-D85DCEB27884}" srcOrd="0" destOrd="0" presId="urn:microsoft.com/office/officeart/2005/8/layout/lProcess3"/>
-    <dgm:cxn modelId="{EA4A50A2-D7DB-9A40-999F-C34508ED9BDF}" srcId="{BB066365-0428-B744-A9EE-28EFAFEA985C}" destId="{F93E27AE-E40C-D240-B958-4C336141075F}" srcOrd="4" destOrd="0" parTransId="{96A58939-B3F3-A747-989E-14B5BCE4CC8C}" sibTransId="{759F35F7-E99A-BF4B-9F5A-ECAABC98A98C}"/>
-    <dgm:cxn modelId="{648D08A6-56AD-A347-8102-D828533FD030}" type="presOf" srcId="{BB066365-0428-B744-A9EE-28EFAFEA985C}" destId="{BCE69AC5-EDF5-6048-82A3-2F4E580882C0}" srcOrd="0" destOrd="0" presId="urn:microsoft.com/office/officeart/2005/8/layout/lProcess3"/>
+    <dgm:cxn modelId="{B6DAEB74-FC28-4438-A390-51FCC047DFB2}" type="presOf" srcId="{BF144609-AC8C-F04F-B100-E87F13B83CD2}" destId="{7A2119B2-BAB2-154A-8E45-93A406A4356F}" srcOrd="0" destOrd="0" presId="urn:microsoft.com/office/officeart/2005/8/layout/lProcess3"/>
+    <dgm:cxn modelId="{771D4275-F5D7-4ABC-A15D-2B6DED5260EA}" type="presOf" srcId="{EBC09B09-37F9-D84E-AFD2-8C6F9D3A0365}" destId="{E30B889D-093B-6C48-BB45-D85DCEB27884}" srcOrd="0" destOrd="0" presId="urn:microsoft.com/office/officeart/2005/8/layout/lProcess3"/>
+    <dgm:cxn modelId="{1036AC87-3069-4B7C-B63F-9ACBAB034089}" type="presOf" srcId="{7558CEA6-A3D0-EA49-8CE7-07C4A42DCBFA}" destId="{3CCB4C62-A04F-F54C-AA5F-901D012FD0CF}" srcOrd="0" destOrd="0" presId="urn:microsoft.com/office/officeart/2005/8/layout/lProcess3"/>
+    <dgm:cxn modelId="{43EA7593-8EE5-4F33-8262-840022FDD82C}" type="presOf" srcId="{D89573EB-5253-F44B-BC96-E2D16D9AC960}" destId="{3C6EDCAC-C7A9-394C-B1C8-2C99100064E5}" srcOrd="0" destOrd="0" presId="urn:microsoft.com/office/officeart/2005/8/layout/lProcess3"/>
+    <dgm:cxn modelId="{A0007693-CB19-493B-A223-FDABF644F34A}" srcId="{BB066365-0428-B744-A9EE-28EFAFEA985C}" destId="{CF470638-A2C4-4066-BC59-4947FB5A299B}" srcOrd="3" destOrd="0" parTransId="{FBB649DC-1E8F-4EE5-B055-3C097F244CEB}" sibTransId="{56535149-B9BC-44B7-BA00-B857285596B3}"/>
+    <dgm:cxn modelId="{12AEED94-BC1C-46F2-B4B7-EFB7F226F015}" type="presOf" srcId="{372B3BA0-ED99-4C20-912D-3E86ED7C7154}" destId="{A89241F6-1BA1-4EBE-AFF1-A8801246B451}" srcOrd="0" destOrd="0" presId="urn:microsoft.com/office/officeart/2005/8/layout/lProcess3"/>
+    <dgm:cxn modelId="{9140619D-FA26-4B0E-89A7-CE25875606ED}" type="presOf" srcId="{D9D06DE5-F849-7646-ABBB-A7AB42478D68}" destId="{CEA4562F-3DF9-D446-9F81-337BB7935385}" srcOrd="0" destOrd="0" presId="urn:microsoft.com/office/officeart/2005/8/layout/lProcess3"/>
+    <dgm:cxn modelId="{4B6998AE-ACD6-49D6-848E-9A2B37DA017C}" type="presOf" srcId="{1C7E5650-A323-CC46-8592-D9278D2F4511}" destId="{D6F3DC2D-C8E8-2443-9968-4CBAC8788EB7}" srcOrd="0" destOrd="0" presId="urn:microsoft.com/office/officeart/2005/8/layout/lProcess3"/>
     <dgm:cxn modelId="{2EB2DDB0-C70B-304A-AF1F-29C90DDB9876}" srcId="{BB066365-0428-B744-A9EE-28EFAFEA985C}" destId="{3825AE95-A929-B547-89AF-702D0003A86F}" srcOrd="0" destOrd="0" parTransId="{D0609CB8-A52F-E84E-AA1A-EF84C5FDB927}" sibTransId="{B0DC6FFA-4C55-5947-BDAA-8A605425B314}"/>
+    <dgm:cxn modelId="{0A7DDEB4-10CA-4D99-980B-49D4097E58D0}" type="presOf" srcId="{47DBC6A6-81B8-F646-A217-89DCB15E4969}" destId="{834A784C-A7A9-5048-8412-CD13436C10B6}" srcOrd="0" destOrd="0" presId="urn:microsoft.com/office/officeart/2005/8/layout/lProcess3"/>
     <dgm:cxn modelId="{909473C0-61E6-C347-A312-28D0C72F6B93}" type="presOf" srcId="{3DA114D2-7EDE-D046-9077-A7E0EBFDF707}" destId="{50608F40-E842-3A42-B7EC-FA9B296A7525}" srcOrd="0" destOrd="0" presId="urn:microsoft.com/office/officeart/2005/8/layout/lProcess3"/>
     <dgm:cxn modelId="{9ACA42CC-349D-4940-9267-B92CD49DE221}" srcId="{BF144609-AC8C-F04F-B100-E87F13B83CD2}" destId="{7558CEA6-A3D0-EA49-8CE7-07C4A42DCBFA}" srcOrd="1" destOrd="0" parTransId="{7A99E946-472C-E347-ABAA-FE8D21B0E261}" sibTransId="{02E31EC8-3717-AF41-9366-82A83549D5F4}"/>
+    <dgm:cxn modelId="{432245CD-1DBF-4FE0-9624-777B29416AFC}" type="presOf" srcId="{46FCBF72-C7B8-C944-AE67-E2F60D8186EB}" destId="{632772CD-9C7D-E24D-93B1-C000A3BB7D8D}" srcOrd="0" destOrd="0" presId="urn:microsoft.com/office/officeart/2005/8/layout/lProcess3"/>
     <dgm:cxn modelId="{100EC7D4-36B3-2540-BCA8-52DBF864EF58}" srcId="{3DA114D2-7EDE-D046-9077-A7E0EBFDF707}" destId="{BB066365-0428-B744-A9EE-28EFAFEA985C}" srcOrd="1" destOrd="0" parTransId="{0BA78A01-F9CC-3B4B-8EEE-3F5CAF8C46E3}" sibTransId="{E24387C7-2DB8-B645-AC0C-FCC12F1195D5}"/>
-    <dgm:cxn modelId="{4C4946D7-8990-744A-9AAE-5C9C3F6BF472}" srcId="{BB066365-0428-B744-A9EE-28EFAFEA985C}" destId="{1C7E5650-A323-CC46-8592-D9278D2F4511}" srcOrd="5" destOrd="0" parTransId="{E5118AE1-921A-E842-BA35-BEFFE3E53DD2}" sibTransId="{16D80136-9918-E749-BC0D-7CB3E349441C}"/>
+    <dgm:cxn modelId="{4C4946D7-8990-744A-9AAE-5C9C3F6BF472}" srcId="{BB066365-0428-B744-A9EE-28EFAFEA985C}" destId="{1C7E5650-A323-CC46-8592-D9278D2F4511}" srcOrd="4" destOrd="0" parTransId="{E5118AE1-921A-E842-BA35-BEFFE3E53DD2}" sibTransId="{16D80136-9918-E749-BC0D-7CB3E349441C}"/>
     <dgm:cxn modelId="{E59DBEDA-138E-DE4B-B751-F8FAE66E049F}" srcId="{3DA114D2-7EDE-D046-9077-A7E0EBFDF707}" destId="{BF144609-AC8C-F04F-B100-E87F13B83CD2}" srcOrd="2" destOrd="0" parTransId="{1A702F70-1358-EC41-995F-0D32C1D65434}" sibTransId="{66E88D79-E572-5746-8D70-CA74AF994E28}"/>
     <dgm:cxn modelId="{D7C2D8DE-6143-BC4C-B688-2A7B38E890BE}" srcId="{BF144609-AC8C-F04F-B100-E87F13B83CD2}" destId="{7925FEA3-D363-BA4F-920C-C48919DCD087}" srcOrd="2" destOrd="0" parTransId="{3EC9A3FC-0D42-3E43-80E0-1527991360CB}" sibTransId="{71B48336-FDF5-F149-890C-FF71F7542C0B}"/>
     <dgm:cxn modelId="{1051E8E0-35E8-B14E-81F2-17540C217481}" srcId="{B95ED0AB-1CBA-6341-8278-7826AC1B0E15}" destId="{D9D06DE5-F849-7646-ABBB-A7AB42478D68}" srcOrd="1" destOrd="0" parTransId="{D433EED7-45BC-4444-9D9B-95366873D32A}" sibTransId="{08FF2C7A-CDF5-E445-AC35-586323F7820F}"/>
-    <dgm:cxn modelId="{E70A50E8-AB21-3848-B2BC-E6FFEBDD928C}" type="presOf" srcId="{D89573EB-5253-F44B-BC96-E2D16D9AC960}" destId="{3C6EDCAC-C7A9-394C-B1C8-2C99100064E5}" srcOrd="0" destOrd="0" presId="urn:microsoft.com/office/officeart/2005/8/layout/lProcess3"/>
-    <dgm:cxn modelId="{F303E8EC-3185-1E4E-8A71-D38F7CDC583D}" type="presOf" srcId="{78510E95-0D19-2845-841B-1D41C65DDA4C}" destId="{6C0952D4-0640-E34A-994F-CCE293E4E2FD}" srcOrd="0" destOrd="0" presId="urn:microsoft.com/office/officeart/2005/8/layout/lProcess3"/>
-    <dgm:cxn modelId="{0FBB64ED-5D57-9643-A7CE-826201B8838C}" type="presOf" srcId="{7558CEA6-A3D0-EA49-8CE7-07C4A42DCBFA}" destId="{3CCB4C62-A04F-F54C-AA5F-901D012FD0CF}" srcOrd="0" destOrd="0" presId="urn:microsoft.com/office/officeart/2005/8/layout/lProcess3"/>
-    <dgm:cxn modelId="{B31BD5FB-B105-B147-98F3-E857E1742E61}" type="presOf" srcId="{47DBC6A6-81B8-F646-A217-89DCB15E4969}" destId="{834A784C-A7A9-5048-8412-CD13436C10B6}" srcOrd="0" destOrd="0" presId="urn:microsoft.com/office/officeart/2005/8/layout/lProcess3"/>
-    <dgm:cxn modelId="{DC9F34E8-4BF4-CF4F-9E76-373B54CA4659}" type="presParOf" srcId="{50608F40-E842-3A42-B7EC-FA9B296A7525}" destId="{7E3BBDFE-F2F9-AA44-8D8C-1DD2A1C4869B}" srcOrd="0" destOrd="0" presId="urn:microsoft.com/office/officeart/2005/8/layout/lProcess3"/>
-    <dgm:cxn modelId="{08B36283-B6F4-924D-AB41-1123683CA5DF}" type="presParOf" srcId="{7E3BBDFE-F2F9-AA44-8D8C-1DD2A1C4869B}" destId="{D9C2B440-8433-ED4B-931B-9D88526F1E68}" srcOrd="0" destOrd="0" presId="urn:microsoft.com/office/officeart/2005/8/layout/lProcess3"/>
-    <dgm:cxn modelId="{C56424A5-D13C-0946-924D-735167897DC5}" type="presParOf" srcId="{7E3BBDFE-F2F9-AA44-8D8C-1DD2A1C4869B}" destId="{36827A13-D7ED-534F-A241-0953280497B9}" srcOrd="1" destOrd="0" presId="urn:microsoft.com/office/officeart/2005/8/layout/lProcess3"/>
-    <dgm:cxn modelId="{37A7DF76-63C6-CD45-B24D-5F2CB70C78B8}" type="presParOf" srcId="{7E3BBDFE-F2F9-AA44-8D8C-1DD2A1C4869B}" destId="{E30B889D-093B-6C48-BB45-D85DCEB27884}" srcOrd="2" destOrd="0" presId="urn:microsoft.com/office/officeart/2005/8/layout/lProcess3"/>
-    <dgm:cxn modelId="{68637A66-723F-A349-AC2C-B85BF7914E8A}" type="presParOf" srcId="{7E3BBDFE-F2F9-AA44-8D8C-1DD2A1C4869B}" destId="{AE4B2D6B-0EDD-B74D-8772-624C1006285C}" srcOrd="3" destOrd="0" presId="urn:microsoft.com/office/officeart/2005/8/layout/lProcess3"/>
-    <dgm:cxn modelId="{94F9C43B-9703-9147-AD43-5428090CFC36}" type="presParOf" srcId="{7E3BBDFE-F2F9-AA44-8D8C-1DD2A1C4869B}" destId="{CEA4562F-3DF9-D446-9F81-337BB7935385}" srcOrd="4" destOrd="0" presId="urn:microsoft.com/office/officeart/2005/8/layout/lProcess3"/>
-    <dgm:cxn modelId="{46F456A3-C117-B447-B854-682239BE0F9D}" type="presParOf" srcId="{7E3BBDFE-F2F9-AA44-8D8C-1DD2A1C4869B}" destId="{2F907ADA-C7D6-924F-8260-D991BF49FA01}" srcOrd="5" destOrd="0" presId="urn:microsoft.com/office/officeart/2005/8/layout/lProcess3"/>
-    <dgm:cxn modelId="{63339084-113B-7344-A206-769DA7F34FFB}" type="presParOf" srcId="{7E3BBDFE-F2F9-AA44-8D8C-1DD2A1C4869B}" destId="{926A95DD-46EE-0948-8924-9A2D4AC6EB8D}" srcOrd="6" destOrd="0" presId="urn:microsoft.com/office/officeart/2005/8/layout/lProcess3"/>
-    <dgm:cxn modelId="{43265623-37EE-D742-B8D4-D69CC0D4672C}" type="presParOf" srcId="{7E3BBDFE-F2F9-AA44-8D8C-1DD2A1C4869B}" destId="{0099202D-6EDC-7B41-9FD3-660E09BCBD89}" srcOrd="7" destOrd="0" presId="urn:microsoft.com/office/officeart/2005/8/layout/lProcess3"/>
-    <dgm:cxn modelId="{B87C39FA-742A-2046-BF32-9CA621891824}" type="presParOf" srcId="{7E3BBDFE-F2F9-AA44-8D8C-1DD2A1C4869B}" destId="{632772CD-9C7D-E24D-93B1-C000A3BB7D8D}" srcOrd="8" destOrd="0" presId="urn:microsoft.com/office/officeart/2005/8/layout/lProcess3"/>
-    <dgm:cxn modelId="{213846BF-183F-724E-8E25-E1663235A1F4}" type="presParOf" srcId="{50608F40-E842-3A42-B7EC-FA9B296A7525}" destId="{58F13D01-EFAB-1940-9425-10371128F19E}" srcOrd="1" destOrd="0" presId="urn:microsoft.com/office/officeart/2005/8/layout/lProcess3"/>
-    <dgm:cxn modelId="{8DFCE072-2DEC-B745-9243-7496CDD8639C}" type="presParOf" srcId="{50608F40-E842-3A42-B7EC-FA9B296A7525}" destId="{43C984C6-D407-5342-89FB-AA4C0DA11CF9}" srcOrd="2" destOrd="0" presId="urn:microsoft.com/office/officeart/2005/8/layout/lProcess3"/>
-    <dgm:cxn modelId="{3B252BBE-2E1C-D34A-91B6-E14DB29A0BC4}" type="presParOf" srcId="{43C984C6-D407-5342-89FB-AA4C0DA11CF9}" destId="{BCE69AC5-EDF5-6048-82A3-2F4E580882C0}" srcOrd="0" destOrd="0" presId="urn:microsoft.com/office/officeart/2005/8/layout/lProcess3"/>
-    <dgm:cxn modelId="{BE434977-B063-B142-8F25-A116F4A5F3B1}" type="presParOf" srcId="{43C984C6-D407-5342-89FB-AA4C0DA11CF9}" destId="{81D75693-FF9C-3F4C-A52F-455166CB794C}" srcOrd="1" destOrd="0" presId="urn:microsoft.com/office/officeart/2005/8/layout/lProcess3"/>
-    <dgm:cxn modelId="{972DC723-51CF-AD46-BC7F-A92667AC0B60}" type="presParOf" srcId="{43C984C6-D407-5342-89FB-AA4C0DA11CF9}" destId="{D63E9201-7A03-5F45-865F-676A48BB160C}" srcOrd="2" destOrd="0" presId="urn:microsoft.com/office/officeart/2005/8/layout/lProcess3"/>
-    <dgm:cxn modelId="{B92552B2-0D67-6648-A4FC-F3144533D74D}" type="presParOf" srcId="{43C984C6-D407-5342-89FB-AA4C0DA11CF9}" destId="{C94C90BC-3641-D340-9E5E-8291C329B73B}" srcOrd="3" destOrd="0" presId="urn:microsoft.com/office/officeart/2005/8/layout/lProcess3"/>
-    <dgm:cxn modelId="{9A41596F-7286-224B-942C-6E26C55A80C2}" type="presParOf" srcId="{43C984C6-D407-5342-89FB-AA4C0DA11CF9}" destId="{6C0952D4-0640-E34A-994F-CCE293E4E2FD}" srcOrd="4" destOrd="0" presId="urn:microsoft.com/office/officeart/2005/8/layout/lProcess3"/>
-    <dgm:cxn modelId="{7995E924-A45D-4A4E-B9A2-1DBF3DA95FE9}" type="presParOf" srcId="{43C984C6-D407-5342-89FB-AA4C0DA11CF9}" destId="{E0608C87-2B1A-AC4B-85C5-2202070109DB}" srcOrd="5" destOrd="0" presId="urn:microsoft.com/office/officeart/2005/8/layout/lProcess3"/>
-    <dgm:cxn modelId="{5B0BEB2F-FF74-A54B-8D7D-6EF12BF82C3D}" type="presParOf" srcId="{43C984C6-D407-5342-89FB-AA4C0DA11CF9}" destId="{4C642C97-12AB-AB4D-BC7B-4A63DD7015B4}" srcOrd="6" destOrd="0" presId="urn:microsoft.com/office/officeart/2005/8/layout/lProcess3"/>
-    <dgm:cxn modelId="{8893D70C-57E4-A240-BD1E-A50633DBAECA}" type="presParOf" srcId="{43C984C6-D407-5342-89FB-AA4C0DA11CF9}" destId="{D53A70C0-D605-9A4B-8089-F9509A9A4F55}" srcOrd="7" destOrd="0" presId="urn:microsoft.com/office/officeart/2005/8/layout/lProcess3"/>
-    <dgm:cxn modelId="{9F368D6A-033F-E544-B357-B9AC1ABE7218}" type="presParOf" srcId="{43C984C6-D407-5342-89FB-AA4C0DA11CF9}" destId="{3C6EDCAC-C7A9-394C-B1C8-2C99100064E5}" srcOrd="8" destOrd="0" presId="urn:microsoft.com/office/officeart/2005/8/layout/lProcess3"/>
-    <dgm:cxn modelId="{0345CA58-7B5B-9445-AA4C-331F7670F014}" type="presParOf" srcId="{43C984C6-D407-5342-89FB-AA4C0DA11CF9}" destId="{490DCFEE-506A-204F-A861-A89E13D90C05}" srcOrd="9" destOrd="0" presId="urn:microsoft.com/office/officeart/2005/8/layout/lProcess3"/>
-    <dgm:cxn modelId="{34363D8E-A3BF-4540-9B46-4F7DAD599707}" type="presParOf" srcId="{43C984C6-D407-5342-89FB-AA4C0DA11CF9}" destId="{F3E41A5C-91CA-AE47-8D8F-2D8870E80197}" srcOrd="10" destOrd="0" presId="urn:microsoft.com/office/officeart/2005/8/layout/lProcess3"/>
-    <dgm:cxn modelId="{E2A074D5-39DE-5845-89D4-638914A2F788}" type="presParOf" srcId="{43C984C6-D407-5342-89FB-AA4C0DA11CF9}" destId="{1F065B89-C6D7-2E40-B971-A20F3E30866F}" srcOrd="11" destOrd="0" presId="urn:microsoft.com/office/officeart/2005/8/layout/lProcess3"/>
-    <dgm:cxn modelId="{2F07B906-CD9E-8B4D-A21F-F19F49649968}" type="presParOf" srcId="{43C984C6-D407-5342-89FB-AA4C0DA11CF9}" destId="{D6F3DC2D-C8E8-2443-9968-4CBAC8788EB7}" srcOrd="12" destOrd="0" presId="urn:microsoft.com/office/officeart/2005/8/layout/lProcess3"/>
-    <dgm:cxn modelId="{73A5A005-F603-6648-A2A2-63B587864B9B}" type="presParOf" srcId="{50608F40-E842-3A42-B7EC-FA9B296A7525}" destId="{A9AEE3D0-F421-8045-9FD4-B90A182E4311}" srcOrd="3" destOrd="0" presId="urn:microsoft.com/office/officeart/2005/8/layout/lProcess3"/>
-    <dgm:cxn modelId="{BB97E8AC-4E67-3A46-8159-A387B87AAC8F}" type="presParOf" srcId="{50608F40-E842-3A42-B7EC-FA9B296A7525}" destId="{A09EEDE6-41DD-4A44-952A-8F6369D80256}" srcOrd="4" destOrd="0" presId="urn:microsoft.com/office/officeart/2005/8/layout/lProcess3"/>
-    <dgm:cxn modelId="{621480A4-2AFE-B947-8EBD-BA3938607649}" type="presParOf" srcId="{A09EEDE6-41DD-4A44-952A-8F6369D80256}" destId="{7A2119B2-BAB2-154A-8E45-93A406A4356F}" srcOrd="0" destOrd="0" presId="urn:microsoft.com/office/officeart/2005/8/layout/lProcess3"/>
-    <dgm:cxn modelId="{0B963974-25AC-FE43-AF88-7499D96B4D58}" type="presParOf" srcId="{A09EEDE6-41DD-4A44-952A-8F6369D80256}" destId="{644000F9-4B2C-774D-8347-334EBFE6AE14}" srcOrd="1" destOrd="0" presId="urn:microsoft.com/office/officeart/2005/8/layout/lProcess3"/>
-    <dgm:cxn modelId="{E118177E-40A8-3345-A3CC-4B747DA04B01}" type="presParOf" srcId="{A09EEDE6-41DD-4A44-952A-8F6369D80256}" destId="{834A784C-A7A9-5048-8412-CD13436C10B6}" srcOrd="2" destOrd="0" presId="urn:microsoft.com/office/officeart/2005/8/layout/lProcess3"/>
-    <dgm:cxn modelId="{0E5340C1-F7E0-F143-9935-2FF3ACC89AFD}" type="presParOf" srcId="{A09EEDE6-41DD-4A44-952A-8F6369D80256}" destId="{CDBC91A3-36B8-A140-BD1E-07F77E9F37CB}" srcOrd="3" destOrd="0" presId="urn:microsoft.com/office/officeart/2005/8/layout/lProcess3"/>
-    <dgm:cxn modelId="{A4816FF9-F234-D04D-987D-C2A0806AC4F2}" type="presParOf" srcId="{A09EEDE6-41DD-4A44-952A-8F6369D80256}" destId="{3CCB4C62-A04F-F54C-AA5F-901D012FD0CF}" srcOrd="4" destOrd="0" presId="urn:microsoft.com/office/officeart/2005/8/layout/lProcess3"/>
-    <dgm:cxn modelId="{E82ED9B3-BCD9-E844-9553-D02A544F326D}" type="presParOf" srcId="{A09EEDE6-41DD-4A44-952A-8F6369D80256}" destId="{55B38173-F52D-C34A-B5B9-C27893B16DC1}" srcOrd="5" destOrd="0" presId="urn:microsoft.com/office/officeart/2005/8/layout/lProcess3"/>
-    <dgm:cxn modelId="{40A6F2DB-4B44-E84B-8DAD-FCDB531FC40D}" type="presParOf" srcId="{A09EEDE6-41DD-4A44-952A-8F6369D80256}" destId="{145240E1-4F54-1B46-94F3-5BE46DC2B791}" srcOrd="6" destOrd="0" presId="urn:microsoft.com/office/officeart/2005/8/layout/lProcess3"/>
+    <dgm:cxn modelId="{8932E5E1-1C3E-490F-8193-63838A56DFA5}" type="presOf" srcId="{3825AE95-A929-B547-89AF-702D0003A86F}" destId="{D63E9201-7A03-5F45-865F-676A48BB160C}" srcOrd="0" destOrd="0" presId="urn:microsoft.com/office/officeart/2005/8/layout/lProcess3"/>
+    <dgm:cxn modelId="{1DCA2FA6-8459-41A3-B341-5576F9F981C0}" type="presParOf" srcId="{50608F40-E842-3A42-B7EC-FA9B296A7525}" destId="{7E3BBDFE-F2F9-AA44-8D8C-1DD2A1C4869B}" srcOrd="0" destOrd="0" presId="urn:microsoft.com/office/officeart/2005/8/layout/lProcess3"/>
+    <dgm:cxn modelId="{3320BDDA-9529-4B3C-9719-69F853BE7FAB}" type="presParOf" srcId="{7E3BBDFE-F2F9-AA44-8D8C-1DD2A1C4869B}" destId="{D9C2B440-8433-ED4B-931B-9D88526F1E68}" srcOrd="0" destOrd="0" presId="urn:microsoft.com/office/officeart/2005/8/layout/lProcess3"/>
+    <dgm:cxn modelId="{DD4C2B6A-885E-46BA-A75C-229ABC99882C}" type="presParOf" srcId="{7E3BBDFE-F2F9-AA44-8D8C-1DD2A1C4869B}" destId="{36827A13-D7ED-534F-A241-0953280497B9}" srcOrd="1" destOrd="0" presId="urn:microsoft.com/office/officeart/2005/8/layout/lProcess3"/>
+    <dgm:cxn modelId="{B549DEDA-D0AA-4DA0-9501-9334D5A53B71}" type="presParOf" srcId="{7E3BBDFE-F2F9-AA44-8D8C-1DD2A1C4869B}" destId="{E30B889D-093B-6C48-BB45-D85DCEB27884}" srcOrd="2" destOrd="0" presId="urn:microsoft.com/office/officeart/2005/8/layout/lProcess3"/>
+    <dgm:cxn modelId="{09E70C9C-2DEA-4542-BA3A-58DF440B83FC}" type="presParOf" srcId="{7E3BBDFE-F2F9-AA44-8D8C-1DD2A1C4869B}" destId="{AE4B2D6B-0EDD-B74D-8772-624C1006285C}" srcOrd="3" destOrd="0" presId="urn:microsoft.com/office/officeart/2005/8/layout/lProcess3"/>
+    <dgm:cxn modelId="{8CB86FEE-E2E4-4EE7-8405-6B704FBCE07A}" type="presParOf" srcId="{7E3BBDFE-F2F9-AA44-8D8C-1DD2A1C4869B}" destId="{CEA4562F-3DF9-D446-9F81-337BB7935385}" srcOrd="4" destOrd="0" presId="urn:microsoft.com/office/officeart/2005/8/layout/lProcess3"/>
+    <dgm:cxn modelId="{45DF2A93-553E-4750-BFB5-BE52E1C8FD6A}" type="presParOf" srcId="{7E3BBDFE-F2F9-AA44-8D8C-1DD2A1C4869B}" destId="{2F907ADA-C7D6-924F-8260-D991BF49FA01}" srcOrd="5" destOrd="0" presId="urn:microsoft.com/office/officeart/2005/8/layout/lProcess3"/>
+    <dgm:cxn modelId="{59BE8C08-F0C8-4C55-9411-C4E9DB61FD26}" type="presParOf" srcId="{7E3BBDFE-F2F9-AA44-8D8C-1DD2A1C4869B}" destId="{926A95DD-46EE-0948-8924-9A2D4AC6EB8D}" srcOrd="6" destOrd="0" presId="urn:microsoft.com/office/officeart/2005/8/layout/lProcess3"/>
+    <dgm:cxn modelId="{45AEC216-4E49-4F7B-BCF2-DD150B8C5A7B}" type="presParOf" srcId="{7E3BBDFE-F2F9-AA44-8D8C-1DD2A1C4869B}" destId="{0099202D-6EDC-7B41-9FD3-660E09BCBD89}" srcOrd="7" destOrd="0" presId="urn:microsoft.com/office/officeart/2005/8/layout/lProcess3"/>
+    <dgm:cxn modelId="{26D52C28-5A01-4295-A643-8850D4552191}" type="presParOf" srcId="{7E3BBDFE-F2F9-AA44-8D8C-1DD2A1C4869B}" destId="{A89241F6-1BA1-4EBE-AFF1-A8801246B451}" srcOrd="8" destOrd="0" presId="urn:microsoft.com/office/officeart/2005/8/layout/lProcess3"/>
+    <dgm:cxn modelId="{EFB70803-F19D-4BED-8C1C-6E33FBABB744}" type="presParOf" srcId="{7E3BBDFE-F2F9-AA44-8D8C-1DD2A1C4869B}" destId="{80C97DEF-B4FD-461A-A9D9-E036B7F17287}" srcOrd="9" destOrd="0" presId="urn:microsoft.com/office/officeart/2005/8/layout/lProcess3"/>
+    <dgm:cxn modelId="{D09F58CB-051D-4E4E-A9D8-9DA9B399AFBE}" type="presParOf" srcId="{7E3BBDFE-F2F9-AA44-8D8C-1DD2A1C4869B}" destId="{632772CD-9C7D-E24D-93B1-C000A3BB7D8D}" srcOrd="10" destOrd="0" presId="urn:microsoft.com/office/officeart/2005/8/layout/lProcess3"/>
+    <dgm:cxn modelId="{6986474E-2E7B-4107-9999-473BCC15DB23}" type="presParOf" srcId="{50608F40-E842-3A42-B7EC-FA9B296A7525}" destId="{58F13D01-EFAB-1940-9425-10371128F19E}" srcOrd="1" destOrd="0" presId="urn:microsoft.com/office/officeart/2005/8/layout/lProcess3"/>
+    <dgm:cxn modelId="{BBF3E95E-06A0-44BB-B999-790874EC6757}" type="presParOf" srcId="{50608F40-E842-3A42-B7EC-FA9B296A7525}" destId="{43C984C6-D407-5342-89FB-AA4C0DA11CF9}" srcOrd="2" destOrd="0" presId="urn:microsoft.com/office/officeart/2005/8/layout/lProcess3"/>
+    <dgm:cxn modelId="{73E27466-C8DA-4616-968D-7A4E66A8846D}" type="presParOf" srcId="{43C984C6-D407-5342-89FB-AA4C0DA11CF9}" destId="{BCE69AC5-EDF5-6048-82A3-2F4E580882C0}" srcOrd="0" destOrd="0" presId="urn:microsoft.com/office/officeart/2005/8/layout/lProcess3"/>
+    <dgm:cxn modelId="{301CB798-AD6D-4228-8580-13E9EF5C5512}" type="presParOf" srcId="{43C984C6-D407-5342-89FB-AA4C0DA11CF9}" destId="{81D75693-FF9C-3F4C-A52F-455166CB794C}" srcOrd="1" destOrd="0" presId="urn:microsoft.com/office/officeart/2005/8/layout/lProcess3"/>
+    <dgm:cxn modelId="{819F37D5-9F37-4407-B204-E6EC6B4FE733}" type="presParOf" srcId="{43C984C6-D407-5342-89FB-AA4C0DA11CF9}" destId="{D63E9201-7A03-5F45-865F-676A48BB160C}" srcOrd="2" destOrd="0" presId="urn:microsoft.com/office/officeart/2005/8/layout/lProcess3"/>
+    <dgm:cxn modelId="{71750C52-2C95-40CC-A2A5-87B4FDF122E5}" type="presParOf" srcId="{43C984C6-D407-5342-89FB-AA4C0DA11CF9}" destId="{487F6291-056C-4E89-8985-257032843F0E}" srcOrd="3" destOrd="0" presId="urn:microsoft.com/office/officeart/2005/8/layout/lProcess3"/>
+    <dgm:cxn modelId="{38A9B6DD-80DA-4BCA-9921-9037C9D941EB}" type="presParOf" srcId="{43C984C6-D407-5342-89FB-AA4C0DA11CF9}" destId="{4C642C97-12AB-AB4D-BC7B-4A63DD7015B4}" srcOrd="4" destOrd="0" presId="urn:microsoft.com/office/officeart/2005/8/layout/lProcess3"/>
+    <dgm:cxn modelId="{A572E663-F6E4-440E-B978-EA8A4D12301D}" type="presParOf" srcId="{43C984C6-D407-5342-89FB-AA4C0DA11CF9}" destId="{F08889FC-75B7-4C57-A4AE-3A8CD819DAAE}" srcOrd="5" destOrd="0" presId="urn:microsoft.com/office/officeart/2005/8/layout/lProcess3"/>
+    <dgm:cxn modelId="{B31E3A01-7A66-40CA-845E-AB659F2B26DA}" type="presParOf" srcId="{43C984C6-D407-5342-89FB-AA4C0DA11CF9}" destId="{3C6EDCAC-C7A9-394C-B1C8-2C99100064E5}" srcOrd="6" destOrd="0" presId="urn:microsoft.com/office/officeart/2005/8/layout/lProcess3"/>
+    <dgm:cxn modelId="{AF3B2917-F52B-43CD-8F35-6581C7545652}" type="presParOf" srcId="{43C984C6-D407-5342-89FB-AA4C0DA11CF9}" destId="{57CCBC07-10CC-4DC2-AA75-DAC80CD57FE8}" srcOrd="7" destOrd="0" presId="urn:microsoft.com/office/officeart/2005/8/layout/lProcess3"/>
+    <dgm:cxn modelId="{E62340D1-E3F0-4B86-AFAB-5ECD4CE22844}" type="presParOf" srcId="{43C984C6-D407-5342-89FB-AA4C0DA11CF9}" destId="{4ECAD6D7-A0CB-4EAC-B7CA-BB0CE1B92C57}" srcOrd="8" destOrd="0" presId="urn:microsoft.com/office/officeart/2005/8/layout/lProcess3"/>
+    <dgm:cxn modelId="{A5B5E8CD-3980-4139-A90D-EF7FD49D1089}" type="presParOf" srcId="{43C984C6-D407-5342-89FB-AA4C0DA11CF9}" destId="{AD806653-A87F-49FE-86E8-03E0BAA12351}" srcOrd="9" destOrd="0" presId="urn:microsoft.com/office/officeart/2005/8/layout/lProcess3"/>
+    <dgm:cxn modelId="{D096781D-60EB-4836-B194-6F388C557134}" type="presParOf" srcId="{43C984C6-D407-5342-89FB-AA4C0DA11CF9}" destId="{D6F3DC2D-C8E8-2443-9968-4CBAC8788EB7}" srcOrd="10" destOrd="0" presId="urn:microsoft.com/office/officeart/2005/8/layout/lProcess3"/>
+    <dgm:cxn modelId="{0DC2DA43-E77D-4DD4-A93B-8A79405492A5}" type="presParOf" srcId="{50608F40-E842-3A42-B7EC-FA9B296A7525}" destId="{A9AEE3D0-F421-8045-9FD4-B90A182E4311}" srcOrd="3" destOrd="0" presId="urn:microsoft.com/office/officeart/2005/8/layout/lProcess3"/>
+    <dgm:cxn modelId="{990FA958-AA60-4EE3-8D20-EFE29DF0F065}" type="presParOf" srcId="{50608F40-E842-3A42-B7EC-FA9B296A7525}" destId="{A09EEDE6-41DD-4A44-952A-8F6369D80256}" srcOrd="4" destOrd="0" presId="urn:microsoft.com/office/officeart/2005/8/layout/lProcess3"/>
+    <dgm:cxn modelId="{6AB79FA8-7816-437C-A734-6EB42F2D2C04}" type="presParOf" srcId="{A09EEDE6-41DD-4A44-952A-8F6369D80256}" destId="{7A2119B2-BAB2-154A-8E45-93A406A4356F}" srcOrd="0" destOrd="0" presId="urn:microsoft.com/office/officeart/2005/8/layout/lProcess3"/>
+    <dgm:cxn modelId="{E952BBDE-FF9A-4C32-86BB-ED536F7A7E63}" type="presParOf" srcId="{A09EEDE6-41DD-4A44-952A-8F6369D80256}" destId="{644000F9-4B2C-774D-8347-334EBFE6AE14}" srcOrd="1" destOrd="0" presId="urn:microsoft.com/office/officeart/2005/8/layout/lProcess3"/>
+    <dgm:cxn modelId="{E47639BF-F5BD-44EA-BA86-16811D783B86}" type="presParOf" srcId="{A09EEDE6-41DD-4A44-952A-8F6369D80256}" destId="{834A784C-A7A9-5048-8412-CD13436C10B6}" srcOrd="2" destOrd="0" presId="urn:microsoft.com/office/officeart/2005/8/layout/lProcess3"/>
+    <dgm:cxn modelId="{6E4B462A-2C5F-42DD-948F-FB00F6FAB220}" type="presParOf" srcId="{A09EEDE6-41DD-4A44-952A-8F6369D80256}" destId="{CDBC91A3-36B8-A140-BD1E-07F77E9F37CB}" srcOrd="3" destOrd="0" presId="urn:microsoft.com/office/officeart/2005/8/layout/lProcess3"/>
+    <dgm:cxn modelId="{DCB5E882-2894-4F12-B7D4-798DC3DE603B}" type="presParOf" srcId="{A09EEDE6-41DD-4A44-952A-8F6369D80256}" destId="{3CCB4C62-A04F-F54C-AA5F-901D012FD0CF}" srcOrd="4" destOrd="0" presId="urn:microsoft.com/office/officeart/2005/8/layout/lProcess3"/>
+    <dgm:cxn modelId="{1C6038FA-5099-41EC-A1FC-F525CF1EF6A8}" type="presParOf" srcId="{A09EEDE6-41DD-4A44-952A-8F6369D80256}" destId="{55B38173-F52D-C34A-B5B9-C27893B16DC1}" srcOrd="5" destOrd="0" presId="urn:microsoft.com/office/officeart/2005/8/layout/lProcess3"/>
+    <dgm:cxn modelId="{4CE69AF3-BD05-43F3-9964-BC13FC1F91B7}" type="presParOf" srcId="{A09EEDE6-41DD-4A44-952A-8F6369D80256}" destId="{145240E1-4F54-1B46-94F3-5BE46DC2B791}" srcOrd="6" destOrd="0" presId="urn:microsoft.com/office/officeart/2005/8/layout/lProcess3"/>
   </dgm:cxnLst>
   <dgm:bg/>
   <dgm:whole/>
@@ -8600,8 +8886,10 @@
         <a:lstStyle/>
         <a:p>
           <a:r>
-            <a:rPr lang="es-PE" b="1" dirty="0"/>
-            <a:t>Hallazgos observados</a:t>
+            <a:rPr lang="es-PE" b="1" dirty="0">
+              <a:latin typeface="Tw Cen MT" panose="020B0602020104020603"/>
+            </a:rPr>
+            <a:t>Insights</a:t>
           </a:r>
           <a:endParaRPr lang="es-PE" dirty="0"/>
         </a:p>
@@ -8895,13 +9183,23 @@
         <a:bodyPr/>
         <a:lstStyle/>
         <a:p>
-          <a:pPr>
+          <a:pPr rtl="0">
             <a:buFont typeface="Wingdings" pitchFamily="2" charset="2"/>
             <a:buChar char="ü"/>
           </a:pPr>
           <a:r>
             <a:rPr lang="es-ES_tradnl" sz="1600" dirty="0"/>
-            <a:t>La regresión lineal permitió identificar correctamente la tendencia general. </a:t>
+            <a:t>La regresión lineal </a:t>
+          </a:r>
+          <a:r>
+            <a:rPr lang="es-ES_tradnl" sz="1600" dirty="0">
+              <a:latin typeface="Tw Cen MT" panose="020B0602020104020603"/>
+            </a:rPr>
+            <a:t>permite identificar</a:t>
+          </a:r>
+          <a:r>
+            <a:rPr lang="es-ES_tradnl" sz="1600" dirty="0"/>
+            <a:t> la tendencia general. </a:t>
           </a:r>
           <a:endParaRPr lang="es-PE" sz="1600" dirty="0"/>
         </a:p>
@@ -8942,7 +9240,7 @@
           </a:pPr>
           <a:r>
             <a:rPr lang="es-ES_tradnl" sz="1600" dirty="0"/>
-            <a:t>La solución es interpretable y fácil de explicar a negocio.</a:t>
+            <a:t>La solución es interpretable y fácil de explicar al negocio.</a:t>
           </a:r>
           <a:endParaRPr lang="es-PE" sz="1600" dirty="0"/>
         </a:p>
@@ -9221,13 +9519,33 @@
         <a:bodyPr/>
         <a:lstStyle/>
         <a:p>
-          <a:pPr>
+          <a:pPr rtl="0">
             <a:buFont typeface="Wingdings" pitchFamily="2" charset="2"/>
             <a:buChar char="ü"/>
           </a:pPr>
           <a:r>
             <a:rPr lang="es-ES_tradnl" sz="1600" dirty="0"/>
-            <a:t>El análisis predictivo puede ayudar a reducir riesgos relacionados con la no renovación de proyectos. </a:t>
+            <a:t>El análisis predictivo puede ayudar a reducir riesgos relacionados con la no renovación </a:t>
+          </a:r>
+          <a:r>
+            <a:rPr lang="es-ES_tradnl" sz="1600" dirty="0">
+              <a:latin typeface="Tw Cen MT" panose="020B0602020104020603"/>
+            </a:rPr>
+            <a:t>o renuncia </a:t>
+          </a:r>
+          <a:r>
+            <a:rPr lang="es-ES_tradnl" sz="1600" dirty="0"/>
+            <a:t>de </a:t>
+          </a:r>
+          <a:r>
+            <a:rPr lang="es-ES_tradnl" sz="1600" dirty="0">
+              <a:latin typeface="Tw Cen MT" panose="020B0602020104020603"/>
+            </a:rPr>
+            <a:t>colaboradores</a:t>
+          </a:r>
+          <a:r>
+            <a:rPr lang="es-ES_tradnl" sz="1600" dirty="0"/>
+            <a:t>. </a:t>
           </a:r>
           <a:endParaRPr lang="es-PE" sz="1600" dirty="0"/>
         </a:p>
@@ -9309,15 +9627,7 @@
           </a:pPr>
           <a:r>
             <a:rPr lang="es-ES_tradnl" sz="1600" dirty="0"/>
-            <a:t>El proyecto demuestra cómo Machine </a:t>
-          </a:r>
-          <a:r>
-            <a:rPr lang="es-ES_tradnl" sz="1600" dirty="0" err="1"/>
-            <a:t>Learning</a:t>
-          </a:r>
-          <a:r>
-            <a:rPr lang="es-ES_tradnl" sz="1600" dirty="0"/>
-            <a:t> puede aportar valor en decisiones estratégicas dentro de una consultora.</a:t>
+            <a:t>El proyecto demuestra cómo Machine Learning puede aportar valor en decisiones estratégicas dentro de una consultora.</a:t>
           </a:r>
           <a:endParaRPr lang="es-PE" sz="1600" dirty="0"/>
         </a:p>
@@ -9498,12 +9808,12 @@
         </a:fontRef>
       </dsp:style>
       <dsp:txBody>
-        <a:bodyPr spcFirstLastPara="0" vert="horz" wrap="square" lIns="107950" tIns="0" rIns="110400" bIns="0" numCol="1" spcCol="1270" anchor="ctr" anchorCtr="0">
+        <a:bodyPr spcFirstLastPara="0" vert="horz" wrap="square" lIns="101600" tIns="0" rIns="102121" bIns="0" numCol="1" spcCol="1270" anchor="ctr" anchorCtr="0">
           <a:noAutofit/>
         </a:bodyPr>
         <a:lstStyle/>
         <a:p>
-          <a:pPr marL="0" lvl="0" indent="0" algn="ctr" defTabSz="755650">
+          <a:pPr marL="0" lvl="0" indent="0" algn="ctr" defTabSz="711200">
             <a:lnSpc>
               <a:spcPct val="90000"/>
             </a:lnSpc>
@@ -9519,7 +9829,7 @@
             <a:buNone/>
           </a:pPr>
           <a:r>
-            <a:rPr kumimoji="0" lang="es-PE" altLang="es-PE" sz="1700" b="0" i="0" u="none" strike="noStrike" kern="1200" cap="none" normalizeH="0" baseline="0" dirty="0">
+            <a:rPr kumimoji="0" lang="es-PE" altLang="es-PE" sz="1600" b="0" i="0" u="none" strike="noStrike" kern="1200" cap="none" normalizeH="0" baseline="0" dirty="0">
               <a:ln>
                 <a:noFill/>
               </a:ln>
@@ -9531,7 +9841,7 @@
             </a:rPr>
             <a:t>La consultora presenta dificultades para anticipar la rotación de personal. </a:t>
           </a:r>
-          <a:endParaRPr lang="es-MX" sz="1700" kern="1200" dirty="0">
+          <a:endParaRPr lang="es-MX" sz="1600" kern="1200" dirty="0">
             <a:solidFill>
               <a:schemeClr val="bg1"/>
             </a:solidFill>
@@ -9592,12 +9902,12 @@
         </a:fontRef>
       </dsp:style>
       <dsp:txBody>
-        <a:bodyPr spcFirstLastPara="0" vert="horz" wrap="square" lIns="107950" tIns="0" rIns="110400" bIns="0" numCol="1" spcCol="1270" anchor="ctr" anchorCtr="0">
+        <a:bodyPr spcFirstLastPara="0" vert="horz" wrap="square" lIns="101600" tIns="0" rIns="102121" bIns="0" numCol="1" spcCol="1270" anchor="ctr" anchorCtr="0">
           <a:noAutofit/>
         </a:bodyPr>
         <a:lstStyle/>
         <a:p>
-          <a:pPr marL="0" lvl="0" indent="0" algn="ctr" defTabSz="755650">
+          <a:pPr marL="0" lvl="0" indent="0" algn="ctr" defTabSz="711200">
             <a:lnSpc>
               <a:spcPct val="90000"/>
             </a:lnSpc>
@@ -9611,7 +9921,7 @@
             <a:buNone/>
           </a:pPr>
           <a:r>
-            <a:rPr kumimoji="0" lang="es-PE" altLang="es-PE" sz="1700" b="0" i="0" u="none" strike="noStrike" kern="1200" cap="none" normalizeH="0" baseline="0" dirty="0">
+            <a:rPr kumimoji="0" lang="es-PE" altLang="es-PE" sz="1600" b="0" i="0" u="none" strike="noStrike" kern="1200" cap="none" normalizeH="0" baseline="0" dirty="0">
               <a:ln>
                 <a:noFill/>
               </a:ln>
@@ -9621,11 +9931,11 @@
               <a:effectLst/>
               <a:latin typeface="Arial" panose="020B0604020202020204" pitchFamily="34" charset="0"/>
             </a:rPr>
-            <a:t>La pérdida de proyectos genera: </a:t>
+            <a:t>La pérdida de colaboradores genera: </a:t>
           </a:r>
         </a:p>
         <a:p>
-          <a:pPr marL="0" lvl="0" indent="0" algn="l" defTabSz="755650">
+          <a:pPr marL="0" lvl="0" indent="0" algn="l" defTabSz="711200">
             <a:lnSpc>
               <a:spcPct val="90000"/>
             </a:lnSpc>
@@ -9639,7 +9949,7 @@
             <a:buNone/>
           </a:pPr>
           <a:r>
-            <a:rPr kumimoji="0" lang="es-PE" altLang="es-PE" sz="1700" b="0" i="0" u="none" strike="noStrike" kern="1200" cap="none" normalizeH="0" baseline="0" dirty="0">
+            <a:rPr kumimoji="0" lang="es-PE" altLang="es-PE" sz="1600" b="0" i="0" u="none" strike="noStrike" kern="1200" cap="none" normalizeH="0" baseline="0" dirty="0">
               <a:ln>
                 <a:noFill/>
               </a:ln>
@@ -9653,7 +9963,7 @@
           </a:r>
         </a:p>
         <a:p>
-          <a:pPr marL="0" lvl="0" indent="0" algn="l" defTabSz="755650">
+          <a:pPr marL="0" lvl="0" indent="0" algn="l" defTabSz="711200">
             <a:lnSpc>
               <a:spcPct val="90000"/>
             </a:lnSpc>
@@ -9667,7 +9977,7 @@
             <a:buNone/>
           </a:pPr>
           <a:r>
-            <a:rPr kumimoji="0" lang="es-PE" altLang="es-PE" sz="1700" b="0" i="0" u="none" strike="noStrike" kern="1200" cap="none" normalizeH="0" baseline="0" dirty="0">
+            <a:rPr kumimoji="0" lang="es-PE" altLang="es-PE" sz="1600" b="0" i="0" u="none" strike="noStrike" kern="1200" cap="none" normalizeH="0" baseline="0" dirty="0">
               <a:ln>
                 <a:noFill/>
               </a:ln>
@@ -9681,7 +9991,7 @@
           </a:r>
         </a:p>
         <a:p>
-          <a:pPr marL="0" lvl="0" indent="0" algn="l" defTabSz="755650">
+          <a:pPr marL="0" lvl="0" indent="0" algn="l" defTabSz="711200">
             <a:lnSpc>
               <a:spcPct val="90000"/>
             </a:lnSpc>
@@ -9695,7 +10005,7 @@
             <a:buNone/>
           </a:pPr>
           <a:r>
-            <a:rPr kumimoji="0" lang="es-PE" altLang="es-PE" sz="1700" b="0" i="0" u="none" strike="noStrike" kern="1200" cap="none" normalizeH="0" baseline="0" dirty="0">
+            <a:rPr kumimoji="0" lang="es-PE" altLang="es-PE" sz="1600" b="0" i="0" u="none" strike="noStrike" kern="1200" cap="none" normalizeH="0" baseline="0" dirty="0">
               <a:ln>
                 <a:noFill/>
               </a:ln>
@@ -9763,12 +10073,12 @@
         </a:fontRef>
       </dsp:style>
       <dsp:txBody>
-        <a:bodyPr spcFirstLastPara="0" vert="horz" wrap="square" lIns="107950" tIns="0" rIns="110400" bIns="0" numCol="1" spcCol="1270" anchor="ctr" anchorCtr="0">
+        <a:bodyPr spcFirstLastPara="0" vert="horz" wrap="square" lIns="101600" tIns="0" rIns="102121" bIns="0" numCol="1" spcCol="1270" anchor="ctr" anchorCtr="0">
           <a:noAutofit/>
         </a:bodyPr>
         <a:lstStyle/>
         <a:p>
-          <a:pPr marL="0" lvl="0" indent="0" algn="ctr" defTabSz="755650">
+          <a:pPr marL="0" lvl="0" indent="0" algn="ctr" defTabSz="711200">
             <a:lnSpc>
               <a:spcPct val="90000"/>
             </a:lnSpc>
@@ -9784,7 +10094,7 @@
             <a:buNone/>
           </a:pPr>
           <a:r>
-            <a:rPr kumimoji="0" lang="es-PE" altLang="es-PE" sz="1700" b="0" i="0" u="none" strike="noStrike" kern="1200" cap="none" normalizeH="0" baseline="0" dirty="0">
+            <a:rPr kumimoji="0" lang="es-PE" altLang="es-PE" sz="1600" b="0" i="0" u="none" strike="noStrike" kern="1200" cap="none" normalizeH="0" baseline="0" dirty="0">
               <a:ln>
                 <a:noFill/>
               </a:ln>
@@ -9796,7 +10106,7 @@
             </a:rPr>
             <a:t>Actualmente las decisiones se toman de manera reactiva y no preventiva. </a:t>
           </a:r>
-          <a:endParaRPr lang="es-MX" sz="1700" kern="1200" dirty="0">
+          <a:endParaRPr lang="es-MX" sz="1600" kern="1200" dirty="0">
             <a:solidFill>
               <a:schemeClr val="bg1"/>
             </a:solidFill>
@@ -9857,12 +10167,12 @@
         </a:fontRef>
       </dsp:style>
       <dsp:txBody>
-        <a:bodyPr spcFirstLastPara="0" vert="horz" wrap="square" lIns="107950" tIns="0" rIns="110400" bIns="0" numCol="1" spcCol="1270" anchor="ctr" anchorCtr="0">
+        <a:bodyPr spcFirstLastPara="0" vert="horz" wrap="square" lIns="101600" tIns="0" rIns="102121" bIns="0" numCol="1" spcCol="1270" anchor="ctr" anchorCtr="0">
           <a:noAutofit/>
         </a:bodyPr>
         <a:lstStyle/>
         <a:p>
-          <a:pPr marL="0" lvl="0" indent="0" algn="ctr" defTabSz="755650">
+          <a:pPr marL="0" lvl="0" indent="0" algn="ctr" defTabSz="711200">
             <a:lnSpc>
               <a:spcPct val="90000"/>
             </a:lnSpc>
@@ -9878,7 +10188,7 @@
             <a:buNone/>
           </a:pPr>
           <a:r>
-            <a:rPr kumimoji="0" lang="es-PE" altLang="es-PE" sz="1700" b="0" i="0" u="none" strike="noStrike" kern="1200" cap="none" normalizeH="0" baseline="0">
+            <a:rPr kumimoji="0" lang="es-PE" altLang="es-PE" sz="1600" b="0" i="0" u="none" strike="noStrike" kern="1200" cap="none" normalizeH="0" baseline="0">
               <a:ln>
                 <a:noFill/>
               </a:ln>
@@ -9890,7 +10200,7 @@
             </a:rPr>
             <a:t>No existe una herramienta analítica simple que permita proyectar tendencias futuras de abandono o pérdida de continuidad.</a:t>
           </a:r>
-          <a:endParaRPr lang="es-MX" sz="1700" kern="1200" dirty="0">
+          <a:endParaRPr lang="es-MX" sz="1600" kern="1200" dirty="0">
             <a:solidFill>
               <a:schemeClr val="bg1"/>
             </a:solidFill>
@@ -10033,7 +10343,15 @@
           </a:pPr>
           <a:r>
             <a:rPr lang="es-PE" sz="2100" b="0" i="0" kern="1200" baseline="0" dirty="0"/>
-            <a:t>La consultora necesita anticiparse a posibles pérdidas de colaboradores, por ende de proyectos. </a:t>
+            <a:t>La consultora necesita anticiparse a posibles pérdidas de colaboradores, por </a:t>
+          </a:r>
+          <a:r>
+            <a:rPr lang="es-PE" sz="2100" b="0" i="0" kern="1200" baseline="0" dirty="0" err="1"/>
+            <a:t>ende</a:t>
+          </a:r>
+          <a:r>
+            <a:rPr lang="es-PE" sz="2100" b="0" i="0" kern="1200" baseline="0" dirty="0"/>
+            <a:t> de proyectos. </a:t>
           </a:r>
           <a:endParaRPr lang="es-PE" sz="2100" kern="1200" dirty="0"/>
         </a:p>
@@ -10301,7 +10619,7 @@
         <a:ext cx="4143717" cy="956004"/>
       </dsp:txXfrm>
     </dsp:sp>
-    <dsp:sp modelId="{B98DF855-EC7E-DA4C-AA22-F6F76CF1BFFE}">
+    <dsp:sp modelId="{F4DE4A95-37FB-4267-BB4C-59E7EC78F599}">
       <dsp:nvSpPr>
         <dsp:cNvPr id="0" name=""/>
         <dsp:cNvSpPr/>
@@ -10353,7 +10671,7 @@
         </a:fontRef>
       </dsp:style>
     </dsp:sp>
-    <dsp:sp modelId="{E1EAD459-84E8-E647-9756-DB050016C2AA}">
+    <dsp:sp modelId="{8F44AB94-720C-4547-B678-359AF71BC54F}">
       <dsp:nvSpPr>
         <dsp:cNvPr id="0" name=""/>
         <dsp:cNvSpPr/>
@@ -10550,7 +10868,71 @@
         <a:ext cx="4143717" cy="956004"/>
       </dsp:txXfrm>
     </dsp:sp>
-    <dsp:sp modelId="{9D0E246D-2B0E-4C42-A279-F7CB3E46C811}">
+    <dsp:sp modelId="{49262429-8B35-2C46-8FF6-31CBF38C001C}">
+      <dsp:nvSpPr>
+        <dsp:cNvPr id="0" name=""/>
+        <dsp:cNvSpPr/>
+      </dsp:nvSpPr>
+      <dsp:spPr>
+        <a:xfrm>
+          <a:off x="6393141" y="1912009"/>
+          <a:ext cx="4143717" cy="956004"/>
+        </a:xfrm>
+        <a:prstGeom prst="rect">
+          <a:avLst/>
+        </a:prstGeom>
+        <a:noFill/>
+        <a:ln w="15875" cap="flat" cmpd="sng" algn="ctr">
+          <a:noFill/>
+          <a:prstDash val="solid"/>
+        </a:ln>
+        <a:effectLst/>
+        <a:sp3d/>
+      </dsp:spPr>
+      <dsp:style>
+        <a:lnRef idx="2">
+          <a:scrgbClr r="0" g="0" b="0"/>
+        </a:lnRef>
+        <a:fillRef idx="1">
+          <a:scrgbClr r="0" g="0" b="0"/>
+        </a:fillRef>
+        <a:effectRef idx="0">
+          <a:scrgbClr r="0" g="0" b="0"/>
+        </a:effectRef>
+        <a:fontRef idx="minor"/>
+      </dsp:style>
+      <dsp:txBody>
+        <a:bodyPr spcFirstLastPara="0" vert="horz" wrap="square" lIns="57150" tIns="57150" rIns="57150" bIns="57150" numCol="1" spcCol="1270" anchor="ctr" anchorCtr="0">
+          <a:noAutofit/>
+        </a:bodyPr>
+        <a:lstStyle/>
+        <a:p>
+          <a:pPr marL="114300" lvl="1" indent="-114300" algn="l" defTabSz="666750" rtl="0">
+            <a:lnSpc>
+              <a:spcPct val="90000"/>
+            </a:lnSpc>
+            <a:spcBef>
+              <a:spcPct val="0"/>
+            </a:spcBef>
+            <a:spcAft>
+              <a:spcPct val="15000"/>
+            </a:spcAft>
+            <a:buChar char="•"/>
+          </a:pPr>
+          <a:r>
+            <a:rPr lang="es-PE" sz="1500" b="0" i="0" kern="1200" baseline="0" dirty="0">
+              <a:latin typeface="Tw Cen MT" panose="020B0602020104020603"/>
+            </a:rPr>
+            <a:t>Mayo a Octubre 2025</a:t>
+          </a:r>
+        </a:p>
+      </dsp:txBody>
+      <dsp:txXfrm>
+        <a:off x="6393141" y="1912009"/>
+        <a:ext cx="4143717" cy="956004"/>
+      </dsp:txXfrm>
+    </dsp:sp>
+    <dsp:sp modelId="{083E20F9-7277-4201-B98F-4A412B09804F}">
       <dsp:nvSpPr>
         <dsp:cNvPr id="0" name=""/>
         <dsp:cNvSpPr/>
@@ -11976,7 +12358,7 @@
           </a:pPr>
           <a:r>
             <a:rPr lang="es-PE" sz="1600" b="0" i="0" kern="1200" baseline="0" dirty="0"/>
-            <a:t>Variable dependiente (y): Cantidad de proyectos que no continuaron o rotaron diariamente.</a:t>
+            <a:t>Variable dependiente (y): Cantidad de colaboradores que no continuaron o rotaron por día.</a:t>
           </a:r>
           <a:endParaRPr lang="es-PE" sz="1600" kern="1200" dirty="0"/>
         </a:p>
@@ -12633,8 +13015,8 @@
       </dsp:nvSpPr>
       <dsp:spPr>
         <a:xfrm>
-          <a:off x="2658" y="597045"/>
-          <a:ext cx="2078908" cy="831563"/>
+          <a:off x="1170" y="382915"/>
+          <a:ext cx="2405326" cy="962130"/>
         </a:xfrm>
         <a:prstGeom prst="chevron">
           <a:avLst/>
@@ -12675,12 +13057,12 @@
         </a:fontRef>
       </dsp:style>
       <dsp:txBody>
-        <a:bodyPr spcFirstLastPara="0" vert="horz" wrap="square" lIns="16510" tIns="8255" rIns="0" bIns="8255" numCol="1" spcCol="1270" anchor="ctr" anchorCtr="0">
+        <a:bodyPr spcFirstLastPara="0" vert="horz" wrap="square" lIns="19050" tIns="9525" rIns="0" bIns="9525" numCol="1" spcCol="1270" anchor="ctr" anchorCtr="0">
           <a:noAutofit/>
         </a:bodyPr>
         <a:lstStyle/>
         <a:p>
-          <a:pPr marL="0" lvl="0" indent="0" algn="ctr" defTabSz="577850">
+          <a:pPr marL="0" lvl="0" indent="0" algn="ctr" defTabSz="666750">
             <a:lnSpc>
               <a:spcPct val="90000"/>
             </a:lnSpc>
@@ -12693,17 +13075,17 @@
             <a:buNone/>
           </a:pPr>
           <a:r>
-            <a:rPr lang="es-ES_tradnl" sz="1300" kern="1200" dirty="0">
+            <a:rPr lang="es-ES_tradnl" sz="1500" kern="1200" dirty="0">
               <a:latin typeface="Arial" panose="020B0604020202020204" pitchFamily="34" charset="0"/>
             </a:rPr>
             <a:t>Tecnologías utilizadas</a:t>
           </a:r>
-          <a:endParaRPr lang="es-MX" sz="1300" kern="1200" dirty="0"/>
+          <a:endParaRPr lang="es-MX" sz="1500" kern="1200" dirty="0"/>
         </a:p>
       </dsp:txBody>
       <dsp:txXfrm>
-        <a:off x="418440" y="597045"/>
-        <a:ext cx="1247345" cy="831563"/>
+        <a:off x="482235" y="382915"/>
+        <a:ext cx="1443196" cy="962130"/>
       </dsp:txXfrm>
     </dsp:sp>
     <dsp:sp modelId="{E30B889D-093B-6C48-BB45-D85DCEB27884}">
@@ -12713,8 +13095,8 @@
       </dsp:nvSpPr>
       <dsp:spPr>
         <a:xfrm>
-          <a:off x="1811308" y="667728"/>
-          <a:ext cx="1725493" cy="690197"/>
+          <a:off x="2093804" y="464696"/>
+          <a:ext cx="1996420" cy="798568"/>
         </a:xfrm>
         <a:prstGeom prst="chevron">
           <a:avLst/>
@@ -12757,12 +13139,12 @@
         <a:fontRef idx="minor"/>
       </dsp:style>
       <dsp:txBody>
-        <a:bodyPr spcFirstLastPara="0" vert="horz" wrap="square" lIns="15240" tIns="7620" rIns="0" bIns="7620" numCol="1" spcCol="1270" anchor="ctr" anchorCtr="0">
+        <a:bodyPr spcFirstLastPara="0" vert="horz" wrap="square" lIns="17780" tIns="8890" rIns="0" bIns="8890" numCol="1" spcCol="1270" anchor="ctr" anchorCtr="0">
           <a:noAutofit/>
         </a:bodyPr>
         <a:lstStyle/>
         <a:p>
-          <a:pPr marL="0" lvl="0" indent="0" algn="ctr" defTabSz="533400">
+          <a:pPr marL="0" lvl="0" indent="0" algn="ctr" defTabSz="622300">
             <a:lnSpc>
               <a:spcPct val="90000"/>
             </a:lnSpc>
@@ -12776,17 +13158,17 @@
             <a:buNone/>
           </a:pPr>
           <a:r>
-            <a:rPr lang="es-ES_tradnl" sz="1200" kern="1200" dirty="0">
+            <a:rPr lang="es-ES_tradnl" sz="1400" kern="1200" dirty="0">
               <a:latin typeface="Arial" panose="020B0604020202020204" pitchFamily="34" charset="0"/>
             </a:rPr>
             <a:t>Python </a:t>
           </a:r>
-          <a:endParaRPr lang="es-MX" sz="1200" kern="1200" dirty="0"/>
+          <a:endParaRPr lang="es-MX" sz="1400" kern="1200" dirty="0"/>
         </a:p>
       </dsp:txBody>
       <dsp:txXfrm>
-        <a:off x="2156407" y="667728"/>
-        <a:ext cx="1035296" cy="690197"/>
+        <a:off x="2493088" y="464696"/>
+        <a:ext cx="1197852" cy="798568"/>
       </dsp:txXfrm>
     </dsp:sp>
     <dsp:sp modelId="{CEA4562F-3DF9-D446-9F81-337BB7935385}">
@@ -12796,8 +13178,8 @@
       </dsp:nvSpPr>
       <dsp:spPr>
         <a:xfrm>
-          <a:off x="3295232" y="667728"/>
-          <a:ext cx="1725493" cy="690197"/>
+          <a:off x="3810726" y="464696"/>
+          <a:ext cx="1996420" cy="798568"/>
         </a:xfrm>
         <a:prstGeom prst="chevron">
           <a:avLst/>
@@ -12840,12 +13222,12 @@
         <a:fontRef idx="minor"/>
       </dsp:style>
       <dsp:txBody>
-        <a:bodyPr spcFirstLastPara="0" vert="horz" wrap="square" lIns="15240" tIns="7620" rIns="0" bIns="7620" numCol="1" spcCol="1270" anchor="ctr" anchorCtr="0">
+        <a:bodyPr spcFirstLastPara="0" vert="horz" wrap="square" lIns="17780" tIns="8890" rIns="0" bIns="8890" numCol="1" spcCol="1270" anchor="ctr" anchorCtr="0">
           <a:noAutofit/>
         </a:bodyPr>
         <a:lstStyle/>
         <a:p>
-          <a:pPr marL="0" lvl="0" indent="0" algn="ctr" defTabSz="533400">
+          <a:pPr marL="0" lvl="0" indent="0" algn="ctr" defTabSz="622300">
             <a:lnSpc>
               <a:spcPct val="90000"/>
             </a:lnSpc>
@@ -12858,7 +13240,7 @@
             <a:buNone/>
           </a:pPr>
           <a:r>
-            <a:rPr lang="es-ES_tradnl" sz="1200" kern="1200" dirty="0">
+            <a:rPr lang="es-ES_tradnl" sz="1400" kern="1200" dirty="0">
               <a:latin typeface="Arial" panose="020B0604020202020204" pitchFamily="34" charset="0"/>
             </a:rPr>
             <a:t>Pandas </a:t>
@@ -12866,8 +13248,8 @@
         </a:p>
       </dsp:txBody>
       <dsp:txXfrm>
-        <a:off x="3640331" y="667728"/>
-        <a:ext cx="1035296" cy="690197"/>
+        <a:off x="4210010" y="464696"/>
+        <a:ext cx="1197852" cy="798568"/>
       </dsp:txXfrm>
     </dsp:sp>
     <dsp:sp modelId="{926A95DD-46EE-0948-8924-9A2D4AC6EB8D}">
@@ -12877,8 +13259,8 @@
       </dsp:nvSpPr>
       <dsp:spPr>
         <a:xfrm>
-          <a:off x="4779157" y="667728"/>
-          <a:ext cx="1725493" cy="690197"/>
+          <a:off x="5527648" y="464696"/>
+          <a:ext cx="1996420" cy="798568"/>
         </a:xfrm>
         <a:prstGeom prst="chevron">
           <a:avLst/>
@@ -12921,12 +13303,12 @@
         <a:fontRef idx="minor"/>
       </dsp:style>
       <dsp:txBody>
-        <a:bodyPr spcFirstLastPara="0" vert="horz" wrap="square" lIns="15240" tIns="7620" rIns="0" bIns="7620" numCol="1" spcCol="1270" anchor="ctr" anchorCtr="0">
+        <a:bodyPr spcFirstLastPara="0" vert="horz" wrap="square" lIns="17780" tIns="8890" rIns="0" bIns="8890" numCol="1" spcCol="1270" anchor="ctr" anchorCtr="0">
           <a:noAutofit/>
         </a:bodyPr>
         <a:lstStyle/>
         <a:p>
-          <a:pPr marL="0" lvl="0" indent="0" algn="ctr" defTabSz="533400">
+          <a:pPr marL="0" lvl="0" indent="0" algn="ctr" defTabSz="622300">
             <a:lnSpc>
               <a:spcPct val="90000"/>
             </a:lnSpc>
@@ -12939,33 +13321,28 @@
             <a:buNone/>
           </a:pPr>
           <a:r>
-            <a:rPr lang="es-ES_tradnl" sz="1200" kern="1200" dirty="0" err="1">
-              <a:latin typeface="Arial" panose="020B0604020202020204" pitchFamily="34" charset="0"/>
+            <a:rPr lang="es-ES_tradnl" sz="1400" kern="1200" dirty="0">
+              <a:latin typeface="Arial"/>
+              <a:cs typeface="Arial"/>
             </a:rPr>
-            <a:t>NumPy</a:t>
-          </a:r>
-          <a:r>
-            <a:rPr lang="es-ES_tradnl" sz="1200" kern="1200" dirty="0">
-              <a:latin typeface="Arial" panose="020B0604020202020204" pitchFamily="34" charset="0"/>
-            </a:rPr>
-            <a:t> </a:t>
+            <a:t>NumPy </a:t>
           </a:r>
         </a:p>
       </dsp:txBody>
       <dsp:txXfrm>
-        <a:off x="5124256" y="667728"/>
-        <a:ext cx="1035296" cy="690197"/>
+        <a:off x="5926932" y="464696"/>
+        <a:ext cx="1197852" cy="798568"/>
       </dsp:txXfrm>
     </dsp:sp>
-    <dsp:sp modelId="{632772CD-9C7D-E24D-93B1-C000A3BB7D8D}">
+    <dsp:sp modelId="{A89241F6-1BA1-4EBE-AFF1-A8801246B451}">
       <dsp:nvSpPr>
         <dsp:cNvPr id="0" name=""/>
         <dsp:cNvSpPr/>
       </dsp:nvSpPr>
       <dsp:spPr>
         <a:xfrm>
-          <a:off x="6263081" y="667728"/>
-          <a:ext cx="1725493" cy="690197"/>
+          <a:off x="7244569" y="464696"/>
+          <a:ext cx="1996420" cy="798568"/>
         </a:xfrm>
         <a:prstGeom prst="chevron">
           <a:avLst/>
@@ -13008,12 +13385,12 @@
         <a:fontRef idx="minor"/>
       </dsp:style>
       <dsp:txBody>
-        <a:bodyPr spcFirstLastPara="0" vert="horz" wrap="square" lIns="15240" tIns="7620" rIns="0" bIns="7620" numCol="1" spcCol="1270" anchor="ctr" anchorCtr="0">
+        <a:bodyPr spcFirstLastPara="0" vert="horz" wrap="square" lIns="17780" tIns="8890" rIns="0" bIns="8890" numCol="1" spcCol="1270" anchor="ctr" anchorCtr="0">
           <a:noAutofit/>
         </a:bodyPr>
         <a:lstStyle/>
         <a:p>
-          <a:pPr marL="0" lvl="0" indent="0" algn="ctr" defTabSz="533400">
+          <a:pPr marL="0" lvl="0" indent="0" algn="ctr" defTabSz="622300">
             <a:lnSpc>
               <a:spcPct val="90000"/>
             </a:lnSpc>
@@ -13026,110 +13403,28 @@
             <a:buNone/>
           </a:pPr>
           <a:r>
-            <a:rPr lang="es-ES_tradnl" sz="1200" kern="1200" dirty="0" err="1">
-              <a:latin typeface="Arial" panose="020B0604020202020204" pitchFamily="34" charset="0"/>
+            <a:rPr lang="es-ES_tradnl" sz="1400" kern="1200" dirty="0">
+              <a:latin typeface="Arial"/>
+              <a:cs typeface="Arial"/>
             </a:rPr>
-            <a:t>Matplotlib</a:t>
+            <a:t>Seaborn</a:t>
           </a:r>
-          <a:endParaRPr lang="es-ES_tradnl" sz="1200" kern="1200" dirty="0">
-            <a:latin typeface="Arial" panose="020B0604020202020204" pitchFamily="34" charset="0"/>
-          </a:endParaRPr>
         </a:p>
       </dsp:txBody>
       <dsp:txXfrm>
-        <a:off x="6608180" y="667728"/>
-        <a:ext cx="1035296" cy="690197"/>
+        <a:off x="7643853" y="464696"/>
+        <a:ext cx="1197852" cy="798568"/>
       </dsp:txXfrm>
     </dsp:sp>
-    <dsp:sp modelId="{BCE69AC5-EDF5-6048-82A3-2F4E580882C0}">
+    <dsp:sp modelId="{632772CD-9C7D-E24D-93B1-C000A3BB7D8D}">
       <dsp:nvSpPr>
         <dsp:cNvPr id="0" name=""/>
         <dsp:cNvSpPr/>
       </dsp:nvSpPr>
       <dsp:spPr>
         <a:xfrm>
-          <a:off x="2658" y="1545027"/>
-          <a:ext cx="2078908" cy="831563"/>
-        </a:xfrm>
-        <a:prstGeom prst="chevron">
-          <a:avLst/>
-        </a:prstGeom>
-        <a:solidFill>
-          <a:schemeClr val="accent1">
-            <a:hueOff val="0"/>
-            <a:satOff val="0"/>
-            <a:lumOff val="0"/>
-            <a:alphaOff val="0"/>
-          </a:schemeClr>
-        </a:solidFill>
-        <a:ln w="15875" cap="flat" cmpd="sng" algn="ctr">
-          <a:solidFill>
-            <a:schemeClr val="lt1">
-              <a:hueOff val="0"/>
-              <a:satOff val="0"/>
-              <a:lumOff val="0"/>
-              <a:alphaOff val="0"/>
-            </a:schemeClr>
-          </a:solidFill>
-          <a:prstDash val="solid"/>
-        </a:ln>
-        <a:effectLst/>
-      </dsp:spPr>
-      <dsp:style>
-        <a:lnRef idx="2">
-          <a:scrgbClr r="0" g="0" b="0"/>
-        </a:lnRef>
-        <a:fillRef idx="1">
-          <a:scrgbClr r="0" g="0" b="0"/>
-        </a:fillRef>
-        <a:effectRef idx="0">
-          <a:scrgbClr r="0" g="0" b="0"/>
-        </a:effectRef>
-        <a:fontRef idx="minor">
-          <a:schemeClr val="lt1"/>
-        </a:fontRef>
-      </dsp:style>
-      <dsp:txBody>
-        <a:bodyPr spcFirstLastPara="0" vert="horz" wrap="square" lIns="16510" tIns="8255" rIns="0" bIns="8255" numCol="1" spcCol="1270" anchor="ctr" anchorCtr="0">
-          <a:noAutofit/>
-        </a:bodyPr>
-        <a:lstStyle/>
-        <a:p>
-          <a:pPr marL="0" lvl="0" indent="0" algn="ctr" defTabSz="577850">
-            <a:lnSpc>
-              <a:spcPct val="90000"/>
-            </a:lnSpc>
-            <a:spcBef>
-              <a:spcPct val="0"/>
-            </a:spcBef>
-            <a:spcAft>
-              <a:spcPct val="35000"/>
-            </a:spcAft>
-            <a:buNone/>
-          </a:pPr>
-          <a:r>
-            <a:rPr lang="es-ES_tradnl" sz="1300" kern="1200" dirty="0">
-              <a:latin typeface="Arial" panose="020B0604020202020204" pitchFamily="34" charset="0"/>
-            </a:rPr>
-            <a:t>Flujo de implementación</a:t>
-          </a:r>
-          <a:endParaRPr lang="es-MX" sz="1300" kern="1200" dirty="0"/>
-        </a:p>
-      </dsp:txBody>
-      <dsp:txXfrm>
-        <a:off x="418440" y="1545027"/>
-        <a:ext cx="1247345" cy="831563"/>
-      </dsp:txXfrm>
-    </dsp:sp>
-    <dsp:sp modelId="{D63E9201-7A03-5F45-865F-676A48BB160C}">
-      <dsp:nvSpPr>
-        <dsp:cNvPr id="0" name=""/>
-        <dsp:cNvSpPr/>
-      </dsp:nvSpPr>
-      <dsp:spPr>
-        <a:xfrm>
-          <a:off x="1811308" y="1615710"/>
-          <a:ext cx="1725493" cy="690197"/>
+          <a:off x="8961491" y="464696"/>
+          <a:ext cx="1996420" cy="798568"/>
         </a:xfrm>
         <a:prstGeom prst="chevron">
           <a:avLst/>
@@ -13172,12 +13467,12 @@
         <a:fontRef idx="minor"/>
       </dsp:style>
       <dsp:txBody>
-        <a:bodyPr spcFirstLastPara="0" vert="horz" wrap="square" lIns="15240" tIns="7620" rIns="0" bIns="7620" numCol="1" spcCol="1270" anchor="ctr" anchorCtr="0">
+        <a:bodyPr spcFirstLastPara="0" vert="horz" wrap="square" lIns="17780" tIns="8890" rIns="0" bIns="8890" numCol="1" spcCol="1270" anchor="ctr" anchorCtr="0">
           <a:noAutofit/>
         </a:bodyPr>
         <a:lstStyle/>
         <a:p>
-          <a:pPr marL="0" lvl="0" indent="0" algn="ctr" defTabSz="533400">
+          <a:pPr marL="0" lvl="0" indent="0" algn="ctr" defTabSz="622300">
             <a:lnSpc>
               <a:spcPct val="90000"/>
             </a:lnSpc>
@@ -13190,27 +13485,108 @@
             <a:buNone/>
           </a:pPr>
           <a:r>
-            <a:rPr lang="es-ES_tradnl" sz="1200" kern="1200" dirty="0">
-              <a:latin typeface="Arial" panose="020B0604020202020204" pitchFamily="34" charset="0"/>
+            <a:rPr lang="es-ES_tradnl" sz="1400" kern="1200" dirty="0">
+              <a:latin typeface="Arial"/>
+              <a:cs typeface="Arial"/>
             </a:rPr>
-            <a:t>Carga y preparación de datos históricos. </a:t>
+            <a:t>Matplotlib</a:t>
           </a:r>
         </a:p>
       </dsp:txBody>
       <dsp:txXfrm>
-        <a:off x="2156407" y="1615710"/>
-        <a:ext cx="1035296" cy="690197"/>
+        <a:off x="9360775" y="464696"/>
+        <a:ext cx="1197852" cy="798568"/>
       </dsp:txXfrm>
     </dsp:sp>
-    <dsp:sp modelId="{6C0952D4-0640-E34A-994F-CCE293E4E2FD}">
+    <dsp:sp modelId="{BCE69AC5-EDF5-6048-82A3-2F4E580882C0}">
       <dsp:nvSpPr>
         <dsp:cNvPr id="0" name=""/>
         <dsp:cNvSpPr/>
       </dsp:nvSpPr>
       <dsp:spPr>
         <a:xfrm>
-          <a:off x="3295232" y="1615710"/>
-          <a:ext cx="1725493" cy="690197"/>
+          <a:off x="1170" y="1479743"/>
+          <a:ext cx="2405326" cy="962130"/>
+        </a:xfrm>
+        <a:prstGeom prst="chevron">
+          <a:avLst/>
+        </a:prstGeom>
+        <a:solidFill>
+          <a:schemeClr val="accent1">
+            <a:hueOff val="0"/>
+            <a:satOff val="0"/>
+            <a:lumOff val="0"/>
+            <a:alphaOff val="0"/>
+          </a:schemeClr>
+        </a:solidFill>
+        <a:ln w="15875" cap="flat" cmpd="sng" algn="ctr">
+          <a:solidFill>
+            <a:schemeClr val="lt1">
+              <a:hueOff val="0"/>
+              <a:satOff val="0"/>
+              <a:lumOff val="0"/>
+              <a:alphaOff val="0"/>
+            </a:schemeClr>
+          </a:solidFill>
+          <a:prstDash val="solid"/>
+        </a:ln>
+        <a:effectLst/>
+      </dsp:spPr>
+      <dsp:style>
+        <a:lnRef idx="2">
+          <a:scrgbClr r="0" g="0" b="0"/>
+        </a:lnRef>
+        <a:fillRef idx="1">
+          <a:scrgbClr r="0" g="0" b="0"/>
+        </a:fillRef>
+        <a:effectRef idx="0">
+          <a:scrgbClr r="0" g="0" b="0"/>
+        </a:effectRef>
+        <a:fontRef idx="minor">
+          <a:schemeClr val="lt1"/>
+        </a:fontRef>
+      </dsp:style>
+      <dsp:txBody>
+        <a:bodyPr spcFirstLastPara="0" vert="horz" wrap="square" lIns="19050" tIns="9525" rIns="0" bIns="9525" numCol="1" spcCol="1270" anchor="ctr" anchorCtr="0">
+          <a:noAutofit/>
+        </a:bodyPr>
+        <a:lstStyle/>
+        <a:p>
+          <a:pPr marL="0" lvl="0" indent="0" algn="ctr" defTabSz="666750">
+            <a:lnSpc>
+              <a:spcPct val="90000"/>
+            </a:lnSpc>
+            <a:spcBef>
+              <a:spcPct val="0"/>
+            </a:spcBef>
+            <a:spcAft>
+              <a:spcPct val="35000"/>
+            </a:spcAft>
+            <a:buNone/>
+          </a:pPr>
+          <a:r>
+            <a:rPr lang="es-ES_tradnl" sz="1500" kern="1200" dirty="0">
+              <a:latin typeface="Arial" panose="020B0604020202020204" pitchFamily="34" charset="0"/>
+            </a:rPr>
+            <a:t>Flujo de implementación</a:t>
+          </a:r>
+          <a:endParaRPr lang="es-MX" sz="1500" kern="1200" dirty="0"/>
+        </a:p>
+      </dsp:txBody>
+      <dsp:txXfrm>
+        <a:off x="482235" y="1479743"/>
+        <a:ext cx="1443196" cy="962130"/>
+      </dsp:txXfrm>
+    </dsp:sp>
+    <dsp:sp modelId="{D63E9201-7A03-5F45-865F-676A48BB160C}">
+      <dsp:nvSpPr>
+        <dsp:cNvPr id="0" name=""/>
+        <dsp:cNvSpPr/>
+      </dsp:nvSpPr>
+      <dsp:spPr>
+        <a:xfrm>
+          <a:off x="2093804" y="1561524"/>
+          <a:ext cx="1996420" cy="798568"/>
         </a:xfrm>
         <a:prstGeom prst="chevron">
           <a:avLst/>
@@ -13253,12 +13629,12 @@
         <a:fontRef idx="minor"/>
       </dsp:style>
       <dsp:txBody>
-        <a:bodyPr spcFirstLastPara="0" vert="horz" wrap="square" lIns="15240" tIns="7620" rIns="0" bIns="7620" numCol="1" spcCol="1270" anchor="ctr" anchorCtr="0">
+        <a:bodyPr spcFirstLastPara="0" vert="horz" wrap="square" lIns="17780" tIns="8890" rIns="0" bIns="8890" numCol="1" spcCol="1270" anchor="ctr" anchorCtr="0">
           <a:noAutofit/>
         </a:bodyPr>
         <a:lstStyle/>
         <a:p>
-          <a:pPr marL="0" lvl="0" indent="0" algn="ctr" defTabSz="533400">
+          <a:pPr marL="0" lvl="0" indent="0" algn="ctr" defTabSz="622300">
             <a:lnSpc>
               <a:spcPct val="90000"/>
             </a:lnSpc>
@@ -13271,16 +13647,17 @@
             <a:buNone/>
           </a:pPr>
           <a:r>
-            <a:rPr lang="es-ES_tradnl" sz="1200" kern="1200" dirty="0">
-              <a:latin typeface="Arial" panose="020B0604020202020204" pitchFamily="34" charset="0"/>
+            <a:rPr lang="es-ES_tradnl" sz="1400" kern="1200" dirty="0">
+              <a:latin typeface="Arial"/>
+              <a:cs typeface="Arial"/>
             </a:rPr>
-            <a:t>Generación de serie temporal diaria. </a:t>
+            <a:t>Carga y preparación de datos históricos. </a:t>
           </a:r>
         </a:p>
       </dsp:txBody>
       <dsp:txXfrm>
-        <a:off x="3640331" y="1615710"/>
-        <a:ext cx="1035296" cy="690197"/>
+        <a:off x="2493088" y="1561524"/>
+        <a:ext cx="1197852" cy="798568"/>
       </dsp:txXfrm>
     </dsp:sp>
     <dsp:sp modelId="{4C642C97-12AB-AB4D-BC7B-4A63DD7015B4}">
@@ -13290,8 +13667,8 @@
       </dsp:nvSpPr>
       <dsp:spPr>
         <a:xfrm>
-          <a:off x="4779157" y="1615710"/>
-          <a:ext cx="1725493" cy="690197"/>
+          <a:off x="3810726" y="1561524"/>
+          <a:ext cx="1996420" cy="798568"/>
         </a:xfrm>
         <a:prstGeom prst="chevron">
           <a:avLst/>
@@ -13334,12 +13711,12 @@
         <a:fontRef idx="minor"/>
       </dsp:style>
       <dsp:txBody>
-        <a:bodyPr spcFirstLastPara="0" vert="horz" wrap="square" lIns="15240" tIns="7620" rIns="0" bIns="7620" numCol="1" spcCol="1270" anchor="ctr" anchorCtr="0">
+        <a:bodyPr spcFirstLastPara="0" vert="horz" wrap="square" lIns="17780" tIns="8890" rIns="0" bIns="8890" numCol="1" spcCol="1270" anchor="ctr" anchorCtr="0">
           <a:noAutofit/>
         </a:bodyPr>
         <a:lstStyle/>
         <a:p>
-          <a:pPr marL="0" lvl="0" indent="0" algn="ctr" defTabSz="533400">
+          <a:pPr marL="0" lvl="0" indent="0" algn="ctr" defTabSz="622300">
             <a:lnSpc>
               <a:spcPct val="90000"/>
             </a:lnSpc>
@@ -13352,19 +13729,19 @@
             <a:buNone/>
           </a:pPr>
           <a:r>
-            <a:rPr lang="es-ES_tradnl" sz="1200" kern="1200">
+            <a:rPr lang="es-ES_tradnl" sz="1400" kern="1200">
               <a:latin typeface="Arial" panose="020B0604020202020204" pitchFamily="34" charset="0"/>
             </a:rPr>
             <a:t>Entrenamiento del modelo de regresión lineal. </a:t>
           </a:r>
-          <a:endParaRPr lang="es-ES_tradnl" sz="1200" kern="1200" dirty="0">
+          <a:endParaRPr lang="es-ES_tradnl" sz="1400" kern="1200" dirty="0">
             <a:latin typeface="Arial" panose="020B0604020202020204" pitchFamily="34" charset="0"/>
           </a:endParaRPr>
         </a:p>
       </dsp:txBody>
       <dsp:txXfrm>
-        <a:off x="5124256" y="1615710"/>
-        <a:ext cx="1035296" cy="690197"/>
+        <a:off x="4210010" y="1561524"/>
+        <a:ext cx="1197852" cy="798568"/>
       </dsp:txXfrm>
     </dsp:sp>
     <dsp:sp modelId="{3C6EDCAC-C7A9-394C-B1C8-2C99100064E5}">
@@ -13374,8 +13751,8 @@
       </dsp:nvSpPr>
       <dsp:spPr>
         <a:xfrm>
-          <a:off x="6263081" y="1615710"/>
-          <a:ext cx="1725493" cy="690197"/>
+          <a:off x="5527648" y="1561524"/>
+          <a:ext cx="1996420" cy="798568"/>
         </a:xfrm>
         <a:prstGeom prst="chevron">
           <a:avLst/>
@@ -13418,12 +13795,12 @@
         <a:fontRef idx="minor"/>
       </dsp:style>
       <dsp:txBody>
-        <a:bodyPr spcFirstLastPara="0" vert="horz" wrap="square" lIns="15240" tIns="7620" rIns="0" bIns="7620" numCol="1" spcCol="1270" anchor="ctr" anchorCtr="0">
+        <a:bodyPr spcFirstLastPara="0" vert="horz" wrap="square" lIns="17780" tIns="8890" rIns="0" bIns="8890" numCol="1" spcCol="1270" anchor="ctr" anchorCtr="0">
           <a:noAutofit/>
         </a:bodyPr>
         <a:lstStyle/>
         <a:p>
-          <a:pPr marL="0" lvl="0" indent="0" algn="ctr" defTabSz="533400">
+          <a:pPr marL="0" lvl="0" indent="0" algn="ctr" defTabSz="622300">
             <a:lnSpc>
               <a:spcPct val="90000"/>
             </a:lnSpc>
@@ -13436,30 +13813,30 @@
             <a:buNone/>
           </a:pPr>
           <a:r>
-            <a:rPr lang="es-ES_tradnl" sz="1200" kern="1200">
+            <a:rPr lang="es-ES_tradnl" sz="1400" kern="1200">
               <a:latin typeface="Arial" panose="020B0604020202020204" pitchFamily="34" charset="0"/>
             </a:rPr>
             <a:t>Generación de predicciones futuras. </a:t>
           </a:r>
-          <a:endParaRPr lang="es-ES_tradnl" sz="1200" kern="1200" dirty="0">
+          <a:endParaRPr lang="es-ES_tradnl" sz="1400" kern="1200" dirty="0">
             <a:latin typeface="Arial" panose="020B0604020202020204" pitchFamily="34" charset="0"/>
           </a:endParaRPr>
         </a:p>
       </dsp:txBody>
       <dsp:txXfrm>
-        <a:off x="6608180" y="1615710"/>
-        <a:ext cx="1035296" cy="690197"/>
+        <a:off x="5926932" y="1561524"/>
+        <a:ext cx="1197852" cy="798568"/>
       </dsp:txXfrm>
     </dsp:sp>
-    <dsp:sp modelId="{F3E41A5C-91CA-AE47-8D8F-2D8870E80197}">
+    <dsp:sp modelId="{4ECAD6D7-A0CB-4EAC-B7CA-BB0CE1B92C57}">
       <dsp:nvSpPr>
         <dsp:cNvPr id="0" name=""/>
         <dsp:cNvSpPr/>
       </dsp:nvSpPr>
       <dsp:spPr>
         <a:xfrm>
-          <a:off x="7747006" y="1615710"/>
-          <a:ext cx="1725493" cy="690197"/>
+          <a:off x="7244569" y="1561524"/>
+          <a:ext cx="1996420" cy="798568"/>
         </a:xfrm>
         <a:prstGeom prst="chevron">
           <a:avLst/>
@@ -13502,12 +13879,12 @@
         <a:fontRef idx="minor"/>
       </dsp:style>
       <dsp:txBody>
-        <a:bodyPr spcFirstLastPara="0" vert="horz" wrap="square" lIns="15240" tIns="7620" rIns="0" bIns="7620" numCol="1" spcCol="1270" anchor="ctr" anchorCtr="0">
+        <a:bodyPr spcFirstLastPara="0" vert="horz" wrap="square" lIns="17780" tIns="8890" rIns="0" bIns="8890" numCol="1" spcCol="1270" anchor="ctr" anchorCtr="0">
           <a:noAutofit/>
         </a:bodyPr>
         <a:lstStyle/>
         <a:p>
-          <a:pPr marL="0" lvl="0" indent="0" algn="ctr" defTabSz="533400">
+          <a:pPr marL="0" lvl="0" indent="0" algn="ctr" defTabSz="622300" rtl="0">
             <a:lnSpc>
               <a:spcPct val="90000"/>
             </a:lnSpc>
@@ -13520,19 +13897,17 @@
             <a:buNone/>
           </a:pPr>
           <a:r>
-            <a:rPr lang="es-ES_tradnl" sz="1200" kern="1200">
-              <a:latin typeface="Arial" panose="020B0604020202020204" pitchFamily="34" charset="0"/>
+            <a:rPr lang="es-ES_tradnl" sz="1400" kern="1200" dirty="0">
+              <a:latin typeface="Arial"/>
+              <a:cs typeface="Arial"/>
             </a:rPr>
             <a:t>Construcción de tabla comparativa. </a:t>
           </a:r>
-          <a:endParaRPr lang="es-ES_tradnl" sz="1200" kern="1200" dirty="0">
-            <a:latin typeface="Arial" panose="020B0604020202020204" pitchFamily="34" charset="0"/>
-          </a:endParaRPr>
         </a:p>
       </dsp:txBody>
       <dsp:txXfrm>
-        <a:off x="8092105" y="1615710"/>
-        <a:ext cx="1035296" cy="690197"/>
+        <a:off x="7643853" y="1561524"/>
+        <a:ext cx="1197852" cy="798568"/>
       </dsp:txXfrm>
     </dsp:sp>
     <dsp:sp modelId="{D6F3DC2D-C8E8-2443-9968-4CBAC8788EB7}">
@@ -13542,8 +13917,8 @@
       </dsp:nvSpPr>
       <dsp:spPr>
         <a:xfrm>
-          <a:off x="9230931" y="1615710"/>
-          <a:ext cx="1725493" cy="690197"/>
+          <a:off x="8961491" y="1561524"/>
+          <a:ext cx="1996420" cy="798568"/>
         </a:xfrm>
         <a:prstGeom prst="chevron">
           <a:avLst/>
@@ -13586,12 +13961,12 @@
         <a:fontRef idx="minor"/>
       </dsp:style>
       <dsp:txBody>
-        <a:bodyPr spcFirstLastPara="0" vert="horz" wrap="square" lIns="15240" tIns="7620" rIns="0" bIns="7620" numCol="1" spcCol="1270" anchor="ctr" anchorCtr="0">
+        <a:bodyPr spcFirstLastPara="0" vert="horz" wrap="square" lIns="17780" tIns="8890" rIns="0" bIns="8890" numCol="1" spcCol="1270" anchor="ctr" anchorCtr="0">
           <a:noAutofit/>
         </a:bodyPr>
         <a:lstStyle/>
         <a:p>
-          <a:pPr marL="0" lvl="0" indent="0" algn="ctr" defTabSz="533400">
+          <a:pPr marL="0" lvl="0" indent="0" algn="ctr" defTabSz="622300">
             <a:lnSpc>
               <a:spcPct val="90000"/>
             </a:lnSpc>
@@ -13604,19 +13979,19 @@
             <a:buNone/>
           </a:pPr>
           <a:r>
-            <a:rPr lang="es-ES_tradnl" sz="1200" kern="1200">
+            <a:rPr lang="es-ES_tradnl" sz="1400" kern="1200">
               <a:latin typeface="Arial" panose="020B0604020202020204" pitchFamily="34" charset="0"/>
             </a:rPr>
             <a:t>Visualización gráfica de resultados.</a:t>
           </a:r>
-          <a:endParaRPr lang="es-ES_tradnl" sz="1200" kern="1200" dirty="0">
+          <a:endParaRPr lang="es-ES_tradnl" sz="1400" kern="1200" dirty="0">
             <a:latin typeface="Arial" panose="020B0604020202020204" pitchFamily="34" charset="0"/>
           </a:endParaRPr>
         </a:p>
       </dsp:txBody>
       <dsp:txXfrm>
-        <a:off x="9576030" y="1615710"/>
-        <a:ext cx="1035296" cy="690197"/>
+        <a:off x="9360775" y="1561524"/>
+        <a:ext cx="1197852" cy="798568"/>
       </dsp:txXfrm>
     </dsp:sp>
     <dsp:sp modelId="{7A2119B2-BAB2-154A-8E45-93A406A4356F}">
@@ -13626,8 +14001,8 @@
       </dsp:nvSpPr>
       <dsp:spPr>
         <a:xfrm>
-          <a:off x="2658" y="2493009"/>
-          <a:ext cx="2078908" cy="831563"/>
+          <a:off x="1170" y="2576572"/>
+          <a:ext cx="2405326" cy="962130"/>
         </a:xfrm>
         <a:prstGeom prst="chevron">
           <a:avLst/>
@@ -13668,12 +14043,12 @@
         </a:fontRef>
       </dsp:style>
       <dsp:txBody>
-        <a:bodyPr spcFirstLastPara="0" vert="horz" wrap="square" lIns="16510" tIns="8255" rIns="0" bIns="8255" numCol="1" spcCol="1270" anchor="ctr" anchorCtr="0">
+        <a:bodyPr spcFirstLastPara="0" vert="horz" wrap="square" lIns="19050" tIns="9525" rIns="0" bIns="9525" numCol="1" spcCol="1270" anchor="ctr" anchorCtr="0">
           <a:noAutofit/>
         </a:bodyPr>
         <a:lstStyle/>
         <a:p>
-          <a:pPr marL="0" lvl="0" indent="0" algn="ctr" defTabSz="577850">
+          <a:pPr marL="0" lvl="0" indent="0" algn="ctr" defTabSz="666750">
             <a:lnSpc>
               <a:spcPct val="90000"/>
             </a:lnSpc>
@@ -13686,17 +14061,17 @@
             <a:buNone/>
           </a:pPr>
           <a:r>
-            <a:rPr lang="es-ES_tradnl" sz="1300" kern="1200" dirty="0">
+            <a:rPr lang="es-ES_tradnl" sz="1500" kern="1200" dirty="0">
               <a:latin typeface="Arial" panose="020B0604020202020204" pitchFamily="34" charset="0"/>
             </a:rPr>
             <a:t>Modelo implementado</a:t>
           </a:r>
-          <a:endParaRPr lang="es-MX" sz="1300" kern="1200" dirty="0"/>
+          <a:endParaRPr lang="es-MX" sz="1500" kern="1200" dirty="0"/>
         </a:p>
       </dsp:txBody>
       <dsp:txXfrm>
-        <a:off x="418440" y="2493009"/>
-        <a:ext cx="1247345" cy="831563"/>
+        <a:off x="482235" y="2576572"/>
+        <a:ext cx="1443196" cy="962130"/>
       </dsp:txXfrm>
     </dsp:sp>
     <dsp:sp modelId="{834A784C-A7A9-5048-8412-CD13436C10B6}">
@@ -13706,8 +14081,8 @@
       </dsp:nvSpPr>
       <dsp:spPr>
         <a:xfrm>
-          <a:off x="1811308" y="2563692"/>
-          <a:ext cx="1725493" cy="690197"/>
+          <a:off x="2093804" y="2658353"/>
+          <a:ext cx="1996420" cy="798568"/>
         </a:xfrm>
         <a:prstGeom prst="chevron">
           <a:avLst/>
@@ -13750,12 +14125,12 @@
         <a:fontRef idx="minor"/>
       </dsp:style>
       <dsp:txBody>
-        <a:bodyPr spcFirstLastPara="0" vert="horz" wrap="square" lIns="15240" tIns="7620" rIns="0" bIns="7620" numCol="1" spcCol="1270" anchor="ctr" anchorCtr="0">
+        <a:bodyPr spcFirstLastPara="0" vert="horz" wrap="square" lIns="17780" tIns="8890" rIns="0" bIns="8890" numCol="1" spcCol="1270" anchor="ctr" anchorCtr="0">
           <a:noAutofit/>
         </a:bodyPr>
         <a:lstStyle/>
         <a:p>
-          <a:pPr marL="0" lvl="0" indent="0" algn="ctr" defTabSz="533400">
+          <a:pPr marL="0" lvl="0" indent="0" algn="ctr" defTabSz="622300">
             <a:lnSpc>
               <a:spcPct val="90000"/>
             </a:lnSpc>
@@ -13768,19 +14143,19 @@
             <a:buNone/>
           </a:pPr>
           <a:r>
-            <a:rPr lang="es-ES_tradnl" sz="1200" kern="1200">
+            <a:rPr lang="es-ES_tradnl" sz="1400" kern="1200">
               <a:latin typeface="Arial" panose="020B0604020202020204" pitchFamily="34" charset="0"/>
             </a:rPr>
             <a:t>Modelo de regresión lineal simple. </a:t>
           </a:r>
-          <a:endParaRPr lang="es-ES_tradnl" sz="1200" kern="1200" dirty="0">
+          <a:endParaRPr lang="es-ES_tradnl" sz="1400" kern="1200" dirty="0">
             <a:latin typeface="Arial" panose="020B0604020202020204" pitchFamily="34" charset="0"/>
           </a:endParaRPr>
         </a:p>
       </dsp:txBody>
       <dsp:txXfrm>
-        <a:off x="2156407" y="2563692"/>
-        <a:ext cx="1035296" cy="690197"/>
+        <a:off x="2493088" y="2658353"/>
+        <a:ext cx="1197852" cy="798568"/>
       </dsp:txXfrm>
     </dsp:sp>
     <dsp:sp modelId="{3CCB4C62-A04F-F54C-AA5F-901D012FD0CF}">
@@ -13790,8 +14165,8 @@
       </dsp:nvSpPr>
       <dsp:spPr>
         <a:xfrm>
-          <a:off x="3295232" y="2563692"/>
-          <a:ext cx="1725493" cy="690197"/>
+          <a:off x="3810726" y="2658353"/>
+          <a:ext cx="1996420" cy="798568"/>
         </a:xfrm>
         <a:prstGeom prst="chevron">
           <a:avLst/>
@@ -13834,12 +14209,12 @@
         <a:fontRef idx="minor"/>
       </dsp:style>
       <dsp:txBody>
-        <a:bodyPr spcFirstLastPara="0" vert="horz" wrap="square" lIns="15240" tIns="7620" rIns="0" bIns="7620" numCol="1" spcCol="1270" anchor="ctr" anchorCtr="0">
+        <a:bodyPr spcFirstLastPara="0" vert="horz" wrap="square" lIns="17780" tIns="8890" rIns="0" bIns="8890" numCol="1" spcCol="1270" anchor="ctr" anchorCtr="0">
           <a:noAutofit/>
         </a:bodyPr>
         <a:lstStyle/>
         <a:p>
-          <a:pPr marL="0" lvl="0" indent="0" algn="ctr" defTabSz="533400">
+          <a:pPr marL="0" lvl="0" indent="0" algn="ctr" defTabSz="622300">
             <a:lnSpc>
               <a:spcPct val="90000"/>
             </a:lnSpc>
@@ -13852,19 +14227,19 @@
             <a:buNone/>
           </a:pPr>
           <a:r>
-            <a:rPr lang="es-ES_tradnl" sz="1200" kern="1200">
+            <a:rPr lang="es-ES_tradnl" sz="1400" kern="1200">
               <a:latin typeface="Arial" panose="020B0604020202020204" pitchFamily="34" charset="0"/>
             </a:rPr>
             <a:t>Entrenado con 180 días de información histórica. </a:t>
           </a:r>
-          <a:endParaRPr lang="es-ES_tradnl" sz="1200" kern="1200" dirty="0">
+          <a:endParaRPr lang="es-ES_tradnl" sz="1400" kern="1200" dirty="0">
             <a:latin typeface="Arial" panose="020B0604020202020204" pitchFamily="34" charset="0"/>
           </a:endParaRPr>
         </a:p>
       </dsp:txBody>
       <dsp:txXfrm>
-        <a:off x="3640331" y="2563692"/>
-        <a:ext cx="1035296" cy="690197"/>
+        <a:off x="4210010" y="2658353"/>
+        <a:ext cx="1197852" cy="798568"/>
       </dsp:txXfrm>
     </dsp:sp>
     <dsp:sp modelId="{145240E1-4F54-1B46-94F3-5BE46DC2B791}">
@@ -13874,8 +14249,8 @@
       </dsp:nvSpPr>
       <dsp:spPr>
         <a:xfrm>
-          <a:off x="4779157" y="2563692"/>
-          <a:ext cx="1725493" cy="690197"/>
+          <a:off x="5527648" y="2658353"/>
+          <a:ext cx="1996420" cy="798568"/>
         </a:xfrm>
         <a:prstGeom prst="chevron">
           <a:avLst/>
@@ -13918,12 +14293,12 @@
         <a:fontRef idx="minor"/>
       </dsp:style>
       <dsp:txBody>
-        <a:bodyPr spcFirstLastPara="0" vert="horz" wrap="square" lIns="15240" tIns="7620" rIns="0" bIns="7620" numCol="1" spcCol="1270" anchor="ctr" anchorCtr="0">
+        <a:bodyPr spcFirstLastPara="0" vert="horz" wrap="square" lIns="17780" tIns="8890" rIns="0" bIns="8890" numCol="1" spcCol="1270" anchor="ctr" anchorCtr="0">
           <a:noAutofit/>
         </a:bodyPr>
         <a:lstStyle/>
         <a:p>
-          <a:pPr marL="0" lvl="0" indent="0" algn="ctr" defTabSz="533400">
+          <a:pPr marL="0" lvl="0" indent="0" algn="ctr" defTabSz="622300">
             <a:lnSpc>
               <a:spcPct val="90000"/>
             </a:lnSpc>
@@ -13936,7 +14311,7 @@
             <a:buNone/>
           </a:pPr>
           <a:r>
-            <a:rPr lang="es-ES_tradnl" sz="1200" kern="1200" dirty="0">
+            <a:rPr lang="es-ES_tradnl" sz="1400" kern="1200" dirty="0">
               <a:latin typeface="Arial" panose="020B0604020202020204" pitchFamily="34" charset="0"/>
             </a:rPr>
             <a:t>Predicción realizada para los siguientes 30 días.</a:t>
@@ -13944,8 +14319,8 @@
         </a:p>
       </dsp:txBody>
       <dsp:txXfrm>
-        <a:off x="5124256" y="2563692"/>
-        <a:ext cx="1035296" cy="690197"/>
+        <a:off x="5926932" y="2658353"/>
+        <a:ext cx="1197852" cy="798568"/>
       </dsp:txXfrm>
     </dsp:sp>
   </dsp:spTree>
@@ -14142,8 +14517,10 @@
             <a:buNone/>
           </a:pPr>
           <a:r>
-            <a:rPr lang="es-PE" sz="3000" b="1" kern="1200" dirty="0"/>
-            <a:t>Hallazgos observados</a:t>
+            <a:rPr lang="es-PE" sz="3000" b="1" kern="1200" dirty="0">
+              <a:latin typeface="Tw Cen MT" panose="020B0602020104020603"/>
+            </a:rPr>
+            <a:t>Insights</a:t>
           </a:r>
           <a:endParaRPr lang="es-PE" sz="3000" kern="1200" dirty="0"/>
         </a:p>
@@ -14212,8 +14589,8 @@
       </dsp:nvSpPr>
       <dsp:spPr>
         <a:xfrm>
-          <a:off x="99631" y="917673"/>
-          <a:ext cx="3158147" cy="2435245"/>
+          <a:off x="94165" y="917673"/>
+          <a:ext cx="3171843" cy="2435245"/>
         </a:xfrm>
         <a:prstGeom prst="roundRect">
           <a:avLst/>
@@ -14298,7 +14675,7 @@
           <a:endParaRPr lang="es-PE" sz="1600" kern="1200" dirty="0"/>
         </a:p>
         <a:p>
-          <a:pPr marL="171450" lvl="1" indent="-171450" algn="l" defTabSz="711200">
+          <a:pPr marL="171450" lvl="1" indent="-171450" algn="l" defTabSz="711200" rtl="0">
             <a:lnSpc>
               <a:spcPct val="90000"/>
             </a:lnSpc>
@@ -14313,7 +14690,17 @@
           </a:pPr>
           <a:r>
             <a:rPr lang="es-ES_tradnl" sz="1600" kern="1200" dirty="0"/>
-            <a:t>La regresión lineal permitió identificar correctamente la tendencia general. </a:t>
+            <a:t>La regresión lineal </a:t>
+          </a:r>
+          <a:r>
+            <a:rPr lang="es-ES_tradnl" sz="1600" kern="1200" dirty="0">
+              <a:latin typeface="Tw Cen MT" panose="020B0602020104020603"/>
+            </a:rPr>
+            <a:t>permite identificar</a:t>
+          </a:r>
+          <a:r>
+            <a:rPr lang="es-ES_tradnl" sz="1600" kern="1200" dirty="0"/>
+            <a:t> la tendencia general. </a:t>
           </a:r>
           <a:endParaRPr lang="es-PE" sz="1600" kern="1200" dirty="0"/>
         </a:p>
@@ -14333,14 +14720,14 @@
           </a:pPr>
           <a:r>
             <a:rPr lang="es-ES_tradnl" sz="1600" kern="1200" dirty="0"/>
-            <a:t>La solución es interpretable y fácil de explicar a negocio.</a:t>
+            <a:t>La solución es interpretable y fácil de explicar al negocio.</a:t>
           </a:r>
           <a:endParaRPr lang="es-PE" sz="1600" kern="1200" dirty="0"/>
         </a:p>
       </dsp:txBody>
       <dsp:txXfrm>
-        <a:off x="218510" y="1036552"/>
-        <a:ext cx="2920389" cy="2197487"/>
+        <a:off x="213044" y="1036552"/>
+        <a:ext cx="2934085" cy="2197487"/>
       </dsp:txXfrm>
     </dsp:sp>
     <dsp:sp modelId="{E26BF08F-E9E0-994D-9449-A537A864DA03}">
@@ -14350,8 +14737,8 @@
       </dsp:nvSpPr>
       <dsp:spPr>
         <a:xfrm>
-          <a:off x="3597491" y="1281177"/>
-          <a:ext cx="2600107" cy="1708236"/>
+          <a:off x="3590372" y="1281177"/>
+          <a:ext cx="2611383" cy="1708236"/>
         </a:xfrm>
         <a:prstGeom prst="roundRect">
           <a:avLst/>
@@ -14497,8 +14884,8 @@
         </a:p>
       </dsp:txBody>
       <dsp:txXfrm>
-        <a:off x="3680880" y="1364566"/>
-        <a:ext cx="2433329" cy="1541458"/>
+        <a:off x="3673761" y="1364566"/>
+        <a:ext cx="2444605" cy="1541458"/>
       </dsp:txXfrm>
     </dsp:sp>
     <dsp:sp modelId="{BE6B4B3B-F80A-EE43-99BA-0E12BFCD8F16}">
@@ -14508,8 +14895,8 @@
       </dsp:nvSpPr>
       <dsp:spPr>
         <a:xfrm>
-          <a:off x="6537309" y="698216"/>
-          <a:ext cx="3840912" cy="2874159"/>
+          <a:off x="6526119" y="698216"/>
+          <a:ext cx="3857569" cy="2874159"/>
         </a:xfrm>
         <a:prstGeom prst="roundRect">
           <a:avLst/>
@@ -14574,7 +14961,7 @@
           <a:endParaRPr lang="es-PE" sz="2000" kern="1200" dirty="0"/>
         </a:p>
         <a:p>
-          <a:pPr marL="171450" lvl="1" indent="-171450" algn="l" defTabSz="711200">
+          <a:pPr marL="171450" lvl="1" indent="-171450" algn="l" defTabSz="711200" rtl="0">
             <a:lnSpc>
               <a:spcPct val="90000"/>
             </a:lnSpc>
@@ -14589,7 +14976,27 @@
           </a:pPr>
           <a:r>
             <a:rPr lang="es-ES_tradnl" sz="1600" kern="1200" dirty="0"/>
-            <a:t>El análisis predictivo puede ayudar a reducir riesgos relacionados con la no renovación de proyectos. </a:t>
+            <a:t>El análisis predictivo puede ayudar a reducir riesgos relacionados con la no renovación </a:t>
+          </a:r>
+          <a:r>
+            <a:rPr lang="es-ES_tradnl" sz="1600" kern="1200" dirty="0">
+              <a:latin typeface="Tw Cen MT" panose="020B0602020104020603"/>
+            </a:rPr>
+            <a:t>o renuncia </a:t>
+          </a:r>
+          <a:r>
+            <a:rPr lang="es-ES_tradnl" sz="1600" kern="1200" dirty="0"/>
+            <a:t>de </a:t>
+          </a:r>
+          <a:r>
+            <a:rPr lang="es-ES_tradnl" sz="1600" kern="1200" dirty="0">
+              <a:latin typeface="Tw Cen MT" panose="020B0602020104020603"/>
+            </a:rPr>
+            <a:t>colaboradores</a:t>
+          </a:r>
+          <a:r>
+            <a:rPr lang="es-ES_tradnl" sz="1600" kern="1200" dirty="0"/>
+            <a:t>. </a:t>
           </a:r>
           <a:endParaRPr lang="es-PE" sz="1600" kern="1200" dirty="0"/>
         </a:p>
@@ -14629,22 +15036,14 @@
           </a:pPr>
           <a:r>
             <a:rPr lang="es-ES_tradnl" sz="1600" kern="1200" dirty="0"/>
-            <a:t>El proyecto demuestra cómo Machine </a:t>
-          </a:r>
-          <a:r>
-            <a:rPr lang="es-ES_tradnl" sz="1600" kern="1200" dirty="0" err="1"/>
-            <a:t>Learning</a:t>
-          </a:r>
-          <a:r>
-            <a:rPr lang="es-ES_tradnl" sz="1600" kern="1200" dirty="0"/>
-            <a:t> puede aportar valor en decisiones estratégicas dentro de una consultora.</a:t>
+            <a:t>El proyecto demuestra cómo Machine Learning puede aportar valor en decisiones estratégicas dentro de una consultora.</a:t>
           </a:r>
           <a:endParaRPr lang="es-PE" sz="1600" kern="1200" dirty="0"/>
         </a:p>
       </dsp:txBody>
       <dsp:txXfrm>
-        <a:off x="6677614" y="838521"/>
-        <a:ext cx="3560302" cy="2593549"/>
+        <a:off x="6666424" y="838521"/>
+        <a:ext cx="3576959" cy="2593549"/>
       </dsp:txXfrm>
     </dsp:sp>
   </dsp:spTree>
@@ -25872,7 +26271,7 @@
           <a:p>
             <a:fld id="{D50D4497-B2B3-BB42-BCC6-66A0EC10B0E4}" type="datetimeFigureOut">
               <a:rPr lang="es-ES_tradnl" smtClean="0"/>
-              <a:t>10/05/2026</a:t>
+              <a:t>14/05/2026</a:t>
             </a:fld>
             <a:endParaRPr lang="es-ES_tradnl"/>
           </a:p>
@@ -26281,7 +26680,7 @@
           <a:noFill/>
           <a:extLst>
             <a:ext uri="{909E8E84-426E-40dd-AFC4-6F175D3DCCD1}">
-              <a14:hiddenFill xmlns:a14="http://schemas.microsoft.com/office/drawing/2010/main" xmlns="">
+              <a14:hiddenFill xmlns="" xmlns:a14="http://schemas.microsoft.com/office/drawing/2010/main">
                 <a:solidFill>
                   <a:srgbClr val="FFFFFF"/>
                 </a:solidFill>
@@ -26340,7 +26739,7 @@
             </a:ln>
             <a:extLst>
               <a:ext uri="{91240B29-F687-4f45-9708-019B960494DF}">
-                <a14:hiddenLine xmlns:a14="http://schemas.microsoft.com/office/drawing/2010/main" xmlns="" w="9525">
+                <a14:hiddenLine xmlns="" xmlns:a14="http://schemas.microsoft.com/office/drawing/2010/main" w="9525">
                   <a:solidFill>
                     <a:srgbClr val="000000"/>
                   </a:solidFill>
@@ -26437,7 +26836,7 @@
             </a:ln>
             <a:extLst>
               <a:ext uri="{91240B29-F687-4f45-9708-019B960494DF}">
-                <a14:hiddenLine xmlns:a14="http://schemas.microsoft.com/office/drawing/2010/main" xmlns="" w="9525">
+                <a14:hiddenLine xmlns="" xmlns:a14="http://schemas.microsoft.com/office/drawing/2010/main" w="9525">
                   <a:solidFill>
                     <a:srgbClr val="000000"/>
                   </a:solidFill>
@@ -26534,7 +26933,7 @@
             </a:ln>
             <a:extLst>
               <a:ext uri="{91240B29-F687-4f45-9708-019B960494DF}">
-                <a14:hiddenLine xmlns:a14="http://schemas.microsoft.com/office/drawing/2010/main" xmlns="" w="9525">
+                <a14:hiddenLine xmlns="" xmlns:a14="http://schemas.microsoft.com/office/drawing/2010/main" w="9525">
                   <a:solidFill>
                     <a:srgbClr val="000000"/>
                   </a:solidFill>
@@ -26575,7 +26974,7 @@
             </a:ln>
             <a:extLst>
               <a:ext uri="{91240B29-F687-4f45-9708-019B960494DF}">
-                <a14:hiddenLine xmlns:a14="http://schemas.microsoft.com/office/drawing/2010/main" xmlns="" w="9525">
+                <a14:hiddenLine xmlns="" xmlns:a14="http://schemas.microsoft.com/office/drawing/2010/main" w="9525">
                   <a:solidFill>
                     <a:srgbClr val="000000"/>
                   </a:solidFill>
@@ -26672,7 +27071,7 @@
             </a:ln>
             <a:extLst>
               <a:ext uri="{91240B29-F687-4f45-9708-019B960494DF}">
-                <a14:hiddenLine xmlns:a14="http://schemas.microsoft.com/office/drawing/2010/main" xmlns="" w="9525">
+                <a14:hiddenLine xmlns="" xmlns:a14="http://schemas.microsoft.com/office/drawing/2010/main" w="9525">
                   <a:solidFill>
                     <a:srgbClr val="000000"/>
                   </a:solidFill>
@@ -26741,7 +27140,7 @@
             </a:ln>
             <a:extLst>
               <a:ext uri="{91240B29-F687-4f45-9708-019B960494DF}">
-                <a14:hiddenLine xmlns:a14="http://schemas.microsoft.com/office/drawing/2010/main" xmlns="" w="9525">
+                <a14:hiddenLine xmlns="" xmlns:a14="http://schemas.microsoft.com/office/drawing/2010/main" w="9525">
                   <a:solidFill>
                     <a:srgbClr val="000000"/>
                   </a:solidFill>
@@ -26810,7 +27209,7 @@
             </a:ln>
             <a:extLst>
               <a:ext uri="{91240B29-F687-4f45-9708-019B960494DF}">
-                <a14:hiddenLine xmlns:a14="http://schemas.microsoft.com/office/drawing/2010/main" xmlns="" w="9525">
+                <a14:hiddenLine xmlns="" xmlns:a14="http://schemas.microsoft.com/office/drawing/2010/main" w="9525">
                   <a:solidFill>
                     <a:srgbClr val="000000"/>
                   </a:solidFill>
@@ -26907,7 +27306,7 @@
             </a:ln>
             <a:extLst>
               <a:ext uri="{91240B29-F687-4f45-9708-019B960494DF}">
-                <a14:hiddenLine xmlns:a14="http://schemas.microsoft.com/office/drawing/2010/main" xmlns="" w="9525">
+                <a14:hiddenLine xmlns="" xmlns:a14="http://schemas.microsoft.com/office/drawing/2010/main" w="9525">
                   <a:solidFill>
                     <a:srgbClr val="000000"/>
                   </a:solidFill>
@@ -26976,7 +27375,7 @@
             </a:ln>
             <a:extLst>
               <a:ext uri="{91240B29-F687-4f45-9708-019B960494DF}">
-                <a14:hiddenLine xmlns:a14="http://schemas.microsoft.com/office/drawing/2010/main" xmlns="" w="9525">
+                <a14:hiddenLine xmlns="" xmlns:a14="http://schemas.microsoft.com/office/drawing/2010/main" w="9525">
                   <a:solidFill>
                     <a:srgbClr val="000000"/>
                   </a:solidFill>
@@ -27045,7 +27444,7 @@
             </a:ln>
             <a:extLst>
               <a:ext uri="{91240B29-F687-4f45-9708-019B960494DF}">
-                <a14:hiddenLine xmlns:a14="http://schemas.microsoft.com/office/drawing/2010/main" xmlns="" w="9525">
+                <a14:hiddenLine xmlns="" xmlns:a14="http://schemas.microsoft.com/office/drawing/2010/main" w="9525">
                   <a:solidFill>
                     <a:srgbClr val="000000"/>
                   </a:solidFill>
@@ -27142,7 +27541,7 @@
             </a:ln>
             <a:extLst>
               <a:ext uri="{91240B29-F687-4f45-9708-019B960494DF}">
-                <a14:hiddenLine xmlns:a14="http://schemas.microsoft.com/office/drawing/2010/main" xmlns="" w="9525">
+                <a14:hiddenLine xmlns="" xmlns:a14="http://schemas.microsoft.com/office/drawing/2010/main" w="9525">
                   <a:solidFill>
                     <a:srgbClr val="000000"/>
                   </a:solidFill>
@@ -27239,7 +27638,7 @@
             </a:ln>
             <a:extLst>
               <a:ext uri="{91240B29-F687-4f45-9708-019B960494DF}">
-                <a14:hiddenLine xmlns:a14="http://schemas.microsoft.com/office/drawing/2010/main" xmlns="" w="9525">
+                <a14:hiddenLine xmlns="" xmlns:a14="http://schemas.microsoft.com/office/drawing/2010/main" w="9525">
                   <a:solidFill>
                     <a:srgbClr val="000000"/>
                   </a:solidFill>
@@ -27308,7 +27707,7 @@
             </a:ln>
             <a:extLst>
               <a:ext uri="{91240B29-F687-4f45-9708-019B960494DF}">
-                <a14:hiddenLine xmlns:a14="http://schemas.microsoft.com/office/drawing/2010/main" xmlns="" w="9525">
+                <a14:hiddenLine xmlns="" xmlns:a14="http://schemas.microsoft.com/office/drawing/2010/main" w="9525">
                   <a:solidFill>
                     <a:srgbClr val="000000"/>
                   </a:solidFill>
@@ -27425,7 +27824,7 @@
             </a:ln>
             <a:extLst>
               <a:ext uri="{91240B29-F687-4f45-9708-019B960494DF}">
-                <a14:hiddenLine xmlns:a14="http://schemas.microsoft.com/office/drawing/2010/main" xmlns="" w="9525">
+                <a14:hiddenLine xmlns="" xmlns:a14="http://schemas.microsoft.com/office/drawing/2010/main" w="9525">
                   <a:solidFill>
                     <a:srgbClr val="000000"/>
                   </a:solidFill>
@@ -27494,7 +27893,7 @@
             </a:ln>
             <a:extLst>
               <a:ext uri="{91240B29-F687-4f45-9708-019B960494DF}">
-                <a14:hiddenLine xmlns:a14="http://schemas.microsoft.com/office/drawing/2010/main" xmlns="" w="9525">
+                <a14:hiddenLine xmlns="" xmlns:a14="http://schemas.microsoft.com/office/drawing/2010/main" w="9525">
                   <a:solidFill>
                     <a:srgbClr val="000000"/>
                   </a:solidFill>
@@ -27591,7 +27990,7 @@
             </a:ln>
             <a:extLst>
               <a:ext uri="{91240B29-F687-4f45-9708-019B960494DF}">
-                <a14:hiddenLine xmlns:a14="http://schemas.microsoft.com/office/drawing/2010/main" xmlns="" w="9525">
+                <a14:hiddenLine xmlns="" xmlns:a14="http://schemas.microsoft.com/office/drawing/2010/main" w="9525">
                   <a:solidFill>
                     <a:srgbClr val="000000"/>
                   </a:solidFill>
@@ -27688,7 +28087,7 @@
             </a:ln>
             <a:extLst>
               <a:ext uri="{91240B29-F687-4f45-9708-019B960494DF}">
-                <a14:hiddenLine xmlns:a14="http://schemas.microsoft.com/office/drawing/2010/main" xmlns="" w="9525">
+                <a14:hiddenLine xmlns="" xmlns:a14="http://schemas.microsoft.com/office/drawing/2010/main" w="9525">
                   <a:solidFill>
                     <a:srgbClr val="000000"/>
                   </a:solidFill>
@@ -27757,7 +28156,7 @@
             </a:ln>
             <a:extLst>
               <a:ext uri="{91240B29-F687-4f45-9708-019B960494DF}">
-                <a14:hiddenLine xmlns:a14="http://schemas.microsoft.com/office/drawing/2010/main" xmlns="" w="9525">
+                <a14:hiddenLine xmlns="" xmlns:a14="http://schemas.microsoft.com/office/drawing/2010/main" w="9525">
                   <a:solidFill>
                     <a:srgbClr val="000000"/>
                   </a:solidFill>
@@ -27854,7 +28253,7 @@
             </a:ln>
             <a:extLst>
               <a:ext uri="{91240B29-F687-4f45-9708-019B960494DF}">
-                <a14:hiddenLine xmlns:a14="http://schemas.microsoft.com/office/drawing/2010/main" xmlns="" w="9525">
+                <a14:hiddenLine xmlns="" xmlns:a14="http://schemas.microsoft.com/office/drawing/2010/main" w="9525">
                   <a:solidFill>
                     <a:srgbClr val="000000"/>
                   </a:solidFill>
@@ -27951,7 +28350,7 @@
             </a:ln>
             <a:extLst>
               <a:ext uri="{91240B29-F687-4f45-9708-019B960494DF}">
-                <a14:hiddenLine xmlns:a14="http://schemas.microsoft.com/office/drawing/2010/main" xmlns="" w="9525">
+                <a14:hiddenLine xmlns="" xmlns:a14="http://schemas.microsoft.com/office/drawing/2010/main" w="9525">
                   <a:solidFill>
                     <a:srgbClr val="000000"/>
                   </a:solidFill>
@@ -28014,7 +28413,7 @@
             </a:ln>
             <a:extLst>
               <a:ext uri="{91240B29-F687-4f45-9708-019B960494DF}">
-                <a14:hiddenLine xmlns:a14="http://schemas.microsoft.com/office/drawing/2010/main" xmlns="" w="9525">
+                <a14:hiddenLine xmlns="" xmlns:a14="http://schemas.microsoft.com/office/drawing/2010/main" w="9525">
                   <a:solidFill>
                     <a:srgbClr val="000000"/>
                   </a:solidFill>
@@ -28111,7 +28510,7 @@
             </a:ln>
             <a:extLst>
               <a:ext uri="{91240B29-F687-4f45-9708-019B960494DF}">
-                <a14:hiddenLine xmlns:a14="http://schemas.microsoft.com/office/drawing/2010/main" xmlns="" w="9525">
+                <a14:hiddenLine xmlns="" xmlns:a14="http://schemas.microsoft.com/office/drawing/2010/main" w="9525">
                   <a:solidFill>
                     <a:srgbClr val="000000"/>
                   </a:solidFill>
@@ -28174,7 +28573,7 @@
             </a:ln>
             <a:extLst>
               <a:ext uri="{91240B29-F687-4f45-9708-019B960494DF}">
-                <a14:hiddenLine xmlns:a14="http://schemas.microsoft.com/office/drawing/2010/main" xmlns="" w="9525">
+                <a14:hiddenLine xmlns="" xmlns:a14="http://schemas.microsoft.com/office/drawing/2010/main" w="9525">
                   <a:solidFill>
                     <a:srgbClr val="000000"/>
                   </a:solidFill>
@@ -28271,7 +28670,7 @@
             </a:ln>
             <a:extLst>
               <a:ext uri="{91240B29-F687-4f45-9708-019B960494DF}">
-                <a14:hiddenLine xmlns:a14="http://schemas.microsoft.com/office/drawing/2010/main" xmlns="" w="9525">
+                <a14:hiddenLine xmlns="" xmlns:a14="http://schemas.microsoft.com/office/drawing/2010/main" w="9525">
                   <a:solidFill>
                     <a:srgbClr val="000000"/>
                   </a:solidFill>
@@ -28346,7 +28745,7 @@
             </a:ln>
             <a:extLst>
               <a:ext uri="{91240B29-F687-4f45-9708-019B960494DF}">
-                <a14:hiddenLine xmlns:a14="http://schemas.microsoft.com/office/drawing/2010/main" xmlns="" w="9525">
+                <a14:hiddenLine xmlns="" xmlns:a14="http://schemas.microsoft.com/office/drawing/2010/main" w="9525">
                   <a:solidFill>
                     <a:srgbClr val="000000"/>
                   </a:solidFill>
@@ -28443,7 +28842,7 @@
             </a:ln>
             <a:extLst>
               <a:ext uri="{91240B29-F687-4f45-9708-019B960494DF}">
-                <a14:hiddenLine xmlns:a14="http://schemas.microsoft.com/office/drawing/2010/main" xmlns="" w="9525">
+                <a14:hiddenLine xmlns="" xmlns:a14="http://schemas.microsoft.com/office/drawing/2010/main" w="9525">
                   <a:solidFill>
                     <a:srgbClr val="000000"/>
                   </a:solidFill>
@@ -28518,7 +28917,7 @@
             </a:ln>
             <a:extLst>
               <a:ext uri="{91240B29-F687-4f45-9708-019B960494DF}">
-                <a14:hiddenLine xmlns:a14="http://schemas.microsoft.com/office/drawing/2010/main" xmlns="" w="9525">
+                <a14:hiddenLine xmlns="" xmlns:a14="http://schemas.microsoft.com/office/drawing/2010/main" w="9525">
                   <a:solidFill>
                     <a:srgbClr val="000000"/>
                   </a:solidFill>
@@ -28615,7 +29014,7 @@
             </a:ln>
             <a:extLst>
               <a:ext uri="{91240B29-F687-4f45-9708-019B960494DF}">
-                <a14:hiddenLine xmlns:a14="http://schemas.microsoft.com/office/drawing/2010/main" xmlns="" w="9525">
+                <a14:hiddenLine xmlns="" xmlns:a14="http://schemas.microsoft.com/office/drawing/2010/main" w="9525">
                   <a:solidFill>
                     <a:srgbClr val="000000"/>
                   </a:solidFill>
@@ -28656,7 +29055,7 @@
             </a:ln>
             <a:extLst>
               <a:ext uri="{91240B29-F687-4f45-9708-019B960494DF}">
-                <a14:hiddenLine xmlns:a14="http://schemas.microsoft.com/office/drawing/2010/main" xmlns="" w="9525">
+                <a14:hiddenLine xmlns="" xmlns:a14="http://schemas.microsoft.com/office/drawing/2010/main" w="9525">
                   <a:solidFill>
                     <a:srgbClr val="000000"/>
                   </a:solidFill>
@@ -28753,7 +29152,7 @@
             </a:ln>
             <a:extLst>
               <a:ext uri="{91240B29-F687-4f45-9708-019B960494DF}">
-                <a14:hiddenLine xmlns:a14="http://schemas.microsoft.com/office/drawing/2010/main" xmlns="" w="9525">
+                <a14:hiddenLine xmlns="" xmlns:a14="http://schemas.microsoft.com/office/drawing/2010/main" w="9525">
                   <a:solidFill>
                     <a:srgbClr val="000000"/>
                   </a:solidFill>
@@ -28822,7 +29221,7 @@
             </a:ln>
             <a:extLst>
               <a:ext uri="{91240B29-F687-4f45-9708-019B960494DF}">
-                <a14:hiddenLine xmlns:a14="http://schemas.microsoft.com/office/drawing/2010/main" xmlns="" w="9525">
+                <a14:hiddenLine xmlns="" xmlns:a14="http://schemas.microsoft.com/office/drawing/2010/main" w="9525">
                   <a:solidFill>
                     <a:srgbClr val="000000"/>
                   </a:solidFill>
@@ -28891,7 +29290,7 @@
             </a:ln>
             <a:extLst>
               <a:ext uri="{91240B29-F687-4f45-9708-019B960494DF}">
-                <a14:hiddenLine xmlns:a14="http://schemas.microsoft.com/office/drawing/2010/main" xmlns="" w="9525">
+                <a14:hiddenLine xmlns="" xmlns:a14="http://schemas.microsoft.com/office/drawing/2010/main" w="9525">
                   <a:solidFill>
                     <a:srgbClr val="000000"/>
                   </a:solidFill>
@@ -28988,7 +29387,7 @@
             </a:ln>
             <a:extLst>
               <a:ext uri="{91240B29-F687-4f45-9708-019B960494DF}">
-                <a14:hiddenLine xmlns:a14="http://schemas.microsoft.com/office/drawing/2010/main" xmlns="" w="9525">
+                <a14:hiddenLine xmlns="" xmlns:a14="http://schemas.microsoft.com/office/drawing/2010/main" w="9525">
                   <a:solidFill>
                     <a:srgbClr val="000000"/>
                   </a:solidFill>
@@ -29063,7 +29462,7 @@
             </a:ln>
             <a:extLst>
               <a:ext uri="{91240B29-F687-4f45-9708-019B960494DF}">
-                <a14:hiddenLine xmlns:a14="http://schemas.microsoft.com/office/drawing/2010/main" xmlns="" w="9525">
+                <a14:hiddenLine xmlns="" xmlns:a14="http://schemas.microsoft.com/office/drawing/2010/main" w="9525">
                   <a:solidFill>
                     <a:srgbClr val="000000"/>
                   </a:solidFill>
@@ -29132,7 +29531,7 @@
             </a:ln>
             <a:extLst>
               <a:ext uri="{91240B29-F687-4f45-9708-019B960494DF}">
-                <a14:hiddenLine xmlns:a14="http://schemas.microsoft.com/office/drawing/2010/main" xmlns="" w="9525">
+                <a14:hiddenLine xmlns="" xmlns:a14="http://schemas.microsoft.com/office/drawing/2010/main" w="9525">
                   <a:solidFill>
                     <a:srgbClr val="000000"/>
                   </a:solidFill>
@@ -29229,7 +29628,7 @@
             </a:ln>
             <a:extLst>
               <a:ext uri="{91240B29-F687-4f45-9708-019B960494DF}">
-                <a14:hiddenLine xmlns:a14="http://schemas.microsoft.com/office/drawing/2010/main" xmlns="" w="9525">
+                <a14:hiddenLine xmlns="" xmlns:a14="http://schemas.microsoft.com/office/drawing/2010/main" w="9525">
                   <a:solidFill>
                     <a:srgbClr val="000000"/>
                   </a:solidFill>
@@ -29298,7 +29697,7 @@
             </a:ln>
             <a:extLst>
               <a:ext uri="{91240B29-F687-4f45-9708-019B960494DF}">
-                <a14:hiddenLine xmlns:a14="http://schemas.microsoft.com/office/drawing/2010/main" xmlns="" w="9525">
+                <a14:hiddenLine xmlns="" xmlns:a14="http://schemas.microsoft.com/office/drawing/2010/main" w="9525">
                   <a:solidFill>
                     <a:srgbClr val="000000"/>
                   </a:solidFill>
@@ -29395,7 +29794,7 @@
             </a:ln>
             <a:extLst>
               <a:ext uri="{91240B29-F687-4f45-9708-019B960494DF}">
-                <a14:hiddenLine xmlns:a14="http://schemas.microsoft.com/office/drawing/2010/main" xmlns="" w="9525">
+                <a14:hiddenLine xmlns="" xmlns:a14="http://schemas.microsoft.com/office/drawing/2010/main" w="9525">
                   <a:solidFill>
                     <a:srgbClr val="000000"/>
                   </a:solidFill>
@@ -29464,7 +29863,7 @@
             </a:ln>
             <a:extLst>
               <a:ext uri="{91240B29-F687-4f45-9708-019B960494DF}">
-                <a14:hiddenLine xmlns:a14="http://schemas.microsoft.com/office/drawing/2010/main" xmlns="" w="9525">
+                <a14:hiddenLine xmlns="" xmlns:a14="http://schemas.microsoft.com/office/drawing/2010/main" w="9525">
                   <a:solidFill>
                     <a:srgbClr val="000000"/>
                   </a:solidFill>
@@ -29561,7 +29960,7 @@
             </a:ln>
             <a:extLst>
               <a:ext uri="{91240B29-F687-4f45-9708-019B960494DF}">
-                <a14:hiddenLine xmlns:a14="http://schemas.microsoft.com/office/drawing/2010/main" xmlns="" w="9525">
+                <a14:hiddenLine xmlns="" xmlns:a14="http://schemas.microsoft.com/office/drawing/2010/main" w="9525">
                   <a:solidFill>
                     <a:srgbClr val="000000"/>
                   </a:solidFill>
@@ -29602,7 +30001,7 @@
             </a:ln>
             <a:extLst>
               <a:ext uri="{91240B29-F687-4f45-9708-019B960494DF}">
-                <a14:hiddenLine xmlns:a14="http://schemas.microsoft.com/office/drawing/2010/main" xmlns="" w="9525">
+                <a14:hiddenLine xmlns="" xmlns:a14="http://schemas.microsoft.com/office/drawing/2010/main" w="9525">
                   <a:solidFill>
                     <a:srgbClr val="000000"/>
                   </a:solidFill>
@@ -29674,7 +30073,7 @@
             </a:ln>
             <a:extLst>
               <a:ext uri="{91240B29-F687-4f45-9708-019B960494DF}">
-                <a14:hiddenLine xmlns:a14="http://schemas.microsoft.com/office/drawing/2010/main" xmlns="" w="9525">
+                <a14:hiddenLine xmlns="" xmlns:a14="http://schemas.microsoft.com/office/drawing/2010/main" w="9525">
                   <a:solidFill>
                     <a:srgbClr val="000000"/>
                   </a:solidFill>
@@ -29771,7 +30170,7 @@
             </a:ln>
             <a:extLst>
               <a:ext uri="{91240B29-F687-4f45-9708-019B960494DF}">
-                <a14:hiddenLine xmlns:a14="http://schemas.microsoft.com/office/drawing/2010/main" xmlns="" w="9525">
+                <a14:hiddenLine xmlns="" xmlns:a14="http://schemas.microsoft.com/office/drawing/2010/main" w="9525">
                   <a:solidFill>
                     <a:srgbClr val="000000"/>
                   </a:solidFill>
@@ -29840,7 +30239,7 @@
             </a:ln>
             <a:extLst>
               <a:ext uri="{91240B29-F687-4f45-9708-019B960494DF}">
-                <a14:hiddenLine xmlns:a14="http://schemas.microsoft.com/office/drawing/2010/main" xmlns="" w="9525">
+                <a14:hiddenLine xmlns="" xmlns:a14="http://schemas.microsoft.com/office/drawing/2010/main" w="9525">
                   <a:solidFill>
                     <a:srgbClr val="000000"/>
                   </a:solidFill>
@@ -29937,7 +30336,7 @@
             </a:ln>
             <a:extLst>
               <a:ext uri="{91240B29-F687-4f45-9708-019B960494DF}">
-                <a14:hiddenLine xmlns:a14="http://schemas.microsoft.com/office/drawing/2010/main" xmlns="" w="9525">
+                <a14:hiddenLine xmlns="" xmlns:a14="http://schemas.microsoft.com/office/drawing/2010/main" w="9525">
                   <a:solidFill>
                     <a:srgbClr val="000000"/>
                   </a:solidFill>
@@ -30034,7 +30433,7 @@
             </a:ln>
             <a:extLst>
               <a:ext uri="{91240B29-F687-4f45-9708-019B960494DF}">
-                <a14:hiddenLine xmlns:a14="http://schemas.microsoft.com/office/drawing/2010/main" xmlns="" w="9525">
+                <a14:hiddenLine xmlns="" xmlns:a14="http://schemas.microsoft.com/office/drawing/2010/main" w="9525">
                   <a:solidFill>
                     <a:srgbClr val="000000"/>
                   </a:solidFill>
@@ -30106,7 +30505,7 @@
             </a:ln>
             <a:extLst>
               <a:ext uri="{91240B29-F687-4f45-9708-019B960494DF}">
-                <a14:hiddenLine xmlns:a14="http://schemas.microsoft.com/office/drawing/2010/main" xmlns="" w="9525">
+                <a14:hiddenLine xmlns="" xmlns:a14="http://schemas.microsoft.com/office/drawing/2010/main" w="9525">
                   <a:solidFill>
                     <a:srgbClr val="000000"/>
                   </a:solidFill>
@@ -30175,7 +30574,7 @@
             </a:ln>
             <a:extLst>
               <a:ext uri="{91240B29-F687-4f45-9708-019B960494DF}">
-                <a14:hiddenLine xmlns:a14="http://schemas.microsoft.com/office/drawing/2010/main" xmlns="" w="9525">
+                <a14:hiddenLine xmlns="" xmlns:a14="http://schemas.microsoft.com/office/drawing/2010/main" w="9525">
                   <a:solidFill>
                     <a:srgbClr val="000000"/>
                   </a:solidFill>
@@ -30272,7 +30671,7 @@
             </a:ln>
             <a:extLst>
               <a:ext uri="{91240B29-F687-4f45-9708-019B960494DF}">
-                <a14:hiddenLine xmlns:a14="http://schemas.microsoft.com/office/drawing/2010/main" xmlns="" w="9525">
+                <a14:hiddenLine xmlns="" xmlns:a14="http://schemas.microsoft.com/office/drawing/2010/main" w="9525">
                   <a:solidFill>
                     <a:srgbClr val="000000"/>
                   </a:solidFill>
@@ -30369,7 +30768,7 @@
             </a:ln>
             <a:extLst>
               <a:ext uri="{91240B29-F687-4f45-9708-019B960494DF}">
-                <a14:hiddenLine xmlns:a14="http://schemas.microsoft.com/office/drawing/2010/main" xmlns="" w="9525">
+                <a14:hiddenLine xmlns="" xmlns:a14="http://schemas.microsoft.com/office/drawing/2010/main" w="9525">
                   <a:solidFill>
                     <a:srgbClr val="000000"/>
                   </a:solidFill>
@@ -30438,7 +30837,7 @@
             </a:ln>
             <a:extLst>
               <a:ext uri="{91240B29-F687-4f45-9708-019B960494DF}">
-                <a14:hiddenLine xmlns:a14="http://schemas.microsoft.com/office/drawing/2010/main" xmlns="" w="9525">
+                <a14:hiddenLine xmlns="" xmlns:a14="http://schemas.microsoft.com/office/drawing/2010/main" w="9525">
                   <a:solidFill>
                     <a:srgbClr val="000000"/>
                   </a:solidFill>
@@ -30565,7 +30964,7 @@
             </a:ln>
             <a:extLst>
               <a:ext uri="{91240B29-F687-4f45-9708-019B960494DF}">
-                <a14:hiddenLine xmlns:a14="http://schemas.microsoft.com/office/drawing/2010/main" xmlns="" w="9525">
+                <a14:hiddenLine xmlns="" xmlns:a14="http://schemas.microsoft.com/office/drawing/2010/main" w="9525">
                   <a:solidFill>
                     <a:srgbClr val="000000"/>
                   </a:solidFill>
@@ -30640,7 +31039,7 @@
             </a:ln>
             <a:extLst>
               <a:ext uri="{91240B29-F687-4f45-9708-019B960494DF}">
-                <a14:hiddenLine xmlns:a14="http://schemas.microsoft.com/office/drawing/2010/main" xmlns="" w="9525">
+                <a14:hiddenLine xmlns="" xmlns:a14="http://schemas.microsoft.com/office/drawing/2010/main" w="9525">
                   <a:solidFill>
                     <a:srgbClr val="000000"/>
                   </a:solidFill>
@@ -30737,7 +31136,7 @@
             </a:ln>
             <a:extLst>
               <a:ext uri="{91240B29-F687-4f45-9708-019B960494DF}">
-                <a14:hiddenLine xmlns:a14="http://schemas.microsoft.com/office/drawing/2010/main" xmlns="" w="9525">
+                <a14:hiddenLine xmlns="" xmlns:a14="http://schemas.microsoft.com/office/drawing/2010/main" w="9525">
                   <a:solidFill>
                     <a:srgbClr val="000000"/>
                   </a:solidFill>
@@ -30884,7 +31283,7 @@
           <a:p>
             <a:fld id="{92E65FDA-6ECA-F649-9D40-2B52E01D4DC0}" type="datetimeFigureOut">
               <a:rPr lang="es-ES_tradnl" smtClean="0"/>
-              <a:t>10/05/2026</a:t>
+              <a:t>14/05/2026</a:t>
             </a:fld>
             <a:endParaRPr lang="es-ES_tradnl"/>
           </a:p>
@@ -31151,7 +31550,7 @@
           <a:p>
             <a:fld id="{92E65FDA-6ECA-F649-9D40-2B52E01D4DC0}" type="datetimeFigureOut">
               <a:rPr lang="es-ES_tradnl" smtClean="0"/>
-              <a:t>10/05/2026</a:t>
+              <a:t>14/05/2026</a:t>
             </a:fld>
             <a:endParaRPr lang="es-ES_tradnl"/>
           </a:p>
@@ -31347,7 +31746,7 @@
           <a:p>
             <a:fld id="{92E65FDA-6ECA-F649-9D40-2B52E01D4DC0}" type="datetimeFigureOut">
               <a:rPr lang="es-ES_tradnl" smtClean="0"/>
-              <a:t>10/05/2026</a:t>
+              <a:t>14/05/2026</a:t>
             </a:fld>
             <a:endParaRPr lang="es-ES_tradnl"/>
           </a:p>
@@ -31610,7 +32009,7 @@
           <a:p>
             <a:fld id="{92E65FDA-6ECA-F649-9D40-2B52E01D4DC0}" type="datetimeFigureOut">
               <a:rPr lang="es-ES_tradnl" smtClean="0"/>
-              <a:t>10/05/2026</a:t>
+              <a:t>14/05/2026</a:t>
             </a:fld>
             <a:endParaRPr lang="es-ES_tradnl"/>
           </a:p>
@@ -32044,7 +32443,7 @@
           <a:p>
             <a:fld id="{92E65FDA-6ECA-F649-9D40-2B52E01D4DC0}" type="datetimeFigureOut">
               <a:rPr lang="es-ES_tradnl" smtClean="0"/>
-              <a:t>10/05/2026</a:t>
+              <a:t>14/05/2026</a:t>
             </a:fld>
             <a:endParaRPr lang="es-ES_tradnl"/>
           </a:p>
@@ -32590,7 +32989,7 @@
           <a:p>
             <a:fld id="{92E65FDA-6ECA-F649-9D40-2B52E01D4DC0}" type="datetimeFigureOut">
               <a:rPr lang="es-ES_tradnl" smtClean="0"/>
-              <a:t>10/05/2026</a:t>
+              <a:t>14/05/2026</a:t>
             </a:fld>
             <a:endParaRPr lang="es-ES_tradnl"/>
           </a:p>
@@ -33310,7 +33709,7 @@
           <a:p>
             <a:fld id="{92E65FDA-6ECA-F649-9D40-2B52E01D4DC0}" type="datetimeFigureOut">
               <a:rPr lang="es-ES_tradnl" smtClean="0"/>
-              <a:t>10/05/2026</a:t>
+              <a:t>14/05/2026</a:t>
             </a:fld>
             <a:endParaRPr lang="es-ES_tradnl"/>
           </a:p>
@@ -33480,7 +33879,7 @@
           <a:p>
             <a:fld id="{92E65FDA-6ECA-F649-9D40-2B52E01D4DC0}" type="datetimeFigureOut">
               <a:rPr lang="es-ES_tradnl" smtClean="0"/>
-              <a:t>10/05/2026</a:t>
+              <a:t>14/05/2026</a:t>
             </a:fld>
             <a:endParaRPr lang="es-ES_tradnl"/>
           </a:p>
@@ -33660,7 +34059,7 @@
           <a:p>
             <a:fld id="{92E65FDA-6ECA-F649-9D40-2B52E01D4DC0}" type="datetimeFigureOut">
               <a:rPr lang="es-ES_tradnl" smtClean="0"/>
-              <a:t>10/05/2026</a:t>
+              <a:t>14/05/2026</a:t>
             </a:fld>
             <a:endParaRPr lang="es-ES_tradnl"/>
           </a:p>
@@ -33830,7 +34229,7 @@
           <a:p>
             <a:fld id="{92E65FDA-6ECA-F649-9D40-2B52E01D4DC0}" type="datetimeFigureOut">
               <a:rPr lang="es-ES_tradnl" smtClean="0"/>
-              <a:t>10/05/2026</a:t>
+              <a:t>14/05/2026</a:t>
             </a:fld>
             <a:endParaRPr lang="es-ES_tradnl"/>
           </a:p>
@@ -34080,7 +34479,7 @@
           <a:p>
             <a:fld id="{92E65FDA-6ECA-F649-9D40-2B52E01D4DC0}" type="datetimeFigureOut">
               <a:rPr lang="es-ES_tradnl" smtClean="0"/>
-              <a:t>10/05/2026</a:t>
+              <a:t>14/05/2026</a:t>
             </a:fld>
             <a:endParaRPr lang="es-ES_tradnl"/>
           </a:p>
@@ -34312,7 +34711,7 @@
           <a:p>
             <a:fld id="{92E65FDA-6ECA-F649-9D40-2B52E01D4DC0}" type="datetimeFigureOut">
               <a:rPr lang="es-ES_tradnl" smtClean="0"/>
-              <a:t>10/05/2026</a:t>
+              <a:t>14/05/2026</a:t>
             </a:fld>
             <a:endParaRPr lang="es-ES_tradnl"/>
           </a:p>
@@ -34693,7 +35092,7 @@
           <a:p>
             <a:fld id="{92E65FDA-6ECA-F649-9D40-2B52E01D4DC0}" type="datetimeFigureOut">
               <a:rPr lang="es-ES_tradnl" smtClean="0"/>
-              <a:t>10/05/2026</a:t>
+              <a:t>14/05/2026</a:t>
             </a:fld>
             <a:endParaRPr lang="es-ES_tradnl"/>
           </a:p>
@@ -34811,7 +35210,7 @@
           <a:p>
             <a:fld id="{92E65FDA-6ECA-F649-9D40-2B52E01D4DC0}" type="datetimeFigureOut">
               <a:rPr lang="es-ES_tradnl" smtClean="0"/>
-              <a:t>10/05/2026</a:t>
+              <a:t>14/05/2026</a:t>
             </a:fld>
             <a:endParaRPr lang="es-ES_tradnl"/>
           </a:p>
@@ -34906,7 +35305,7 @@
           <a:p>
             <a:fld id="{92E65FDA-6ECA-F649-9D40-2B52E01D4DC0}" type="datetimeFigureOut">
               <a:rPr lang="es-ES_tradnl" smtClean="0"/>
-              <a:t>10/05/2026</a:t>
+              <a:t>14/05/2026</a:t>
             </a:fld>
             <a:endParaRPr lang="es-ES_tradnl"/>
           </a:p>
@@ -35155,7 +35554,7 @@
           <a:p>
             <a:fld id="{92E65FDA-6ECA-F649-9D40-2B52E01D4DC0}" type="datetimeFigureOut">
               <a:rPr lang="es-ES_tradnl" smtClean="0"/>
-              <a:t>10/05/2026</a:t>
+              <a:t>14/05/2026</a:t>
             </a:fld>
             <a:endParaRPr lang="es-ES_tradnl"/>
           </a:p>
@@ -35435,7 +35834,7 @@
           <a:p>
             <a:fld id="{92E65FDA-6ECA-F649-9D40-2B52E01D4DC0}" type="datetimeFigureOut">
               <a:rPr lang="es-ES_tradnl" smtClean="0"/>
-              <a:t>10/05/2026</a:t>
+              <a:t>14/05/2026</a:t>
             </a:fld>
             <a:endParaRPr lang="es-ES_tradnl"/>
           </a:p>
@@ -35558,7 +35957,7 @@
           <a:noFill/>
           <a:extLst>
             <a:ext uri="{909E8E84-426E-40dd-AFC4-6F175D3DCCD1}">
-              <a14:hiddenFill xmlns:a14="http://schemas.microsoft.com/office/drawing/2010/main" xmlns="">
+              <a14:hiddenFill xmlns="" xmlns:a14="http://schemas.microsoft.com/office/drawing/2010/main">
                 <a:solidFill>
                   <a:srgbClr val="FFFFFF"/>
                 </a:solidFill>
@@ -35632,7 +36031,7 @@
               </a:ln>
               <a:extLst>
                 <a:ext uri="{91240B29-F687-4f45-9708-019B960494DF}">
-                  <a14:hiddenLine xmlns:a14="http://schemas.microsoft.com/office/drawing/2010/main" xmlns="" w="9525">
+                  <a14:hiddenLine xmlns="" xmlns:a14="http://schemas.microsoft.com/office/drawing/2010/main" w="9525">
                     <a:solidFill>
                       <a:srgbClr val="000000"/>
                     </a:solidFill>
@@ -35729,7 +36128,7 @@
               </a:ln>
               <a:extLst>
                 <a:ext uri="{91240B29-F687-4f45-9708-019B960494DF}">
-                  <a14:hiddenLine xmlns:a14="http://schemas.microsoft.com/office/drawing/2010/main" xmlns="" w="9525">
+                  <a14:hiddenLine xmlns="" xmlns:a14="http://schemas.microsoft.com/office/drawing/2010/main" w="9525">
                     <a:solidFill>
                       <a:srgbClr val="000000"/>
                     </a:solidFill>
@@ -35826,7 +36225,7 @@
               </a:ln>
               <a:extLst>
                 <a:ext uri="{91240B29-F687-4f45-9708-019B960494DF}">
-                  <a14:hiddenLine xmlns:a14="http://schemas.microsoft.com/office/drawing/2010/main" xmlns="" w="9525">
+                  <a14:hiddenLine xmlns="" xmlns:a14="http://schemas.microsoft.com/office/drawing/2010/main" w="9525">
                     <a:solidFill>
                       <a:srgbClr val="000000"/>
                     </a:solidFill>
@@ -35895,7 +36294,7 @@
               </a:ln>
               <a:extLst>
                 <a:ext uri="{91240B29-F687-4f45-9708-019B960494DF}">
-                  <a14:hiddenLine xmlns:a14="http://schemas.microsoft.com/office/drawing/2010/main" xmlns="" w="9525">
+                  <a14:hiddenLine xmlns="" xmlns:a14="http://schemas.microsoft.com/office/drawing/2010/main" w="9525">
                     <a:solidFill>
                       <a:srgbClr val="000000"/>
                     </a:solidFill>
@@ -35992,7 +36391,7 @@
               </a:ln>
               <a:extLst>
                 <a:ext uri="{91240B29-F687-4f45-9708-019B960494DF}">
-                  <a14:hiddenLine xmlns:a14="http://schemas.microsoft.com/office/drawing/2010/main" xmlns="" w="9525">
+                  <a14:hiddenLine xmlns="" xmlns:a14="http://schemas.microsoft.com/office/drawing/2010/main" w="9525">
                     <a:solidFill>
                       <a:srgbClr val="000000"/>
                     </a:solidFill>
@@ -36061,7 +36460,7 @@
               </a:ln>
               <a:extLst>
                 <a:ext uri="{91240B29-F687-4f45-9708-019B960494DF}">
-                  <a14:hiddenLine xmlns:a14="http://schemas.microsoft.com/office/drawing/2010/main" xmlns="" w="9525">
+                  <a14:hiddenLine xmlns="" xmlns:a14="http://schemas.microsoft.com/office/drawing/2010/main" w="9525">
                     <a:solidFill>
                       <a:srgbClr val="000000"/>
                     </a:solidFill>
@@ -36130,7 +36529,7 @@
               </a:ln>
               <a:extLst>
                 <a:ext uri="{91240B29-F687-4f45-9708-019B960494DF}">
-                  <a14:hiddenLine xmlns:a14="http://schemas.microsoft.com/office/drawing/2010/main" xmlns="" w="9525">
+                  <a14:hiddenLine xmlns="" xmlns:a14="http://schemas.microsoft.com/office/drawing/2010/main" w="9525">
                     <a:solidFill>
                       <a:srgbClr val="000000"/>
                     </a:solidFill>
@@ -36227,7 +36626,7 @@
               </a:ln>
               <a:extLst>
                 <a:ext uri="{91240B29-F687-4f45-9708-019B960494DF}">
-                  <a14:hiddenLine xmlns:a14="http://schemas.microsoft.com/office/drawing/2010/main" xmlns="" w="9525">
+                  <a14:hiddenLine xmlns="" xmlns:a14="http://schemas.microsoft.com/office/drawing/2010/main" w="9525">
                     <a:solidFill>
                       <a:srgbClr val="000000"/>
                     </a:solidFill>
@@ -36324,7 +36723,7 @@
               </a:ln>
               <a:extLst>
                 <a:ext uri="{91240B29-F687-4f45-9708-019B960494DF}">
-                  <a14:hiddenLine xmlns:a14="http://schemas.microsoft.com/office/drawing/2010/main" xmlns="" w="9525">
+                  <a14:hiddenLine xmlns="" xmlns:a14="http://schemas.microsoft.com/office/drawing/2010/main" w="9525">
                     <a:solidFill>
                       <a:srgbClr val="000000"/>
                     </a:solidFill>
@@ -36393,7 +36792,7 @@
               </a:ln>
               <a:extLst>
                 <a:ext uri="{91240B29-F687-4f45-9708-019B960494DF}">
-                  <a14:hiddenLine xmlns:a14="http://schemas.microsoft.com/office/drawing/2010/main" xmlns="" w="9525">
+                  <a14:hiddenLine xmlns="" xmlns:a14="http://schemas.microsoft.com/office/drawing/2010/main" w="9525">
                     <a:solidFill>
                       <a:srgbClr val="000000"/>
                     </a:solidFill>
@@ -36510,7 +36909,7 @@
               </a:ln>
               <a:extLst>
                 <a:ext uri="{91240B29-F687-4f45-9708-019B960494DF}">
-                  <a14:hiddenLine xmlns:a14="http://schemas.microsoft.com/office/drawing/2010/main" xmlns="" w="9525">
+                  <a14:hiddenLine xmlns="" xmlns:a14="http://schemas.microsoft.com/office/drawing/2010/main" w="9525">
                     <a:solidFill>
                       <a:srgbClr val="000000"/>
                     </a:solidFill>
@@ -36608,7 +37007,7 @@
               </a:ln>
               <a:extLst>
                 <a:ext uri="{91240B29-F687-4f45-9708-019B960494DF}">
-                  <a14:hiddenLine xmlns:a14="http://schemas.microsoft.com/office/drawing/2010/main" xmlns="" w="9525">
+                  <a14:hiddenLine xmlns="" xmlns:a14="http://schemas.microsoft.com/office/drawing/2010/main" w="9525">
                     <a:solidFill>
                       <a:srgbClr val="000000"/>
                     </a:solidFill>
@@ -36677,7 +37076,7 @@
               </a:ln>
               <a:extLst>
                 <a:ext uri="{91240B29-F687-4f45-9708-019B960494DF}">
-                  <a14:hiddenLine xmlns:a14="http://schemas.microsoft.com/office/drawing/2010/main" xmlns="" w="9525">
+                  <a14:hiddenLine xmlns="" xmlns:a14="http://schemas.microsoft.com/office/drawing/2010/main" w="9525">
                     <a:solidFill>
                       <a:srgbClr val="000000"/>
                     </a:solidFill>
@@ -36746,7 +37145,7 @@
               </a:ln>
               <a:extLst>
                 <a:ext uri="{91240B29-F687-4f45-9708-019B960494DF}">
-                  <a14:hiddenLine xmlns:a14="http://schemas.microsoft.com/office/drawing/2010/main" xmlns="" w="9525">
+                  <a14:hiddenLine xmlns="" xmlns:a14="http://schemas.microsoft.com/office/drawing/2010/main" w="9525">
                     <a:solidFill>
                       <a:srgbClr val="000000"/>
                     </a:solidFill>
@@ -36843,7 +37242,7 @@
               </a:ln>
               <a:extLst>
                 <a:ext uri="{91240B29-F687-4f45-9708-019B960494DF}">
-                  <a14:hiddenLine xmlns:a14="http://schemas.microsoft.com/office/drawing/2010/main" xmlns="" w="9525">
+                  <a14:hiddenLine xmlns="" xmlns:a14="http://schemas.microsoft.com/office/drawing/2010/main" w="9525">
                     <a:solidFill>
                       <a:srgbClr val="000000"/>
                     </a:solidFill>
@@ -36884,7 +37283,7 @@
               </a:ln>
               <a:extLst>
                 <a:ext uri="{91240B29-F687-4f45-9708-019B960494DF}">
-                  <a14:hiddenLine xmlns:a14="http://schemas.microsoft.com/office/drawing/2010/main" xmlns="" w="9525">
+                  <a14:hiddenLine xmlns="" xmlns:a14="http://schemas.microsoft.com/office/drawing/2010/main" w="9525">
                     <a:solidFill>
                       <a:srgbClr val="000000"/>
                     </a:solidFill>
@@ -36956,7 +37355,7 @@
               </a:ln>
               <a:extLst>
                 <a:ext uri="{91240B29-F687-4f45-9708-019B960494DF}">
-                  <a14:hiddenLine xmlns:a14="http://schemas.microsoft.com/office/drawing/2010/main" xmlns="" w="9525">
+                  <a14:hiddenLine xmlns="" xmlns:a14="http://schemas.microsoft.com/office/drawing/2010/main" w="9525">
                     <a:solidFill>
                       <a:srgbClr val="000000"/>
                     </a:solidFill>
@@ -37053,7 +37452,7 @@
               </a:ln>
               <a:extLst>
                 <a:ext uri="{91240B29-F687-4f45-9708-019B960494DF}">
-                  <a14:hiddenLine xmlns:a14="http://schemas.microsoft.com/office/drawing/2010/main" xmlns="" w="9525">
+                  <a14:hiddenLine xmlns="" xmlns:a14="http://schemas.microsoft.com/office/drawing/2010/main" w="9525">
                     <a:solidFill>
                       <a:srgbClr val="000000"/>
                     </a:solidFill>
@@ -37122,7 +37521,7 @@
               </a:ln>
               <a:extLst>
                 <a:ext uri="{91240B29-F687-4f45-9708-019B960494DF}">
-                  <a14:hiddenLine xmlns:a14="http://schemas.microsoft.com/office/drawing/2010/main" xmlns="" w="9525">
+                  <a14:hiddenLine xmlns="" xmlns:a14="http://schemas.microsoft.com/office/drawing/2010/main" w="9525">
                     <a:solidFill>
                       <a:srgbClr val="000000"/>
                     </a:solidFill>
@@ -37219,7 +37618,7 @@
               </a:ln>
               <a:extLst>
                 <a:ext uri="{91240B29-F687-4f45-9708-019B960494DF}">
-                  <a14:hiddenLine xmlns:a14="http://schemas.microsoft.com/office/drawing/2010/main" xmlns="" w="9525">
+                  <a14:hiddenLine xmlns="" xmlns:a14="http://schemas.microsoft.com/office/drawing/2010/main" w="9525">
                     <a:solidFill>
                       <a:srgbClr val="000000"/>
                     </a:solidFill>
@@ -37291,7 +37690,7 @@
               </a:ln>
               <a:extLst>
                 <a:ext uri="{91240B29-F687-4f45-9708-019B960494DF}">
-                  <a14:hiddenLine xmlns:a14="http://schemas.microsoft.com/office/drawing/2010/main" xmlns="" w="9525">
+                  <a14:hiddenLine xmlns="" xmlns:a14="http://schemas.microsoft.com/office/drawing/2010/main" w="9525">
                     <a:solidFill>
                       <a:srgbClr val="000000"/>
                     </a:solidFill>
@@ -37360,7 +37759,7 @@
               </a:ln>
               <a:extLst>
                 <a:ext uri="{91240B29-F687-4f45-9708-019B960494DF}">
-                  <a14:hiddenLine xmlns:a14="http://schemas.microsoft.com/office/drawing/2010/main" xmlns="" w="9525">
+                  <a14:hiddenLine xmlns="" xmlns:a14="http://schemas.microsoft.com/office/drawing/2010/main" w="9525">
                     <a:solidFill>
                       <a:srgbClr val="000000"/>
                     </a:solidFill>
@@ -37457,7 +37856,7 @@
               </a:ln>
               <a:extLst>
                 <a:ext uri="{91240B29-F687-4f45-9708-019B960494DF}">
-                  <a14:hiddenLine xmlns:a14="http://schemas.microsoft.com/office/drawing/2010/main" xmlns="" w="9525">
+                  <a14:hiddenLine xmlns="" xmlns:a14="http://schemas.microsoft.com/office/drawing/2010/main" w="9525">
                     <a:solidFill>
                       <a:srgbClr val="000000"/>
                     </a:solidFill>
@@ -37554,7 +37953,7 @@
               </a:ln>
               <a:extLst>
                 <a:ext uri="{91240B29-F687-4f45-9708-019B960494DF}">
-                  <a14:hiddenLine xmlns:a14="http://schemas.microsoft.com/office/drawing/2010/main" xmlns="" w="9525">
+                  <a14:hiddenLine xmlns="" xmlns:a14="http://schemas.microsoft.com/office/drawing/2010/main" w="9525">
                     <a:solidFill>
                       <a:srgbClr val="000000"/>
                     </a:solidFill>
@@ -37626,7 +38025,7 @@
               </a:ln>
               <a:extLst>
                 <a:ext uri="{91240B29-F687-4f45-9708-019B960494DF}">
-                  <a14:hiddenLine xmlns:a14="http://schemas.microsoft.com/office/drawing/2010/main" xmlns="" w="9525">
+                  <a14:hiddenLine xmlns="" xmlns:a14="http://schemas.microsoft.com/office/drawing/2010/main" w="9525">
                     <a:solidFill>
                       <a:srgbClr val="000000"/>
                     </a:solidFill>
@@ -37753,7 +38152,7 @@
               </a:ln>
               <a:extLst>
                 <a:ext uri="{91240B29-F687-4f45-9708-019B960494DF}">
-                  <a14:hiddenLine xmlns:a14="http://schemas.microsoft.com/office/drawing/2010/main" xmlns="" w="9525">
+                  <a14:hiddenLine xmlns="" xmlns:a14="http://schemas.microsoft.com/office/drawing/2010/main" w="9525">
                     <a:solidFill>
                       <a:srgbClr val="000000"/>
                     </a:solidFill>
@@ -37841,7 +38240,7 @@
               </a:ln>
               <a:extLst>
                 <a:ext uri="{91240B29-F687-4f45-9708-019B960494DF}">
-                  <a14:hiddenLine xmlns:a14="http://schemas.microsoft.com/office/drawing/2010/main" xmlns="" w="9525">
+                  <a14:hiddenLine xmlns="" xmlns:a14="http://schemas.microsoft.com/office/drawing/2010/main" w="9525">
                     <a:solidFill>
                       <a:srgbClr val="000000"/>
                     </a:solidFill>
@@ -37963,7 +38362,7 @@
               </a:ln>
               <a:extLst>
                 <a:ext uri="{91240B29-F687-4f45-9708-019B960494DF}">
-                  <a14:hiddenLine xmlns:a14="http://schemas.microsoft.com/office/drawing/2010/main" xmlns="" w="9525">
+                  <a14:hiddenLine xmlns="" xmlns:a14="http://schemas.microsoft.com/office/drawing/2010/main" w="9525">
                     <a:solidFill>
                       <a:srgbClr val="000000"/>
                     </a:solidFill>
@@ -38060,7 +38459,7 @@
               </a:ln>
               <a:extLst>
                 <a:ext uri="{91240B29-F687-4f45-9708-019B960494DF}">
-                  <a14:hiddenLine xmlns:a14="http://schemas.microsoft.com/office/drawing/2010/main" xmlns="" w="9525">
+                  <a14:hiddenLine xmlns="" xmlns:a14="http://schemas.microsoft.com/office/drawing/2010/main" w="9525">
                     <a:solidFill>
                       <a:srgbClr val="000000"/>
                     </a:solidFill>
@@ -38132,7 +38531,7 @@
               </a:ln>
               <a:extLst>
                 <a:ext uri="{91240B29-F687-4f45-9708-019B960494DF}">
-                  <a14:hiddenLine xmlns:a14="http://schemas.microsoft.com/office/drawing/2010/main" xmlns="" w="9525">
+                  <a14:hiddenLine xmlns="" xmlns:a14="http://schemas.microsoft.com/office/drawing/2010/main" w="9525">
                     <a:solidFill>
                       <a:srgbClr val="000000"/>
                     </a:solidFill>
@@ -38229,7 +38628,7 @@
               </a:ln>
               <a:extLst>
                 <a:ext uri="{91240B29-F687-4f45-9708-019B960494DF}">
-                  <a14:hiddenLine xmlns:a14="http://schemas.microsoft.com/office/drawing/2010/main" xmlns="" w="9525">
+                  <a14:hiddenLine xmlns="" xmlns:a14="http://schemas.microsoft.com/office/drawing/2010/main" w="9525">
                     <a:solidFill>
                       <a:srgbClr val="000000"/>
                     </a:solidFill>
@@ -38304,7 +38703,7 @@
               </a:ln>
               <a:extLst>
                 <a:ext uri="{91240B29-F687-4f45-9708-019B960494DF}">
-                  <a14:hiddenLine xmlns:a14="http://schemas.microsoft.com/office/drawing/2010/main" xmlns="" w="9525">
+                  <a14:hiddenLine xmlns="" xmlns:a14="http://schemas.microsoft.com/office/drawing/2010/main" w="9525">
                     <a:solidFill>
                       <a:srgbClr val="000000"/>
                     </a:solidFill>
@@ -38401,7 +38800,7 @@
               </a:ln>
               <a:extLst>
                 <a:ext uri="{91240B29-F687-4f45-9708-019B960494DF}">
-                  <a14:hiddenLine xmlns:a14="http://schemas.microsoft.com/office/drawing/2010/main" xmlns="" w="9525">
+                  <a14:hiddenLine xmlns="" xmlns:a14="http://schemas.microsoft.com/office/drawing/2010/main" w="9525">
                     <a:solidFill>
                       <a:srgbClr val="000000"/>
                     </a:solidFill>
@@ -38476,7 +38875,7 @@
               </a:ln>
               <a:extLst>
                 <a:ext uri="{91240B29-F687-4f45-9708-019B960494DF}">
-                  <a14:hiddenLine xmlns:a14="http://schemas.microsoft.com/office/drawing/2010/main" xmlns="" w="9525">
+                  <a14:hiddenLine xmlns="" xmlns:a14="http://schemas.microsoft.com/office/drawing/2010/main" w="9525">
                     <a:solidFill>
                       <a:srgbClr val="000000"/>
                     </a:solidFill>
@@ -38573,7 +38972,7 @@
               </a:ln>
               <a:extLst>
                 <a:ext uri="{91240B29-F687-4f45-9708-019B960494DF}">
-                  <a14:hiddenLine xmlns:a14="http://schemas.microsoft.com/office/drawing/2010/main" xmlns="" w="9525">
+                  <a14:hiddenLine xmlns="" xmlns:a14="http://schemas.microsoft.com/office/drawing/2010/main" w="9525">
                     <a:solidFill>
                       <a:srgbClr val="000000"/>
                     </a:solidFill>
@@ -38614,7 +39013,7 @@
               </a:ln>
               <a:extLst>
                 <a:ext uri="{91240B29-F687-4f45-9708-019B960494DF}">
-                  <a14:hiddenLine xmlns:a14="http://schemas.microsoft.com/office/drawing/2010/main" xmlns="" w="9525">
+                  <a14:hiddenLine xmlns="" xmlns:a14="http://schemas.microsoft.com/office/drawing/2010/main" w="9525">
                     <a:solidFill>
                       <a:srgbClr val="000000"/>
                     </a:solidFill>
@@ -38761,7 +39160,7 @@
           <a:p>
             <a:fld id="{92E65FDA-6ECA-F649-9D40-2B52E01D4DC0}" type="datetimeFigureOut">
               <a:rPr lang="es-ES_tradnl" smtClean="0"/>
-              <a:t>10/05/2026</a:t>
+              <a:t>14/05/2026</a:t>
             </a:fld>
             <a:endParaRPr lang="es-ES_tradnl"/>
           </a:p>
@@ -39197,13 +39596,19 @@
             <p:ph type="ctrTitle"/>
           </p:nvPr>
         </p:nvSpPr>
-        <p:spPr/>
+        <p:spPr>
+          <a:xfrm>
+            <a:off x="1876424" y="2487036"/>
+            <a:ext cx="8791575" cy="2387600"/>
+          </a:xfrm>
+        </p:spPr>
         <p:txBody>
           <a:bodyPr>
             <a:normAutofit fontScale="90000"/>
           </a:bodyPr>
           <a:lstStyle/>
           <a:p>
+            <a:pPr algn="ctr"/>
             <a:r>
               <a:rPr lang="es-PE" dirty="0"/>
               <a:t>Modelo Predictivo de Rotación de Personal para la Anticipación de Salidas en una Consultora </a:t>
@@ -39212,28 +39617,275 @@
           </a:p>
         </p:txBody>
       </p:sp>
-      <p:sp>
-        <p:nvSpPr>
-          <p:cNvPr id="3" name="Subtítulo 2">
+      <p:pic>
+        <p:nvPicPr>
+          <p:cNvPr id="4" name="Imagen 3" descr="Archivo:UTEC-Logo.jpg - Wikipedia, la enciclopedia libre">
             <a:extLst>
               <a:ext uri="{FF2B5EF4-FFF2-40B4-BE49-F238E27FC236}">
-                <a16:creationId xmlns:a16="http://schemas.microsoft.com/office/drawing/2014/main" id="{41258141-D21A-A452-46A1-4F843307918E}"/>
+                <a16:creationId xmlns:a16="http://schemas.microsoft.com/office/drawing/2014/main" id="{2E99CE63-F72A-92AE-B961-A6A7E9F372F8}"/>
               </a:ext>
             </a:extLst>
           </p:cNvPr>
-          <p:cNvSpPr>
-            <a:spLocks noGrp="1"/>
+          <p:cNvPicPr>
+            <a:picLocks noChangeAspect="1"/>
+          </p:cNvPicPr>
+          <p:nvPr/>
+        </p:nvPicPr>
+        <p:blipFill>
+          <a:blip r:embed="rId2"/>
+          <a:stretch>
+            <a:fillRect/>
+          </a:stretch>
+        </p:blipFill>
+        <p:spPr>
+          <a:xfrm>
+            <a:off x="4975514" y="307529"/>
+            <a:ext cx="2242039" cy="2543176"/>
+          </a:xfrm>
+          <a:prstGeom prst="rect">
+            <a:avLst/>
+          </a:prstGeom>
+        </p:spPr>
+      </p:pic>
+      <p:sp>
+        <p:nvSpPr>
+          <p:cNvPr id="8" name="Marcador de contenido 2">
+            <a:extLst>
+              <a:ext uri="{FF2B5EF4-FFF2-40B4-BE49-F238E27FC236}">
+                <a16:creationId xmlns:a16="http://schemas.microsoft.com/office/drawing/2014/main" id="{98D90103-DE12-251F-C4A6-0F92F4E1A52C}"/>
+              </a:ext>
+            </a:extLst>
+          </p:cNvPr>
+          <p:cNvSpPr txBox="1">
+            <a:spLocks/>
           </p:cNvSpPr>
-          <p:nvPr>
-            <p:ph type="subTitle" idx="1"/>
-          </p:nvPr>
+          <p:nvPr/>
         </p:nvSpPr>
-        <p:spPr/>
+        <p:spPr>
+          <a:xfrm>
+            <a:off x="8733703" y="5685414"/>
+            <a:ext cx="2687781" cy="680751"/>
+          </a:xfrm>
+          <a:prstGeom prst="rect">
+            <a:avLst/>
+          </a:prstGeom>
+        </p:spPr>
         <p:txBody>
-          <a:bodyPr/>
-          <a:lstStyle/>
+          <a:bodyPr vert="horz" lIns="91440" tIns="45720" rIns="91440" bIns="45720" rtlCol="0" anchor="t">
+            <a:noAutofit/>
+          </a:bodyPr>
+          <a:lstStyle>
+            <a:lvl1pPr marL="0" indent="0" algn="l" defTabSz="914400" rtl="0" eaLnBrk="1" latinLnBrk="0" hangingPunct="1">
+              <a:lnSpc>
+                <a:spcPct val="120000"/>
+              </a:lnSpc>
+              <a:spcBef>
+                <a:spcPts val="1000"/>
+              </a:spcBef>
+              <a:buSzPct val="125000"/>
+              <a:buFont typeface="Arial" panose="020B0604020202020204" pitchFamily="34" charset="0"/>
+              <a:buNone/>
+              <a:defRPr sz="2000" kern="1200" cap="all" baseline="0">
+                <a:solidFill>
+                  <a:schemeClr val="tx2"/>
+                </a:solidFill>
+                <a:latin typeface="+mn-lt"/>
+                <a:ea typeface="+mn-ea"/>
+                <a:cs typeface="+mn-cs"/>
+              </a:defRPr>
+            </a:lvl1pPr>
+            <a:lvl2pPr marL="457200" indent="0" algn="ctr" defTabSz="914400" rtl="0" eaLnBrk="1" latinLnBrk="0" hangingPunct="1">
+              <a:lnSpc>
+                <a:spcPct val="120000"/>
+              </a:lnSpc>
+              <a:spcBef>
+                <a:spcPts val="500"/>
+              </a:spcBef>
+              <a:buSzPct val="125000"/>
+              <a:buFont typeface="Arial" panose="020B0604020202020204" pitchFamily="34" charset="0"/>
+              <a:buNone/>
+              <a:defRPr sz="2000" kern="1200">
+                <a:solidFill>
+                  <a:schemeClr val="tx1"/>
+                </a:solidFill>
+                <a:latin typeface="+mn-lt"/>
+                <a:ea typeface="+mn-ea"/>
+                <a:cs typeface="+mn-cs"/>
+              </a:defRPr>
+            </a:lvl2pPr>
+            <a:lvl3pPr marL="914400" indent="0" algn="ctr" defTabSz="914400" rtl="0" eaLnBrk="1" latinLnBrk="0" hangingPunct="1">
+              <a:lnSpc>
+                <a:spcPct val="120000"/>
+              </a:lnSpc>
+              <a:spcBef>
+                <a:spcPts val="500"/>
+              </a:spcBef>
+              <a:buSzPct val="125000"/>
+              <a:buFont typeface="Arial" panose="020B0604020202020204" pitchFamily="34" charset="0"/>
+              <a:buNone/>
+              <a:defRPr sz="1800" kern="1200">
+                <a:solidFill>
+                  <a:schemeClr val="tx1"/>
+                </a:solidFill>
+                <a:latin typeface="+mn-lt"/>
+                <a:ea typeface="+mn-ea"/>
+                <a:cs typeface="+mn-cs"/>
+              </a:defRPr>
+            </a:lvl3pPr>
+            <a:lvl4pPr marL="1371600" indent="0" algn="ctr" defTabSz="914400" rtl="0" eaLnBrk="1" latinLnBrk="0" hangingPunct="1">
+              <a:lnSpc>
+                <a:spcPct val="120000"/>
+              </a:lnSpc>
+              <a:spcBef>
+                <a:spcPts val="500"/>
+              </a:spcBef>
+              <a:buSzPct val="125000"/>
+              <a:buFont typeface="Arial" panose="020B0604020202020204" pitchFamily="34" charset="0"/>
+              <a:buNone/>
+              <a:defRPr sz="1600" kern="1200">
+                <a:solidFill>
+                  <a:schemeClr val="tx1"/>
+                </a:solidFill>
+                <a:latin typeface="+mn-lt"/>
+                <a:ea typeface="+mn-ea"/>
+                <a:cs typeface="+mn-cs"/>
+              </a:defRPr>
+            </a:lvl4pPr>
+            <a:lvl5pPr marL="1828800" indent="0" algn="ctr" defTabSz="914400" rtl="0" eaLnBrk="1" latinLnBrk="0" hangingPunct="1">
+              <a:lnSpc>
+                <a:spcPct val="120000"/>
+              </a:lnSpc>
+              <a:spcBef>
+                <a:spcPts val="500"/>
+              </a:spcBef>
+              <a:buSzPct val="125000"/>
+              <a:buFont typeface="Arial" panose="020B0604020202020204" pitchFamily="34" charset="0"/>
+              <a:buNone/>
+              <a:defRPr sz="1600" kern="1200">
+                <a:solidFill>
+                  <a:schemeClr val="tx1"/>
+                </a:solidFill>
+                <a:latin typeface="+mn-lt"/>
+                <a:ea typeface="+mn-ea"/>
+                <a:cs typeface="+mn-cs"/>
+              </a:defRPr>
+            </a:lvl5pPr>
+            <a:lvl6pPr marL="2286000" indent="0" algn="ctr" defTabSz="914400" rtl="0" eaLnBrk="1" latinLnBrk="0" hangingPunct="1">
+              <a:lnSpc>
+                <a:spcPct val="120000"/>
+              </a:lnSpc>
+              <a:spcBef>
+                <a:spcPts val="500"/>
+              </a:spcBef>
+              <a:buSzPct val="125000"/>
+              <a:buFont typeface="Arial" panose="020B0604020202020204" pitchFamily="34" charset="0"/>
+              <a:buNone/>
+              <a:defRPr sz="1600" kern="1200">
+                <a:solidFill>
+                  <a:schemeClr val="tx1"/>
+                </a:solidFill>
+                <a:latin typeface="+mn-lt"/>
+                <a:ea typeface="+mn-ea"/>
+                <a:cs typeface="+mn-cs"/>
+              </a:defRPr>
+            </a:lvl6pPr>
+            <a:lvl7pPr marL="2743200" indent="0" algn="ctr" defTabSz="914400" rtl="0" eaLnBrk="1" latinLnBrk="0" hangingPunct="1">
+              <a:lnSpc>
+                <a:spcPct val="120000"/>
+              </a:lnSpc>
+              <a:spcBef>
+                <a:spcPts val="500"/>
+              </a:spcBef>
+              <a:buSzPct val="125000"/>
+              <a:buFont typeface="Arial" panose="020B0604020202020204" pitchFamily="34" charset="0"/>
+              <a:buNone/>
+              <a:defRPr sz="1600" kern="1200">
+                <a:solidFill>
+                  <a:schemeClr val="tx1"/>
+                </a:solidFill>
+                <a:latin typeface="+mn-lt"/>
+                <a:ea typeface="+mn-ea"/>
+                <a:cs typeface="+mn-cs"/>
+              </a:defRPr>
+            </a:lvl7pPr>
+            <a:lvl8pPr marL="3200400" indent="0" algn="ctr" defTabSz="914400" rtl="0" eaLnBrk="1" latinLnBrk="0" hangingPunct="1">
+              <a:lnSpc>
+                <a:spcPct val="120000"/>
+              </a:lnSpc>
+              <a:spcBef>
+                <a:spcPts val="500"/>
+              </a:spcBef>
+              <a:buSzPct val="125000"/>
+              <a:buFont typeface="Arial" panose="020B0604020202020204" pitchFamily="34" charset="0"/>
+              <a:buNone/>
+              <a:defRPr sz="1600" kern="1200">
+                <a:solidFill>
+                  <a:schemeClr val="tx1"/>
+                </a:solidFill>
+                <a:latin typeface="+mn-lt"/>
+                <a:ea typeface="+mn-ea"/>
+                <a:cs typeface="+mn-cs"/>
+              </a:defRPr>
+            </a:lvl8pPr>
+            <a:lvl9pPr marL="3657600" indent="0" algn="ctr" defTabSz="914400" rtl="0" eaLnBrk="1" latinLnBrk="0" hangingPunct="1">
+              <a:lnSpc>
+                <a:spcPct val="120000"/>
+              </a:lnSpc>
+              <a:spcBef>
+                <a:spcPts val="500"/>
+              </a:spcBef>
+              <a:buSzPct val="125000"/>
+              <a:buFont typeface="Arial" panose="020B0604020202020204" pitchFamily="34" charset="0"/>
+              <a:buNone/>
+              <a:defRPr sz="1600" kern="1200">
+                <a:solidFill>
+                  <a:schemeClr val="tx1"/>
+                </a:solidFill>
+                <a:latin typeface="+mn-lt"/>
+                <a:ea typeface="+mn-ea"/>
+                <a:cs typeface="+mn-cs"/>
+              </a:defRPr>
+            </a:lvl9pPr>
+          </a:lstStyle>
           <a:p>
-            <a:endParaRPr lang="es-ES_tradnl" dirty="0"/>
+            <a:pPr algn="r">
+              <a:lnSpc>
+                <a:spcPct val="100000"/>
+              </a:lnSpc>
+              <a:spcBef>
+                <a:spcPts val="0"/>
+              </a:spcBef>
+            </a:pPr>
+            <a:r>
+              <a:rPr lang="es-ES" sz="1100">
+                <a:latin typeface="Tw Cen MT"/>
+                <a:ea typeface="Calibri"/>
+                <a:cs typeface="Calibri"/>
+              </a:rPr>
+              <a:t>Presentado por: </a:t>
+            </a:r>
+            <a:endParaRPr lang="es-ES" sz="1100"/>
+          </a:p>
+          <a:p>
+            <a:pPr algn="r">
+              <a:lnSpc>
+                <a:spcPct val="100000"/>
+              </a:lnSpc>
+              <a:spcBef>
+                <a:spcPts val="0"/>
+              </a:spcBef>
+            </a:pPr>
+            <a:r>
+              <a:rPr lang="es-ES" sz="1600">
+                <a:ea typeface="Calibri"/>
+                <a:cs typeface="Calibri"/>
+              </a:rPr>
+              <a:t>DANIEL GRANADOS</a:t>
+            </a:r>
+            <a:endParaRPr lang="es-ES" sz="1600" dirty="0">
+              <a:ea typeface="Calibri"/>
+              <a:cs typeface="Calibri"/>
+            </a:endParaRPr>
           </a:p>
         </p:txBody>
       </p:sp>
@@ -39251,747 +39903,6 @@
 </file>
 
 <file path=ppt/slides/slide10.xml><?xml version="1.0" encoding="utf-8"?>
-<p:sld xmlns:a="http://schemas.openxmlformats.org/drawingml/2006/main" xmlns:r="http://schemas.openxmlformats.org/officeDocument/2006/relationships" xmlns:p="http://schemas.openxmlformats.org/presentationml/2006/main">
-  <p:cSld>
-    <p:spTree>
-      <p:nvGrpSpPr>
-        <p:cNvPr id="1" name="">
-          <a:extLst>
-            <a:ext uri="{FF2B5EF4-FFF2-40B4-BE49-F238E27FC236}">
-              <a16:creationId xmlns:a16="http://schemas.microsoft.com/office/drawing/2014/main" id="{9F930E2D-23FE-99A5-40BC-245271A8A3E7}"/>
-            </a:ext>
-          </a:extLst>
-        </p:cNvPr>
-        <p:cNvGrpSpPr/>
-        <p:nvPr/>
-      </p:nvGrpSpPr>
-      <p:grpSpPr>
-        <a:xfrm>
-          <a:off x="0" y="0"/>
-          <a:ext cx="0" cy="0"/>
-          <a:chOff x="0" y="0"/>
-          <a:chExt cx="0" cy="0"/>
-        </a:xfrm>
-      </p:grpSpPr>
-      <p:sp>
-        <p:nvSpPr>
-          <p:cNvPr id="2" name="Título 1">
-            <a:extLst>
-              <a:ext uri="{FF2B5EF4-FFF2-40B4-BE49-F238E27FC236}">
-                <a16:creationId xmlns:a16="http://schemas.microsoft.com/office/drawing/2014/main" id="{238AB016-9AE1-5296-8E31-3FAF88C00773}"/>
-              </a:ext>
-            </a:extLst>
-          </p:cNvPr>
-          <p:cNvSpPr>
-            <a:spLocks noGrp="1"/>
-          </p:cNvSpPr>
-          <p:nvPr>
-            <p:ph type="title"/>
-          </p:nvPr>
-        </p:nvSpPr>
-        <p:spPr>
-          <a:xfrm>
-            <a:off x="1141413" y="2689715"/>
-            <a:ext cx="9905998" cy="1478570"/>
-          </a:xfrm>
-        </p:spPr>
-        <p:txBody>
-          <a:bodyPr/>
-          <a:lstStyle/>
-          <a:p>
-            <a:pPr algn="ctr"/>
-            <a:r>
-              <a:rPr lang="es-ES_tradnl" dirty="0"/>
-              <a:t>GRACIAS</a:t>
-            </a:r>
-            <a:endParaRPr lang="es-PE" dirty="0"/>
-          </a:p>
-        </p:txBody>
-      </p:sp>
-    </p:spTree>
-    <p:extLst>
-      <p:ext uri="{BB962C8B-B14F-4D97-AF65-F5344CB8AC3E}">
-        <p14:creationId xmlns:p14="http://schemas.microsoft.com/office/powerpoint/2010/main" val="578503961"/>
-      </p:ext>
-    </p:extLst>
-  </p:cSld>
-  <p:clrMapOvr>
-    <a:masterClrMapping/>
-  </p:clrMapOvr>
-</p:sld>
-</file>
-
-<file path=ppt/slides/slide2.xml><?xml version="1.0" encoding="utf-8"?>
-<p:sld xmlns:a="http://schemas.openxmlformats.org/drawingml/2006/main" xmlns:r="http://schemas.openxmlformats.org/officeDocument/2006/relationships" xmlns:p="http://schemas.openxmlformats.org/presentationml/2006/main">
-  <p:cSld>
-    <p:spTree>
-      <p:nvGrpSpPr>
-        <p:cNvPr id="1" name=""/>
-        <p:cNvGrpSpPr/>
-        <p:nvPr/>
-      </p:nvGrpSpPr>
-      <p:grpSpPr>
-        <a:xfrm>
-          <a:off x="0" y="0"/>
-          <a:ext cx="0" cy="0"/>
-          <a:chOff x="0" y="0"/>
-          <a:chExt cx="0" cy="0"/>
-        </a:xfrm>
-      </p:grpSpPr>
-      <p:sp>
-        <p:nvSpPr>
-          <p:cNvPr id="2" name="Título 1">
-            <a:extLst>
-              <a:ext uri="{FF2B5EF4-FFF2-40B4-BE49-F238E27FC236}">
-                <a16:creationId xmlns:a16="http://schemas.microsoft.com/office/drawing/2014/main" id="{55CD742A-A6A7-C96F-E37B-C10C7E564AE3}"/>
-              </a:ext>
-            </a:extLst>
-          </p:cNvPr>
-          <p:cNvSpPr>
-            <a:spLocks noGrp="1"/>
-          </p:cNvSpPr>
-          <p:nvPr>
-            <p:ph type="title"/>
-          </p:nvPr>
-        </p:nvSpPr>
-        <p:spPr>
-          <a:xfrm>
-            <a:off x="1141413" y="2689715"/>
-            <a:ext cx="9905998" cy="1478570"/>
-          </a:xfrm>
-        </p:spPr>
-        <p:txBody>
-          <a:bodyPr/>
-          <a:lstStyle/>
-          <a:p>
-            <a:pPr algn="ctr"/>
-            <a:r>
-              <a:rPr lang="es-ES_tradnl" dirty="0"/>
-              <a:t>CONTEXTO</a:t>
-            </a:r>
-            <a:endParaRPr lang="es-PE" dirty="0"/>
-          </a:p>
-        </p:txBody>
-      </p:sp>
-    </p:spTree>
-    <p:extLst>
-      <p:ext uri="{BB962C8B-B14F-4D97-AF65-F5344CB8AC3E}">
-        <p14:creationId xmlns:p14="http://schemas.microsoft.com/office/powerpoint/2010/main" val="192601957"/>
-      </p:ext>
-    </p:extLst>
-  </p:cSld>
-  <p:clrMapOvr>
-    <a:masterClrMapping/>
-  </p:clrMapOvr>
-</p:sld>
-</file>
-
-<file path=ppt/slides/slide3.xml><?xml version="1.0" encoding="utf-8"?>
-<p:sld xmlns:a="http://schemas.openxmlformats.org/drawingml/2006/main" xmlns:r="http://schemas.openxmlformats.org/officeDocument/2006/relationships" xmlns:p="http://schemas.openxmlformats.org/presentationml/2006/main">
-  <p:cSld>
-    <p:spTree>
-      <p:nvGrpSpPr>
-        <p:cNvPr id="1" name=""/>
-        <p:cNvGrpSpPr/>
-        <p:nvPr/>
-      </p:nvGrpSpPr>
-      <p:grpSpPr>
-        <a:xfrm>
-          <a:off x="0" y="0"/>
-          <a:ext cx="0" cy="0"/>
-          <a:chOff x="0" y="0"/>
-          <a:chExt cx="0" cy="0"/>
-        </a:xfrm>
-      </p:grpSpPr>
-      <p:sp>
-        <p:nvSpPr>
-          <p:cNvPr id="2" name="Título 1">
-            <a:extLst>
-              <a:ext uri="{FF2B5EF4-FFF2-40B4-BE49-F238E27FC236}">
-                <a16:creationId xmlns:a16="http://schemas.microsoft.com/office/drawing/2014/main" id="{AB417137-6933-2996-A547-C510EE6EE9B6}"/>
-              </a:ext>
-            </a:extLst>
-          </p:cNvPr>
-          <p:cNvSpPr>
-            <a:spLocks noGrp="1"/>
-          </p:cNvSpPr>
-          <p:nvPr>
-            <p:ph type="title"/>
-          </p:nvPr>
-        </p:nvSpPr>
-        <p:spPr/>
-        <p:txBody>
-          <a:bodyPr/>
-          <a:lstStyle/>
-          <a:p>
-            <a:r>
-              <a:rPr lang="es-ES_tradnl" dirty="0"/>
-              <a:t>Problema identificado</a:t>
-            </a:r>
-          </a:p>
-        </p:txBody>
-      </p:sp>
-      <p:graphicFrame>
-        <p:nvGraphicFramePr>
-          <p:cNvPr id="6" name="Diagrama 5">
-            <a:extLst>
-              <a:ext uri="{FF2B5EF4-FFF2-40B4-BE49-F238E27FC236}">
-                <a16:creationId xmlns:a16="http://schemas.microsoft.com/office/drawing/2014/main" id="{48A9351B-7BFB-EBB9-93BB-EE16D4DD7F81}"/>
-              </a:ext>
-            </a:extLst>
-          </p:cNvPr>
-          <p:cNvGraphicFramePr/>
-          <p:nvPr>
-            <p:extLst>
-              <p:ext uri="{D42A27DB-BD31-4B8C-83A1-F6EECF244321}">
-                <p14:modId xmlns:p14="http://schemas.microsoft.com/office/powerpoint/2010/main" val="1285922424"/>
-              </p:ext>
-            </p:extLst>
-          </p:nvPr>
-        </p:nvGraphicFramePr>
-        <p:xfrm>
-          <a:off x="1141413" y="2097088"/>
-          <a:ext cx="9905999" cy="4239317"/>
-        </p:xfrm>
-        <a:graphic>
-          <a:graphicData uri="http://schemas.openxmlformats.org/drawingml/2006/diagram">
-            <dgm:relIds xmlns:dgm="http://schemas.openxmlformats.org/drawingml/2006/diagram" xmlns:r="http://schemas.openxmlformats.org/officeDocument/2006/relationships" r:dm="rId2" r:lo="rId3" r:qs="rId4" r:cs="rId5"/>
-          </a:graphicData>
-        </a:graphic>
-      </p:graphicFrame>
-    </p:spTree>
-    <p:extLst>
-      <p:ext uri="{BB962C8B-B14F-4D97-AF65-F5344CB8AC3E}">
-        <p14:creationId xmlns:p14="http://schemas.microsoft.com/office/powerpoint/2010/main" val="1860873599"/>
-      </p:ext>
-    </p:extLst>
-  </p:cSld>
-  <p:clrMapOvr>
-    <a:masterClrMapping/>
-  </p:clrMapOvr>
-</p:sld>
-</file>
-
-<file path=ppt/slides/slide4.xml><?xml version="1.0" encoding="utf-8"?>
-<p:sld xmlns:a="http://schemas.openxmlformats.org/drawingml/2006/main" xmlns:r="http://schemas.openxmlformats.org/officeDocument/2006/relationships" xmlns:p="http://schemas.openxmlformats.org/presentationml/2006/main">
-  <p:cSld>
-    <p:spTree>
-      <p:nvGrpSpPr>
-        <p:cNvPr id="1" name=""/>
-        <p:cNvGrpSpPr/>
-        <p:nvPr/>
-      </p:nvGrpSpPr>
-      <p:grpSpPr>
-        <a:xfrm>
-          <a:off x="0" y="0"/>
-          <a:ext cx="0" cy="0"/>
-          <a:chOff x="0" y="0"/>
-          <a:chExt cx="0" cy="0"/>
-        </a:xfrm>
-      </p:grpSpPr>
-      <p:sp>
-        <p:nvSpPr>
-          <p:cNvPr id="2" name="Título 1">
-            <a:extLst>
-              <a:ext uri="{FF2B5EF4-FFF2-40B4-BE49-F238E27FC236}">
-                <a16:creationId xmlns:a16="http://schemas.microsoft.com/office/drawing/2014/main" id="{752C44F6-8562-ED18-5320-D23B6B5389CC}"/>
-              </a:ext>
-            </a:extLst>
-          </p:cNvPr>
-          <p:cNvSpPr>
-            <a:spLocks noGrp="1"/>
-          </p:cNvSpPr>
-          <p:nvPr>
-            <p:ph type="title"/>
-          </p:nvPr>
-        </p:nvSpPr>
-        <p:spPr/>
-        <p:txBody>
-          <a:bodyPr/>
-          <a:lstStyle/>
-          <a:p>
-            <a:r>
-              <a:rPr lang="es-PE" dirty="0"/>
-              <a:t>¿Por qué desarrollar este proyecto?</a:t>
-            </a:r>
-            <a:endParaRPr lang="es-ES_tradnl" dirty="0"/>
-          </a:p>
-        </p:txBody>
-      </p:sp>
-      <p:graphicFrame>
-        <p:nvGraphicFramePr>
-          <p:cNvPr id="10" name="Marcador de contenido 9">
-            <a:extLst>
-              <a:ext uri="{FF2B5EF4-FFF2-40B4-BE49-F238E27FC236}">
-                <a16:creationId xmlns:a16="http://schemas.microsoft.com/office/drawing/2014/main" id="{23500928-D5C5-95CB-BB76-291C05954161}"/>
-              </a:ext>
-            </a:extLst>
-          </p:cNvPr>
-          <p:cNvGraphicFramePr>
-            <a:graphicFrameLocks noGrp="1"/>
-          </p:cNvGraphicFramePr>
-          <p:nvPr>
-            <p:ph idx="1"/>
-            <p:extLst>
-              <p:ext uri="{D42A27DB-BD31-4B8C-83A1-F6EECF244321}">
-                <p14:modId xmlns:p14="http://schemas.microsoft.com/office/powerpoint/2010/main" val="2031873570"/>
-              </p:ext>
-            </p:extLst>
-          </p:nvPr>
-        </p:nvGraphicFramePr>
-        <p:xfrm>
-          <a:off x="825982" y="1901952"/>
-          <a:ext cx="10536859" cy="4498847"/>
-        </p:xfrm>
-        <a:graphic>
-          <a:graphicData uri="http://schemas.openxmlformats.org/drawingml/2006/diagram">
-            <dgm:relIds xmlns:dgm="http://schemas.openxmlformats.org/drawingml/2006/diagram" xmlns:r="http://schemas.openxmlformats.org/officeDocument/2006/relationships" r:dm="rId3" r:lo="rId4" r:qs="rId5" r:cs="rId6"/>
-          </a:graphicData>
-        </a:graphic>
-      </p:graphicFrame>
-    </p:spTree>
-    <p:extLst>
-      <p:ext uri="{BB962C8B-B14F-4D97-AF65-F5344CB8AC3E}">
-        <p14:creationId xmlns:p14="http://schemas.microsoft.com/office/powerpoint/2010/main" val="2060895292"/>
-      </p:ext>
-    </p:extLst>
-  </p:cSld>
-  <p:clrMapOvr>
-    <a:masterClrMapping/>
-  </p:clrMapOvr>
-</p:sld>
-</file>
-
-<file path=ppt/slides/slide5.xml><?xml version="1.0" encoding="utf-8"?>
-<p:sld xmlns:a="http://schemas.openxmlformats.org/drawingml/2006/main" xmlns:r="http://schemas.openxmlformats.org/officeDocument/2006/relationships" xmlns:p="http://schemas.openxmlformats.org/presentationml/2006/main">
-  <p:cSld>
-    <p:spTree>
-      <p:nvGrpSpPr>
-        <p:cNvPr id="1" name=""/>
-        <p:cNvGrpSpPr/>
-        <p:nvPr/>
-      </p:nvGrpSpPr>
-      <p:grpSpPr>
-        <a:xfrm>
-          <a:off x="0" y="0"/>
-          <a:ext cx="0" cy="0"/>
-          <a:chOff x="0" y="0"/>
-          <a:chExt cx="0" cy="0"/>
-        </a:xfrm>
-      </p:grpSpPr>
-      <p:graphicFrame>
-        <p:nvGraphicFramePr>
-          <p:cNvPr id="16" name="Marcador de contenido 15">
-            <a:extLst>
-              <a:ext uri="{FF2B5EF4-FFF2-40B4-BE49-F238E27FC236}">
-                <a16:creationId xmlns:a16="http://schemas.microsoft.com/office/drawing/2014/main" id="{DCB581CD-A48B-6DF2-12F7-4C16ABB5BEC4}"/>
-              </a:ext>
-            </a:extLst>
-          </p:cNvPr>
-          <p:cNvGraphicFramePr>
-            <a:graphicFrameLocks noGrp="1"/>
-          </p:cNvGraphicFramePr>
-          <p:nvPr>
-            <p:ph idx="1"/>
-            <p:extLst>
-              <p:ext uri="{D42A27DB-BD31-4B8C-83A1-F6EECF244321}">
-                <p14:modId xmlns:p14="http://schemas.microsoft.com/office/powerpoint/2010/main" val="3024195509"/>
-              </p:ext>
-            </p:extLst>
-          </p:nvPr>
-        </p:nvGraphicFramePr>
-        <p:xfrm>
-          <a:off x="1143000" y="1423115"/>
-          <a:ext cx="9906000" cy="4368085"/>
-        </p:xfrm>
-        <a:graphic>
-          <a:graphicData uri="http://schemas.openxmlformats.org/drawingml/2006/diagram">
-            <dgm:relIds xmlns:dgm="http://schemas.openxmlformats.org/drawingml/2006/diagram" xmlns:r="http://schemas.openxmlformats.org/officeDocument/2006/relationships" r:dm="rId2" r:lo="rId3" r:qs="rId4" r:cs="rId5"/>
-          </a:graphicData>
-        </a:graphic>
-      </p:graphicFrame>
-    </p:spTree>
-    <p:extLst>
-      <p:ext uri="{BB962C8B-B14F-4D97-AF65-F5344CB8AC3E}">
-        <p14:creationId xmlns:p14="http://schemas.microsoft.com/office/powerpoint/2010/main" val="1648153153"/>
-      </p:ext>
-    </p:extLst>
-  </p:cSld>
-  <p:clrMapOvr>
-    <a:masterClrMapping/>
-  </p:clrMapOvr>
-</p:sld>
-</file>
-
-<file path=ppt/slides/slide6.xml><?xml version="1.0" encoding="utf-8"?>
-<p:sld xmlns:a="http://schemas.openxmlformats.org/drawingml/2006/main" xmlns:r="http://schemas.openxmlformats.org/officeDocument/2006/relationships" xmlns:p="http://schemas.openxmlformats.org/presentationml/2006/main">
-  <p:cSld>
-    <p:spTree>
-      <p:nvGrpSpPr>
-        <p:cNvPr id="1" name=""/>
-        <p:cNvGrpSpPr/>
-        <p:nvPr/>
-      </p:nvGrpSpPr>
-      <p:grpSpPr>
-        <a:xfrm>
-          <a:off x="0" y="0"/>
-          <a:ext cx="0" cy="0"/>
-          <a:chOff x="0" y="0"/>
-          <a:chExt cx="0" cy="0"/>
-        </a:xfrm>
-      </p:grpSpPr>
-      <p:sp>
-        <p:nvSpPr>
-          <p:cNvPr id="2" name="Título 1">
-            <a:extLst>
-              <a:ext uri="{FF2B5EF4-FFF2-40B4-BE49-F238E27FC236}">
-                <a16:creationId xmlns:a16="http://schemas.microsoft.com/office/drawing/2014/main" id="{D7588BB8-DDCA-ADB8-E183-F23AFF85EEE7}"/>
-              </a:ext>
-            </a:extLst>
-          </p:cNvPr>
-          <p:cNvSpPr>
-            <a:spLocks noGrp="1"/>
-          </p:cNvSpPr>
-          <p:nvPr>
-            <p:ph type="title"/>
-          </p:nvPr>
-        </p:nvSpPr>
-        <p:spPr/>
-        <p:txBody>
-          <a:bodyPr/>
-          <a:lstStyle/>
-          <a:p>
-            <a:r>
-              <a:rPr lang="es-ES_tradnl" dirty="0"/>
-              <a:t>Propuesta de solución</a:t>
-            </a:r>
-          </a:p>
-        </p:txBody>
-      </p:sp>
-      <p:graphicFrame>
-        <p:nvGraphicFramePr>
-          <p:cNvPr id="9" name="Marcador de contenido 8">
-            <a:extLst>
-              <a:ext uri="{FF2B5EF4-FFF2-40B4-BE49-F238E27FC236}">
-                <a16:creationId xmlns:a16="http://schemas.microsoft.com/office/drawing/2014/main" id="{426F2A62-4B67-E738-2A5A-0F41B889F264}"/>
-              </a:ext>
-            </a:extLst>
-          </p:cNvPr>
-          <p:cNvGraphicFramePr>
-            <a:graphicFrameLocks noGrp="1"/>
-          </p:cNvGraphicFramePr>
-          <p:nvPr>
-            <p:ph idx="1"/>
-            <p:extLst>
-              <p:ext uri="{D42A27DB-BD31-4B8C-83A1-F6EECF244321}">
-                <p14:modId xmlns:p14="http://schemas.microsoft.com/office/powerpoint/2010/main" val="3381707591"/>
-              </p:ext>
-            </p:extLst>
-          </p:nvPr>
-        </p:nvGraphicFramePr>
-        <p:xfrm>
-          <a:off x="595669" y="2097089"/>
-          <a:ext cx="10997485" cy="4142393"/>
-        </p:xfrm>
-        <a:graphic>
-          <a:graphicData uri="http://schemas.openxmlformats.org/drawingml/2006/diagram">
-            <dgm:relIds xmlns:dgm="http://schemas.openxmlformats.org/drawingml/2006/diagram" xmlns:r="http://schemas.openxmlformats.org/officeDocument/2006/relationships" r:dm="rId2" r:lo="rId3" r:qs="rId4" r:cs="rId5"/>
-          </a:graphicData>
-        </a:graphic>
-      </p:graphicFrame>
-    </p:spTree>
-    <p:extLst>
-      <p:ext uri="{BB962C8B-B14F-4D97-AF65-F5344CB8AC3E}">
-        <p14:creationId xmlns:p14="http://schemas.microsoft.com/office/powerpoint/2010/main" val="3818610333"/>
-      </p:ext>
-    </p:extLst>
-  </p:cSld>
-  <p:clrMapOvr>
-    <a:masterClrMapping/>
-  </p:clrMapOvr>
-</p:sld>
-</file>
-
-<file path=ppt/slides/slide7.xml><?xml version="1.0" encoding="utf-8"?>
-<p:sld xmlns:a="http://schemas.openxmlformats.org/drawingml/2006/main" xmlns:r="http://schemas.openxmlformats.org/officeDocument/2006/relationships" xmlns:p="http://schemas.openxmlformats.org/presentationml/2006/main">
-  <p:cSld>
-    <p:spTree>
-      <p:nvGrpSpPr>
-        <p:cNvPr id="1" name=""/>
-        <p:cNvGrpSpPr/>
-        <p:nvPr/>
-      </p:nvGrpSpPr>
-      <p:grpSpPr>
-        <a:xfrm>
-          <a:off x="0" y="0"/>
-          <a:ext cx="0" cy="0"/>
-          <a:chOff x="0" y="0"/>
-          <a:chExt cx="0" cy="0"/>
-        </a:xfrm>
-      </p:grpSpPr>
-      <p:sp>
-        <p:nvSpPr>
-          <p:cNvPr id="2" name="Título 1">
-            <a:extLst>
-              <a:ext uri="{FF2B5EF4-FFF2-40B4-BE49-F238E27FC236}">
-                <a16:creationId xmlns:a16="http://schemas.microsoft.com/office/drawing/2014/main" id="{3BA79F47-8EE9-45B9-FC3F-0ACAA6CC15C2}"/>
-              </a:ext>
-            </a:extLst>
-          </p:cNvPr>
-          <p:cNvSpPr>
-            <a:spLocks noGrp="1"/>
-          </p:cNvSpPr>
-          <p:nvPr>
-            <p:ph type="title"/>
-          </p:nvPr>
-        </p:nvSpPr>
-        <p:spPr/>
-        <p:txBody>
-          <a:bodyPr/>
-          <a:lstStyle/>
-          <a:p>
-            <a:r>
-              <a:rPr lang="es-PE" dirty="0"/>
-              <a:t>Implementación</a:t>
-            </a:r>
-            <a:endParaRPr lang="es-ES_tradnl" dirty="0"/>
-          </a:p>
-        </p:txBody>
-      </p:sp>
-      <p:graphicFrame>
-        <p:nvGraphicFramePr>
-          <p:cNvPr id="7" name="Diagrama 6">
-            <a:extLst>
-              <a:ext uri="{FF2B5EF4-FFF2-40B4-BE49-F238E27FC236}">
-                <a16:creationId xmlns:a16="http://schemas.microsoft.com/office/drawing/2014/main" id="{E85E166B-AE3C-603A-DACF-B9E0B374793A}"/>
-              </a:ext>
-            </a:extLst>
-          </p:cNvPr>
-          <p:cNvGraphicFramePr/>
-          <p:nvPr>
-            <p:extLst>
-              <p:ext uri="{D42A27DB-BD31-4B8C-83A1-F6EECF244321}">
-                <p14:modId xmlns:p14="http://schemas.microsoft.com/office/powerpoint/2010/main" val="3196464605"/>
-              </p:ext>
-            </p:extLst>
-          </p:nvPr>
-        </p:nvGraphicFramePr>
-        <p:xfrm>
-          <a:off x="612585" y="1944709"/>
-          <a:ext cx="10959083" cy="3921618"/>
-        </p:xfrm>
-        <a:graphic>
-          <a:graphicData uri="http://schemas.openxmlformats.org/drawingml/2006/diagram">
-            <dgm:relIds xmlns:dgm="http://schemas.openxmlformats.org/drawingml/2006/diagram" xmlns:r="http://schemas.openxmlformats.org/officeDocument/2006/relationships" r:dm="rId2" r:lo="rId3" r:qs="rId4" r:cs="rId5"/>
-          </a:graphicData>
-        </a:graphic>
-      </p:graphicFrame>
-      <p:sp>
-        <p:nvSpPr>
-          <p:cNvPr id="6" name="Hexágono 5">
-            <a:extLst>
-              <a:ext uri="{FF2B5EF4-FFF2-40B4-BE49-F238E27FC236}">
-                <a16:creationId xmlns:a16="http://schemas.microsoft.com/office/drawing/2014/main" id="{214E6896-2F9F-6A72-07A8-9D6F3A4EE56C}"/>
-              </a:ext>
-            </a:extLst>
-          </p:cNvPr>
-          <p:cNvSpPr/>
-          <p:nvPr/>
-        </p:nvSpPr>
-        <p:spPr>
-          <a:xfrm>
-            <a:off x="9620518" y="5467082"/>
-            <a:ext cx="1292180" cy="1113948"/>
-          </a:xfrm>
-          <a:prstGeom prst="hexagon">
-            <a:avLst/>
-          </a:prstGeom>
-        </p:spPr>
-        <p:style>
-          <a:lnRef idx="2">
-            <a:schemeClr val="accent1">
-              <a:shade val="15000"/>
-            </a:schemeClr>
-          </a:lnRef>
-          <a:fillRef idx="1">
-            <a:schemeClr val="accent1"/>
-          </a:fillRef>
-          <a:effectRef idx="0">
-            <a:schemeClr val="accent1"/>
-          </a:effectRef>
-          <a:fontRef idx="minor">
-            <a:schemeClr val="lt1"/>
-          </a:fontRef>
-        </p:style>
-        <p:txBody>
-          <a:bodyPr rtlCol="0" anchor="ctr"/>
-          <a:lstStyle/>
-          <a:p>
-            <a:pPr algn="ctr"/>
-            <a:r>
-              <a:rPr lang="es-ES_tradnl" dirty="0"/>
-              <a:t>Mostrar Código</a:t>
-            </a:r>
-          </a:p>
-          <a:p>
-            <a:pPr algn="ctr"/>
-            <a:r>
-              <a:rPr lang="es-ES_tradnl" dirty="0"/>
-              <a:t>Demo</a:t>
-            </a:r>
-          </a:p>
-        </p:txBody>
-      </p:sp>
-    </p:spTree>
-    <p:extLst>
-      <p:ext uri="{BB962C8B-B14F-4D97-AF65-F5344CB8AC3E}">
-        <p14:creationId xmlns:p14="http://schemas.microsoft.com/office/powerpoint/2010/main" val="246699837"/>
-      </p:ext>
-    </p:extLst>
-  </p:cSld>
-  <p:clrMapOvr>
-    <a:masterClrMapping/>
-  </p:clrMapOvr>
-</p:sld>
-</file>
-
-<file path=ppt/slides/slide8.xml><?xml version="1.0" encoding="utf-8"?>
-<p:sld xmlns:a="http://schemas.openxmlformats.org/drawingml/2006/main" xmlns:r="http://schemas.openxmlformats.org/officeDocument/2006/relationships" xmlns:p="http://schemas.openxmlformats.org/presentationml/2006/main">
-  <p:cSld>
-    <p:spTree>
-      <p:nvGrpSpPr>
-        <p:cNvPr id="1" name=""/>
-        <p:cNvGrpSpPr/>
-        <p:nvPr/>
-      </p:nvGrpSpPr>
-      <p:grpSpPr>
-        <a:xfrm>
-          <a:off x="0" y="0"/>
-          <a:ext cx="0" cy="0"/>
-          <a:chOff x="0" y="0"/>
-          <a:chExt cx="0" cy="0"/>
-        </a:xfrm>
-      </p:grpSpPr>
-      <p:sp>
-        <p:nvSpPr>
-          <p:cNvPr id="2" name="Título 1">
-            <a:extLst>
-              <a:ext uri="{FF2B5EF4-FFF2-40B4-BE49-F238E27FC236}">
-                <a16:creationId xmlns:a16="http://schemas.microsoft.com/office/drawing/2014/main" id="{EECC6975-A793-F105-777A-AF163E068C3B}"/>
-              </a:ext>
-            </a:extLst>
-          </p:cNvPr>
-          <p:cNvSpPr>
-            <a:spLocks noGrp="1"/>
-          </p:cNvSpPr>
-          <p:nvPr>
-            <p:ph type="title"/>
-          </p:nvPr>
-        </p:nvSpPr>
-        <p:spPr/>
-        <p:txBody>
-          <a:bodyPr/>
-          <a:lstStyle/>
-          <a:p>
-            <a:r>
-              <a:rPr lang="es-PE" dirty="0"/>
-              <a:t>Presentación de Resultados</a:t>
-            </a:r>
-            <a:endParaRPr lang="es-ES_tradnl" dirty="0"/>
-          </a:p>
-        </p:txBody>
-      </p:sp>
-      <p:pic>
-        <p:nvPicPr>
-          <p:cNvPr id="4098" name="Picture 2">
-            <a:extLst>
-              <a:ext uri="{FF2B5EF4-FFF2-40B4-BE49-F238E27FC236}">
-                <a16:creationId xmlns:a16="http://schemas.microsoft.com/office/drawing/2014/main" id="{51AA23F8-6387-8414-4898-2030335B1129}"/>
-              </a:ext>
-            </a:extLst>
-          </p:cNvPr>
-          <p:cNvPicPr>
-            <a:picLocks noGrp="1" noChangeAspect="1" noChangeArrowheads="1"/>
-          </p:cNvPicPr>
-          <p:nvPr>
-            <p:ph idx="1"/>
-          </p:nvPr>
-        </p:nvPicPr>
-        <p:blipFill>
-          <a:blip r:embed="rId2">
-            <a:extLst>
-              <a:ext uri="{28A0092B-C50C-407E-A947-70E740481C1C}">
-                <a14:useLocalDpi xmlns:a14="http://schemas.microsoft.com/office/drawing/2010/main" val="0"/>
-              </a:ext>
-            </a:extLst>
-          </a:blip>
-          <a:srcRect/>
-          <a:stretch>
-            <a:fillRect/>
-          </a:stretch>
-        </p:blipFill>
-        <p:spPr bwMode="auto">
-          <a:xfrm>
-            <a:off x="731946" y="2287385"/>
-            <a:ext cx="7464650" cy="3697444"/>
-          </a:xfrm>
-          <a:prstGeom prst="rect">
-            <a:avLst/>
-          </a:prstGeom>
-          <a:noFill/>
-          <a:extLst>
-            <a:ext uri="{909E8E84-426E-40DD-AFC4-6F175D3DCCD1}">
-              <a14:hiddenFill xmlns:a14="http://schemas.microsoft.com/office/drawing/2010/main">
-                <a:solidFill>
-                  <a:srgbClr val="FFFFFF"/>
-                </a:solidFill>
-              </a14:hiddenFill>
-            </a:ext>
-          </a:extLst>
-        </p:spPr>
-      </p:pic>
-      <p:graphicFrame>
-        <p:nvGraphicFramePr>
-          <p:cNvPr id="8" name="Diagrama 7">
-            <a:extLst>
-              <a:ext uri="{FF2B5EF4-FFF2-40B4-BE49-F238E27FC236}">
-                <a16:creationId xmlns:a16="http://schemas.microsoft.com/office/drawing/2014/main" id="{D20818CC-2B10-B393-2D70-F4B3197AFE3C}"/>
-              </a:ext>
-            </a:extLst>
-          </p:cNvPr>
-          <p:cNvGraphicFramePr/>
-          <p:nvPr>
-            <p:extLst>
-              <p:ext uri="{D42A27DB-BD31-4B8C-83A1-F6EECF244321}">
-                <p14:modId xmlns:p14="http://schemas.microsoft.com/office/powerpoint/2010/main" val="2309031091"/>
-              </p:ext>
-            </p:extLst>
-          </p:nvPr>
-        </p:nvGraphicFramePr>
-        <p:xfrm>
-          <a:off x="8196596" y="2097088"/>
-          <a:ext cx="3628031" cy="4078039"/>
-        </p:xfrm>
-        <a:graphic>
-          <a:graphicData uri="http://schemas.openxmlformats.org/drawingml/2006/diagram">
-            <dgm:relIds xmlns:dgm="http://schemas.openxmlformats.org/drawingml/2006/diagram" xmlns:r="http://schemas.openxmlformats.org/officeDocument/2006/relationships" r:dm="rId3" r:lo="rId4" r:qs="rId5" r:cs="rId6"/>
-          </a:graphicData>
-        </a:graphic>
-      </p:graphicFrame>
-    </p:spTree>
-    <p:extLst>
-      <p:ext uri="{BB962C8B-B14F-4D97-AF65-F5344CB8AC3E}">
-        <p14:creationId xmlns:p14="http://schemas.microsoft.com/office/powerpoint/2010/main" val="2897962074"/>
-      </p:ext>
-    </p:extLst>
-  </p:cSld>
-  <p:clrMapOvr>
-    <a:masterClrMapping/>
-  </p:clrMapOvr>
-</p:sld>
-</file>
-
-<file path=ppt/slides/slide9.xml><?xml version="1.0" encoding="utf-8"?>
 <p:sld xmlns:a="http://schemas.openxmlformats.org/drawingml/2006/main" xmlns:r="http://schemas.openxmlformats.org/officeDocument/2006/relationships" xmlns:p="http://schemas.openxmlformats.org/presentationml/2006/main">
   <p:cSld>
     <p:spTree>
@@ -40052,7 +39963,7 @@
             <p:ph idx="1"/>
             <p:extLst>
               <p:ext uri="{D42A27DB-BD31-4B8C-83A1-F6EECF244321}">
-                <p14:modId xmlns:p14="http://schemas.microsoft.com/office/powerpoint/2010/main" val="2530765127"/>
+                <p14:modId xmlns:p14="http://schemas.microsoft.com/office/powerpoint/2010/main" val="2214481721"/>
               </p:ext>
             </p:extLst>
           </p:nvPr>
@@ -40488,6 +40399,4486 @@
     <p:extLst>
       <p:ext uri="{BB962C8B-B14F-4D97-AF65-F5344CB8AC3E}">
         <p14:creationId xmlns:p14="http://schemas.microsoft.com/office/powerpoint/2010/main" val="2189395731"/>
+      </p:ext>
+    </p:extLst>
+  </p:cSld>
+  <p:clrMapOvr>
+    <a:masterClrMapping/>
+  </p:clrMapOvr>
+</p:sld>
+</file>
+
+<file path=ppt/slides/slide11.xml><?xml version="1.0" encoding="utf-8"?>
+<p:sld xmlns:a="http://schemas.openxmlformats.org/drawingml/2006/main" xmlns:r="http://schemas.openxmlformats.org/officeDocument/2006/relationships" xmlns:p="http://schemas.openxmlformats.org/presentationml/2006/main">
+  <p:cSld>
+    <p:spTree>
+      <p:nvGrpSpPr>
+        <p:cNvPr id="1" name="">
+          <a:extLst>
+            <a:ext uri="{FF2B5EF4-FFF2-40B4-BE49-F238E27FC236}">
+              <a16:creationId xmlns:a16="http://schemas.microsoft.com/office/drawing/2014/main" id="{9F930E2D-23FE-99A5-40BC-245271A8A3E7}"/>
+            </a:ext>
+          </a:extLst>
+        </p:cNvPr>
+        <p:cNvGrpSpPr/>
+        <p:nvPr/>
+      </p:nvGrpSpPr>
+      <p:grpSpPr>
+        <a:xfrm>
+          <a:off x="0" y="0"/>
+          <a:ext cx="0" cy="0"/>
+          <a:chOff x="0" y="0"/>
+          <a:chExt cx="0" cy="0"/>
+        </a:xfrm>
+      </p:grpSpPr>
+      <p:sp>
+        <p:nvSpPr>
+          <p:cNvPr id="2" name="Título 1">
+            <a:extLst>
+              <a:ext uri="{FF2B5EF4-FFF2-40B4-BE49-F238E27FC236}">
+                <a16:creationId xmlns:a16="http://schemas.microsoft.com/office/drawing/2014/main" id="{238AB016-9AE1-5296-8E31-3FAF88C00773}"/>
+              </a:ext>
+            </a:extLst>
+          </p:cNvPr>
+          <p:cNvSpPr>
+            <a:spLocks noGrp="1"/>
+          </p:cNvSpPr>
+          <p:nvPr>
+            <p:ph type="title"/>
+          </p:nvPr>
+        </p:nvSpPr>
+        <p:spPr>
+          <a:xfrm>
+            <a:off x="1141413" y="2689715"/>
+            <a:ext cx="9905998" cy="1478570"/>
+          </a:xfrm>
+        </p:spPr>
+        <p:txBody>
+          <a:bodyPr/>
+          <a:lstStyle/>
+          <a:p>
+            <a:pPr algn="ctr"/>
+            <a:r>
+              <a:rPr lang="es-ES_tradnl" dirty="0"/>
+              <a:t>GRACIAS</a:t>
+            </a:r>
+            <a:endParaRPr lang="es-PE" dirty="0"/>
+          </a:p>
+        </p:txBody>
+      </p:sp>
+    </p:spTree>
+    <p:extLst>
+      <p:ext uri="{BB962C8B-B14F-4D97-AF65-F5344CB8AC3E}">
+        <p14:creationId xmlns:p14="http://schemas.microsoft.com/office/powerpoint/2010/main" val="578503961"/>
+      </p:ext>
+    </p:extLst>
+  </p:cSld>
+  <p:clrMapOvr>
+    <a:masterClrMapping/>
+  </p:clrMapOvr>
+</p:sld>
+</file>
+
+<file path=ppt/slides/slide2.xml><?xml version="1.0" encoding="utf-8"?>
+<p:sld xmlns:a="http://schemas.openxmlformats.org/drawingml/2006/main" xmlns:r="http://schemas.openxmlformats.org/officeDocument/2006/relationships" xmlns:p="http://schemas.openxmlformats.org/presentationml/2006/main">
+  <p:cSld>
+    <p:spTree>
+      <p:nvGrpSpPr>
+        <p:cNvPr id="1" name=""/>
+        <p:cNvGrpSpPr/>
+        <p:nvPr/>
+      </p:nvGrpSpPr>
+      <p:grpSpPr>
+        <a:xfrm>
+          <a:off x="0" y="0"/>
+          <a:ext cx="0" cy="0"/>
+          <a:chOff x="0" y="0"/>
+          <a:chExt cx="0" cy="0"/>
+        </a:xfrm>
+      </p:grpSpPr>
+      <p:sp>
+        <p:nvSpPr>
+          <p:cNvPr id="2" name="Título 1">
+            <a:extLst>
+              <a:ext uri="{FF2B5EF4-FFF2-40B4-BE49-F238E27FC236}">
+                <a16:creationId xmlns:a16="http://schemas.microsoft.com/office/drawing/2014/main" id="{AB417137-6933-2996-A547-C510EE6EE9B6}"/>
+              </a:ext>
+            </a:extLst>
+          </p:cNvPr>
+          <p:cNvSpPr>
+            <a:spLocks noGrp="1"/>
+          </p:cNvSpPr>
+          <p:nvPr>
+            <p:ph type="title"/>
+          </p:nvPr>
+        </p:nvSpPr>
+        <p:spPr/>
+        <p:txBody>
+          <a:bodyPr/>
+          <a:lstStyle/>
+          <a:p>
+            <a:r>
+              <a:rPr lang="es-ES_tradnl"/>
+              <a:t>CONTEXTO</a:t>
+            </a:r>
+            <a:endParaRPr lang="es-ES"/>
+          </a:p>
+        </p:txBody>
+      </p:sp>
+      <p:sp>
+        <p:nvSpPr>
+          <p:cNvPr id="10" name="Marcador de contenido 2">
+            <a:extLst>
+              <a:ext uri="{FF2B5EF4-FFF2-40B4-BE49-F238E27FC236}">
+                <a16:creationId xmlns:a16="http://schemas.microsoft.com/office/drawing/2014/main" id="{BD0444FC-1FBE-D718-CB99-E0E67BF06EC5}"/>
+              </a:ext>
+            </a:extLst>
+          </p:cNvPr>
+          <p:cNvSpPr>
+            <a:spLocks noGrp="1"/>
+          </p:cNvSpPr>
+          <p:nvPr>
+            <p:ph idx="1"/>
+          </p:nvPr>
+        </p:nvSpPr>
+        <p:spPr>
+          <a:xfrm>
+            <a:off x="1141412" y="2249487"/>
+            <a:ext cx="9905999" cy="3991986"/>
+          </a:xfrm>
+        </p:spPr>
+        <p:txBody>
+          <a:bodyPr vert="horz" lIns="91440" tIns="45720" rIns="91440" bIns="45720" rtlCol="0" anchor="t">
+            <a:noAutofit/>
+          </a:bodyPr>
+          <a:lstStyle/>
+          <a:p>
+            <a:r>
+              <a:rPr lang="es-ES">
+                <a:latin typeface="Tw Cen MT"/>
+                <a:ea typeface="Calibri"/>
+                <a:cs typeface="Calibri"/>
+              </a:rPr>
+              <a:t>La consultora</a:t>
+            </a:r>
+            <a:r>
+              <a:rPr lang="es-ES" dirty="0">
+                <a:latin typeface="Tw Cen MT"/>
+                <a:ea typeface="Calibri"/>
+                <a:cs typeface="Calibri"/>
+              </a:rPr>
+              <a:t> depende del talento humano para mantener la continuidad de sus operaciones y proyectos.</a:t>
+            </a:r>
+            <a:endParaRPr lang="es-ES" dirty="0">
+              <a:latin typeface="Tw Cen MT"/>
+            </a:endParaRPr>
+          </a:p>
+          <a:p>
+            <a:r>
+              <a:rPr lang="es-ES">
+                <a:latin typeface="Tw Cen MT"/>
+                <a:ea typeface="Calibri"/>
+                <a:cs typeface="Calibri"/>
+              </a:rPr>
+              <a:t>La rotación de personal genera retrasos, sobrecarga laboral y costos de reemplazo. </a:t>
+            </a:r>
+            <a:endParaRPr lang="es-ES"/>
+          </a:p>
+          <a:p>
+            <a:r>
+              <a:rPr lang="es-ES">
+                <a:latin typeface="Tw Cen MT"/>
+                <a:ea typeface="Calibri"/>
+                <a:cs typeface="Calibri"/>
+              </a:rPr>
+              <a:t>La salida no planificada de colaboradores afecta la disponibilidad de recursos y la planificación operativa. </a:t>
+            </a:r>
+            <a:endParaRPr lang="es-ES"/>
+          </a:p>
+          <a:p>
+            <a:r>
+              <a:rPr lang="es-ES" dirty="0">
+                <a:latin typeface="Tw Cen MT"/>
+                <a:ea typeface="Calibri"/>
+                <a:cs typeface="Calibri"/>
+              </a:rPr>
+              <a:t>Surge la necesidad de aplicar Machine </a:t>
+            </a:r>
+            <a:r>
+              <a:rPr lang="es-ES" dirty="0" err="1">
+                <a:latin typeface="Tw Cen MT"/>
+                <a:ea typeface="Calibri"/>
+                <a:cs typeface="Calibri"/>
+              </a:rPr>
+              <a:t>Learning</a:t>
+            </a:r>
+            <a:r>
+              <a:rPr lang="es-ES" dirty="0">
+                <a:latin typeface="Tw Cen MT"/>
+                <a:ea typeface="Calibri"/>
+                <a:cs typeface="Calibri"/>
+              </a:rPr>
+              <a:t> para anticipar tendencias de desvinculación y mejorar la toma de decisiones en RRHH.</a:t>
+            </a:r>
+            <a:endParaRPr lang="es-ES" dirty="0"/>
+          </a:p>
+          <a:p>
+            <a:endParaRPr lang="es-ES" dirty="0"/>
+          </a:p>
+        </p:txBody>
+      </p:sp>
+    </p:spTree>
+    <p:extLst>
+      <p:ext uri="{BB962C8B-B14F-4D97-AF65-F5344CB8AC3E}">
+        <p14:creationId xmlns:p14="http://schemas.microsoft.com/office/powerpoint/2010/main" val="1860873599"/>
+      </p:ext>
+    </p:extLst>
+  </p:cSld>
+  <p:clrMapOvr>
+    <a:masterClrMapping/>
+  </p:clrMapOvr>
+</p:sld>
+</file>
+
+<file path=ppt/slides/slide3.xml><?xml version="1.0" encoding="utf-8"?>
+<p:sld xmlns:a="http://schemas.openxmlformats.org/drawingml/2006/main" xmlns:r="http://schemas.openxmlformats.org/officeDocument/2006/relationships" xmlns:p="http://schemas.openxmlformats.org/presentationml/2006/main">
+  <p:cSld>
+    <p:spTree>
+      <p:nvGrpSpPr>
+        <p:cNvPr id="1" name="">
+          <a:extLst>
+            <a:ext uri="{FF2B5EF4-FFF2-40B4-BE49-F238E27FC236}">
+              <a16:creationId xmlns:a16="http://schemas.microsoft.com/office/drawing/2014/main" id="{1BE0EB9A-002B-BB49-20AD-58ACAA25787F}"/>
+            </a:ext>
+          </a:extLst>
+        </p:cNvPr>
+        <p:cNvGrpSpPr/>
+        <p:nvPr/>
+      </p:nvGrpSpPr>
+      <p:grpSpPr>
+        <a:xfrm>
+          <a:off x="0" y="0"/>
+          <a:ext cx="0" cy="0"/>
+          <a:chOff x="0" y="0"/>
+          <a:chExt cx="0" cy="0"/>
+        </a:xfrm>
+      </p:grpSpPr>
+      <p:sp>
+        <p:nvSpPr>
+          <p:cNvPr id="2" name="Título 1">
+            <a:extLst>
+              <a:ext uri="{FF2B5EF4-FFF2-40B4-BE49-F238E27FC236}">
+                <a16:creationId xmlns:a16="http://schemas.microsoft.com/office/drawing/2014/main" id="{8CD9871A-BC58-595C-6481-8AB274518602}"/>
+              </a:ext>
+            </a:extLst>
+          </p:cNvPr>
+          <p:cNvSpPr>
+            <a:spLocks noGrp="1"/>
+          </p:cNvSpPr>
+          <p:nvPr>
+            <p:ph type="title"/>
+          </p:nvPr>
+        </p:nvSpPr>
+        <p:spPr/>
+        <p:txBody>
+          <a:bodyPr/>
+          <a:lstStyle/>
+          <a:p>
+            <a:r>
+              <a:rPr lang="es-ES_tradnl" dirty="0"/>
+              <a:t>Problema identificado</a:t>
+            </a:r>
+          </a:p>
+        </p:txBody>
+      </p:sp>
+      <p:graphicFrame>
+        <p:nvGraphicFramePr>
+          <p:cNvPr id="6" name="Diagrama 5">
+            <a:extLst>
+              <a:ext uri="{FF2B5EF4-FFF2-40B4-BE49-F238E27FC236}">
+                <a16:creationId xmlns:a16="http://schemas.microsoft.com/office/drawing/2014/main" id="{1653AD15-B887-0886-C788-3A76757DBF81}"/>
+              </a:ext>
+            </a:extLst>
+          </p:cNvPr>
+          <p:cNvGraphicFramePr/>
+          <p:nvPr/>
+        </p:nvGraphicFramePr>
+        <p:xfrm>
+          <a:off x="1141413" y="2097088"/>
+          <a:ext cx="9905999" cy="4239317"/>
+        </p:xfrm>
+        <a:graphic>
+          <a:graphicData uri="http://schemas.openxmlformats.org/drawingml/2006/diagram">
+            <dgm:relIds xmlns:dgm="http://schemas.openxmlformats.org/drawingml/2006/diagram" xmlns:r="http://schemas.openxmlformats.org/officeDocument/2006/relationships" r:dm="rId2" r:lo="rId3" r:qs="rId4" r:cs="rId5"/>
+          </a:graphicData>
+        </a:graphic>
+      </p:graphicFrame>
+    </p:spTree>
+    <p:extLst>
+      <p:ext uri="{BB962C8B-B14F-4D97-AF65-F5344CB8AC3E}">
+        <p14:creationId xmlns:p14="http://schemas.microsoft.com/office/powerpoint/2010/main" val="4061065148"/>
+      </p:ext>
+    </p:extLst>
+  </p:cSld>
+  <p:clrMapOvr>
+    <a:masterClrMapping/>
+  </p:clrMapOvr>
+</p:sld>
+</file>
+
+<file path=ppt/slides/slide4.xml><?xml version="1.0" encoding="utf-8"?>
+<p:sld xmlns:a="http://schemas.openxmlformats.org/drawingml/2006/main" xmlns:r="http://schemas.openxmlformats.org/officeDocument/2006/relationships" xmlns:p="http://schemas.openxmlformats.org/presentationml/2006/main">
+  <p:cSld>
+    <p:spTree>
+      <p:nvGrpSpPr>
+        <p:cNvPr id="1" name=""/>
+        <p:cNvGrpSpPr/>
+        <p:nvPr/>
+      </p:nvGrpSpPr>
+      <p:grpSpPr>
+        <a:xfrm>
+          <a:off x="0" y="0"/>
+          <a:ext cx="0" cy="0"/>
+          <a:chOff x="0" y="0"/>
+          <a:chExt cx="0" cy="0"/>
+        </a:xfrm>
+      </p:grpSpPr>
+      <p:sp>
+        <p:nvSpPr>
+          <p:cNvPr id="2" name="Título 1">
+            <a:extLst>
+              <a:ext uri="{FF2B5EF4-FFF2-40B4-BE49-F238E27FC236}">
+                <a16:creationId xmlns:a16="http://schemas.microsoft.com/office/drawing/2014/main" id="{752C44F6-8562-ED18-5320-D23B6B5389CC}"/>
+              </a:ext>
+            </a:extLst>
+          </p:cNvPr>
+          <p:cNvSpPr>
+            <a:spLocks noGrp="1"/>
+          </p:cNvSpPr>
+          <p:nvPr>
+            <p:ph type="title"/>
+          </p:nvPr>
+        </p:nvSpPr>
+        <p:spPr/>
+        <p:txBody>
+          <a:bodyPr/>
+          <a:lstStyle/>
+          <a:p>
+            <a:r>
+              <a:rPr lang="es-PE" dirty="0"/>
+              <a:t>¿Por qué desarrollar este proyecto?</a:t>
+            </a:r>
+            <a:endParaRPr lang="es-ES_tradnl" dirty="0"/>
+          </a:p>
+        </p:txBody>
+      </p:sp>
+      <p:graphicFrame>
+        <p:nvGraphicFramePr>
+          <p:cNvPr id="10" name="Marcador de contenido 9">
+            <a:extLst>
+              <a:ext uri="{FF2B5EF4-FFF2-40B4-BE49-F238E27FC236}">
+                <a16:creationId xmlns:a16="http://schemas.microsoft.com/office/drawing/2014/main" id="{23500928-D5C5-95CB-BB76-291C05954161}"/>
+              </a:ext>
+            </a:extLst>
+          </p:cNvPr>
+          <p:cNvGraphicFramePr>
+            <a:graphicFrameLocks noGrp="1"/>
+          </p:cNvGraphicFramePr>
+          <p:nvPr>
+            <p:ph idx="1"/>
+            <p:extLst>
+              <p:ext uri="{D42A27DB-BD31-4B8C-83A1-F6EECF244321}">
+                <p14:modId xmlns:p14="http://schemas.microsoft.com/office/powerpoint/2010/main" val="2031873570"/>
+              </p:ext>
+            </p:extLst>
+          </p:nvPr>
+        </p:nvGraphicFramePr>
+        <p:xfrm>
+          <a:off x="825982" y="1901952"/>
+          <a:ext cx="10536859" cy="4498847"/>
+        </p:xfrm>
+        <a:graphic>
+          <a:graphicData uri="http://schemas.openxmlformats.org/drawingml/2006/diagram">
+            <dgm:relIds xmlns:dgm="http://schemas.openxmlformats.org/drawingml/2006/diagram" xmlns:r="http://schemas.openxmlformats.org/officeDocument/2006/relationships" r:dm="rId3" r:lo="rId4" r:qs="rId5" r:cs="rId6"/>
+          </a:graphicData>
+        </a:graphic>
+      </p:graphicFrame>
+    </p:spTree>
+    <p:extLst>
+      <p:ext uri="{BB962C8B-B14F-4D97-AF65-F5344CB8AC3E}">
+        <p14:creationId xmlns:p14="http://schemas.microsoft.com/office/powerpoint/2010/main" val="2060895292"/>
+      </p:ext>
+    </p:extLst>
+  </p:cSld>
+  <p:clrMapOvr>
+    <a:masterClrMapping/>
+  </p:clrMapOvr>
+</p:sld>
+</file>
+
+<file path=ppt/slides/slide5.xml><?xml version="1.0" encoding="utf-8"?>
+<p:sld xmlns:a="http://schemas.openxmlformats.org/drawingml/2006/main" xmlns:r="http://schemas.openxmlformats.org/officeDocument/2006/relationships" xmlns:p="http://schemas.openxmlformats.org/presentationml/2006/main">
+  <p:cSld>
+    <p:spTree>
+      <p:nvGrpSpPr>
+        <p:cNvPr id="1" name=""/>
+        <p:cNvGrpSpPr/>
+        <p:nvPr/>
+      </p:nvGrpSpPr>
+      <p:grpSpPr>
+        <a:xfrm>
+          <a:off x="0" y="0"/>
+          <a:ext cx="0" cy="0"/>
+          <a:chOff x="0" y="0"/>
+          <a:chExt cx="0" cy="0"/>
+        </a:xfrm>
+      </p:grpSpPr>
+      <p:graphicFrame>
+        <p:nvGraphicFramePr>
+          <p:cNvPr id="16" name="Marcador de contenido 15">
+            <a:extLst>
+              <a:ext uri="{FF2B5EF4-FFF2-40B4-BE49-F238E27FC236}">
+                <a16:creationId xmlns:a16="http://schemas.microsoft.com/office/drawing/2014/main" id="{DCB581CD-A48B-6DF2-12F7-4C16ABB5BEC4}"/>
+              </a:ext>
+            </a:extLst>
+          </p:cNvPr>
+          <p:cNvGraphicFramePr>
+            <a:graphicFrameLocks noGrp="1"/>
+          </p:cNvGraphicFramePr>
+          <p:nvPr>
+            <p:ph idx="1"/>
+            <p:extLst>
+              <p:ext uri="{D42A27DB-BD31-4B8C-83A1-F6EECF244321}">
+                <p14:modId xmlns:p14="http://schemas.microsoft.com/office/powerpoint/2010/main" val="3024195509"/>
+              </p:ext>
+            </p:extLst>
+          </p:nvPr>
+        </p:nvGraphicFramePr>
+        <p:xfrm>
+          <a:off x="1143000" y="1423115"/>
+          <a:ext cx="9906000" cy="4368085"/>
+        </p:xfrm>
+        <a:graphic>
+          <a:graphicData uri="http://schemas.openxmlformats.org/drawingml/2006/diagram">
+            <dgm:relIds xmlns:dgm="http://schemas.openxmlformats.org/drawingml/2006/diagram" xmlns:r="http://schemas.openxmlformats.org/officeDocument/2006/relationships" r:dm="rId2" r:lo="rId3" r:qs="rId4" r:cs="rId5"/>
+          </a:graphicData>
+        </a:graphic>
+      </p:graphicFrame>
+    </p:spTree>
+    <p:extLst>
+      <p:ext uri="{BB962C8B-B14F-4D97-AF65-F5344CB8AC3E}">
+        <p14:creationId xmlns:p14="http://schemas.microsoft.com/office/powerpoint/2010/main" val="1648153153"/>
+      </p:ext>
+    </p:extLst>
+  </p:cSld>
+  <p:clrMapOvr>
+    <a:masterClrMapping/>
+  </p:clrMapOvr>
+</p:sld>
+</file>
+
+<file path=ppt/slides/slide6.xml><?xml version="1.0" encoding="utf-8"?>
+<p:sld xmlns:a="http://schemas.openxmlformats.org/drawingml/2006/main" xmlns:r="http://schemas.openxmlformats.org/officeDocument/2006/relationships" xmlns:p="http://schemas.openxmlformats.org/presentationml/2006/main">
+  <p:cSld>
+    <p:spTree>
+      <p:nvGrpSpPr>
+        <p:cNvPr id="1" name=""/>
+        <p:cNvGrpSpPr/>
+        <p:nvPr/>
+      </p:nvGrpSpPr>
+      <p:grpSpPr>
+        <a:xfrm>
+          <a:off x="0" y="0"/>
+          <a:ext cx="0" cy="0"/>
+          <a:chOff x="0" y="0"/>
+          <a:chExt cx="0" cy="0"/>
+        </a:xfrm>
+      </p:grpSpPr>
+      <p:sp>
+        <p:nvSpPr>
+          <p:cNvPr id="2" name="Título 1">
+            <a:extLst>
+              <a:ext uri="{FF2B5EF4-FFF2-40B4-BE49-F238E27FC236}">
+                <a16:creationId xmlns:a16="http://schemas.microsoft.com/office/drawing/2014/main" id="{D7588BB8-DDCA-ADB8-E183-F23AFF85EEE7}"/>
+              </a:ext>
+            </a:extLst>
+          </p:cNvPr>
+          <p:cNvSpPr>
+            <a:spLocks noGrp="1"/>
+          </p:cNvSpPr>
+          <p:nvPr>
+            <p:ph type="title"/>
+          </p:nvPr>
+        </p:nvSpPr>
+        <p:spPr/>
+        <p:txBody>
+          <a:bodyPr/>
+          <a:lstStyle/>
+          <a:p>
+            <a:r>
+              <a:rPr lang="es-ES_tradnl" dirty="0"/>
+              <a:t>Propuesta de solución</a:t>
+            </a:r>
+          </a:p>
+        </p:txBody>
+      </p:sp>
+      <p:graphicFrame>
+        <p:nvGraphicFramePr>
+          <p:cNvPr id="9" name="Marcador de contenido 8">
+            <a:extLst>
+              <a:ext uri="{FF2B5EF4-FFF2-40B4-BE49-F238E27FC236}">
+                <a16:creationId xmlns:a16="http://schemas.microsoft.com/office/drawing/2014/main" id="{426F2A62-4B67-E738-2A5A-0F41B889F264}"/>
+              </a:ext>
+            </a:extLst>
+          </p:cNvPr>
+          <p:cNvGraphicFramePr>
+            <a:graphicFrameLocks noGrp="1"/>
+          </p:cNvGraphicFramePr>
+          <p:nvPr>
+            <p:ph idx="1"/>
+            <p:extLst>
+              <p:ext uri="{D42A27DB-BD31-4B8C-83A1-F6EECF244321}">
+                <p14:modId xmlns:p14="http://schemas.microsoft.com/office/powerpoint/2010/main" val="3019191562"/>
+              </p:ext>
+            </p:extLst>
+          </p:nvPr>
+        </p:nvGraphicFramePr>
+        <p:xfrm>
+          <a:off x="595669" y="2097089"/>
+          <a:ext cx="10997485" cy="4142393"/>
+        </p:xfrm>
+        <a:graphic>
+          <a:graphicData uri="http://schemas.openxmlformats.org/drawingml/2006/diagram">
+            <dgm:relIds xmlns:dgm="http://schemas.openxmlformats.org/drawingml/2006/diagram" xmlns:r="http://schemas.openxmlformats.org/officeDocument/2006/relationships" r:dm="rId2" r:lo="rId3" r:qs="rId4" r:cs="rId5"/>
+          </a:graphicData>
+        </a:graphic>
+      </p:graphicFrame>
+    </p:spTree>
+    <p:extLst>
+      <p:ext uri="{BB962C8B-B14F-4D97-AF65-F5344CB8AC3E}">
+        <p14:creationId xmlns:p14="http://schemas.microsoft.com/office/powerpoint/2010/main" val="3818610333"/>
+      </p:ext>
+    </p:extLst>
+  </p:cSld>
+  <p:clrMapOvr>
+    <a:masterClrMapping/>
+  </p:clrMapOvr>
+</p:sld>
+</file>
+
+<file path=ppt/slides/slide7.xml><?xml version="1.0" encoding="utf-8"?>
+<p:sld xmlns:a="http://schemas.openxmlformats.org/drawingml/2006/main" xmlns:r="http://schemas.openxmlformats.org/officeDocument/2006/relationships" xmlns:p="http://schemas.openxmlformats.org/presentationml/2006/main">
+  <p:cSld>
+    <p:spTree>
+      <p:nvGrpSpPr>
+        <p:cNvPr id="1" name=""/>
+        <p:cNvGrpSpPr/>
+        <p:nvPr/>
+      </p:nvGrpSpPr>
+      <p:grpSpPr>
+        <a:xfrm>
+          <a:off x="0" y="0"/>
+          <a:ext cx="0" cy="0"/>
+          <a:chOff x="0" y="0"/>
+          <a:chExt cx="0" cy="0"/>
+        </a:xfrm>
+      </p:grpSpPr>
+      <p:sp>
+        <p:nvSpPr>
+          <p:cNvPr id="2" name="Título 1">
+            <a:extLst>
+              <a:ext uri="{FF2B5EF4-FFF2-40B4-BE49-F238E27FC236}">
+                <a16:creationId xmlns:a16="http://schemas.microsoft.com/office/drawing/2014/main" id="{3BA79F47-8EE9-45B9-FC3F-0ACAA6CC15C2}"/>
+              </a:ext>
+            </a:extLst>
+          </p:cNvPr>
+          <p:cNvSpPr>
+            <a:spLocks noGrp="1"/>
+          </p:cNvSpPr>
+          <p:nvPr>
+            <p:ph type="title"/>
+          </p:nvPr>
+        </p:nvSpPr>
+        <p:spPr/>
+        <p:txBody>
+          <a:bodyPr/>
+          <a:lstStyle/>
+          <a:p>
+            <a:r>
+              <a:rPr lang="es-PE" dirty="0"/>
+              <a:t>Implementación</a:t>
+            </a:r>
+            <a:endParaRPr lang="es-ES_tradnl" dirty="0"/>
+          </a:p>
+        </p:txBody>
+      </p:sp>
+      <p:graphicFrame>
+        <p:nvGraphicFramePr>
+          <p:cNvPr id="7" name="Diagrama 6">
+            <a:extLst>
+              <a:ext uri="{FF2B5EF4-FFF2-40B4-BE49-F238E27FC236}">
+                <a16:creationId xmlns:a16="http://schemas.microsoft.com/office/drawing/2014/main" id="{E85E166B-AE3C-603A-DACF-B9E0B374793A}"/>
+              </a:ext>
+            </a:extLst>
+          </p:cNvPr>
+          <p:cNvGraphicFramePr/>
+          <p:nvPr>
+            <p:extLst>
+              <p:ext uri="{D42A27DB-BD31-4B8C-83A1-F6EECF244321}">
+                <p14:modId xmlns:p14="http://schemas.microsoft.com/office/powerpoint/2010/main" val="3196464605"/>
+              </p:ext>
+            </p:extLst>
+          </p:nvPr>
+        </p:nvGraphicFramePr>
+        <p:xfrm>
+          <a:off x="612585" y="1944709"/>
+          <a:ext cx="10959083" cy="3921618"/>
+        </p:xfrm>
+        <a:graphic>
+          <a:graphicData uri="http://schemas.openxmlformats.org/drawingml/2006/diagram">
+            <dgm:relIds xmlns:dgm="http://schemas.openxmlformats.org/drawingml/2006/diagram" xmlns:r="http://schemas.openxmlformats.org/officeDocument/2006/relationships" r:dm="rId2" r:lo="rId3" r:qs="rId4" r:cs="rId5"/>
+          </a:graphicData>
+        </a:graphic>
+      </p:graphicFrame>
+    </p:spTree>
+    <p:extLst>
+      <p:ext uri="{BB962C8B-B14F-4D97-AF65-F5344CB8AC3E}">
+        <p14:creationId xmlns:p14="http://schemas.microsoft.com/office/powerpoint/2010/main" val="246699837"/>
+      </p:ext>
+    </p:extLst>
+  </p:cSld>
+  <p:clrMapOvr>
+    <a:masterClrMapping/>
+  </p:clrMapOvr>
+</p:sld>
+</file>
+
+<file path=ppt/slides/slide8.xml><?xml version="1.0" encoding="utf-8"?>
+<p:sld xmlns:a="http://schemas.openxmlformats.org/drawingml/2006/main" xmlns:r="http://schemas.openxmlformats.org/officeDocument/2006/relationships" xmlns:p="http://schemas.openxmlformats.org/presentationml/2006/main">
+  <p:cSld>
+    <p:spTree>
+      <p:nvGrpSpPr>
+        <p:cNvPr id="1" name=""/>
+        <p:cNvGrpSpPr/>
+        <p:nvPr/>
+      </p:nvGrpSpPr>
+      <p:grpSpPr>
+        <a:xfrm>
+          <a:off x="0" y="0"/>
+          <a:ext cx="0" cy="0"/>
+          <a:chOff x="0" y="0"/>
+          <a:chExt cx="0" cy="0"/>
+        </a:xfrm>
+      </p:grpSpPr>
+      <p:sp>
+        <p:nvSpPr>
+          <p:cNvPr id="2" name="Título 1">
+            <a:extLst>
+              <a:ext uri="{FF2B5EF4-FFF2-40B4-BE49-F238E27FC236}">
+                <a16:creationId xmlns:a16="http://schemas.microsoft.com/office/drawing/2014/main" id="{E80C6B06-8BA7-6409-EC77-9BF0DBEA4279}"/>
+              </a:ext>
+            </a:extLst>
+          </p:cNvPr>
+          <p:cNvSpPr>
+            <a:spLocks noGrp="1"/>
+          </p:cNvSpPr>
+          <p:nvPr>
+            <p:ph type="title"/>
+          </p:nvPr>
+        </p:nvSpPr>
+        <p:spPr>
+          <a:xfrm>
+            <a:off x="1141413" y="-129627"/>
+            <a:ext cx="9905998" cy="1478570"/>
+          </a:xfrm>
+        </p:spPr>
+        <p:txBody>
+          <a:bodyPr/>
+          <a:lstStyle/>
+          <a:p>
+            <a:r>
+              <a:rPr lang="es-ES"/>
+              <a:t> TABLA COMPARATIVA</a:t>
+            </a:r>
+          </a:p>
+        </p:txBody>
+      </p:sp>
+      <p:graphicFrame>
+        <p:nvGraphicFramePr>
+          <p:cNvPr id="5" name="Marcador de contenido 4">
+            <a:extLst>
+              <a:ext uri="{FF2B5EF4-FFF2-40B4-BE49-F238E27FC236}">
+                <a16:creationId xmlns:a16="http://schemas.microsoft.com/office/drawing/2014/main" id="{368D4D31-43A8-5F6A-8DA8-1E2C5B2A261B}"/>
+              </a:ext>
+            </a:extLst>
+          </p:cNvPr>
+          <p:cNvGraphicFramePr>
+            <a:graphicFrameLocks noGrp="1"/>
+          </p:cNvGraphicFramePr>
+          <p:nvPr>
+            <p:ph idx="1"/>
+            <p:extLst>
+              <p:ext uri="{D42A27DB-BD31-4B8C-83A1-F6EECF244321}">
+                <p14:modId xmlns:p14="http://schemas.microsoft.com/office/powerpoint/2010/main" val="1712431497"/>
+              </p:ext>
+            </p:extLst>
+          </p:nvPr>
+        </p:nvGraphicFramePr>
+        <p:xfrm>
+          <a:off x="1336963" y="1246908"/>
+          <a:ext cx="4156160" cy="4876800"/>
+        </p:xfrm>
+        <a:graphic>
+          <a:graphicData uri="http://schemas.openxmlformats.org/drawingml/2006/table">
+            <a:tbl>
+              <a:tblPr bandRow="1">
+                <a:tableStyleId>{BC89EF96-8CEA-46FF-86C4-4CE0E7609802}</a:tableStyleId>
+              </a:tblPr>
+              <a:tblGrid>
+                <a:gridCol w="789521">
+                  <a:extLst>
+                    <a:ext uri="{9D8B030D-6E8A-4147-A177-3AD203B41FA5}">
+                      <a16:colId xmlns:a16="http://schemas.microsoft.com/office/drawing/2014/main" val="459095723"/>
+                    </a:ext>
+                  </a:extLst>
+                </a:gridCol>
+                <a:gridCol w="543726">
+                  <a:extLst>
+                    <a:ext uri="{9D8B030D-6E8A-4147-A177-3AD203B41FA5}">
+                      <a16:colId xmlns:a16="http://schemas.microsoft.com/office/drawing/2014/main" val="3109736837"/>
+                    </a:ext>
+                  </a:extLst>
+                </a:gridCol>
+                <a:gridCol w="744833">
+                  <a:extLst>
+                    <a:ext uri="{9D8B030D-6E8A-4147-A177-3AD203B41FA5}">
+                      <a16:colId xmlns:a16="http://schemas.microsoft.com/office/drawing/2014/main" val="2734643805"/>
+                    </a:ext>
+                  </a:extLst>
+                </a:gridCol>
+                <a:gridCol w="789521">
+                  <a:extLst>
+                    <a:ext uri="{9D8B030D-6E8A-4147-A177-3AD203B41FA5}">
+                      <a16:colId xmlns:a16="http://schemas.microsoft.com/office/drawing/2014/main" val="2813115942"/>
+                    </a:ext>
+                  </a:extLst>
+                </a:gridCol>
+                <a:gridCol w="543726">
+                  <a:extLst>
+                    <a:ext uri="{9D8B030D-6E8A-4147-A177-3AD203B41FA5}">
+                      <a16:colId xmlns:a16="http://schemas.microsoft.com/office/drawing/2014/main" val="1243556320"/>
+                    </a:ext>
+                  </a:extLst>
+                </a:gridCol>
+                <a:gridCol w="744833">
+                  <a:extLst>
+                    <a:ext uri="{9D8B030D-6E8A-4147-A177-3AD203B41FA5}">
+                      <a16:colId xmlns:a16="http://schemas.microsoft.com/office/drawing/2014/main" val="122325436"/>
+                    </a:ext>
+                  </a:extLst>
+                </a:gridCol>
+              </a:tblGrid>
+              <a:tr h="267132">
+                <a:tc>
+                  <a:txBody>
+                    <a:bodyPr/>
+                    <a:lstStyle/>
+                    <a:p>
+                      <a:pPr>
+                        <a:buNone/>
+                      </a:pPr>
+                      <a:r>
+                        <a:rPr lang="es-ES" sz="1000">
+                          <a:effectLst/>
+                        </a:rPr>
+                        <a:t>Fecha</a:t>
+                      </a:r>
+                    </a:p>
+                  </a:txBody>
+                  <a:tcPr marL="0" marR="0" marT="0" marB="0" anchor="ctr"/>
+                </a:tc>
+                <a:tc>
+                  <a:txBody>
+                    <a:bodyPr/>
+                    <a:lstStyle/>
+                    <a:p>
+                      <a:pPr algn="ctr">
+                        <a:buNone/>
+                      </a:pPr>
+                      <a:r>
+                        <a:rPr lang="es-ES" sz="1000" dirty="0" err="1">
+                          <a:effectLst/>
+                          <a:highlight>
+                            <a:srgbClr val="FFFF00"/>
+                          </a:highlight>
+                        </a:rPr>
+                        <a:t>Rotacion</a:t>
+                      </a:r>
+                      <a:r>
+                        <a:rPr lang="es-ES" sz="1000" dirty="0">
+                          <a:effectLst/>
+                          <a:highlight>
+                            <a:srgbClr val="FFFF00"/>
+                          </a:highlight>
+                        </a:rPr>
+                        <a:t> Real</a:t>
+                      </a:r>
+                    </a:p>
+                  </a:txBody>
+                  <a:tcPr marL="0" marR="0" marT="0" marB="0" anchor="ctr"/>
+                </a:tc>
+                <a:tc>
+                  <a:txBody>
+                    <a:bodyPr/>
+                    <a:lstStyle/>
+                    <a:p>
+                      <a:pPr algn="ctr">
+                        <a:buNone/>
+                      </a:pPr>
+                      <a:r>
+                        <a:rPr lang="es-ES" sz="1000" dirty="0" err="1">
+                          <a:effectLst/>
+                        </a:rPr>
+                        <a:t>Rotacion</a:t>
+                      </a:r>
+                      <a:r>
+                        <a:rPr lang="es-ES" sz="1000" dirty="0">
+                          <a:effectLst/>
+                        </a:rPr>
+                        <a:t> </a:t>
+                      </a:r>
+                      <a:r>
+                        <a:rPr lang="es-ES" sz="1000" dirty="0" err="1">
+                          <a:effectLst/>
+                        </a:rPr>
+                        <a:t>Prediccion</a:t>
+                      </a:r>
+                    </a:p>
+                  </a:txBody>
+                  <a:tcPr marL="0" marR="0" marT="0" marB="0" anchor="ctr"/>
+                </a:tc>
+                <a:tc>
+                  <a:txBody>
+                    <a:bodyPr/>
+                    <a:lstStyle/>
+                    <a:p>
+                      <a:pPr>
+                        <a:buNone/>
+                      </a:pPr>
+                      <a:r>
+                        <a:rPr lang="es-ES" sz="1000">
+                          <a:effectLst/>
+                        </a:rPr>
+                        <a:t>Fecha</a:t>
+                      </a:r>
+                    </a:p>
+                  </a:txBody>
+                  <a:tcPr marL="0" marR="0" marT="0" marB="0" anchor="ctr"/>
+                </a:tc>
+                <a:tc>
+                  <a:txBody>
+                    <a:bodyPr/>
+                    <a:lstStyle/>
+                    <a:p>
+                      <a:pPr algn="ctr">
+                        <a:buNone/>
+                      </a:pPr>
+                      <a:r>
+                        <a:rPr lang="es-ES" sz="1000" dirty="0" err="1">
+                          <a:effectLst/>
+                          <a:highlight>
+                            <a:srgbClr val="FFFF00"/>
+                          </a:highlight>
+                        </a:rPr>
+                        <a:t>Rotacion</a:t>
+                      </a:r>
+                      <a:r>
+                        <a:rPr lang="es-ES" sz="1000" dirty="0">
+                          <a:effectLst/>
+                          <a:highlight>
+                            <a:srgbClr val="FFFF00"/>
+                          </a:highlight>
+                        </a:rPr>
+                        <a:t> Real</a:t>
+                      </a:r>
+                      <a:endParaRPr lang="es-ES" sz="1000" dirty="0" err="1">
+                        <a:effectLst/>
+                        <a:highlight>
+                          <a:srgbClr val="FFFF00"/>
+                        </a:highlight>
+                      </a:endParaRPr>
+                    </a:p>
+                  </a:txBody>
+                  <a:tcPr marL="0" marR="0" marT="0" marB="0" anchor="ctr"/>
+                </a:tc>
+                <a:tc>
+                  <a:txBody>
+                    <a:bodyPr/>
+                    <a:lstStyle/>
+                    <a:p>
+                      <a:pPr algn="ctr">
+                        <a:buNone/>
+                      </a:pPr>
+                      <a:r>
+                        <a:rPr lang="es-ES" sz="1000" err="1">
+                          <a:effectLst/>
+                        </a:rPr>
+                        <a:t>Rotacion</a:t>
+                      </a:r>
+                      <a:r>
+                        <a:rPr lang="es-ES" sz="1000" dirty="0">
+                          <a:effectLst/>
+                        </a:rPr>
+                        <a:t> </a:t>
+                      </a:r>
+                      <a:r>
+                        <a:rPr lang="es-ES" sz="1000" err="1">
+                          <a:effectLst/>
+                        </a:rPr>
+                        <a:t>Prediccion</a:t>
+                      </a:r>
+                      <a:endParaRPr lang="es-ES" sz="1000" dirty="0" err="1">
+                        <a:effectLst/>
+                      </a:endParaRPr>
+                    </a:p>
+                  </a:txBody>
+                  <a:tcPr marL="0" marR="0" marT="0" marB="0" anchor="ctr"/>
+                </a:tc>
+                <a:extLst>
+                  <a:ext uri="{0D108BD9-81ED-4DB2-BD59-A6C34878D82A}">
+                    <a16:rowId xmlns:a16="http://schemas.microsoft.com/office/drawing/2014/main" val="2005736805"/>
+                  </a:ext>
+                </a:extLst>
+              </a:tr>
+              <a:tr h="267132">
+                <a:tc>
+                  <a:txBody>
+                    <a:bodyPr/>
+                    <a:lstStyle/>
+                    <a:p>
+                      <a:pPr>
+                        <a:buNone/>
+                      </a:pPr>
+                      <a:r>
+                        <a:rPr lang="es-ES" sz="1000">
+                          <a:effectLst/>
+                        </a:rPr>
+                        <a:t>2025-09-19 00:13:48</a:t>
+                      </a:r>
+                    </a:p>
+                  </a:txBody>
+                  <a:tcPr marL="0" marR="0" marT="0" marB="0" anchor="ctr"/>
+                </a:tc>
+                <a:tc>
+                  <a:txBody>
+                    <a:bodyPr/>
+                    <a:lstStyle/>
+                    <a:p>
+                      <a:pPr algn="ctr">
+                        <a:buNone/>
+                      </a:pPr>
+                      <a:r>
+                        <a:rPr lang="es-ES" sz="1000"/>
+                        <a:t>1</a:t>
+                      </a:r>
+                      <a:endParaRPr lang="es-ES" sz="1000" dirty="0"/>
+                    </a:p>
+                  </a:txBody>
+                  <a:tcPr marL="0" marR="0" marT="0" marB="0" anchor="ctr"/>
+                </a:tc>
+                <a:tc>
+                  <a:txBody>
+                    <a:bodyPr/>
+                    <a:lstStyle/>
+                    <a:p>
+                      <a:pPr algn="ctr">
+                        <a:buNone/>
+                      </a:pPr>
+                      <a:endParaRPr lang="es-ES" sz="1000" dirty="0"/>
+                    </a:p>
+                  </a:txBody>
+                  <a:tcPr marL="0" marR="0" marT="0" marB="0" anchor="ctr"/>
+                </a:tc>
+                <a:tc>
+                  <a:txBody>
+                    <a:bodyPr/>
+                    <a:lstStyle/>
+                    <a:p>
+                      <a:pPr>
+                        <a:buNone/>
+                      </a:pPr>
+                      <a:r>
+                        <a:rPr lang="es-ES" sz="1000">
+                          <a:effectLst/>
+                        </a:rPr>
+                        <a:t>2025-10-04 00:13:48</a:t>
+                      </a:r>
+                    </a:p>
+                  </a:txBody>
+                  <a:tcPr marL="0" marR="0" marT="0" marB="0" anchor="ctr"/>
+                </a:tc>
+                <a:tc>
+                  <a:txBody>
+                    <a:bodyPr/>
+                    <a:lstStyle/>
+                    <a:p>
+                      <a:pPr algn="ctr">
+                        <a:buNone/>
+                      </a:pPr>
+                      <a:r>
+                        <a:rPr lang="es-ES" sz="1000"/>
+                        <a:t>1</a:t>
+                      </a:r>
+                      <a:endParaRPr lang="es-ES" sz="1000" dirty="0"/>
+                    </a:p>
+                  </a:txBody>
+                  <a:tcPr marL="0" marR="0" marT="0" marB="0" anchor="ctr"/>
+                </a:tc>
+                <a:tc>
+                  <a:txBody>
+                    <a:bodyPr/>
+                    <a:lstStyle/>
+                    <a:p>
+                      <a:pPr algn="ctr">
+                        <a:buNone/>
+                      </a:pPr>
+                      <a:endParaRPr lang="es-ES" sz="1000" dirty="0"/>
+                    </a:p>
+                  </a:txBody>
+                  <a:tcPr marL="0" marR="0" marT="0" marB="0" anchor="ctr"/>
+                </a:tc>
+                <a:extLst>
+                  <a:ext uri="{0D108BD9-81ED-4DB2-BD59-A6C34878D82A}">
+                    <a16:rowId xmlns:a16="http://schemas.microsoft.com/office/drawing/2014/main" val="3461978312"/>
+                  </a:ext>
+                </a:extLst>
+              </a:tr>
+              <a:tr h="267132">
+                <a:tc>
+                  <a:txBody>
+                    <a:bodyPr/>
+                    <a:lstStyle/>
+                    <a:p>
+                      <a:pPr>
+                        <a:buNone/>
+                      </a:pPr>
+                      <a:r>
+                        <a:rPr lang="es-ES" sz="1000">
+                          <a:effectLst/>
+                        </a:rPr>
+                        <a:t>2025-09-20 00:13:48</a:t>
+                      </a:r>
+                    </a:p>
+                  </a:txBody>
+                  <a:tcPr marL="0" marR="0" marT="0" marB="0" anchor="ctr"/>
+                </a:tc>
+                <a:tc>
+                  <a:txBody>
+                    <a:bodyPr/>
+                    <a:lstStyle/>
+                    <a:p>
+                      <a:pPr algn="ctr">
+                        <a:buNone/>
+                      </a:pPr>
+                      <a:r>
+                        <a:rPr lang="es-ES" sz="1000"/>
+                        <a:t>2</a:t>
+                      </a:r>
+                      <a:endParaRPr lang="es-ES" sz="1000" dirty="0"/>
+                    </a:p>
+                  </a:txBody>
+                  <a:tcPr marL="0" marR="0" marT="0" marB="0" anchor="ctr"/>
+                </a:tc>
+                <a:tc>
+                  <a:txBody>
+                    <a:bodyPr/>
+                    <a:lstStyle/>
+                    <a:p>
+                      <a:pPr algn="ctr">
+                        <a:buNone/>
+                      </a:pPr>
+                      <a:endParaRPr lang="es-ES" sz="1000" dirty="0"/>
+                    </a:p>
+                  </a:txBody>
+                  <a:tcPr marL="0" marR="0" marT="0" marB="0" anchor="ctr"/>
+                </a:tc>
+                <a:tc>
+                  <a:txBody>
+                    <a:bodyPr/>
+                    <a:lstStyle/>
+                    <a:p>
+                      <a:pPr>
+                        <a:buNone/>
+                      </a:pPr>
+                      <a:r>
+                        <a:rPr lang="es-ES" sz="1000">
+                          <a:effectLst/>
+                        </a:rPr>
+                        <a:t>2025-10-05 00:13:48</a:t>
+                      </a:r>
+                    </a:p>
+                  </a:txBody>
+                  <a:tcPr marL="0" marR="0" marT="0" marB="0" anchor="ctr"/>
+                </a:tc>
+                <a:tc>
+                  <a:txBody>
+                    <a:bodyPr/>
+                    <a:lstStyle/>
+                    <a:p>
+                      <a:pPr algn="ctr">
+                        <a:buNone/>
+                      </a:pPr>
+                      <a:r>
+                        <a:rPr lang="es-ES" sz="1000"/>
+                        <a:t>1</a:t>
+                      </a:r>
+                      <a:endParaRPr lang="es-ES" sz="1000" dirty="0"/>
+                    </a:p>
+                  </a:txBody>
+                  <a:tcPr marL="0" marR="0" marT="0" marB="0" anchor="ctr"/>
+                </a:tc>
+                <a:tc>
+                  <a:txBody>
+                    <a:bodyPr/>
+                    <a:lstStyle/>
+                    <a:p>
+                      <a:pPr algn="ctr">
+                        <a:buNone/>
+                      </a:pPr>
+                      <a:endParaRPr lang="es-ES" sz="1000" dirty="0"/>
+                    </a:p>
+                  </a:txBody>
+                  <a:tcPr marL="0" marR="0" marT="0" marB="0" anchor="ctr"/>
+                </a:tc>
+                <a:extLst>
+                  <a:ext uri="{0D108BD9-81ED-4DB2-BD59-A6C34878D82A}">
+                    <a16:rowId xmlns:a16="http://schemas.microsoft.com/office/drawing/2014/main" val="465612211"/>
+                  </a:ext>
+                </a:extLst>
+              </a:tr>
+              <a:tr h="267132">
+                <a:tc>
+                  <a:txBody>
+                    <a:bodyPr/>
+                    <a:lstStyle/>
+                    <a:p>
+                      <a:pPr>
+                        <a:buNone/>
+                      </a:pPr>
+                      <a:r>
+                        <a:rPr lang="es-ES" sz="1000">
+                          <a:effectLst/>
+                        </a:rPr>
+                        <a:t>2025-09-21 00:13:48</a:t>
+                      </a:r>
+                    </a:p>
+                  </a:txBody>
+                  <a:tcPr marL="0" marR="0" marT="0" marB="0" anchor="ctr"/>
+                </a:tc>
+                <a:tc>
+                  <a:txBody>
+                    <a:bodyPr/>
+                    <a:lstStyle/>
+                    <a:p>
+                      <a:pPr algn="ctr">
+                        <a:buNone/>
+                      </a:pPr>
+                      <a:r>
+                        <a:rPr lang="es-ES" sz="1000"/>
+                        <a:t>1</a:t>
+                      </a:r>
+                      <a:endParaRPr lang="es-ES" sz="1000" dirty="0"/>
+                    </a:p>
+                  </a:txBody>
+                  <a:tcPr marL="0" marR="0" marT="0" marB="0" anchor="ctr"/>
+                </a:tc>
+                <a:tc>
+                  <a:txBody>
+                    <a:bodyPr/>
+                    <a:lstStyle/>
+                    <a:p>
+                      <a:pPr algn="ctr">
+                        <a:buNone/>
+                      </a:pPr>
+                      <a:endParaRPr lang="es-ES" sz="1000" dirty="0"/>
+                    </a:p>
+                  </a:txBody>
+                  <a:tcPr marL="0" marR="0" marT="0" marB="0" anchor="ctr"/>
+                </a:tc>
+                <a:tc>
+                  <a:txBody>
+                    <a:bodyPr/>
+                    <a:lstStyle/>
+                    <a:p>
+                      <a:pPr>
+                        <a:buNone/>
+                      </a:pPr>
+                      <a:r>
+                        <a:rPr lang="es-ES" sz="1000">
+                          <a:effectLst/>
+                        </a:rPr>
+                        <a:t>2025-10-06 00:13:48</a:t>
+                      </a:r>
+                    </a:p>
+                  </a:txBody>
+                  <a:tcPr marL="0" marR="0" marT="0" marB="0" anchor="ctr"/>
+                </a:tc>
+                <a:tc>
+                  <a:txBody>
+                    <a:bodyPr/>
+                    <a:lstStyle/>
+                    <a:p>
+                      <a:pPr algn="ctr">
+                        <a:buNone/>
+                      </a:pPr>
+                      <a:r>
+                        <a:rPr lang="es-ES" sz="1000"/>
+                        <a:t>1</a:t>
+                      </a:r>
+                      <a:endParaRPr lang="es-ES" sz="1000" dirty="0"/>
+                    </a:p>
+                  </a:txBody>
+                  <a:tcPr marL="0" marR="0" marT="0" marB="0" anchor="ctr"/>
+                </a:tc>
+                <a:tc>
+                  <a:txBody>
+                    <a:bodyPr/>
+                    <a:lstStyle/>
+                    <a:p>
+                      <a:pPr algn="ctr">
+                        <a:buNone/>
+                      </a:pPr>
+                      <a:endParaRPr lang="es-ES" sz="1000" dirty="0"/>
+                    </a:p>
+                  </a:txBody>
+                  <a:tcPr marL="0" marR="0" marT="0" marB="0" anchor="ctr"/>
+                </a:tc>
+                <a:extLst>
+                  <a:ext uri="{0D108BD9-81ED-4DB2-BD59-A6C34878D82A}">
+                    <a16:rowId xmlns:a16="http://schemas.microsoft.com/office/drawing/2014/main" val="3584199511"/>
+                  </a:ext>
+                </a:extLst>
+              </a:tr>
+              <a:tr h="267132">
+                <a:tc>
+                  <a:txBody>
+                    <a:bodyPr/>
+                    <a:lstStyle/>
+                    <a:p>
+                      <a:pPr>
+                        <a:buNone/>
+                      </a:pPr>
+                      <a:r>
+                        <a:rPr lang="es-ES" sz="1000">
+                          <a:effectLst/>
+                        </a:rPr>
+                        <a:t>2025-09-22 00:13:48</a:t>
+                      </a:r>
+                    </a:p>
+                  </a:txBody>
+                  <a:tcPr marL="0" marR="0" marT="0" marB="0" anchor="ctr"/>
+                </a:tc>
+                <a:tc>
+                  <a:txBody>
+                    <a:bodyPr/>
+                    <a:lstStyle/>
+                    <a:p>
+                      <a:pPr algn="ctr">
+                        <a:buNone/>
+                      </a:pPr>
+                      <a:r>
+                        <a:rPr lang="es-ES" sz="1000"/>
+                        <a:t>2</a:t>
+                      </a:r>
+                      <a:endParaRPr lang="es-ES" sz="1000" dirty="0"/>
+                    </a:p>
+                  </a:txBody>
+                  <a:tcPr marL="0" marR="0" marT="0" marB="0" anchor="ctr"/>
+                </a:tc>
+                <a:tc>
+                  <a:txBody>
+                    <a:bodyPr/>
+                    <a:lstStyle/>
+                    <a:p>
+                      <a:pPr algn="ctr">
+                        <a:buNone/>
+                      </a:pPr>
+                      <a:endParaRPr lang="es-ES" sz="1000" dirty="0"/>
+                    </a:p>
+                  </a:txBody>
+                  <a:tcPr marL="0" marR="0" marT="0" marB="0" anchor="ctr"/>
+                </a:tc>
+                <a:tc>
+                  <a:txBody>
+                    <a:bodyPr/>
+                    <a:lstStyle/>
+                    <a:p>
+                      <a:pPr>
+                        <a:buNone/>
+                      </a:pPr>
+                      <a:r>
+                        <a:rPr lang="es-ES" sz="1000">
+                          <a:effectLst/>
+                        </a:rPr>
+                        <a:t>2025-10-07 00:13:48</a:t>
+                      </a:r>
+                    </a:p>
+                  </a:txBody>
+                  <a:tcPr marL="0" marR="0" marT="0" marB="0" anchor="ctr"/>
+                </a:tc>
+                <a:tc>
+                  <a:txBody>
+                    <a:bodyPr/>
+                    <a:lstStyle/>
+                    <a:p>
+                      <a:pPr algn="ctr">
+                        <a:buNone/>
+                      </a:pPr>
+                      <a:r>
+                        <a:rPr lang="es-ES" sz="1000"/>
+                        <a:t>3</a:t>
+                      </a:r>
+                      <a:endParaRPr lang="es-ES" sz="1000" dirty="0"/>
+                    </a:p>
+                  </a:txBody>
+                  <a:tcPr marL="0" marR="0" marT="0" marB="0" anchor="ctr"/>
+                </a:tc>
+                <a:tc>
+                  <a:txBody>
+                    <a:bodyPr/>
+                    <a:lstStyle/>
+                    <a:p>
+                      <a:pPr algn="ctr">
+                        <a:buNone/>
+                      </a:pPr>
+                      <a:endParaRPr lang="es-ES" sz="1000" dirty="0"/>
+                    </a:p>
+                  </a:txBody>
+                  <a:tcPr marL="0" marR="0" marT="0" marB="0" anchor="ctr"/>
+                </a:tc>
+                <a:extLst>
+                  <a:ext uri="{0D108BD9-81ED-4DB2-BD59-A6C34878D82A}">
+                    <a16:rowId xmlns:a16="http://schemas.microsoft.com/office/drawing/2014/main" val="2427218897"/>
+                  </a:ext>
+                </a:extLst>
+              </a:tr>
+              <a:tr h="267132">
+                <a:tc>
+                  <a:txBody>
+                    <a:bodyPr/>
+                    <a:lstStyle/>
+                    <a:p>
+                      <a:pPr>
+                        <a:buNone/>
+                      </a:pPr>
+                      <a:r>
+                        <a:rPr lang="es-ES" sz="1000">
+                          <a:effectLst/>
+                        </a:rPr>
+                        <a:t>2025-09-23 00:13:48</a:t>
+                      </a:r>
+                    </a:p>
+                  </a:txBody>
+                  <a:tcPr marL="0" marR="0" marT="0" marB="0" anchor="ctr"/>
+                </a:tc>
+                <a:tc>
+                  <a:txBody>
+                    <a:bodyPr/>
+                    <a:lstStyle/>
+                    <a:p>
+                      <a:pPr algn="ctr">
+                        <a:buNone/>
+                      </a:pPr>
+                      <a:r>
+                        <a:rPr lang="es-ES" sz="1000"/>
+                        <a:t>1</a:t>
+                      </a:r>
+                      <a:endParaRPr lang="es-ES" sz="1000" dirty="0"/>
+                    </a:p>
+                  </a:txBody>
+                  <a:tcPr marL="0" marR="0" marT="0" marB="0" anchor="ctr"/>
+                </a:tc>
+                <a:tc>
+                  <a:txBody>
+                    <a:bodyPr/>
+                    <a:lstStyle/>
+                    <a:p>
+                      <a:pPr algn="ctr">
+                        <a:buNone/>
+                      </a:pPr>
+                      <a:endParaRPr lang="es-ES" sz="1000" dirty="0"/>
+                    </a:p>
+                  </a:txBody>
+                  <a:tcPr marL="0" marR="0" marT="0" marB="0" anchor="ctr"/>
+                </a:tc>
+                <a:tc>
+                  <a:txBody>
+                    <a:bodyPr/>
+                    <a:lstStyle/>
+                    <a:p>
+                      <a:pPr>
+                        <a:buNone/>
+                      </a:pPr>
+                      <a:r>
+                        <a:rPr lang="es-ES" sz="1000">
+                          <a:effectLst/>
+                        </a:rPr>
+                        <a:t>2025-10-08 00:13:48</a:t>
+                      </a:r>
+                    </a:p>
+                  </a:txBody>
+                  <a:tcPr marL="0" marR="0" marT="0" marB="0" anchor="ctr"/>
+                </a:tc>
+                <a:tc>
+                  <a:txBody>
+                    <a:bodyPr/>
+                    <a:lstStyle/>
+                    <a:p>
+                      <a:pPr algn="ctr">
+                        <a:buNone/>
+                      </a:pPr>
+                      <a:r>
+                        <a:rPr lang="es-ES" sz="1000"/>
+                        <a:t>1</a:t>
+                      </a:r>
+                      <a:endParaRPr lang="es-ES" sz="1000" dirty="0"/>
+                    </a:p>
+                  </a:txBody>
+                  <a:tcPr marL="0" marR="0" marT="0" marB="0" anchor="ctr"/>
+                </a:tc>
+                <a:tc>
+                  <a:txBody>
+                    <a:bodyPr/>
+                    <a:lstStyle/>
+                    <a:p>
+                      <a:pPr algn="ctr">
+                        <a:buNone/>
+                      </a:pPr>
+                      <a:endParaRPr lang="es-ES" sz="1000" dirty="0"/>
+                    </a:p>
+                  </a:txBody>
+                  <a:tcPr marL="0" marR="0" marT="0" marB="0" anchor="ctr"/>
+                </a:tc>
+                <a:extLst>
+                  <a:ext uri="{0D108BD9-81ED-4DB2-BD59-A6C34878D82A}">
+                    <a16:rowId xmlns:a16="http://schemas.microsoft.com/office/drawing/2014/main" val="1512211310"/>
+                  </a:ext>
+                </a:extLst>
+              </a:tr>
+              <a:tr h="267132">
+                <a:tc>
+                  <a:txBody>
+                    <a:bodyPr/>
+                    <a:lstStyle/>
+                    <a:p>
+                      <a:pPr>
+                        <a:buNone/>
+                      </a:pPr>
+                      <a:r>
+                        <a:rPr lang="es-ES" sz="1000">
+                          <a:effectLst/>
+                        </a:rPr>
+                        <a:t>2025-09-24 00:13:48</a:t>
+                      </a:r>
+                    </a:p>
+                  </a:txBody>
+                  <a:tcPr marL="0" marR="0" marT="0" marB="0" anchor="ctr"/>
+                </a:tc>
+                <a:tc>
+                  <a:txBody>
+                    <a:bodyPr/>
+                    <a:lstStyle/>
+                    <a:p>
+                      <a:pPr algn="ctr">
+                        <a:buNone/>
+                      </a:pPr>
+                      <a:r>
+                        <a:rPr lang="es-ES" sz="1000"/>
+                        <a:t>3</a:t>
+                      </a:r>
+                      <a:endParaRPr lang="es-ES" sz="1000" dirty="0"/>
+                    </a:p>
+                  </a:txBody>
+                  <a:tcPr marL="0" marR="0" marT="0" marB="0" anchor="ctr"/>
+                </a:tc>
+                <a:tc>
+                  <a:txBody>
+                    <a:bodyPr/>
+                    <a:lstStyle/>
+                    <a:p>
+                      <a:pPr algn="ctr">
+                        <a:buNone/>
+                      </a:pPr>
+                      <a:endParaRPr lang="es-ES" sz="1000" dirty="0"/>
+                    </a:p>
+                  </a:txBody>
+                  <a:tcPr marL="0" marR="0" marT="0" marB="0" anchor="ctr"/>
+                </a:tc>
+                <a:tc>
+                  <a:txBody>
+                    <a:bodyPr/>
+                    <a:lstStyle/>
+                    <a:p>
+                      <a:pPr>
+                        <a:buNone/>
+                      </a:pPr>
+                      <a:r>
+                        <a:rPr lang="es-ES" sz="1000">
+                          <a:effectLst/>
+                        </a:rPr>
+                        <a:t>2025-10-09 00:13:48</a:t>
+                      </a:r>
+                    </a:p>
+                  </a:txBody>
+                  <a:tcPr marL="0" marR="0" marT="0" marB="0" anchor="ctr"/>
+                </a:tc>
+                <a:tc>
+                  <a:txBody>
+                    <a:bodyPr/>
+                    <a:lstStyle/>
+                    <a:p>
+                      <a:pPr algn="ctr">
+                        <a:buNone/>
+                      </a:pPr>
+                      <a:r>
+                        <a:rPr lang="es-ES" sz="1000"/>
+                        <a:t>4</a:t>
+                      </a:r>
+                      <a:endParaRPr lang="es-ES" sz="1000" dirty="0"/>
+                    </a:p>
+                  </a:txBody>
+                  <a:tcPr marL="0" marR="0" marT="0" marB="0" anchor="ctr"/>
+                </a:tc>
+                <a:tc>
+                  <a:txBody>
+                    <a:bodyPr/>
+                    <a:lstStyle/>
+                    <a:p>
+                      <a:pPr algn="ctr">
+                        <a:buNone/>
+                      </a:pPr>
+                      <a:endParaRPr lang="es-ES" sz="1000" dirty="0"/>
+                    </a:p>
+                  </a:txBody>
+                  <a:tcPr marL="0" marR="0" marT="0" marB="0" anchor="ctr"/>
+                </a:tc>
+                <a:extLst>
+                  <a:ext uri="{0D108BD9-81ED-4DB2-BD59-A6C34878D82A}">
+                    <a16:rowId xmlns:a16="http://schemas.microsoft.com/office/drawing/2014/main" val="664937832"/>
+                  </a:ext>
+                </a:extLst>
+              </a:tr>
+              <a:tr h="267132">
+                <a:tc>
+                  <a:txBody>
+                    <a:bodyPr/>
+                    <a:lstStyle/>
+                    <a:p>
+                      <a:pPr>
+                        <a:buNone/>
+                      </a:pPr>
+                      <a:r>
+                        <a:rPr lang="es-ES" sz="1000">
+                          <a:effectLst/>
+                        </a:rPr>
+                        <a:t>2025-09-25 00:13:48</a:t>
+                      </a:r>
+                    </a:p>
+                  </a:txBody>
+                  <a:tcPr marL="0" marR="0" marT="0" marB="0" anchor="ctr"/>
+                </a:tc>
+                <a:tc>
+                  <a:txBody>
+                    <a:bodyPr/>
+                    <a:lstStyle/>
+                    <a:p>
+                      <a:pPr algn="ctr">
+                        <a:buNone/>
+                      </a:pPr>
+                      <a:r>
+                        <a:rPr lang="es-ES" sz="1000"/>
+                        <a:t>2</a:t>
+                      </a:r>
+                      <a:endParaRPr lang="es-ES" sz="1000" dirty="0"/>
+                    </a:p>
+                  </a:txBody>
+                  <a:tcPr marL="0" marR="0" marT="0" marB="0" anchor="ctr"/>
+                </a:tc>
+                <a:tc>
+                  <a:txBody>
+                    <a:bodyPr/>
+                    <a:lstStyle/>
+                    <a:p>
+                      <a:pPr algn="ctr">
+                        <a:buNone/>
+                      </a:pPr>
+                      <a:endParaRPr lang="es-ES" sz="1000" dirty="0"/>
+                    </a:p>
+                  </a:txBody>
+                  <a:tcPr marL="0" marR="0" marT="0" marB="0" anchor="ctr"/>
+                </a:tc>
+                <a:tc>
+                  <a:txBody>
+                    <a:bodyPr/>
+                    <a:lstStyle/>
+                    <a:p>
+                      <a:pPr>
+                        <a:buNone/>
+                      </a:pPr>
+                      <a:r>
+                        <a:rPr lang="es-ES" sz="1000">
+                          <a:effectLst/>
+                        </a:rPr>
+                        <a:t>2025-10-10 00:13:48</a:t>
+                      </a:r>
+                    </a:p>
+                  </a:txBody>
+                  <a:tcPr marL="0" marR="0" marT="0" marB="0" anchor="ctr"/>
+                </a:tc>
+                <a:tc>
+                  <a:txBody>
+                    <a:bodyPr/>
+                    <a:lstStyle/>
+                    <a:p>
+                      <a:pPr algn="ctr">
+                        <a:buNone/>
+                      </a:pPr>
+                      <a:r>
+                        <a:rPr lang="es-ES" sz="1000"/>
+                        <a:t>2</a:t>
+                      </a:r>
+                      <a:endParaRPr lang="es-ES" sz="1000" dirty="0"/>
+                    </a:p>
+                  </a:txBody>
+                  <a:tcPr marL="0" marR="0" marT="0" marB="0" anchor="ctr"/>
+                </a:tc>
+                <a:tc>
+                  <a:txBody>
+                    <a:bodyPr/>
+                    <a:lstStyle/>
+                    <a:p>
+                      <a:pPr algn="ctr">
+                        <a:buNone/>
+                      </a:pPr>
+                      <a:endParaRPr lang="es-ES" sz="1000" dirty="0"/>
+                    </a:p>
+                  </a:txBody>
+                  <a:tcPr marL="0" marR="0" marT="0" marB="0" anchor="ctr"/>
+                </a:tc>
+                <a:extLst>
+                  <a:ext uri="{0D108BD9-81ED-4DB2-BD59-A6C34878D82A}">
+                    <a16:rowId xmlns:a16="http://schemas.microsoft.com/office/drawing/2014/main" val="1169375269"/>
+                  </a:ext>
+                </a:extLst>
+              </a:tr>
+              <a:tr h="267132">
+                <a:tc>
+                  <a:txBody>
+                    <a:bodyPr/>
+                    <a:lstStyle/>
+                    <a:p>
+                      <a:pPr>
+                        <a:buNone/>
+                      </a:pPr>
+                      <a:r>
+                        <a:rPr lang="es-ES" sz="1000">
+                          <a:effectLst/>
+                        </a:rPr>
+                        <a:t>2025-09-26 00:13:48</a:t>
+                      </a:r>
+                    </a:p>
+                  </a:txBody>
+                  <a:tcPr marL="0" marR="0" marT="0" marB="0" anchor="ctr"/>
+                </a:tc>
+                <a:tc>
+                  <a:txBody>
+                    <a:bodyPr/>
+                    <a:lstStyle/>
+                    <a:p>
+                      <a:pPr algn="ctr">
+                        <a:buNone/>
+                      </a:pPr>
+                      <a:r>
+                        <a:rPr lang="es-ES" sz="1000"/>
+                        <a:t>1</a:t>
+                      </a:r>
+                      <a:endParaRPr lang="es-ES" sz="1000" dirty="0"/>
+                    </a:p>
+                  </a:txBody>
+                  <a:tcPr marL="0" marR="0" marT="0" marB="0" anchor="ctr"/>
+                </a:tc>
+                <a:tc>
+                  <a:txBody>
+                    <a:bodyPr/>
+                    <a:lstStyle/>
+                    <a:p>
+                      <a:pPr algn="ctr">
+                        <a:buNone/>
+                      </a:pPr>
+                      <a:endParaRPr lang="es-ES" sz="1000" dirty="0"/>
+                    </a:p>
+                  </a:txBody>
+                  <a:tcPr marL="0" marR="0" marT="0" marB="0" anchor="ctr"/>
+                </a:tc>
+                <a:tc>
+                  <a:txBody>
+                    <a:bodyPr/>
+                    <a:lstStyle/>
+                    <a:p>
+                      <a:pPr>
+                        <a:buNone/>
+                      </a:pPr>
+                      <a:r>
+                        <a:rPr lang="es-ES" sz="1000">
+                          <a:effectLst/>
+                        </a:rPr>
+                        <a:t>2025-10-11 00:13:48</a:t>
+                      </a:r>
+                    </a:p>
+                  </a:txBody>
+                  <a:tcPr marL="0" marR="0" marT="0" marB="0" anchor="ctr"/>
+                </a:tc>
+                <a:tc>
+                  <a:txBody>
+                    <a:bodyPr/>
+                    <a:lstStyle/>
+                    <a:p>
+                      <a:pPr algn="ctr">
+                        <a:buNone/>
+                      </a:pPr>
+                      <a:r>
+                        <a:rPr lang="es-ES" sz="1000"/>
+                        <a:t>1</a:t>
+                      </a:r>
+                      <a:endParaRPr lang="es-ES" sz="1000" dirty="0"/>
+                    </a:p>
+                  </a:txBody>
+                  <a:tcPr marL="0" marR="0" marT="0" marB="0" anchor="ctr"/>
+                </a:tc>
+                <a:tc>
+                  <a:txBody>
+                    <a:bodyPr/>
+                    <a:lstStyle/>
+                    <a:p>
+                      <a:pPr algn="ctr">
+                        <a:buNone/>
+                      </a:pPr>
+                      <a:endParaRPr lang="es-ES" sz="1000" dirty="0"/>
+                    </a:p>
+                  </a:txBody>
+                  <a:tcPr marL="0" marR="0" marT="0" marB="0" anchor="ctr"/>
+                </a:tc>
+                <a:extLst>
+                  <a:ext uri="{0D108BD9-81ED-4DB2-BD59-A6C34878D82A}">
+                    <a16:rowId xmlns:a16="http://schemas.microsoft.com/office/drawing/2014/main" val="3731091675"/>
+                  </a:ext>
+                </a:extLst>
+              </a:tr>
+              <a:tr h="267132">
+                <a:tc>
+                  <a:txBody>
+                    <a:bodyPr/>
+                    <a:lstStyle/>
+                    <a:p>
+                      <a:pPr>
+                        <a:buNone/>
+                      </a:pPr>
+                      <a:r>
+                        <a:rPr lang="es-ES" sz="1000">
+                          <a:effectLst/>
+                        </a:rPr>
+                        <a:t>2025-09-27 00:13:48</a:t>
+                      </a:r>
+                    </a:p>
+                  </a:txBody>
+                  <a:tcPr marL="0" marR="0" marT="0" marB="0" anchor="ctr"/>
+                </a:tc>
+                <a:tc>
+                  <a:txBody>
+                    <a:bodyPr/>
+                    <a:lstStyle/>
+                    <a:p>
+                      <a:pPr algn="ctr">
+                        <a:buNone/>
+                      </a:pPr>
+                      <a:r>
+                        <a:rPr lang="es-ES" sz="1000"/>
+                        <a:t>2</a:t>
+                      </a:r>
+                      <a:endParaRPr lang="es-ES" sz="1000" dirty="0"/>
+                    </a:p>
+                  </a:txBody>
+                  <a:tcPr marL="0" marR="0" marT="0" marB="0" anchor="ctr"/>
+                </a:tc>
+                <a:tc>
+                  <a:txBody>
+                    <a:bodyPr/>
+                    <a:lstStyle/>
+                    <a:p>
+                      <a:pPr algn="ctr">
+                        <a:buNone/>
+                      </a:pPr>
+                      <a:endParaRPr lang="es-ES" sz="1000" dirty="0"/>
+                    </a:p>
+                  </a:txBody>
+                  <a:tcPr marL="0" marR="0" marT="0" marB="0" anchor="ctr"/>
+                </a:tc>
+                <a:tc>
+                  <a:txBody>
+                    <a:bodyPr/>
+                    <a:lstStyle/>
+                    <a:p>
+                      <a:pPr>
+                        <a:buNone/>
+                      </a:pPr>
+                      <a:r>
+                        <a:rPr lang="es-ES" sz="1000">
+                          <a:effectLst/>
+                        </a:rPr>
+                        <a:t>2025-10-12 00:13:48</a:t>
+                      </a:r>
+                    </a:p>
+                  </a:txBody>
+                  <a:tcPr marL="0" marR="0" marT="0" marB="0" anchor="ctr"/>
+                </a:tc>
+                <a:tc>
+                  <a:txBody>
+                    <a:bodyPr/>
+                    <a:lstStyle/>
+                    <a:p>
+                      <a:pPr algn="ctr">
+                        <a:buNone/>
+                      </a:pPr>
+                      <a:r>
+                        <a:rPr lang="es-ES" sz="1000"/>
+                        <a:t>2</a:t>
+                      </a:r>
+                      <a:endParaRPr lang="es-ES" sz="1000" dirty="0"/>
+                    </a:p>
+                  </a:txBody>
+                  <a:tcPr marL="0" marR="0" marT="0" marB="0" anchor="ctr"/>
+                </a:tc>
+                <a:tc>
+                  <a:txBody>
+                    <a:bodyPr/>
+                    <a:lstStyle/>
+                    <a:p>
+                      <a:pPr algn="ctr">
+                        <a:buNone/>
+                      </a:pPr>
+                      <a:endParaRPr lang="es-ES" sz="1000" dirty="0"/>
+                    </a:p>
+                  </a:txBody>
+                  <a:tcPr marL="0" marR="0" marT="0" marB="0" anchor="ctr"/>
+                </a:tc>
+                <a:extLst>
+                  <a:ext uri="{0D108BD9-81ED-4DB2-BD59-A6C34878D82A}">
+                    <a16:rowId xmlns:a16="http://schemas.microsoft.com/office/drawing/2014/main" val="3258519507"/>
+                  </a:ext>
+                </a:extLst>
+              </a:tr>
+              <a:tr h="267132">
+                <a:tc>
+                  <a:txBody>
+                    <a:bodyPr/>
+                    <a:lstStyle/>
+                    <a:p>
+                      <a:pPr>
+                        <a:buNone/>
+                      </a:pPr>
+                      <a:r>
+                        <a:rPr lang="es-ES" sz="1000">
+                          <a:effectLst/>
+                        </a:rPr>
+                        <a:t>2025-09-28 00:13:48</a:t>
+                      </a:r>
+                    </a:p>
+                  </a:txBody>
+                  <a:tcPr marL="0" marR="0" marT="0" marB="0" anchor="ctr"/>
+                </a:tc>
+                <a:tc>
+                  <a:txBody>
+                    <a:bodyPr/>
+                    <a:lstStyle/>
+                    <a:p>
+                      <a:pPr algn="ctr">
+                        <a:buNone/>
+                      </a:pPr>
+                      <a:r>
+                        <a:rPr lang="es-ES" sz="1000"/>
+                        <a:t>4</a:t>
+                      </a:r>
+                      <a:endParaRPr lang="es-ES" sz="1000" dirty="0"/>
+                    </a:p>
+                  </a:txBody>
+                  <a:tcPr marL="0" marR="0" marT="0" marB="0" anchor="ctr"/>
+                </a:tc>
+                <a:tc>
+                  <a:txBody>
+                    <a:bodyPr/>
+                    <a:lstStyle/>
+                    <a:p>
+                      <a:pPr algn="ctr">
+                        <a:buNone/>
+                      </a:pPr>
+                      <a:endParaRPr lang="es-ES" sz="1000" dirty="0"/>
+                    </a:p>
+                  </a:txBody>
+                  <a:tcPr marL="0" marR="0" marT="0" marB="0" anchor="ctr"/>
+                </a:tc>
+                <a:tc>
+                  <a:txBody>
+                    <a:bodyPr/>
+                    <a:lstStyle/>
+                    <a:p>
+                      <a:pPr>
+                        <a:buNone/>
+                      </a:pPr>
+                      <a:r>
+                        <a:rPr lang="es-ES" sz="1000">
+                          <a:effectLst/>
+                        </a:rPr>
+                        <a:t>2025-10-13 00:13:48</a:t>
+                      </a:r>
+                    </a:p>
+                  </a:txBody>
+                  <a:tcPr marL="0" marR="0" marT="0" marB="0" anchor="ctr"/>
+                </a:tc>
+                <a:tc>
+                  <a:txBody>
+                    <a:bodyPr/>
+                    <a:lstStyle/>
+                    <a:p>
+                      <a:pPr algn="ctr">
+                        <a:buNone/>
+                      </a:pPr>
+                      <a:r>
+                        <a:rPr lang="es-ES" sz="1000"/>
+                        <a:t>1</a:t>
+                      </a:r>
+                      <a:endParaRPr lang="es-ES" sz="1000" dirty="0"/>
+                    </a:p>
+                  </a:txBody>
+                  <a:tcPr marL="0" marR="0" marT="0" marB="0" anchor="ctr"/>
+                </a:tc>
+                <a:tc>
+                  <a:txBody>
+                    <a:bodyPr/>
+                    <a:lstStyle/>
+                    <a:p>
+                      <a:pPr algn="ctr">
+                        <a:buNone/>
+                      </a:pPr>
+                      <a:endParaRPr lang="es-ES" sz="1000" dirty="0"/>
+                    </a:p>
+                  </a:txBody>
+                  <a:tcPr marL="0" marR="0" marT="0" marB="0" anchor="ctr"/>
+                </a:tc>
+                <a:extLst>
+                  <a:ext uri="{0D108BD9-81ED-4DB2-BD59-A6C34878D82A}">
+                    <a16:rowId xmlns:a16="http://schemas.microsoft.com/office/drawing/2014/main" val="3741502347"/>
+                  </a:ext>
+                </a:extLst>
+              </a:tr>
+              <a:tr h="267132">
+                <a:tc>
+                  <a:txBody>
+                    <a:bodyPr/>
+                    <a:lstStyle/>
+                    <a:p>
+                      <a:pPr>
+                        <a:buNone/>
+                      </a:pPr>
+                      <a:r>
+                        <a:rPr lang="es-ES" sz="1000">
+                          <a:effectLst/>
+                        </a:rPr>
+                        <a:t>2025-09-29 00:13:48</a:t>
+                      </a:r>
+                    </a:p>
+                  </a:txBody>
+                  <a:tcPr marL="0" marR="0" marT="0" marB="0" anchor="ctr"/>
+                </a:tc>
+                <a:tc>
+                  <a:txBody>
+                    <a:bodyPr/>
+                    <a:lstStyle/>
+                    <a:p>
+                      <a:pPr algn="ctr">
+                        <a:buNone/>
+                      </a:pPr>
+                      <a:r>
+                        <a:rPr lang="es-ES" sz="1000"/>
+                        <a:t>1</a:t>
+                      </a:r>
+                      <a:endParaRPr lang="es-ES" sz="1000" dirty="0"/>
+                    </a:p>
+                  </a:txBody>
+                  <a:tcPr marL="0" marR="0" marT="0" marB="0" anchor="ctr"/>
+                </a:tc>
+                <a:tc>
+                  <a:txBody>
+                    <a:bodyPr/>
+                    <a:lstStyle/>
+                    <a:p>
+                      <a:pPr algn="ctr">
+                        <a:buNone/>
+                      </a:pPr>
+                      <a:endParaRPr lang="es-ES" sz="1000" dirty="0"/>
+                    </a:p>
+                  </a:txBody>
+                  <a:tcPr marL="0" marR="0" marT="0" marB="0" anchor="ctr"/>
+                </a:tc>
+                <a:tc>
+                  <a:txBody>
+                    <a:bodyPr/>
+                    <a:lstStyle/>
+                    <a:p>
+                      <a:pPr>
+                        <a:buNone/>
+                      </a:pPr>
+                      <a:r>
+                        <a:rPr lang="es-ES" sz="1000">
+                          <a:effectLst/>
+                        </a:rPr>
+                        <a:t>2025-10-14 00:13:48</a:t>
+                      </a:r>
+                    </a:p>
+                  </a:txBody>
+                  <a:tcPr marL="0" marR="0" marT="0" marB="0" anchor="ctr"/>
+                </a:tc>
+                <a:tc>
+                  <a:txBody>
+                    <a:bodyPr/>
+                    <a:lstStyle/>
+                    <a:p>
+                      <a:pPr algn="ctr">
+                        <a:buNone/>
+                      </a:pPr>
+                      <a:r>
+                        <a:rPr lang="es-ES" sz="1000"/>
+                        <a:t>1</a:t>
+                      </a:r>
+                      <a:endParaRPr lang="es-ES" sz="1000" dirty="0"/>
+                    </a:p>
+                  </a:txBody>
+                  <a:tcPr marL="0" marR="0" marT="0" marB="0" anchor="ctr"/>
+                </a:tc>
+                <a:tc>
+                  <a:txBody>
+                    <a:bodyPr/>
+                    <a:lstStyle/>
+                    <a:p>
+                      <a:pPr algn="ctr">
+                        <a:buNone/>
+                      </a:pPr>
+                      <a:endParaRPr lang="es-ES" sz="1000" dirty="0"/>
+                    </a:p>
+                  </a:txBody>
+                  <a:tcPr marL="0" marR="0" marT="0" marB="0" anchor="ctr"/>
+                </a:tc>
+                <a:extLst>
+                  <a:ext uri="{0D108BD9-81ED-4DB2-BD59-A6C34878D82A}">
+                    <a16:rowId xmlns:a16="http://schemas.microsoft.com/office/drawing/2014/main" val="811072283"/>
+                  </a:ext>
+                </a:extLst>
+              </a:tr>
+              <a:tr h="267132">
+                <a:tc>
+                  <a:txBody>
+                    <a:bodyPr/>
+                    <a:lstStyle/>
+                    <a:p>
+                      <a:pPr>
+                        <a:buNone/>
+                      </a:pPr>
+                      <a:r>
+                        <a:rPr lang="es-ES" sz="1000">
+                          <a:effectLst/>
+                        </a:rPr>
+                        <a:t>2025-09-30 00:13:48</a:t>
+                      </a:r>
+                    </a:p>
+                  </a:txBody>
+                  <a:tcPr marL="0" marR="0" marT="0" marB="0" anchor="ctr"/>
+                </a:tc>
+                <a:tc>
+                  <a:txBody>
+                    <a:bodyPr/>
+                    <a:lstStyle/>
+                    <a:p>
+                      <a:pPr algn="ctr">
+                        <a:buNone/>
+                      </a:pPr>
+                      <a:r>
+                        <a:rPr lang="es-ES" sz="1000"/>
+                        <a:t>2</a:t>
+                      </a:r>
+                      <a:endParaRPr lang="es-ES" sz="1000" dirty="0"/>
+                    </a:p>
+                  </a:txBody>
+                  <a:tcPr marL="0" marR="0" marT="0" marB="0" anchor="ctr"/>
+                </a:tc>
+                <a:tc>
+                  <a:txBody>
+                    <a:bodyPr/>
+                    <a:lstStyle/>
+                    <a:p>
+                      <a:pPr algn="ctr">
+                        <a:buNone/>
+                      </a:pPr>
+                      <a:endParaRPr lang="es-ES" sz="1000" dirty="0"/>
+                    </a:p>
+                  </a:txBody>
+                  <a:tcPr marL="0" marR="0" marT="0" marB="0" anchor="ctr"/>
+                </a:tc>
+                <a:tc>
+                  <a:txBody>
+                    <a:bodyPr/>
+                    <a:lstStyle/>
+                    <a:p>
+                      <a:pPr>
+                        <a:buNone/>
+                      </a:pPr>
+                      <a:r>
+                        <a:rPr lang="es-ES" sz="1000">
+                          <a:effectLst/>
+                        </a:rPr>
+                        <a:t>2025-10-15 00:13:48</a:t>
+                      </a:r>
+                    </a:p>
+                  </a:txBody>
+                  <a:tcPr marL="0" marR="0" marT="0" marB="0" anchor="ctr"/>
+                </a:tc>
+                <a:tc>
+                  <a:txBody>
+                    <a:bodyPr/>
+                    <a:lstStyle/>
+                    <a:p>
+                      <a:pPr algn="ctr">
+                        <a:buNone/>
+                      </a:pPr>
+                      <a:r>
+                        <a:rPr lang="es-ES" sz="1000"/>
+                        <a:t>1</a:t>
+                      </a:r>
+                      <a:endParaRPr lang="es-ES" sz="1000" dirty="0"/>
+                    </a:p>
+                  </a:txBody>
+                  <a:tcPr marL="0" marR="0" marT="0" marB="0" anchor="ctr"/>
+                </a:tc>
+                <a:tc>
+                  <a:txBody>
+                    <a:bodyPr/>
+                    <a:lstStyle/>
+                    <a:p>
+                      <a:pPr algn="ctr">
+                        <a:buNone/>
+                      </a:pPr>
+                      <a:endParaRPr lang="es-ES" sz="1000" dirty="0"/>
+                    </a:p>
+                  </a:txBody>
+                  <a:tcPr marL="0" marR="0" marT="0" marB="0" anchor="ctr"/>
+                </a:tc>
+                <a:extLst>
+                  <a:ext uri="{0D108BD9-81ED-4DB2-BD59-A6C34878D82A}">
+                    <a16:rowId xmlns:a16="http://schemas.microsoft.com/office/drawing/2014/main" val="4219391591"/>
+                  </a:ext>
+                </a:extLst>
+              </a:tr>
+              <a:tr h="267132">
+                <a:tc>
+                  <a:txBody>
+                    <a:bodyPr/>
+                    <a:lstStyle/>
+                    <a:p>
+                      <a:pPr>
+                        <a:buNone/>
+                      </a:pPr>
+                      <a:r>
+                        <a:rPr lang="es-ES" sz="1000">
+                          <a:effectLst/>
+                        </a:rPr>
+                        <a:t>2025-10-01 00:13:48</a:t>
+                      </a:r>
+                    </a:p>
+                  </a:txBody>
+                  <a:tcPr marL="0" marR="0" marT="0" marB="0" anchor="ctr"/>
+                </a:tc>
+                <a:tc>
+                  <a:txBody>
+                    <a:bodyPr/>
+                    <a:lstStyle/>
+                    <a:p>
+                      <a:pPr algn="ctr">
+                        <a:buNone/>
+                      </a:pPr>
+                      <a:r>
+                        <a:rPr lang="es-ES" sz="1000"/>
+                        <a:t>2</a:t>
+                      </a:r>
+                      <a:endParaRPr lang="es-ES" sz="1000" dirty="0"/>
+                    </a:p>
+                  </a:txBody>
+                  <a:tcPr marL="0" marR="0" marT="0" marB="0" anchor="ctr"/>
+                </a:tc>
+                <a:tc>
+                  <a:txBody>
+                    <a:bodyPr/>
+                    <a:lstStyle/>
+                    <a:p>
+                      <a:pPr algn="ctr">
+                        <a:buNone/>
+                      </a:pPr>
+                      <a:endParaRPr lang="es-ES" sz="1000" dirty="0"/>
+                    </a:p>
+                  </a:txBody>
+                  <a:tcPr marL="0" marR="0" marT="0" marB="0" anchor="ctr"/>
+                </a:tc>
+                <a:tc>
+                  <a:txBody>
+                    <a:bodyPr/>
+                    <a:lstStyle/>
+                    <a:p>
+                      <a:pPr>
+                        <a:buNone/>
+                      </a:pPr>
+                      <a:r>
+                        <a:rPr lang="es-ES" sz="1000">
+                          <a:effectLst/>
+                        </a:rPr>
+                        <a:t>2025-10-16 00:13:48</a:t>
+                      </a:r>
+                    </a:p>
+                  </a:txBody>
+                  <a:tcPr marL="0" marR="0" marT="0" marB="0" anchor="ctr"/>
+                </a:tc>
+                <a:tc>
+                  <a:txBody>
+                    <a:bodyPr/>
+                    <a:lstStyle/>
+                    <a:p>
+                      <a:pPr algn="ctr">
+                        <a:buNone/>
+                      </a:pPr>
+                      <a:r>
+                        <a:rPr lang="es-ES" sz="1000"/>
+                        <a:t>3</a:t>
+                      </a:r>
+                      <a:endParaRPr lang="es-ES" sz="1000" dirty="0"/>
+                    </a:p>
+                  </a:txBody>
+                  <a:tcPr marL="0" marR="0" marT="0" marB="0" anchor="ctr"/>
+                </a:tc>
+                <a:tc>
+                  <a:txBody>
+                    <a:bodyPr/>
+                    <a:lstStyle/>
+                    <a:p>
+                      <a:pPr algn="ctr">
+                        <a:buNone/>
+                      </a:pPr>
+                      <a:endParaRPr lang="es-ES" sz="1000" dirty="0"/>
+                    </a:p>
+                  </a:txBody>
+                  <a:tcPr marL="0" marR="0" marT="0" marB="0" anchor="ctr"/>
+                </a:tc>
+                <a:extLst>
+                  <a:ext uri="{0D108BD9-81ED-4DB2-BD59-A6C34878D82A}">
+                    <a16:rowId xmlns:a16="http://schemas.microsoft.com/office/drawing/2014/main" val="3558247313"/>
+                  </a:ext>
+                </a:extLst>
+              </a:tr>
+              <a:tr h="267132">
+                <a:tc>
+                  <a:txBody>
+                    <a:bodyPr/>
+                    <a:lstStyle/>
+                    <a:p>
+                      <a:pPr>
+                        <a:buNone/>
+                      </a:pPr>
+                      <a:r>
+                        <a:rPr lang="es-ES" sz="1000">
+                          <a:effectLst/>
+                        </a:rPr>
+                        <a:t>2025-10-02 00:13:48</a:t>
+                      </a:r>
+                    </a:p>
+                  </a:txBody>
+                  <a:tcPr marL="0" marR="0" marT="0" marB="0" anchor="ctr"/>
+                </a:tc>
+                <a:tc>
+                  <a:txBody>
+                    <a:bodyPr/>
+                    <a:lstStyle/>
+                    <a:p>
+                      <a:pPr algn="ctr">
+                        <a:buNone/>
+                      </a:pPr>
+                      <a:r>
+                        <a:rPr lang="es-ES" sz="1000"/>
+                        <a:t>1</a:t>
+                      </a:r>
+                      <a:endParaRPr lang="es-ES" sz="1000" dirty="0"/>
+                    </a:p>
+                  </a:txBody>
+                  <a:tcPr marL="0" marR="0" marT="0" marB="0" anchor="ctr"/>
+                </a:tc>
+                <a:tc>
+                  <a:txBody>
+                    <a:bodyPr/>
+                    <a:lstStyle/>
+                    <a:p>
+                      <a:pPr algn="ctr">
+                        <a:buNone/>
+                      </a:pPr>
+                      <a:endParaRPr lang="es-ES" sz="1000" dirty="0"/>
+                    </a:p>
+                  </a:txBody>
+                  <a:tcPr marL="0" marR="0" marT="0" marB="0" anchor="ctr"/>
+                </a:tc>
+                <a:tc>
+                  <a:txBody>
+                    <a:bodyPr/>
+                    <a:lstStyle/>
+                    <a:p>
+                      <a:pPr>
+                        <a:buNone/>
+                      </a:pPr>
+                      <a:r>
+                        <a:rPr lang="es-ES" sz="1000">
+                          <a:effectLst/>
+                        </a:rPr>
+                        <a:t>2025-10-17 00:13:48</a:t>
+                      </a:r>
+                    </a:p>
+                  </a:txBody>
+                  <a:tcPr marL="0" marR="0" marT="0" marB="0" anchor="ctr"/>
+                </a:tc>
+                <a:tc>
+                  <a:txBody>
+                    <a:bodyPr/>
+                    <a:lstStyle/>
+                    <a:p>
+                      <a:pPr algn="ctr">
+                        <a:buNone/>
+                      </a:pPr>
+                      <a:r>
+                        <a:rPr lang="es-ES" sz="1000"/>
+                        <a:t>1</a:t>
+                      </a:r>
+                      <a:endParaRPr lang="es-ES" sz="1000" dirty="0"/>
+                    </a:p>
+                  </a:txBody>
+                  <a:tcPr marL="0" marR="0" marT="0" marB="0" anchor="ctr"/>
+                </a:tc>
+                <a:tc>
+                  <a:txBody>
+                    <a:bodyPr/>
+                    <a:lstStyle/>
+                    <a:p>
+                      <a:pPr algn="ctr">
+                        <a:buNone/>
+                      </a:pPr>
+                      <a:endParaRPr lang="es-ES" sz="1000" dirty="0"/>
+                    </a:p>
+                  </a:txBody>
+                  <a:tcPr marL="0" marR="0" marT="0" marB="0" anchor="ctr"/>
+                </a:tc>
+                <a:extLst>
+                  <a:ext uri="{0D108BD9-81ED-4DB2-BD59-A6C34878D82A}">
+                    <a16:rowId xmlns:a16="http://schemas.microsoft.com/office/drawing/2014/main" val="3735087874"/>
+                  </a:ext>
+                </a:extLst>
+              </a:tr>
+              <a:tr h="267132">
+                <a:tc>
+                  <a:txBody>
+                    <a:bodyPr/>
+                    <a:lstStyle/>
+                    <a:p>
+                      <a:pPr>
+                        <a:buNone/>
+                      </a:pPr>
+                      <a:r>
+                        <a:rPr lang="es-ES" sz="1000">
+                          <a:effectLst/>
+                        </a:rPr>
+                        <a:t>2025-10-03 00:13:48</a:t>
+                      </a:r>
+                    </a:p>
+                  </a:txBody>
+                  <a:tcPr marL="0" marR="0" marT="0" marB="0" anchor="ctr"/>
+                </a:tc>
+                <a:tc>
+                  <a:txBody>
+                    <a:bodyPr/>
+                    <a:lstStyle/>
+                    <a:p>
+                      <a:pPr algn="ctr">
+                        <a:buNone/>
+                      </a:pPr>
+                      <a:r>
+                        <a:rPr lang="es-ES" sz="1000"/>
+                        <a:t>4</a:t>
+                      </a:r>
+                      <a:endParaRPr lang="es-ES" sz="1000" dirty="0"/>
+                    </a:p>
+                  </a:txBody>
+                  <a:tcPr marL="0" marR="0" marT="0" marB="0" anchor="ctr"/>
+                </a:tc>
+                <a:tc>
+                  <a:txBody>
+                    <a:bodyPr/>
+                    <a:lstStyle/>
+                    <a:p>
+                      <a:pPr algn="ctr">
+                        <a:buNone/>
+                      </a:pPr>
+                      <a:endParaRPr lang="es-ES" sz="1000" dirty="0"/>
+                    </a:p>
+                  </a:txBody>
+                  <a:tcPr marL="0" marR="0" marT="0" marB="0" anchor="ctr"/>
+                </a:tc>
+                <a:tc>
+                  <a:txBody>
+                    <a:bodyPr/>
+                    <a:lstStyle/>
+                    <a:p>
+                      <a:pPr>
+                        <a:buNone/>
+                      </a:pPr>
+                      <a:r>
+                        <a:rPr lang="es-ES" sz="1000">
+                          <a:effectLst/>
+                        </a:rPr>
+                        <a:t>2025-10-18 00:13:48</a:t>
+                      </a:r>
+                    </a:p>
+                  </a:txBody>
+                  <a:tcPr marL="0" marR="0" marT="0" marB="0" anchor="ctr"/>
+                </a:tc>
+                <a:tc>
+                  <a:txBody>
+                    <a:bodyPr/>
+                    <a:lstStyle/>
+                    <a:p>
+                      <a:pPr algn="ctr">
+                        <a:buNone/>
+                      </a:pPr>
+                      <a:r>
+                        <a:rPr lang="es-ES" sz="1000"/>
+                        <a:t>2</a:t>
+                      </a:r>
+                      <a:endParaRPr lang="es-ES" sz="1000" dirty="0"/>
+                    </a:p>
+                  </a:txBody>
+                  <a:tcPr marL="0" marR="0" marT="0" marB="0" anchor="ctr"/>
+                </a:tc>
+                <a:tc>
+                  <a:txBody>
+                    <a:bodyPr/>
+                    <a:lstStyle/>
+                    <a:p>
+                      <a:pPr algn="ctr">
+                        <a:buNone/>
+                      </a:pPr>
+                      <a:endParaRPr lang="es-ES" sz="1000" dirty="0"/>
+                    </a:p>
+                  </a:txBody>
+                  <a:tcPr marL="0" marR="0" marT="0" marB="0" anchor="ctr"/>
+                </a:tc>
+                <a:extLst>
+                  <a:ext uri="{0D108BD9-81ED-4DB2-BD59-A6C34878D82A}">
+                    <a16:rowId xmlns:a16="http://schemas.microsoft.com/office/drawing/2014/main" val="1302150350"/>
+                  </a:ext>
+                </a:extLst>
+              </a:tr>
+            </a:tbl>
+          </a:graphicData>
+        </a:graphic>
+      </p:graphicFrame>
+      <p:graphicFrame>
+        <p:nvGraphicFramePr>
+          <p:cNvPr id="7" name="Tabla 6">
+            <a:extLst>
+              <a:ext uri="{FF2B5EF4-FFF2-40B4-BE49-F238E27FC236}">
+                <a16:creationId xmlns:a16="http://schemas.microsoft.com/office/drawing/2014/main" id="{BD097B00-CBD2-2BB6-BDF7-D66FB2925031}"/>
+              </a:ext>
+            </a:extLst>
+          </p:cNvPr>
+          <p:cNvGraphicFramePr>
+            <a:graphicFrameLocks noGrp="1"/>
+          </p:cNvGraphicFramePr>
+          <p:nvPr>
+            <p:extLst>
+              <p:ext uri="{D42A27DB-BD31-4B8C-83A1-F6EECF244321}">
+                <p14:modId xmlns:p14="http://schemas.microsoft.com/office/powerpoint/2010/main" val="3477735120"/>
+              </p:ext>
+            </p:extLst>
+          </p:nvPr>
+        </p:nvGraphicFramePr>
+        <p:xfrm>
+          <a:off x="6380018" y="1246909"/>
+          <a:ext cx="4156264" cy="4876800"/>
+        </p:xfrm>
+        <a:graphic>
+          <a:graphicData uri="http://schemas.openxmlformats.org/drawingml/2006/table">
+            <a:tbl>
+              <a:tblPr bandRow="1">
+                <a:tableStyleId>{BC89EF96-8CEA-46FF-86C4-4CE0E7609802}</a:tableStyleId>
+              </a:tblPr>
+              <a:tblGrid>
+                <a:gridCol w="789541">
+                  <a:extLst>
+                    <a:ext uri="{9D8B030D-6E8A-4147-A177-3AD203B41FA5}">
+                      <a16:colId xmlns:a16="http://schemas.microsoft.com/office/drawing/2014/main" val="1483579881"/>
+                    </a:ext>
+                  </a:extLst>
+                </a:gridCol>
+                <a:gridCol w="543741">
+                  <a:extLst>
+                    <a:ext uri="{9D8B030D-6E8A-4147-A177-3AD203B41FA5}">
+                      <a16:colId xmlns:a16="http://schemas.microsoft.com/office/drawing/2014/main" val="910849019"/>
+                    </a:ext>
+                  </a:extLst>
+                </a:gridCol>
+                <a:gridCol w="744850">
+                  <a:extLst>
+                    <a:ext uri="{9D8B030D-6E8A-4147-A177-3AD203B41FA5}">
+                      <a16:colId xmlns:a16="http://schemas.microsoft.com/office/drawing/2014/main" val="2909674331"/>
+                    </a:ext>
+                  </a:extLst>
+                </a:gridCol>
+                <a:gridCol w="789541">
+                  <a:extLst>
+                    <a:ext uri="{9D8B030D-6E8A-4147-A177-3AD203B41FA5}">
+                      <a16:colId xmlns:a16="http://schemas.microsoft.com/office/drawing/2014/main" val="3578427777"/>
+                    </a:ext>
+                  </a:extLst>
+                </a:gridCol>
+                <a:gridCol w="543741">
+                  <a:extLst>
+                    <a:ext uri="{9D8B030D-6E8A-4147-A177-3AD203B41FA5}">
+                      <a16:colId xmlns:a16="http://schemas.microsoft.com/office/drawing/2014/main" val="726081758"/>
+                    </a:ext>
+                  </a:extLst>
+                </a:gridCol>
+                <a:gridCol w="744850">
+                  <a:extLst>
+                    <a:ext uri="{9D8B030D-6E8A-4147-A177-3AD203B41FA5}">
+                      <a16:colId xmlns:a16="http://schemas.microsoft.com/office/drawing/2014/main" val="2560803959"/>
+                    </a:ext>
+                  </a:extLst>
+                </a:gridCol>
+              </a:tblGrid>
+              <a:tr h="133129">
+                <a:tc>
+                  <a:txBody>
+                    <a:bodyPr/>
+                    <a:lstStyle/>
+                    <a:p>
+                      <a:pPr algn="ctr">
+                        <a:buNone/>
+                      </a:pPr>
+                      <a:r>
+                        <a:rPr lang="es-ES" sz="1000">
+                          <a:effectLst/>
+                        </a:rPr>
+                        <a:t>Fecha</a:t>
+                      </a:r>
+                    </a:p>
+                  </a:txBody>
+                  <a:tcPr marL="0" marR="0" marT="0" marB="0" anchor="ctr"/>
+                </a:tc>
+                <a:tc>
+                  <a:txBody>
+                    <a:bodyPr/>
+                    <a:lstStyle/>
+                    <a:p>
+                      <a:pPr algn="ctr">
+                        <a:buNone/>
+                      </a:pPr>
+                      <a:r>
+                        <a:rPr lang="es-ES" sz="1000" dirty="0" err="1">
+                          <a:effectLst/>
+                        </a:rPr>
+                        <a:t>Rotacion</a:t>
+                      </a:r>
+                      <a:r>
+                        <a:rPr lang="es-ES" sz="1000" dirty="0">
+                          <a:effectLst/>
+                        </a:rPr>
+                        <a:t> Real</a:t>
+                      </a:r>
+                      <a:endParaRPr lang="es-ES" sz="1000" dirty="0" err="1">
+                        <a:effectLst/>
+                      </a:endParaRPr>
+                    </a:p>
+                  </a:txBody>
+                  <a:tcPr marL="0" marR="0" marT="0" marB="0" anchor="ctr"/>
+                </a:tc>
+                <a:tc>
+                  <a:txBody>
+                    <a:bodyPr/>
+                    <a:lstStyle/>
+                    <a:p>
+                      <a:pPr algn="ctr">
+                        <a:buNone/>
+                      </a:pPr>
+                      <a:r>
+                        <a:rPr lang="es-ES" sz="1000" dirty="0" err="1">
+                          <a:effectLst/>
+                          <a:highlight>
+                            <a:srgbClr val="00FFFF"/>
+                          </a:highlight>
+                        </a:rPr>
+                        <a:t>Rotacion</a:t>
+                      </a:r>
+                      <a:r>
+                        <a:rPr lang="es-ES" sz="1000" dirty="0">
+                          <a:effectLst/>
+                          <a:highlight>
+                            <a:srgbClr val="00FFFF"/>
+                          </a:highlight>
+                        </a:rPr>
+                        <a:t> </a:t>
+                      </a:r>
+                      <a:r>
+                        <a:rPr lang="es-ES" sz="1000" dirty="0" err="1">
+                          <a:effectLst/>
+                          <a:highlight>
+                            <a:srgbClr val="00FFFF"/>
+                          </a:highlight>
+                        </a:rPr>
+                        <a:t>Prediccion</a:t>
+                      </a:r>
+                    </a:p>
+                  </a:txBody>
+                  <a:tcPr marL="0" marR="0" marT="0" marB="0" anchor="ctr"/>
+                </a:tc>
+                <a:tc>
+                  <a:txBody>
+                    <a:bodyPr/>
+                    <a:lstStyle/>
+                    <a:p>
+                      <a:pPr algn="ctr">
+                        <a:buNone/>
+                      </a:pPr>
+                      <a:r>
+                        <a:rPr lang="es-ES" sz="1000">
+                          <a:effectLst/>
+                        </a:rPr>
+                        <a:t>Fecha</a:t>
+                      </a:r>
+                    </a:p>
+                  </a:txBody>
+                  <a:tcPr marL="0" marR="0" marT="0" marB="0" anchor="ctr"/>
+                </a:tc>
+                <a:tc>
+                  <a:txBody>
+                    <a:bodyPr/>
+                    <a:lstStyle/>
+                    <a:p>
+                      <a:pPr algn="ctr">
+                        <a:buNone/>
+                      </a:pPr>
+                      <a:r>
+                        <a:rPr lang="es-ES" sz="1000" dirty="0" err="1">
+                          <a:effectLst/>
+                        </a:rPr>
+                        <a:t>Rotacion</a:t>
+                      </a:r>
+                      <a:r>
+                        <a:rPr lang="es-ES" sz="1000" dirty="0">
+                          <a:effectLst/>
+                        </a:rPr>
+                        <a:t> Real</a:t>
+                      </a:r>
+                      <a:endParaRPr lang="es-ES" sz="1000" dirty="0" err="1">
+                        <a:effectLst/>
+                      </a:endParaRPr>
+                    </a:p>
+                  </a:txBody>
+                  <a:tcPr marL="0" marR="0" marT="0" marB="0" anchor="ctr"/>
+                </a:tc>
+                <a:tc>
+                  <a:txBody>
+                    <a:bodyPr/>
+                    <a:lstStyle/>
+                    <a:p>
+                      <a:pPr algn="ctr">
+                        <a:buNone/>
+                      </a:pPr>
+                      <a:r>
+                        <a:rPr lang="es-ES" sz="1000" dirty="0" err="1">
+                          <a:effectLst/>
+                          <a:highlight>
+                            <a:srgbClr val="00FFFF"/>
+                          </a:highlight>
+                        </a:rPr>
+                        <a:t>Rotacion</a:t>
+                      </a:r>
+                      <a:r>
+                        <a:rPr lang="es-ES" sz="1000" dirty="0">
+                          <a:effectLst/>
+                          <a:highlight>
+                            <a:srgbClr val="00FFFF"/>
+                          </a:highlight>
+                        </a:rPr>
+                        <a:t> </a:t>
+                      </a:r>
+                      <a:r>
+                        <a:rPr lang="es-ES" sz="1000" dirty="0" err="1">
+                          <a:effectLst/>
+                          <a:highlight>
+                            <a:srgbClr val="00FFFF"/>
+                          </a:highlight>
+                        </a:rPr>
+                        <a:t>Prediccion</a:t>
+                      </a:r>
+                    </a:p>
+                  </a:txBody>
+                  <a:tcPr marL="0" marR="0" marT="0" marB="0" anchor="ctr"/>
+                </a:tc>
+                <a:extLst>
+                  <a:ext uri="{0D108BD9-81ED-4DB2-BD59-A6C34878D82A}">
+                    <a16:rowId xmlns:a16="http://schemas.microsoft.com/office/drawing/2014/main" val="508210212"/>
+                  </a:ext>
+                </a:extLst>
+              </a:tr>
+              <a:tr h="133129">
+                <a:tc>
+                  <a:txBody>
+                    <a:bodyPr/>
+                    <a:lstStyle/>
+                    <a:p>
+                      <a:pPr>
+                        <a:buNone/>
+                      </a:pPr>
+                      <a:r>
+                        <a:rPr lang="es-ES" sz="1000">
+                          <a:effectLst/>
+                        </a:rPr>
+                        <a:t>2025-10-19 00:13:48</a:t>
+                      </a:r>
+                    </a:p>
+                  </a:txBody>
+                  <a:tcPr marL="0" marR="0" marT="0" marB="0" anchor="ctr"/>
+                </a:tc>
+                <a:tc>
+                  <a:txBody>
+                    <a:bodyPr/>
+                    <a:lstStyle/>
+                    <a:p>
+                      <a:pPr algn="ctr">
+                        <a:buNone/>
+                      </a:pPr>
+                      <a:endParaRPr lang="es-ES" sz="1000" dirty="0"/>
+                    </a:p>
+                  </a:txBody>
+                  <a:tcPr marL="0" marR="0" marT="0" marB="0" anchor="ctr"/>
+                </a:tc>
+                <a:tc>
+                  <a:txBody>
+                    <a:bodyPr/>
+                    <a:lstStyle/>
+                    <a:p>
+                      <a:pPr algn="ctr">
+                        <a:buNone/>
+                      </a:pPr>
+                      <a:r>
+                        <a:rPr lang="es-ES" sz="1000"/>
+                        <a:t>2</a:t>
+                      </a:r>
+                      <a:endParaRPr lang="es-ES" sz="1000" dirty="0"/>
+                    </a:p>
+                  </a:txBody>
+                  <a:tcPr marL="0" marR="0" marT="0" marB="0" anchor="ctr"/>
+                </a:tc>
+                <a:tc>
+                  <a:txBody>
+                    <a:bodyPr/>
+                    <a:lstStyle/>
+                    <a:p>
+                      <a:pPr>
+                        <a:buNone/>
+                      </a:pPr>
+                      <a:r>
+                        <a:rPr lang="es-ES" sz="1000">
+                          <a:effectLst/>
+                        </a:rPr>
+                        <a:t>2025-11-03 00:13:48</a:t>
+                      </a:r>
+                    </a:p>
+                  </a:txBody>
+                  <a:tcPr marL="0" marR="0" marT="0" marB="0" anchor="ctr"/>
+                </a:tc>
+                <a:tc>
+                  <a:txBody>
+                    <a:bodyPr/>
+                    <a:lstStyle/>
+                    <a:p>
+                      <a:pPr algn="ctr">
+                        <a:buNone/>
+                      </a:pPr>
+                      <a:endParaRPr lang="es-ES" sz="1000" dirty="0"/>
+                    </a:p>
+                  </a:txBody>
+                  <a:tcPr marL="0" marR="0" marT="0" marB="0" anchor="ctr"/>
+                </a:tc>
+                <a:tc>
+                  <a:txBody>
+                    <a:bodyPr/>
+                    <a:lstStyle/>
+                    <a:p>
+                      <a:pPr algn="ctr">
+                        <a:buNone/>
+                      </a:pPr>
+                      <a:r>
+                        <a:rPr lang="es-ES" sz="1000"/>
+                        <a:t>2</a:t>
+                      </a:r>
+                      <a:endParaRPr lang="es-ES" sz="1000" dirty="0"/>
+                    </a:p>
+                  </a:txBody>
+                  <a:tcPr marL="0" marR="0" marT="0" marB="0" anchor="ctr"/>
+                </a:tc>
+                <a:extLst>
+                  <a:ext uri="{0D108BD9-81ED-4DB2-BD59-A6C34878D82A}">
+                    <a16:rowId xmlns:a16="http://schemas.microsoft.com/office/drawing/2014/main" val="2754201255"/>
+                  </a:ext>
+                </a:extLst>
+              </a:tr>
+              <a:tr h="133129">
+                <a:tc>
+                  <a:txBody>
+                    <a:bodyPr/>
+                    <a:lstStyle/>
+                    <a:p>
+                      <a:pPr>
+                        <a:buNone/>
+                      </a:pPr>
+                      <a:r>
+                        <a:rPr lang="es-ES" sz="1000">
+                          <a:effectLst/>
+                        </a:rPr>
+                        <a:t>2025-10-20 00:13:48</a:t>
+                      </a:r>
+                    </a:p>
+                  </a:txBody>
+                  <a:tcPr marL="0" marR="0" marT="0" marB="0" anchor="ctr"/>
+                </a:tc>
+                <a:tc>
+                  <a:txBody>
+                    <a:bodyPr/>
+                    <a:lstStyle/>
+                    <a:p>
+                      <a:pPr algn="ctr">
+                        <a:buNone/>
+                      </a:pPr>
+                      <a:endParaRPr lang="es-ES" sz="1000" dirty="0"/>
+                    </a:p>
+                  </a:txBody>
+                  <a:tcPr marL="0" marR="0" marT="0" marB="0" anchor="ctr"/>
+                </a:tc>
+                <a:tc>
+                  <a:txBody>
+                    <a:bodyPr/>
+                    <a:lstStyle/>
+                    <a:p>
+                      <a:pPr algn="ctr">
+                        <a:buNone/>
+                      </a:pPr>
+                      <a:r>
+                        <a:rPr lang="es-ES" sz="1000"/>
+                        <a:t>2</a:t>
+                      </a:r>
+                      <a:endParaRPr lang="es-ES" sz="1000" dirty="0"/>
+                    </a:p>
+                  </a:txBody>
+                  <a:tcPr marL="0" marR="0" marT="0" marB="0" anchor="ctr"/>
+                </a:tc>
+                <a:tc>
+                  <a:txBody>
+                    <a:bodyPr/>
+                    <a:lstStyle/>
+                    <a:p>
+                      <a:pPr>
+                        <a:buNone/>
+                      </a:pPr>
+                      <a:r>
+                        <a:rPr lang="es-ES" sz="1000">
+                          <a:effectLst/>
+                        </a:rPr>
+                        <a:t>2025-11-04 00:13:48</a:t>
+                      </a:r>
+                    </a:p>
+                  </a:txBody>
+                  <a:tcPr marL="0" marR="0" marT="0" marB="0" anchor="ctr"/>
+                </a:tc>
+                <a:tc>
+                  <a:txBody>
+                    <a:bodyPr/>
+                    <a:lstStyle/>
+                    <a:p>
+                      <a:pPr algn="ctr">
+                        <a:buNone/>
+                      </a:pPr>
+                      <a:endParaRPr lang="es-ES" sz="1000" dirty="0"/>
+                    </a:p>
+                  </a:txBody>
+                  <a:tcPr marL="0" marR="0" marT="0" marB="0" anchor="ctr"/>
+                </a:tc>
+                <a:tc>
+                  <a:txBody>
+                    <a:bodyPr/>
+                    <a:lstStyle/>
+                    <a:p>
+                      <a:pPr algn="ctr">
+                        <a:buNone/>
+                      </a:pPr>
+                      <a:r>
+                        <a:rPr lang="es-ES" sz="1000"/>
+                        <a:t>2</a:t>
+                      </a:r>
+                      <a:endParaRPr lang="es-ES" sz="1000" dirty="0"/>
+                    </a:p>
+                  </a:txBody>
+                  <a:tcPr marL="0" marR="0" marT="0" marB="0" anchor="ctr"/>
+                </a:tc>
+                <a:extLst>
+                  <a:ext uri="{0D108BD9-81ED-4DB2-BD59-A6C34878D82A}">
+                    <a16:rowId xmlns:a16="http://schemas.microsoft.com/office/drawing/2014/main" val="2305899733"/>
+                  </a:ext>
+                </a:extLst>
+              </a:tr>
+              <a:tr h="133129">
+                <a:tc>
+                  <a:txBody>
+                    <a:bodyPr/>
+                    <a:lstStyle/>
+                    <a:p>
+                      <a:pPr>
+                        <a:buNone/>
+                      </a:pPr>
+                      <a:r>
+                        <a:rPr lang="es-ES" sz="1000">
+                          <a:effectLst/>
+                        </a:rPr>
+                        <a:t>2025-10-21 00:13:48</a:t>
+                      </a:r>
+                    </a:p>
+                  </a:txBody>
+                  <a:tcPr marL="0" marR="0" marT="0" marB="0" anchor="ctr"/>
+                </a:tc>
+                <a:tc>
+                  <a:txBody>
+                    <a:bodyPr/>
+                    <a:lstStyle/>
+                    <a:p>
+                      <a:pPr algn="ctr">
+                        <a:buNone/>
+                      </a:pPr>
+                      <a:endParaRPr lang="es-ES" sz="1000" dirty="0"/>
+                    </a:p>
+                  </a:txBody>
+                  <a:tcPr marL="0" marR="0" marT="0" marB="0" anchor="ctr"/>
+                </a:tc>
+                <a:tc>
+                  <a:txBody>
+                    <a:bodyPr/>
+                    <a:lstStyle/>
+                    <a:p>
+                      <a:pPr algn="ctr">
+                        <a:buNone/>
+                      </a:pPr>
+                      <a:r>
+                        <a:rPr lang="es-ES" sz="1000"/>
+                        <a:t>2</a:t>
+                      </a:r>
+                      <a:endParaRPr lang="es-ES" sz="1000" dirty="0"/>
+                    </a:p>
+                  </a:txBody>
+                  <a:tcPr marL="0" marR="0" marT="0" marB="0" anchor="ctr"/>
+                </a:tc>
+                <a:tc>
+                  <a:txBody>
+                    <a:bodyPr/>
+                    <a:lstStyle/>
+                    <a:p>
+                      <a:pPr>
+                        <a:buNone/>
+                      </a:pPr>
+                      <a:r>
+                        <a:rPr lang="es-ES" sz="1000">
+                          <a:effectLst/>
+                        </a:rPr>
+                        <a:t>2025-11-05 00:13:48</a:t>
+                      </a:r>
+                    </a:p>
+                  </a:txBody>
+                  <a:tcPr marL="0" marR="0" marT="0" marB="0" anchor="ctr"/>
+                </a:tc>
+                <a:tc>
+                  <a:txBody>
+                    <a:bodyPr/>
+                    <a:lstStyle/>
+                    <a:p>
+                      <a:pPr algn="ctr">
+                        <a:buNone/>
+                      </a:pPr>
+                      <a:endParaRPr lang="es-ES" sz="1000" dirty="0"/>
+                    </a:p>
+                  </a:txBody>
+                  <a:tcPr marL="0" marR="0" marT="0" marB="0" anchor="ctr"/>
+                </a:tc>
+                <a:tc>
+                  <a:txBody>
+                    <a:bodyPr/>
+                    <a:lstStyle/>
+                    <a:p>
+                      <a:pPr algn="ctr">
+                        <a:buNone/>
+                      </a:pPr>
+                      <a:r>
+                        <a:rPr lang="es-ES" sz="1000"/>
+                        <a:t>2</a:t>
+                      </a:r>
+                      <a:endParaRPr lang="es-ES" sz="1000" dirty="0"/>
+                    </a:p>
+                  </a:txBody>
+                  <a:tcPr marL="0" marR="0" marT="0" marB="0" anchor="ctr"/>
+                </a:tc>
+                <a:extLst>
+                  <a:ext uri="{0D108BD9-81ED-4DB2-BD59-A6C34878D82A}">
+                    <a16:rowId xmlns:a16="http://schemas.microsoft.com/office/drawing/2014/main" val="1371221849"/>
+                  </a:ext>
+                </a:extLst>
+              </a:tr>
+              <a:tr h="133129">
+                <a:tc>
+                  <a:txBody>
+                    <a:bodyPr/>
+                    <a:lstStyle/>
+                    <a:p>
+                      <a:pPr>
+                        <a:buNone/>
+                      </a:pPr>
+                      <a:r>
+                        <a:rPr lang="es-ES" sz="1000">
+                          <a:effectLst/>
+                        </a:rPr>
+                        <a:t>2025-10-22 00:13:48</a:t>
+                      </a:r>
+                    </a:p>
+                  </a:txBody>
+                  <a:tcPr marL="0" marR="0" marT="0" marB="0" anchor="ctr"/>
+                </a:tc>
+                <a:tc>
+                  <a:txBody>
+                    <a:bodyPr/>
+                    <a:lstStyle/>
+                    <a:p>
+                      <a:pPr algn="ctr">
+                        <a:buNone/>
+                      </a:pPr>
+                      <a:endParaRPr lang="es-ES" sz="1000" dirty="0"/>
+                    </a:p>
+                  </a:txBody>
+                  <a:tcPr marL="0" marR="0" marT="0" marB="0" anchor="ctr"/>
+                </a:tc>
+                <a:tc>
+                  <a:txBody>
+                    <a:bodyPr/>
+                    <a:lstStyle/>
+                    <a:p>
+                      <a:pPr algn="ctr">
+                        <a:buNone/>
+                      </a:pPr>
+                      <a:r>
+                        <a:rPr lang="es-ES" sz="1000"/>
+                        <a:t>2</a:t>
+                      </a:r>
+                      <a:endParaRPr lang="es-ES" sz="1000" dirty="0"/>
+                    </a:p>
+                  </a:txBody>
+                  <a:tcPr marL="0" marR="0" marT="0" marB="0" anchor="ctr"/>
+                </a:tc>
+                <a:tc>
+                  <a:txBody>
+                    <a:bodyPr/>
+                    <a:lstStyle/>
+                    <a:p>
+                      <a:pPr>
+                        <a:buNone/>
+                      </a:pPr>
+                      <a:r>
+                        <a:rPr lang="es-ES" sz="1000">
+                          <a:effectLst/>
+                        </a:rPr>
+                        <a:t>2025-11-06 00:13:48</a:t>
+                      </a:r>
+                    </a:p>
+                  </a:txBody>
+                  <a:tcPr marL="0" marR="0" marT="0" marB="0" anchor="ctr"/>
+                </a:tc>
+                <a:tc>
+                  <a:txBody>
+                    <a:bodyPr/>
+                    <a:lstStyle/>
+                    <a:p>
+                      <a:pPr algn="ctr">
+                        <a:buNone/>
+                      </a:pPr>
+                      <a:endParaRPr lang="es-ES" sz="1000" dirty="0"/>
+                    </a:p>
+                  </a:txBody>
+                  <a:tcPr marL="0" marR="0" marT="0" marB="0" anchor="ctr"/>
+                </a:tc>
+                <a:tc>
+                  <a:txBody>
+                    <a:bodyPr/>
+                    <a:lstStyle/>
+                    <a:p>
+                      <a:pPr algn="ctr">
+                        <a:buNone/>
+                      </a:pPr>
+                      <a:r>
+                        <a:rPr lang="es-ES" sz="1000"/>
+                        <a:t>2</a:t>
+                      </a:r>
+                      <a:endParaRPr lang="es-ES" sz="1000" dirty="0"/>
+                    </a:p>
+                  </a:txBody>
+                  <a:tcPr marL="0" marR="0" marT="0" marB="0" anchor="ctr"/>
+                </a:tc>
+                <a:extLst>
+                  <a:ext uri="{0D108BD9-81ED-4DB2-BD59-A6C34878D82A}">
+                    <a16:rowId xmlns:a16="http://schemas.microsoft.com/office/drawing/2014/main" val="3843009813"/>
+                  </a:ext>
+                </a:extLst>
+              </a:tr>
+              <a:tr h="133129">
+                <a:tc>
+                  <a:txBody>
+                    <a:bodyPr/>
+                    <a:lstStyle/>
+                    <a:p>
+                      <a:pPr>
+                        <a:buNone/>
+                      </a:pPr>
+                      <a:r>
+                        <a:rPr lang="es-ES" sz="1000">
+                          <a:effectLst/>
+                        </a:rPr>
+                        <a:t>2025-10-23 00:13:48</a:t>
+                      </a:r>
+                    </a:p>
+                  </a:txBody>
+                  <a:tcPr marL="0" marR="0" marT="0" marB="0" anchor="ctr"/>
+                </a:tc>
+                <a:tc>
+                  <a:txBody>
+                    <a:bodyPr/>
+                    <a:lstStyle/>
+                    <a:p>
+                      <a:pPr algn="ctr">
+                        <a:buNone/>
+                      </a:pPr>
+                      <a:endParaRPr lang="es-ES" sz="1000" dirty="0"/>
+                    </a:p>
+                  </a:txBody>
+                  <a:tcPr marL="0" marR="0" marT="0" marB="0" anchor="ctr"/>
+                </a:tc>
+                <a:tc>
+                  <a:txBody>
+                    <a:bodyPr/>
+                    <a:lstStyle/>
+                    <a:p>
+                      <a:pPr algn="ctr">
+                        <a:buNone/>
+                      </a:pPr>
+                      <a:r>
+                        <a:rPr lang="es-ES" sz="1000"/>
+                        <a:t>2</a:t>
+                      </a:r>
+                      <a:endParaRPr lang="es-ES" sz="1000" dirty="0"/>
+                    </a:p>
+                  </a:txBody>
+                  <a:tcPr marL="0" marR="0" marT="0" marB="0" anchor="ctr"/>
+                </a:tc>
+                <a:tc>
+                  <a:txBody>
+                    <a:bodyPr/>
+                    <a:lstStyle/>
+                    <a:p>
+                      <a:pPr>
+                        <a:buNone/>
+                      </a:pPr>
+                      <a:r>
+                        <a:rPr lang="es-ES" sz="1000">
+                          <a:effectLst/>
+                        </a:rPr>
+                        <a:t>2025-11-07 00:13:48</a:t>
+                      </a:r>
+                    </a:p>
+                  </a:txBody>
+                  <a:tcPr marL="0" marR="0" marT="0" marB="0" anchor="ctr"/>
+                </a:tc>
+                <a:tc>
+                  <a:txBody>
+                    <a:bodyPr/>
+                    <a:lstStyle/>
+                    <a:p>
+                      <a:pPr algn="ctr">
+                        <a:buNone/>
+                      </a:pPr>
+                      <a:endParaRPr lang="es-ES" sz="1000" dirty="0"/>
+                    </a:p>
+                  </a:txBody>
+                  <a:tcPr marL="0" marR="0" marT="0" marB="0" anchor="ctr"/>
+                </a:tc>
+                <a:tc>
+                  <a:txBody>
+                    <a:bodyPr/>
+                    <a:lstStyle/>
+                    <a:p>
+                      <a:pPr algn="ctr">
+                        <a:buNone/>
+                      </a:pPr>
+                      <a:r>
+                        <a:rPr lang="es-ES" sz="1000"/>
+                        <a:t>2</a:t>
+                      </a:r>
+                      <a:endParaRPr lang="es-ES" sz="1000" dirty="0"/>
+                    </a:p>
+                  </a:txBody>
+                  <a:tcPr marL="0" marR="0" marT="0" marB="0" anchor="ctr"/>
+                </a:tc>
+                <a:extLst>
+                  <a:ext uri="{0D108BD9-81ED-4DB2-BD59-A6C34878D82A}">
+                    <a16:rowId xmlns:a16="http://schemas.microsoft.com/office/drawing/2014/main" val="876052653"/>
+                  </a:ext>
+                </a:extLst>
+              </a:tr>
+              <a:tr h="133129">
+                <a:tc>
+                  <a:txBody>
+                    <a:bodyPr/>
+                    <a:lstStyle/>
+                    <a:p>
+                      <a:pPr>
+                        <a:buNone/>
+                      </a:pPr>
+                      <a:r>
+                        <a:rPr lang="es-ES" sz="1000">
+                          <a:effectLst/>
+                        </a:rPr>
+                        <a:t>2025-10-24 00:13:48</a:t>
+                      </a:r>
+                    </a:p>
+                  </a:txBody>
+                  <a:tcPr marL="0" marR="0" marT="0" marB="0" anchor="ctr"/>
+                </a:tc>
+                <a:tc>
+                  <a:txBody>
+                    <a:bodyPr/>
+                    <a:lstStyle/>
+                    <a:p>
+                      <a:pPr algn="ctr">
+                        <a:buNone/>
+                      </a:pPr>
+                      <a:endParaRPr lang="es-ES" sz="1000" dirty="0"/>
+                    </a:p>
+                  </a:txBody>
+                  <a:tcPr marL="0" marR="0" marT="0" marB="0" anchor="ctr"/>
+                </a:tc>
+                <a:tc>
+                  <a:txBody>
+                    <a:bodyPr/>
+                    <a:lstStyle/>
+                    <a:p>
+                      <a:pPr algn="ctr">
+                        <a:buNone/>
+                      </a:pPr>
+                      <a:r>
+                        <a:rPr lang="es-ES" sz="1000"/>
+                        <a:t>2</a:t>
+                      </a:r>
+                      <a:endParaRPr lang="es-ES" sz="1000" dirty="0"/>
+                    </a:p>
+                  </a:txBody>
+                  <a:tcPr marL="0" marR="0" marT="0" marB="0" anchor="ctr"/>
+                </a:tc>
+                <a:tc>
+                  <a:txBody>
+                    <a:bodyPr/>
+                    <a:lstStyle/>
+                    <a:p>
+                      <a:pPr>
+                        <a:buNone/>
+                      </a:pPr>
+                      <a:r>
+                        <a:rPr lang="es-ES" sz="1000">
+                          <a:effectLst/>
+                        </a:rPr>
+                        <a:t>2025-11-08 00:13:48</a:t>
+                      </a:r>
+                    </a:p>
+                  </a:txBody>
+                  <a:tcPr marL="0" marR="0" marT="0" marB="0" anchor="ctr"/>
+                </a:tc>
+                <a:tc>
+                  <a:txBody>
+                    <a:bodyPr/>
+                    <a:lstStyle/>
+                    <a:p>
+                      <a:pPr algn="ctr">
+                        <a:buNone/>
+                      </a:pPr>
+                      <a:endParaRPr lang="es-ES" sz="1000" dirty="0"/>
+                    </a:p>
+                  </a:txBody>
+                  <a:tcPr marL="0" marR="0" marT="0" marB="0" anchor="ctr"/>
+                </a:tc>
+                <a:tc>
+                  <a:txBody>
+                    <a:bodyPr/>
+                    <a:lstStyle/>
+                    <a:p>
+                      <a:pPr algn="ctr">
+                        <a:buNone/>
+                      </a:pPr>
+                      <a:r>
+                        <a:rPr lang="es-ES" sz="1000"/>
+                        <a:t>2</a:t>
+                      </a:r>
+                      <a:endParaRPr lang="es-ES" sz="1000" dirty="0"/>
+                    </a:p>
+                  </a:txBody>
+                  <a:tcPr marL="0" marR="0" marT="0" marB="0" anchor="ctr"/>
+                </a:tc>
+                <a:extLst>
+                  <a:ext uri="{0D108BD9-81ED-4DB2-BD59-A6C34878D82A}">
+                    <a16:rowId xmlns:a16="http://schemas.microsoft.com/office/drawing/2014/main" val="3699177738"/>
+                  </a:ext>
+                </a:extLst>
+              </a:tr>
+              <a:tr h="133129">
+                <a:tc>
+                  <a:txBody>
+                    <a:bodyPr/>
+                    <a:lstStyle/>
+                    <a:p>
+                      <a:pPr>
+                        <a:buNone/>
+                      </a:pPr>
+                      <a:r>
+                        <a:rPr lang="es-ES" sz="1000">
+                          <a:effectLst/>
+                        </a:rPr>
+                        <a:t>2025-10-25 00:13:48</a:t>
+                      </a:r>
+                    </a:p>
+                  </a:txBody>
+                  <a:tcPr marL="0" marR="0" marT="0" marB="0" anchor="ctr"/>
+                </a:tc>
+                <a:tc>
+                  <a:txBody>
+                    <a:bodyPr/>
+                    <a:lstStyle/>
+                    <a:p>
+                      <a:pPr algn="ctr">
+                        <a:buNone/>
+                      </a:pPr>
+                      <a:endParaRPr lang="es-ES" sz="1000" dirty="0"/>
+                    </a:p>
+                  </a:txBody>
+                  <a:tcPr marL="0" marR="0" marT="0" marB="0" anchor="ctr"/>
+                </a:tc>
+                <a:tc>
+                  <a:txBody>
+                    <a:bodyPr/>
+                    <a:lstStyle/>
+                    <a:p>
+                      <a:pPr algn="ctr">
+                        <a:buNone/>
+                      </a:pPr>
+                      <a:r>
+                        <a:rPr lang="es-ES" sz="1000"/>
+                        <a:t>2</a:t>
+                      </a:r>
+                      <a:endParaRPr lang="es-ES" sz="1000" dirty="0"/>
+                    </a:p>
+                  </a:txBody>
+                  <a:tcPr marL="0" marR="0" marT="0" marB="0" anchor="ctr"/>
+                </a:tc>
+                <a:tc>
+                  <a:txBody>
+                    <a:bodyPr/>
+                    <a:lstStyle/>
+                    <a:p>
+                      <a:pPr>
+                        <a:buNone/>
+                      </a:pPr>
+                      <a:r>
+                        <a:rPr lang="es-ES" sz="1000">
+                          <a:effectLst/>
+                        </a:rPr>
+                        <a:t>2025-11-09 00:13:48</a:t>
+                      </a:r>
+                    </a:p>
+                  </a:txBody>
+                  <a:tcPr marL="0" marR="0" marT="0" marB="0" anchor="ctr"/>
+                </a:tc>
+                <a:tc>
+                  <a:txBody>
+                    <a:bodyPr/>
+                    <a:lstStyle/>
+                    <a:p>
+                      <a:pPr algn="ctr">
+                        <a:buNone/>
+                      </a:pPr>
+                      <a:endParaRPr lang="es-ES" sz="1000" dirty="0"/>
+                    </a:p>
+                  </a:txBody>
+                  <a:tcPr marL="0" marR="0" marT="0" marB="0" anchor="ctr"/>
+                </a:tc>
+                <a:tc>
+                  <a:txBody>
+                    <a:bodyPr/>
+                    <a:lstStyle/>
+                    <a:p>
+                      <a:pPr algn="ctr">
+                        <a:buNone/>
+                      </a:pPr>
+                      <a:r>
+                        <a:rPr lang="es-ES" sz="1000"/>
+                        <a:t>2</a:t>
+                      </a:r>
+                      <a:endParaRPr lang="es-ES" sz="1000" dirty="0"/>
+                    </a:p>
+                  </a:txBody>
+                  <a:tcPr marL="0" marR="0" marT="0" marB="0" anchor="ctr"/>
+                </a:tc>
+                <a:extLst>
+                  <a:ext uri="{0D108BD9-81ED-4DB2-BD59-A6C34878D82A}">
+                    <a16:rowId xmlns:a16="http://schemas.microsoft.com/office/drawing/2014/main" val="3837136836"/>
+                  </a:ext>
+                </a:extLst>
+              </a:tr>
+              <a:tr h="133129">
+                <a:tc>
+                  <a:txBody>
+                    <a:bodyPr/>
+                    <a:lstStyle/>
+                    <a:p>
+                      <a:pPr>
+                        <a:buNone/>
+                      </a:pPr>
+                      <a:r>
+                        <a:rPr lang="es-ES" sz="1000">
+                          <a:effectLst/>
+                        </a:rPr>
+                        <a:t>2025-10-26 00:13:48</a:t>
+                      </a:r>
+                    </a:p>
+                  </a:txBody>
+                  <a:tcPr marL="0" marR="0" marT="0" marB="0" anchor="ctr"/>
+                </a:tc>
+                <a:tc>
+                  <a:txBody>
+                    <a:bodyPr/>
+                    <a:lstStyle/>
+                    <a:p>
+                      <a:pPr algn="ctr">
+                        <a:buNone/>
+                      </a:pPr>
+                      <a:endParaRPr lang="es-ES" sz="1000" dirty="0"/>
+                    </a:p>
+                  </a:txBody>
+                  <a:tcPr marL="0" marR="0" marT="0" marB="0" anchor="ctr"/>
+                </a:tc>
+                <a:tc>
+                  <a:txBody>
+                    <a:bodyPr/>
+                    <a:lstStyle/>
+                    <a:p>
+                      <a:pPr algn="ctr">
+                        <a:buNone/>
+                      </a:pPr>
+                      <a:r>
+                        <a:rPr lang="es-ES" sz="1000"/>
+                        <a:t>2</a:t>
+                      </a:r>
+                      <a:endParaRPr lang="es-ES" sz="1000" dirty="0"/>
+                    </a:p>
+                  </a:txBody>
+                  <a:tcPr marL="0" marR="0" marT="0" marB="0" anchor="ctr"/>
+                </a:tc>
+                <a:tc>
+                  <a:txBody>
+                    <a:bodyPr/>
+                    <a:lstStyle/>
+                    <a:p>
+                      <a:pPr>
+                        <a:buNone/>
+                      </a:pPr>
+                      <a:r>
+                        <a:rPr lang="es-ES" sz="1000">
+                          <a:effectLst/>
+                        </a:rPr>
+                        <a:t>2025-11-10 00:13:48</a:t>
+                      </a:r>
+                    </a:p>
+                  </a:txBody>
+                  <a:tcPr marL="0" marR="0" marT="0" marB="0" anchor="ctr"/>
+                </a:tc>
+                <a:tc>
+                  <a:txBody>
+                    <a:bodyPr/>
+                    <a:lstStyle/>
+                    <a:p>
+                      <a:pPr algn="ctr">
+                        <a:buNone/>
+                      </a:pPr>
+                      <a:endParaRPr lang="es-ES" sz="1000" dirty="0"/>
+                    </a:p>
+                  </a:txBody>
+                  <a:tcPr marL="0" marR="0" marT="0" marB="0" anchor="ctr"/>
+                </a:tc>
+                <a:tc>
+                  <a:txBody>
+                    <a:bodyPr/>
+                    <a:lstStyle/>
+                    <a:p>
+                      <a:pPr algn="ctr">
+                        <a:buNone/>
+                      </a:pPr>
+                      <a:r>
+                        <a:rPr lang="es-ES" sz="1000"/>
+                        <a:t>2</a:t>
+                      </a:r>
+                      <a:endParaRPr lang="es-ES" sz="1000" dirty="0"/>
+                    </a:p>
+                  </a:txBody>
+                  <a:tcPr marL="0" marR="0" marT="0" marB="0" anchor="ctr"/>
+                </a:tc>
+                <a:extLst>
+                  <a:ext uri="{0D108BD9-81ED-4DB2-BD59-A6C34878D82A}">
+                    <a16:rowId xmlns:a16="http://schemas.microsoft.com/office/drawing/2014/main" val="3715237768"/>
+                  </a:ext>
+                </a:extLst>
+              </a:tr>
+              <a:tr h="133129">
+                <a:tc>
+                  <a:txBody>
+                    <a:bodyPr/>
+                    <a:lstStyle/>
+                    <a:p>
+                      <a:pPr>
+                        <a:buNone/>
+                      </a:pPr>
+                      <a:r>
+                        <a:rPr lang="es-ES" sz="1000">
+                          <a:effectLst/>
+                        </a:rPr>
+                        <a:t>2025-10-27 00:13:48</a:t>
+                      </a:r>
+                    </a:p>
+                  </a:txBody>
+                  <a:tcPr marL="0" marR="0" marT="0" marB="0" anchor="ctr"/>
+                </a:tc>
+                <a:tc>
+                  <a:txBody>
+                    <a:bodyPr/>
+                    <a:lstStyle/>
+                    <a:p>
+                      <a:pPr algn="ctr">
+                        <a:buNone/>
+                      </a:pPr>
+                      <a:endParaRPr lang="es-ES" sz="1000" dirty="0"/>
+                    </a:p>
+                  </a:txBody>
+                  <a:tcPr marL="0" marR="0" marT="0" marB="0" anchor="ctr"/>
+                </a:tc>
+                <a:tc>
+                  <a:txBody>
+                    <a:bodyPr/>
+                    <a:lstStyle/>
+                    <a:p>
+                      <a:pPr algn="ctr">
+                        <a:buNone/>
+                      </a:pPr>
+                      <a:r>
+                        <a:rPr lang="es-ES" sz="1000"/>
+                        <a:t>2</a:t>
+                      </a:r>
+                      <a:endParaRPr lang="es-ES" sz="1000" dirty="0"/>
+                    </a:p>
+                  </a:txBody>
+                  <a:tcPr marL="0" marR="0" marT="0" marB="0" anchor="ctr"/>
+                </a:tc>
+                <a:tc>
+                  <a:txBody>
+                    <a:bodyPr/>
+                    <a:lstStyle/>
+                    <a:p>
+                      <a:pPr>
+                        <a:buNone/>
+                      </a:pPr>
+                      <a:r>
+                        <a:rPr lang="es-ES" sz="1000">
+                          <a:effectLst/>
+                        </a:rPr>
+                        <a:t>2025-11-11 00:13:48</a:t>
+                      </a:r>
+                    </a:p>
+                  </a:txBody>
+                  <a:tcPr marL="0" marR="0" marT="0" marB="0" anchor="ctr"/>
+                </a:tc>
+                <a:tc>
+                  <a:txBody>
+                    <a:bodyPr/>
+                    <a:lstStyle/>
+                    <a:p>
+                      <a:pPr algn="ctr">
+                        <a:buNone/>
+                      </a:pPr>
+                      <a:endParaRPr lang="es-ES" sz="1000" dirty="0"/>
+                    </a:p>
+                  </a:txBody>
+                  <a:tcPr marL="0" marR="0" marT="0" marB="0" anchor="ctr"/>
+                </a:tc>
+                <a:tc>
+                  <a:txBody>
+                    <a:bodyPr/>
+                    <a:lstStyle/>
+                    <a:p>
+                      <a:pPr algn="ctr">
+                        <a:buNone/>
+                      </a:pPr>
+                      <a:r>
+                        <a:rPr lang="es-ES" sz="1000"/>
+                        <a:t>2</a:t>
+                      </a:r>
+                      <a:endParaRPr lang="es-ES" sz="1000" dirty="0"/>
+                    </a:p>
+                  </a:txBody>
+                  <a:tcPr marL="0" marR="0" marT="0" marB="0" anchor="ctr"/>
+                </a:tc>
+                <a:extLst>
+                  <a:ext uri="{0D108BD9-81ED-4DB2-BD59-A6C34878D82A}">
+                    <a16:rowId xmlns:a16="http://schemas.microsoft.com/office/drawing/2014/main" val="1160499641"/>
+                  </a:ext>
+                </a:extLst>
+              </a:tr>
+              <a:tr h="133129">
+                <a:tc>
+                  <a:txBody>
+                    <a:bodyPr/>
+                    <a:lstStyle/>
+                    <a:p>
+                      <a:pPr>
+                        <a:buNone/>
+                      </a:pPr>
+                      <a:r>
+                        <a:rPr lang="es-ES" sz="1000">
+                          <a:effectLst/>
+                        </a:rPr>
+                        <a:t>2025-10-28 00:13:48</a:t>
+                      </a:r>
+                    </a:p>
+                  </a:txBody>
+                  <a:tcPr marL="0" marR="0" marT="0" marB="0" anchor="ctr"/>
+                </a:tc>
+                <a:tc>
+                  <a:txBody>
+                    <a:bodyPr/>
+                    <a:lstStyle/>
+                    <a:p>
+                      <a:pPr algn="ctr">
+                        <a:buNone/>
+                      </a:pPr>
+                      <a:endParaRPr lang="es-ES" sz="1000" dirty="0"/>
+                    </a:p>
+                  </a:txBody>
+                  <a:tcPr marL="0" marR="0" marT="0" marB="0" anchor="ctr"/>
+                </a:tc>
+                <a:tc>
+                  <a:txBody>
+                    <a:bodyPr/>
+                    <a:lstStyle/>
+                    <a:p>
+                      <a:pPr algn="ctr">
+                        <a:buNone/>
+                      </a:pPr>
+                      <a:r>
+                        <a:rPr lang="es-ES" sz="1000"/>
+                        <a:t>2</a:t>
+                      </a:r>
+                      <a:endParaRPr lang="es-ES" sz="1000" dirty="0"/>
+                    </a:p>
+                  </a:txBody>
+                  <a:tcPr marL="0" marR="0" marT="0" marB="0" anchor="ctr"/>
+                </a:tc>
+                <a:tc>
+                  <a:txBody>
+                    <a:bodyPr/>
+                    <a:lstStyle/>
+                    <a:p>
+                      <a:pPr>
+                        <a:buNone/>
+                      </a:pPr>
+                      <a:r>
+                        <a:rPr lang="es-ES" sz="1000">
+                          <a:effectLst/>
+                        </a:rPr>
+                        <a:t>2025-11-12 00:13:48</a:t>
+                      </a:r>
+                    </a:p>
+                  </a:txBody>
+                  <a:tcPr marL="0" marR="0" marT="0" marB="0" anchor="ctr"/>
+                </a:tc>
+                <a:tc>
+                  <a:txBody>
+                    <a:bodyPr/>
+                    <a:lstStyle/>
+                    <a:p>
+                      <a:pPr algn="ctr">
+                        <a:buNone/>
+                      </a:pPr>
+                      <a:endParaRPr lang="es-ES" sz="1000" dirty="0"/>
+                    </a:p>
+                  </a:txBody>
+                  <a:tcPr marL="0" marR="0" marT="0" marB="0" anchor="ctr"/>
+                </a:tc>
+                <a:tc>
+                  <a:txBody>
+                    <a:bodyPr/>
+                    <a:lstStyle/>
+                    <a:p>
+                      <a:pPr algn="ctr">
+                        <a:buNone/>
+                      </a:pPr>
+                      <a:r>
+                        <a:rPr lang="es-ES" sz="1000"/>
+                        <a:t>2</a:t>
+                      </a:r>
+                      <a:endParaRPr lang="es-ES" sz="1000" dirty="0"/>
+                    </a:p>
+                  </a:txBody>
+                  <a:tcPr marL="0" marR="0" marT="0" marB="0" anchor="ctr"/>
+                </a:tc>
+                <a:extLst>
+                  <a:ext uri="{0D108BD9-81ED-4DB2-BD59-A6C34878D82A}">
+                    <a16:rowId xmlns:a16="http://schemas.microsoft.com/office/drawing/2014/main" val="1955463071"/>
+                  </a:ext>
+                </a:extLst>
+              </a:tr>
+              <a:tr h="133129">
+                <a:tc>
+                  <a:txBody>
+                    <a:bodyPr/>
+                    <a:lstStyle/>
+                    <a:p>
+                      <a:pPr>
+                        <a:buNone/>
+                      </a:pPr>
+                      <a:r>
+                        <a:rPr lang="es-ES" sz="1000">
+                          <a:effectLst/>
+                        </a:rPr>
+                        <a:t>2025-10-29 00:13:48</a:t>
+                      </a:r>
+                    </a:p>
+                  </a:txBody>
+                  <a:tcPr marL="0" marR="0" marT="0" marB="0" anchor="ctr"/>
+                </a:tc>
+                <a:tc>
+                  <a:txBody>
+                    <a:bodyPr/>
+                    <a:lstStyle/>
+                    <a:p>
+                      <a:pPr algn="ctr">
+                        <a:buNone/>
+                      </a:pPr>
+                      <a:endParaRPr lang="es-ES" sz="1000" dirty="0"/>
+                    </a:p>
+                  </a:txBody>
+                  <a:tcPr marL="0" marR="0" marT="0" marB="0" anchor="ctr"/>
+                </a:tc>
+                <a:tc>
+                  <a:txBody>
+                    <a:bodyPr/>
+                    <a:lstStyle/>
+                    <a:p>
+                      <a:pPr algn="ctr">
+                        <a:buNone/>
+                      </a:pPr>
+                      <a:r>
+                        <a:rPr lang="es-ES" sz="1000"/>
+                        <a:t>2</a:t>
+                      </a:r>
+                      <a:endParaRPr lang="es-ES" sz="1000" dirty="0"/>
+                    </a:p>
+                  </a:txBody>
+                  <a:tcPr marL="0" marR="0" marT="0" marB="0" anchor="ctr"/>
+                </a:tc>
+                <a:tc>
+                  <a:txBody>
+                    <a:bodyPr/>
+                    <a:lstStyle/>
+                    <a:p>
+                      <a:pPr>
+                        <a:buNone/>
+                      </a:pPr>
+                      <a:r>
+                        <a:rPr lang="es-ES" sz="1000">
+                          <a:effectLst/>
+                        </a:rPr>
+                        <a:t>2025-11-13 00:13:48</a:t>
+                      </a:r>
+                    </a:p>
+                  </a:txBody>
+                  <a:tcPr marL="0" marR="0" marT="0" marB="0" anchor="ctr"/>
+                </a:tc>
+                <a:tc>
+                  <a:txBody>
+                    <a:bodyPr/>
+                    <a:lstStyle/>
+                    <a:p>
+                      <a:pPr algn="ctr">
+                        <a:buNone/>
+                      </a:pPr>
+                      <a:endParaRPr lang="es-ES" sz="1000" dirty="0"/>
+                    </a:p>
+                  </a:txBody>
+                  <a:tcPr marL="0" marR="0" marT="0" marB="0" anchor="ctr"/>
+                </a:tc>
+                <a:tc>
+                  <a:txBody>
+                    <a:bodyPr/>
+                    <a:lstStyle/>
+                    <a:p>
+                      <a:pPr algn="ctr">
+                        <a:buNone/>
+                      </a:pPr>
+                      <a:r>
+                        <a:rPr lang="es-ES" sz="1000"/>
+                        <a:t>2</a:t>
+                      </a:r>
+                      <a:endParaRPr lang="es-ES" sz="1000" dirty="0"/>
+                    </a:p>
+                  </a:txBody>
+                  <a:tcPr marL="0" marR="0" marT="0" marB="0" anchor="ctr"/>
+                </a:tc>
+                <a:extLst>
+                  <a:ext uri="{0D108BD9-81ED-4DB2-BD59-A6C34878D82A}">
+                    <a16:rowId xmlns:a16="http://schemas.microsoft.com/office/drawing/2014/main" val="3120816124"/>
+                  </a:ext>
+                </a:extLst>
+              </a:tr>
+              <a:tr h="133129">
+                <a:tc>
+                  <a:txBody>
+                    <a:bodyPr/>
+                    <a:lstStyle/>
+                    <a:p>
+                      <a:pPr>
+                        <a:buNone/>
+                      </a:pPr>
+                      <a:r>
+                        <a:rPr lang="es-ES" sz="1000">
+                          <a:effectLst/>
+                        </a:rPr>
+                        <a:t>2025-10-30 00:13:48</a:t>
+                      </a:r>
+                    </a:p>
+                  </a:txBody>
+                  <a:tcPr marL="0" marR="0" marT="0" marB="0" anchor="ctr"/>
+                </a:tc>
+                <a:tc>
+                  <a:txBody>
+                    <a:bodyPr/>
+                    <a:lstStyle/>
+                    <a:p>
+                      <a:pPr algn="ctr">
+                        <a:buNone/>
+                      </a:pPr>
+                      <a:endParaRPr lang="es-ES" sz="1000" dirty="0"/>
+                    </a:p>
+                  </a:txBody>
+                  <a:tcPr marL="0" marR="0" marT="0" marB="0" anchor="ctr"/>
+                </a:tc>
+                <a:tc>
+                  <a:txBody>
+                    <a:bodyPr/>
+                    <a:lstStyle/>
+                    <a:p>
+                      <a:pPr algn="ctr">
+                        <a:buNone/>
+                      </a:pPr>
+                      <a:r>
+                        <a:rPr lang="es-ES" sz="1000"/>
+                        <a:t>2</a:t>
+                      </a:r>
+                      <a:endParaRPr lang="es-ES" sz="1000" dirty="0"/>
+                    </a:p>
+                  </a:txBody>
+                  <a:tcPr marL="0" marR="0" marT="0" marB="0" anchor="ctr"/>
+                </a:tc>
+                <a:tc>
+                  <a:txBody>
+                    <a:bodyPr/>
+                    <a:lstStyle/>
+                    <a:p>
+                      <a:pPr>
+                        <a:buNone/>
+                      </a:pPr>
+                      <a:r>
+                        <a:rPr lang="es-ES" sz="1000">
+                          <a:effectLst/>
+                        </a:rPr>
+                        <a:t>2025-11-14 00:13:48</a:t>
+                      </a:r>
+                    </a:p>
+                  </a:txBody>
+                  <a:tcPr marL="0" marR="0" marT="0" marB="0" anchor="ctr"/>
+                </a:tc>
+                <a:tc>
+                  <a:txBody>
+                    <a:bodyPr/>
+                    <a:lstStyle/>
+                    <a:p>
+                      <a:pPr algn="ctr">
+                        <a:buNone/>
+                      </a:pPr>
+                      <a:endParaRPr lang="es-ES" sz="1000" dirty="0"/>
+                    </a:p>
+                  </a:txBody>
+                  <a:tcPr marL="0" marR="0" marT="0" marB="0" anchor="ctr"/>
+                </a:tc>
+                <a:tc>
+                  <a:txBody>
+                    <a:bodyPr/>
+                    <a:lstStyle/>
+                    <a:p>
+                      <a:pPr algn="ctr">
+                        <a:buNone/>
+                      </a:pPr>
+                      <a:r>
+                        <a:rPr lang="es-ES" sz="1000"/>
+                        <a:t>2</a:t>
+                      </a:r>
+                      <a:endParaRPr lang="es-ES" sz="1000" dirty="0"/>
+                    </a:p>
+                  </a:txBody>
+                  <a:tcPr marL="0" marR="0" marT="0" marB="0" anchor="ctr"/>
+                </a:tc>
+                <a:extLst>
+                  <a:ext uri="{0D108BD9-81ED-4DB2-BD59-A6C34878D82A}">
+                    <a16:rowId xmlns:a16="http://schemas.microsoft.com/office/drawing/2014/main" val="3630603632"/>
+                  </a:ext>
+                </a:extLst>
+              </a:tr>
+              <a:tr h="133129">
+                <a:tc>
+                  <a:txBody>
+                    <a:bodyPr/>
+                    <a:lstStyle/>
+                    <a:p>
+                      <a:pPr>
+                        <a:buNone/>
+                      </a:pPr>
+                      <a:r>
+                        <a:rPr lang="es-ES" sz="1000">
+                          <a:effectLst/>
+                        </a:rPr>
+                        <a:t>2025-10-31 00:13:48</a:t>
+                      </a:r>
+                    </a:p>
+                  </a:txBody>
+                  <a:tcPr marL="0" marR="0" marT="0" marB="0" anchor="ctr"/>
+                </a:tc>
+                <a:tc>
+                  <a:txBody>
+                    <a:bodyPr/>
+                    <a:lstStyle/>
+                    <a:p>
+                      <a:pPr algn="ctr">
+                        <a:buNone/>
+                      </a:pPr>
+                      <a:endParaRPr lang="es-ES" sz="1000" dirty="0"/>
+                    </a:p>
+                  </a:txBody>
+                  <a:tcPr marL="0" marR="0" marT="0" marB="0" anchor="ctr"/>
+                </a:tc>
+                <a:tc>
+                  <a:txBody>
+                    <a:bodyPr/>
+                    <a:lstStyle/>
+                    <a:p>
+                      <a:pPr algn="ctr">
+                        <a:buNone/>
+                      </a:pPr>
+                      <a:r>
+                        <a:rPr lang="es-ES" sz="1000"/>
+                        <a:t>2</a:t>
+                      </a:r>
+                      <a:endParaRPr lang="es-ES" sz="1000" dirty="0"/>
+                    </a:p>
+                  </a:txBody>
+                  <a:tcPr marL="0" marR="0" marT="0" marB="0" anchor="ctr"/>
+                </a:tc>
+                <a:tc>
+                  <a:txBody>
+                    <a:bodyPr/>
+                    <a:lstStyle/>
+                    <a:p>
+                      <a:pPr>
+                        <a:buNone/>
+                      </a:pPr>
+                      <a:r>
+                        <a:rPr lang="es-ES" sz="1000">
+                          <a:effectLst/>
+                        </a:rPr>
+                        <a:t>2025-11-</a:t>
+                      </a:r>
+                      <a:r>
+                        <a:rPr lang="es-ES" sz="1000" b="1">
+                          <a:effectLst/>
+                        </a:rPr>
+                        <a:t>15</a:t>
+                      </a:r>
+                      <a:r>
+                        <a:rPr lang="es-ES" sz="1000" dirty="0">
+                          <a:effectLst/>
+                        </a:rPr>
+                        <a:t> </a:t>
+                      </a:r>
+                      <a:r>
+                        <a:rPr lang="es-ES" sz="1000">
+                          <a:effectLst/>
+                        </a:rPr>
+                        <a:t>00:13:48</a:t>
+                      </a:r>
+                    </a:p>
+                  </a:txBody>
+                  <a:tcPr marL="0" marR="0" marT="0" marB="0" anchor="ctr"/>
+                </a:tc>
+                <a:tc>
+                  <a:txBody>
+                    <a:bodyPr/>
+                    <a:lstStyle/>
+                    <a:p>
+                      <a:pPr algn="ctr">
+                        <a:buNone/>
+                      </a:pPr>
+                      <a:endParaRPr lang="es-ES" sz="1000" dirty="0"/>
+                    </a:p>
+                  </a:txBody>
+                  <a:tcPr marL="0" marR="0" marT="0" marB="0" anchor="ctr"/>
+                </a:tc>
+                <a:tc>
+                  <a:txBody>
+                    <a:bodyPr/>
+                    <a:lstStyle/>
+                    <a:p>
+                      <a:pPr algn="ctr">
+                        <a:buNone/>
+                      </a:pPr>
+                      <a:r>
+                        <a:rPr lang="es-ES" sz="1000"/>
+                        <a:t>3</a:t>
+                      </a:r>
+                      <a:endParaRPr lang="es-ES" sz="1000" dirty="0"/>
+                    </a:p>
+                  </a:txBody>
+                  <a:tcPr marL="0" marR="0" marT="0" marB="0" anchor="ctr"/>
+                </a:tc>
+                <a:extLst>
+                  <a:ext uri="{0D108BD9-81ED-4DB2-BD59-A6C34878D82A}">
+                    <a16:rowId xmlns:a16="http://schemas.microsoft.com/office/drawing/2014/main" val="943275661"/>
+                  </a:ext>
+                </a:extLst>
+              </a:tr>
+              <a:tr h="133129">
+                <a:tc>
+                  <a:txBody>
+                    <a:bodyPr/>
+                    <a:lstStyle/>
+                    <a:p>
+                      <a:pPr>
+                        <a:buNone/>
+                      </a:pPr>
+                      <a:r>
+                        <a:rPr lang="es-ES" sz="1000">
+                          <a:effectLst/>
+                        </a:rPr>
+                        <a:t>2025-11-01 00:13:48</a:t>
+                      </a:r>
+                    </a:p>
+                  </a:txBody>
+                  <a:tcPr marL="0" marR="0" marT="0" marB="0" anchor="ctr"/>
+                </a:tc>
+                <a:tc>
+                  <a:txBody>
+                    <a:bodyPr/>
+                    <a:lstStyle/>
+                    <a:p>
+                      <a:pPr algn="ctr">
+                        <a:buNone/>
+                      </a:pPr>
+                      <a:endParaRPr lang="es-ES" sz="1000" dirty="0"/>
+                    </a:p>
+                  </a:txBody>
+                  <a:tcPr marL="0" marR="0" marT="0" marB="0" anchor="ctr"/>
+                </a:tc>
+                <a:tc>
+                  <a:txBody>
+                    <a:bodyPr/>
+                    <a:lstStyle/>
+                    <a:p>
+                      <a:pPr algn="ctr">
+                        <a:buNone/>
+                      </a:pPr>
+                      <a:r>
+                        <a:rPr lang="es-ES" sz="1000"/>
+                        <a:t>2</a:t>
+                      </a:r>
+                      <a:endParaRPr lang="es-ES" sz="1000" dirty="0"/>
+                    </a:p>
+                  </a:txBody>
+                  <a:tcPr marL="0" marR="0" marT="0" marB="0" anchor="ctr"/>
+                </a:tc>
+                <a:tc>
+                  <a:txBody>
+                    <a:bodyPr/>
+                    <a:lstStyle/>
+                    <a:p>
+                      <a:pPr>
+                        <a:buNone/>
+                      </a:pPr>
+                      <a:r>
+                        <a:rPr lang="es-ES" sz="1000">
+                          <a:effectLst/>
+                        </a:rPr>
+                        <a:t>2025-11-</a:t>
+                      </a:r>
+                      <a:r>
+                        <a:rPr lang="es-ES" sz="1000" b="1">
+                          <a:effectLst/>
+                        </a:rPr>
+                        <a:t>16</a:t>
+                      </a:r>
+                      <a:r>
+                        <a:rPr lang="es-ES" sz="1000">
+                          <a:effectLst/>
+                        </a:rPr>
+                        <a:t> 00:13:48</a:t>
+                      </a:r>
+                    </a:p>
+                  </a:txBody>
+                  <a:tcPr marL="0" marR="0" marT="0" marB="0" anchor="ctr"/>
+                </a:tc>
+                <a:tc>
+                  <a:txBody>
+                    <a:bodyPr/>
+                    <a:lstStyle/>
+                    <a:p>
+                      <a:pPr algn="ctr">
+                        <a:buNone/>
+                      </a:pPr>
+                      <a:endParaRPr lang="es-ES" sz="1000" dirty="0"/>
+                    </a:p>
+                  </a:txBody>
+                  <a:tcPr marL="0" marR="0" marT="0" marB="0" anchor="ctr"/>
+                </a:tc>
+                <a:tc>
+                  <a:txBody>
+                    <a:bodyPr/>
+                    <a:lstStyle/>
+                    <a:p>
+                      <a:pPr algn="ctr">
+                        <a:buNone/>
+                      </a:pPr>
+                      <a:r>
+                        <a:rPr lang="es-ES" sz="1000"/>
+                        <a:t>3</a:t>
+                      </a:r>
+                      <a:endParaRPr lang="es-ES" sz="1000" dirty="0"/>
+                    </a:p>
+                  </a:txBody>
+                  <a:tcPr marL="0" marR="0" marT="0" marB="0" anchor="ctr"/>
+                </a:tc>
+                <a:extLst>
+                  <a:ext uri="{0D108BD9-81ED-4DB2-BD59-A6C34878D82A}">
+                    <a16:rowId xmlns:a16="http://schemas.microsoft.com/office/drawing/2014/main" val="2123000114"/>
+                  </a:ext>
+                </a:extLst>
+              </a:tr>
+              <a:tr h="133129">
+                <a:tc>
+                  <a:txBody>
+                    <a:bodyPr/>
+                    <a:lstStyle/>
+                    <a:p>
+                      <a:pPr>
+                        <a:buNone/>
+                      </a:pPr>
+                      <a:r>
+                        <a:rPr lang="es-ES" sz="1000">
+                          <a:effectLst/>
+                        </a:rPr>
+                        <a:t>2025-11-02 00:13:48</a:t>
+                      </a:r>
+                    </a:p>
+                  </a:txBody>
+                  <a:tcPr marL="0" marR="0" marT="0" marB="0" anchor="ctr"/>
+                </a:tc>
+                <a:tc>
+                  <a:txBody>
+                    <a:bodyPr/>
+                    <a:lstStyle/>
+                    <a:p>
+                      <a:pPr algn="ctr">
+                        <a:buNone/>
+                      </a:pPr>
+                      <a:endParaRPr lang="es-ES" sz="1000" dirty="0"/>
+                    </a:p>
+                  </a:txBody>
+                  <a:tcPr marL="0" marR="0" marT="0" marB="0" anchor="ctr"/>
+                </a:tc>
+                <a:tc>
+                  <a:txBody>
+                    <a:bodyPr/>
+                    <a:lstStyle/>
+                    <a:p>
+                      <a:pPr algn="ctr">
+                        <a:buNone/>
+                      </a:pPr>
+                      <a:r>
+                        <a:rPr lang="es-ES" sz="1000"/>
+                        <a:t>2</a:t>
+                      </a:r>
+                      <a:endParaRPr lang="es-ES" sz="1000" dirty="0"/>
+                    </a:p>
+                  </a:txBody>
+                  <a:tcPr marL="0" marR="0" marT="0" marB="0" anchor="ctr"/>
+                </a:tc>
+                <a:tc>
+                  <a:txBody>
+                    <a:bodyPr/>
+                    <a:lstStyle/>
+                    <a:p>
+                      <a:pPr>
+                        <a:buNone/>
+                      </a:pPr>
+                      <a:r>
+                        <a:rPr lang="es-ES" sz="1000">
+                          <a:effectLst/>
+                        </a:rPr>
+                        <a:t>2025-11-</a:t>
+                      </a:r>
+                      <a:r>
+                        <a:rPr lang="es-ES" sz="1000" b="1">
+                          <a:effectLst/>
+                        </a:rPr>
+                        <a:t>17</a:t>
+                      </a:r>
+                      <a:r>
+                        <a:rPr lang="es-ES" sz="1000">
+                          <a:effectLst/>
+                        </a:rPr>
+                        <a:t> 00:13:48</a:t>
+                      </a:r>
+                    </a:p>
+                  </a:txBody>
+                  <a:tcPr marL="0" marR="0" marT="0" marB="0" anchor="ctr"/>
+                </a:tc>
+                <a:tc>
+                  <a:txBody>
+                    <a:bodyPr/>
+                    <a:lstStyle/>
+                    <a:p>
+                      <a:pPr algn="ctr">
+                        <a:buNone/>
+                      </a:pPr>
+                      <a:endParaRPr lang="es-ES" sz="1000" dirty="0"/>
+                    </a:p>
+                  </a:txBody>
+                  <a:tcPr marL="0" marR="0" marT="0" marB="0" anchor="ctr"/>
+                </a:tc>
+                <a:tc>
+                  <a:txBody>
+                    <a:bodyPr/>
+                    <a:lstStyle/>
+                    <a:p>
+                      <a:pPr algn="ctr">
+                        <a:buNone/>
+                      </a:pPr>
+                      <a:r>
+                        <a:rPr lang="es-ES" sz="1000"/>
+                        <a:t>3</a:t>
+                      </a:r>
+                      <a:endParaRPr lang="es-ES" sz="1000" dirty="0"/>
+                    </a:p>
+                  </a:txBody>
+                  <a:tcPr marL="0" marR="0" marT="0" marB="0" anchor="ctr"/>
+                </a:tc>
+                <a:extLst>
+                  <a:ext uri="{0D108BD9-81ED-4DB2-BD59-A6C34878D82A}">
+                    <a16:rowId xmlns:a16="http://schemas.microsoft.com/office/drawing/2014/main" val="3336927366"/>
+                  </a:ext>
+                </a:extLst>
+              </a:tr>
+            </a:tbl>
+          </a:graphicData>
+        </a:graphic>
+      </p:graphicFrame>
+    </p:spTree>
+    <p:extLst>
+      <p:ext uri="{BB962C8B-B14F-4D97-AF65-F5344CB8AC3E}">
+        <p14:creationId xmlns:p14="http://schemas.microsoft.com/office/powerpoint/2010/main" val="4004196352"/>
+      </p:ext>
+    </p:extLst>
+  </p:cSld>
+  <p:clrMapOvr>
+    <a:masterClrMapping/>
+  </p:clrMapOvr>
+</p:sld>
+</file>
+
+<file path=ppt/slides/slide9.xml><?xml version="1.0" encoding="utf-8"?>
+<p:sld xmlns:a="http://schemas.openxmlformats.org/drawingml/2006/main" xmlns:r="http://schemas.openxmlformats.org/officeDocument/2006/relationships" xmlns:p="http://schemas.openxmlformats.org/presentationml/2006/main">
+  <p:cSld>
+    <p:spTree>
+      <p:nvGrpSpPr>
+        <p:cNvPr id="1" name=""/>
+        <p:cNvGrpSpPr/>
+        <p:nvPr/>
+      </p:nvGrpSpPr>
+      <p:grpSpPr>
+        <a:xfrm>
+          <a:off x="0" y="0"/>
+          <a:ext cx="0" cy="0"/>
+          <a:chOff x="0" y="0"/>
+          <a:chExt cx="0" cy="0"/>
+        </a:xfrm>
+      </p:grpSpPr>
+      <p:sp>
+        <p:nvSpPr>
+          <p:cNvPr id="2" name="Título 1">
+            <a:extLst>
+              <a:ext uri="{FF2B5EF4-FFF2-40B4-BE49-F238E27FC236}">
+                <a16:creationId xmlns:a16="http://schemas.microsoft.com/office/drawing/2014/main" id="{EECC6975-A793-F105-777A-AF163E068C3B}"/>
+              </a:ext>
+            </a:extLst>
+          </p:cNvPr>
+          <p:cNvSpPr>
+            <a:spLocks noGrp="1"/>
+          </p:cNvSpPr>
+          <p:nvPr>
+            <p:ph type="title"/>
+          </p:nvPr>
+        </p:nvSpPr>
+        <p:spPr/>
+        <p:txBody>
+          <a:bodyPr/>
+          <a:lstStyle/>
+          <a:p>
+            <a:r>
+              <a:rPr lang="es-PE" dirty="0"/>
+              <a:t>Presentación de Resultados</a:t>
+            </a:r>
+            <a:endParaRPr lang="es-ES_tradnl" dirty="0"/>
+          </a:p>
+        </p:txBody>
+      </p:sp>
+      <p:pic>
+        <p:nvPicPr>
+          <p:cNvPr id="4098" name="Picture 2">
+            <a:extLst>
+              <a:ext uri="{FF2B5EF4-FFF2-40B4-BE49-F238E27FC236}">
+                <a16:creationId xmlns:a16="http://schemas.microsoft.com/office/drawing/2014/main" id="{51AA23F8-6387-8414-4898-2030335B1129}"/>
+              </a:ext>
+            </a:extLst>
+          </p:cNvPr>
+          <p:cNvPicPr>
+            <a:picLocks noGrp="1" noChangeAspect="1" noChangeArrowheads="1"/>
+          </p:cNvPicPr>
+          <p:nvPr>
+            <p:ph idx="1"/>
+          </p:nvPr>
+        </p:nvPicPr>
+        <p:blipFill>
+          <a:blip r:embed="rId2">
+            <a:extLst>
+              <a:ext uri="{28A0092B-C50C-407E-A947-70E740481C1C}">
+                <a14:useLocalDpi xmlns:a14="http://schemas.microsoft.com/office/drawing/2010/main" val="0"/>
+              </a:ext>
+            </a:extLst>
+          </a:blip>
+          <a:srcRect/>
+          <a:stretch>
+            <a:fillRect/>
+          </a:stretch>
+        </p:blipFill>
+        <p:spPr bwMode="auto">
+          <a:xfrm>
+            <a:off x="731946" y="2287385"/>
+            <a:ext cx="7464650" cy="3697444"/>
+          </a:xfrm>
+          <a:prstGeom prst="rect">
+            <a:avLst/>
+          </a:prstGeom>
+          <a:noFill/>
+          <a:extLst>
+            <a:ext uri="{909E8E84-426E-40DD-AFC4-6F175D3DCCD1}">
+              <a14:hiddenFill xmlns:a14="http://schemas.microsoft.com/office/drawing/2010/main">
+                <a:solidFill>
+                  <a:srgbClr val="FFFFFF"/>
+                </a:solidFill>
+              </a14:hiddenFill>
+            </a:ext>
+          </a:extLst>
+        </p:spPr>
+      </p:pic>
+      <p:graphicFrame>
+        <p:nvGraphicFramePr>
+          <p:cNvPr id="8" name="Diagrama 7">
+            <a:extLst>
+              <a:ext uri="{FF2B5EF4-FFF2-40B4-BE49-F238E27FC236}">
+                <a16:creationId xmlns:a16="http://schemas.microsoft.com/office/drawing/2014/main" id="{D20818CC-2B10-B393-2D70-F4B3197AFE3C}"/>
+              </a:ext>
+            </a:extLst>
+          </p:cNvPr>
+          <p:cNvGraphicFramePr/>
+          <p:nvPr>
+            <p:extLst>
+              <p:ext uri="{D42A27DB-BD31-4B8C-83A1-F6EECF244321}">
+                <p14:modId xmlns:p14="http://schemas.microsoft.com/office/powerpoint/2010/main" val="2309031091"/>
+              </p:ext>
+            </p:extLst>
+          </p:nvPr>
+        </p:nvGraphicFramePr>
+        <p:xfrm>
+          <a:off x="8196596" y="2097088"/>
+          <a:ext cx="3628031" cy="4078039"/>
+        </p:xfrm>
+        <a:graphic>
+          <a:graphicData uri="http://schemas.openxmlformats.org/drawingml/2006/diagram">
+            <dgm:relIds xmlns:dgm="http://schemas.openxmlformats.org/drawingml/2006/diagram" xmlns:r="http://schemas.openxmlformats.org/officeDocument/2006/relationships" r:dm="rId3" r:lo="rId4" r:qs="rId5" r:cs="rId6"/>
+          </a:graphicData>
+        </a:graphic>
+      </p:graphicFrame>
+    </p:spTree>
+    <p:extLst>
+      <p:ext uri="{BB962C8B-B14F-4D97-AF65-F5344CB8AC3E}">
+        <p14:creationId xmlns:p14="http://schemas.microsoft.com/office/powerpoint/2010/main" val="2897962074"/>
       </p:ext>
     </p:extLst>
   </p:cSld>
